--- a/PCB_LIGHTING_updated.pptx
+++ b/PCB_LIGHTING_updated.pptx
@@ -4839,9 +4839,9 @@
           <p:nvPr/>
         </p:nvCxnSpPr>
         <p:spPr>
-          <a:xfrm flipH="1" flipV="1">
-            <a:off x="4646855" y="1624763"/>
-            <a:ext cx="103453" cy="103453"/>
+          <a:xfrm flipV="1">
+            <a:off x="4750308" y="1624763"/>
+            <a:ext cx="103452" cy="103453"/>
           </a:xfrm>
           <a:prstGeom prst="line">
             <a:avLst/>
@@ -4861,9 +4861,9 @@
           <p:nvPr/>
         </p:nvCxnSpPr>
         <p:spPr>
-          <a:xfrm flipH="1" flipV="1">
-            <a:off x="4747439" y="1624763"/>
-            <a:ext cx="103453" cy="103453"/>
+          <a:xfrm flipV="1">
+            <a:off x="4850892" y="1624763"/>
+            <a:ext cx="103452" cy="103453"/>
           </a:xfrm>
           <a:prstGeom prst="line">
             <a:avLst/>
@@ -5001,9 +5001,9 @@
           <p:nvPr/>
         </p:nvCxnSpPr>
         <p:spPr>
-          <a:xfrm flipH="1" flipV="1">
-            <a:off x="5012615" y="1624763"/>
-            <a:ext cx="103453" cy="103453"/>
+          <a:xfrm flipV="1">
+            <a:off x="5116068" y="1624763"/>
+            <a:ext cx="103452" cy="103453"/>
           </a:xfrm>
           <a:prstGeom prst="line">
             <a:avLst/>
@@ -5023,9 +5023,9 @@
           <p:nvPr/>
         </p:nvCxnSpPr>
         <p:spPr>
-          <a:xfrm flipH="1" flipV="1">
-            <a:off x="5113199" y="1624763"/>
-            <a:ext cx="103453" cy="103453"/>
+          <a:xfrm flipV="1">
+            <a:off x="5216652" y="1624763"/>
+            <a:ext cx="103452" cy="103453"/>
           </a:xfrm>
           <a:prstGeom prst="line">
             <a:avLst/>
@@ -5163,9 +5163,9 @@
           <p:nvPr/>
         </p:nvCxnSpPr>
         <p:spPr>
-          <a:xfrm flipH="1" flipV="1">
-            <a:off x="5378375" y="1624763"/>
-            <a:ext cx="103453" cy="103453"/>
+          <a:xfrm flipV="1">
+            <a:off x="5481828" y="1624763"/>
+            <a:ext cx="103452" cy="103453"/>
           </a:xfrm>
           <a:prstGeom prst="line">
             <a:avLst/>
@@ -5185,9 +5185,9 @@
           <p:nvPr/>
         </p:nvCxnSpPr>
         <p:spPr>
-          <a:xfrm flipH="1" flipV="1">
-            <a:off x="5478959" y="1624763"/>
-            <a:ext cx="103453" cy="103453"/>
+          <a:xfrm flipV="1">
+            <a:off x="5582412" y="1624763"/>
+            <a:ext cx="103452" cy="103453"/>
           </a:xfrm>
           <a:prstGeom prst="line">
             <a:avLst/>
@@ -5325,9 +5325,9 @@
           <p:nvPr/>
         </p:nvCxnSpPr>
         <p:spPr>
-          <a:xfrm flipH="1" flipV="1">
-            <a:off x="5744135" y="1624763"/>
-            <a:ext cx="103453" cy="103453"/>
+          <a:xfrm flipV="1">
+            <a:off x="5847588" y="1624763"/>
+            <a:ext cx="103452" cy="103453"/>
           </a:xfrm>
           <a:prstGeom prst="line">
             <a:avLst/>
@@ -5347,9 +5347,9 @@
           <p:nvPr/>
         </p:nvCxnSpPr>
         <p:spPr>
-          <a:xfrm flipH="1" flipV="1">
-            <a:off x="5844719" y="1624763"/>
-            <a:ext cx="103453" cy="103453"/>
+          <a:xfrm flipV="1">
+            <a:off x="5948172" y="1624763"/>
+            <a:ext cx="103452" cy="103453"/>
           </a:xfrm>
           <a:prstGeom prst="line">
             <a:avLst/>
@@ -5487,9 +5487,9 @@
           <p:nvPr/>
         </p:nvCxnSpPr>
         <p:spPr>
-          <a:xfrm flipH="1" flipV="1">
-            <a:off x="6109895" y="1624763"/>
-            <a:ext cx="103453" cy="103453"/>
+          <a:xfrm flipV="1">
+            <a:off x="6213348" y="1624763"/>
+            <a:ext cx="103452" cy="103453"/>
           </a:xfrm>
           <a:prstGeom prst="line">
             <a:avLst/>
@@ -5509,9 +5509,9 @@
           <p:nvPr/>
         </p:nvCxnSpPr>
         <p:spPr>
-          <a:xfrm flipH="1" flipV="1">
-            <a:off x="6210479" y="1624763"/>
-            <a:ext cx="103452" cy="103453"/>
+          <a:xfrm flipV="1">
+            <a:off x="6313931" y="1624763"/>
+            <a:ext cx="103453" cy="103453"/>
           </a:xfrm>
           <a:prstGeom prst="line">
             <a:avLst/>
@@ -5649,9 +5649,9 @@
           <p:nvPr/>
         </p:nvCxnSpPr>
         <p:spPr>
-          <a:xfrm flipH="1" flipV="1">
-            <a:off x="6475655" y="1624763"/>
-            <a:ext cx="103453" cy="103453"/>
+          <a:xfrm flipV="1">
+            <a:off x="6579108" y="1624763"/>
+            <a:ext cx="103452" cy="103453"/>
           </a:xfrm>
           <a:prstGeom prst="line">
             <a:avLst/>
@@ -5671,9 +5671,9 @@
           <p:nvPr/>
         </p:nvCxnSpPr>
         <p:spPr>
-          <a:xfrm flipH="1" flipV="1">
-            <a:off x="6576239" y="1624763"/>
-            <a:ext cx="103453" cy="103453"/>
+          <a:xfrm flipV="1">
+            <a:off x="6679692" y="1624763"/>
+            <a:ext cx="103452" cy="103453"/>
           </a:xfrm>
           <a:prstGeom prst="line">
             <a:avLst/>
@@ -5811,9 +5811,9 @@
           <p:nvPr/>
         </p:nvCxnSpPr>
         <p:spPr>
-          <a:xfrm flipH="1" flipV="1">
-            <a:off x="6841415" y="1624763"/>
-            <a:ext cx="103453" cy="103453"/>
+          <a:xfrm flipV="1">
+            <a:off x="6944868" y="1624763"/>
+            <a:ext cx="103452" cy="103453"/>
           </a:xfrm>
           <a:prstGeom prst="line">
             <a:avLst/>
@@ -5833,9 +5833,9 @@
           <p:nvPr/>
         </p:nvCxnSpPr>
         <p:spPr>
-          <a:xfrm flipH="1" flipV="1">
-            <a:off x="6941999" y="1624763"/>
-            <a:ext cx="103453" cy="103453"/>
+          <a:xfrm flipV="1">
+            <a:off x="7045452" y="1624763"/>
+            <a:ext cx="103452" cy="103453"/>
           </a:xfrm>
           <a:prstGeom prst="line">
             <a:avLst/>
@@ -5973,9 +5973,9 @@
           <p:nvPr/>
         </p:nvCxnSpPr>
         <p:spPr>
-          <a:xfrm flipH="1" flipV="1">
-            <a:off x="7207175" y="1624763"/>
-            <a:ext cx="103453" cy="103453"/>
+          <a:xfrm flipV="1">
+            <a:off x="7310628" y="1624763"/>
+            <a:ext cx="103452" cy="103453"/>
           </a:xfrm>
           <a:prstGeom prst="line">
             <a:avLst/>
@@ -5995,9 +5995,9 @@
           <p:nvPr/>
         </p:nvCxnSpPr>
         <p:spPr>
-          <a:xfrm flipH="1" flipV="1">
-            <a:off x="7307759" y="1624763"/>
-            <a:ext cx="103453" cy="103453"/>
+          <a:xfrm flipV="1">
+            <a:off x="7411212" y="1624763"/>
+            <a:ext cx="103452" cy="103453"/>
           </a:xfrm>
           <a:prstGeom prst="line">
             <a:avLst/>
@@ -7431,9 +7431,9 @@
           <p:nvPr/>
         </p:nvCxnSpPr>
         <p:spPr>
-          <a:xfrm>
-            <a:off x="7411212" y="5769864"/>
-            <a:ext cx="103452" cy="103452"/>
+          <a:xfrm flipH="1">
+            <a:off x="7307759" y="5769864"/>
+            <a:ext cx="103453" cy="103452"/>
           </a:xfrm>
           <a:prstGeom prst="line">
             <a:avLst/>
@@ -7453,9 +7453,9 @@
           <p:nvPr/>
         </p:nvCxnSpPr>
         <p:spPr>
-          <a:xfrm>
-            <a:off x="7310628" y="5769864"/>
-            <a:ext cx="103452" cy="103452"/>
+          <a:xfrm flipH="1">
+            <a:off x="7207175" y="5769864"/>
+            <a:ext cx="103453" cy="103452"/>
           </a:xfrm>
           <a:prstGeom prst="line">
             <a:avLst/>
@@ -7593,9 +7593,9 @@
           <p:nvPr/>
         </p:nvCxnSpPr>
         <p:spPr>
-          <a:xfrm>
-            <a:off x="7045452" y="5769864"/>
-            <a:ext cx="103452" cy="103452"/>
+          <a:xfrm flipH="1">
+            <a:off x="6941999" y="5769864"/>
+            <a:ext cx="103453" cy="103452"/>
           </a:xfrm>
           <a:prstGeom prst="line">
             <a:avLst/>
@@ -7615,9 +7615,9 @@
           <p:nvPr/>
         </p:nvCxnSpPr>
         <p:spPr>
-          <a:xfrm>
-            <a:off x="6944868" y="5769864"/>
-            <a:ext cx="103452" cy="103452"/>
+          <a:xfrm flipH="1">
+            <a:off x="6841415" y="5769864"/>
+            <a:ext cx="103453" cy="103452"/>
           </a:xfrm>
           <a:prstGeom prst="line">
             <a:avLst/>
@@ -7755,9 +7755,9 @@
           <p:nvPr/>
         </p:nvCxnSpPr>
         <p:spPr>
-          <a:xfrm>
-            <a:off x="6679692" y="5769864"/>
-            <a:ext cx="103452" cy="103452"/>
+          <a:xfrm flipH="1">
+            <a:off x="6576239" y="5769864"/>
+            <a:ext cx="103453" cy="103452"/>
           </a:xfrm>
           <a:prstGeom prst="line">
             <a:avLst/>
@@ -7777,9 +7777,9 @@
           <p:nvPr/>
         </p:nvCxnSpPr>
         <p:spPr>
-          <a:xfrm>
-            <a:off x="6579108" y="5769864"/>
-            <a:ext cx="103452" cy="103452"/>
+          <a:xfrm flipH="1">
+            <a:off x="6475655" y="5769864"/>
+            <a:ext cx="103453" cy="103452"/>
           </a:xfrm>
           <a:prstGeom prst="line">
             <a:avLst/>
@@ -7917,9 +7917,9 @@
           <p:nvPr/>
         </p:nvCxnSpPr>
         <p:spPr>
-          <a:xfrm>
-            <a:off x="6313931" y="5769864"/>
-            <a:ext cx="103453" cy="103452"/>
+          <a:xfrm flipH="1">
+            <a:off x="6210479" y="5769864"/>
+            <a:ext cx="103452" cy="103452"/>
           </a:xfrm>
           <a:prstGeom prst="line">
             <a:avLst/>
@@ -7939,9 +7939,9 @@
           <p:nvPr/>
         </p:nvCxnSpPr>
         <p:spPr>
-          <a:xfrm>
-            <a:off x="6213348" y="5769864"/>
-            <a:ext cx="103452" cy="103452"/>
+          <a:xfrm flipH="1">
+            <a:off x="6109895" y="5769864"/>
+            <a:ext cx="103453" cy="103452"/>
           </a:xfrm>
           <a:prstGeom prst="line">
             <a:avLst/>
@@ -8079,9 +8079,9 @@
           <p:nvPr/>
         </p:nvCxnSpPr>
         <p:spPr>
-          <a:xfrm>
-            <a:off x="5948172" y="5769864"/>
-            <a:ext cx="103452" cy="103452"/>
+          <a:xfrm flipH="1">
+            <a:off x="5844719" y="5769864"/>
+            <a:ext cx="103453" cy="103452"/>
           </a:xfrm>
           <a:prstGeom prst="line">
             <a:avLst/>
@@ -8101,9 +8101,9 @@
           <p:nvPr/>
         </p:nvCxnSpPr>
         <p:spPr>
-          <a:xfrm>
-            <a:off x="5847588" y="5769864"/>
-            <a:ext cx="103452" cy="103452"/>
+          <a:xfrm flipH="1">
+            <a:off x="5744135" y="5769864"/>
+            <a:ext cx="103453" cy="103452"/>
           </a:xfrm>
           <a:prstGeom prst="line">
             <a:avLst/>
@@ -8241,9 +8241,9 @@
           <p:nvPr/>
         </p:nvCxnSpPr>
         <p:spPr>
-          <a:xfrm>
-            <a:off x="5582412" y="5769864"/>
-            <a:ext cx="103452" cy="103452"/>
+          <a:xfrm flipH="1">
+            <a:off x="5478959" y="5769864"/>
+            <a:ext cx="103453" cy="103452"/>
           </a:xfrm>
           <a:prstGeom prst="line">
             <a:avLst/>
@@ -8263,9 +8263,9 @@
           <p:nvPr/>
         </p:nvCxnSpPr>
         <p:spPr>
-          <a:xfrm>
-            <a:off x="5481828" y="5769864"/>
-            <a:ext cx="103452" cy="103452"/>
+          <a:xfrm flipH="1">
+            <a:off x="5378375" y="5769864"/>
+            <a:ext cx="103453" cy="103452"/>
           </a:xfrm>
           <a:prstGeom prst="line">
             <a:avLst/>
@@ -8403,9 +8403,9 @@
           <p:nvPr/>
         </p:nvCxnSpPr>
         <p:spPr>
-          <a:xfrm>
-            <a:off x="5216652" y="5769864"/>
-            <a:ext cx="103452" cy="103452"/>
+          <a:xfrm flipH="1">
+            <a:off x="5113199" y="5769864"/>
+            <a:ext cx="103453" cy="103452"/>
           </a:xfrm>
           <a:prstGeom prst="line">
             <a:avLst/>
@@ -8425,9 +8425,9 @@
           <p:nvPr/>
         </p:nvCxnSpPr>
         <p:spPr>
-          <a:xfrm>
-            <a:off x="5116068" y="5769864"/>
-            <a:ext cx="103452" cy="103452"/>
+          <a:xfrm flipH="1">
+            <a:off x="5012615" y="5769864"/>
+            <a:ext cx="103453" cy="103452"/>
           </a:xfrm>
           <a:prstGeom prst="line">
             <a:avLst/>
@@ -8565,9 +8565,9 @@
           <p:nvPr/>
         </p:nvCxnSpPr>
         <p:spPr>
-          <a:xfrm>
-            <a:off x="4850892" y="5769864"/>
-            <a:ext cx="103452" cy="103452"/>
+          <a:xfrm flipH="1">
+            <a:off x="4747439" y="5769864"/>
+            <a:ext cx="103453" cy="103452"/>
           </a:xfrm>
           <a:prstGeom prst="line">
             <a:avLst/>
@@ -8587,9 +8587,9 @@
           <p:nvPr/>
         </p:nvCxnSpPr>
         <p:spPr>
-          <a:xfrm>
-            <a:off x="4750308" y="5769864"/>
-            <a:ext cx="103452" cy="103452"/>
+          <a:xfrm flipH="1">
+            <a:off x="4646855" y="5769864"/>
+            <a:ext cx="103453" cy="103452"/>
           </a:xfrm>
           <a:prstGeom prst="line">
             <a:avLst/>
@@ -9422,9 +9422,9 @@
           <p:nvPr/>
         </p:nvCxnSpPr>
         <p:spPr>
-          <a:xfrm flipH="1" flipV="1">
-            <a:off x="714935" y="4688003"/>
-            <a:ext cx="103452" cy="103452"/>
+          <a:xfrm flipV="1">
+            <a:off x="818387" y="4688003"/>
+            <a:ext cx="103453" cy="103452"/>
           </a:xfrm>
           <a:prstGeom prst="line">
             <a:avLst/>
@@ -9444,9 +9444,9 @@
           <p:nvPr/>
         </p:nvCxnSpPr>
         <p:spPr>
-          <a:xfrm flipH="1" flipV="1">
-            <a:off x="815519" y="4688003"/>
-            <a:ext cx="103452" cy="103452"/>
+          <a:xfrm flipV="1">
+            <a:off x="918971" y="4688003"/>
+            <a:ext cx="103453" cy="103452"/>
           </a:xfrm>
           <a:prstGeom prst="line">
             <a:avLst/>

--- a/PCB_LIGHTING_updated.pptx
+++ b/PCB_LIGHTING_updated.pptx
@@ -4386,7 +4386,7 @@
           </a:prstGeom>
           <a:ln w="15875">
             <a:solidFill>
-              <a:srgbClr val="E0B25B"/>
+              <a:srgbClr val="000000"/>
             </a:solidFill>
           </a:ln>
         </p:spPr>
@@ -4407,7 +4407,7 @@
           </a:prstGeom>
           <a:ln w="15875">
             <a:solidFill>
-              <a:srgbClr val="E0B25B"/>
+              <a:srgbClr val="000000"/>
             </a:solidFill>
           </a:ln>
         </p:spPr>
@@ -4428,7 +4428,7 @@
           </a:prstGeom>
           <a:ln w="15875">
             <a:solidFill>
-              <a:srgbClr val="E0B25B"/>
+              <a:srgbClr val="000000"/>
             </a:solidFill>
           </a:ln>
         </p:spPr>
@@ -4751,38 +4751,7 @@
       </p:sp>
       <p:sp>
         <p:nvSpPr>
-          <p:cNvPr id="20" name="Oval 19"/>
-          <p:cNvSpPr/>
-          <p:nvPr/>
-        </p:nvSpPr>
-        <p:spPr>
-          <a:xfrm>
-            <a:off x="4645152" y="1563624"/>
-            <a:ext cx="310896" cy="310896"/>
-          </a:xfrm>
-          <a:prstGeom prst="ellipse">
-            <a:avLst/>
-          </a:prstGeom>
-          <a:solidFill>
-            <a:srgbClr val="FFD34D">
-              <a:alpha val="22000"/>
-            </a:srgbClr>
-          </a:solidFill>
-          <a:ln>
-            <a:noFill/>
-          </a:ln>
-        </p:spPr>
-        <p:txBody>
-          <a:bodyPr rtlCol="0" anchor="ctr"/>
-          <a:lstStyle/>
-          <a:p>
-            <a:pPr algn="ctr"/>
-          </a:p>
-        </p:txBody>
-      </p:sp>
-      <p:sp>
-        <p:nvSpPr>
-          <p:cNvPr id="21" name="Isosceles Triangle 20"/>
+          <p:cNvPr id="20" name="Isosceles Triangle 19"/>
           <p:cNvSpPr/>
           <p:nvPr/>
         </p:nvSpPr>
@@ -4795,11 +4764,11 @@
             <a:avLst/>
           </a:prstGeom>
           <a:solidFill>
-            <a:srgbClr val="FFF1C1"/>
+            <a:srgbClr val="D9D9D9"/>
           </a:solidFill>
           <a:ln w="12700">
             <a:solidFill>
-              <a:srgbClr val="E0B25B"/>
+              <a:srgbClr val="000000"/>
             </a:solidFill>
           </a:ln>
         </p:spPr>
@@ -4811,6 +4780,27 @@
           </a:p>
         </p:txBody>
       </p:sp>
+      <p:cxnSp>
+        <p:nvCxnSpPr>
+          <p:cNvPr id="21" name="Connector 20"/>
+          <p:cNvCxnSpPr/>
+          <p:nvPr/>
+        </p:nvCxnSpPr>
+        <p:spPr>
+          <a:xfrm>
+            <a:off x="4882896" y="1719072"/>
+            <a:ext cx="0" cy="219456"/>
+          </a:xfrm>
+          <a:prstGeom prst="line">
+            <a:avLst/>
+          </a:prstGeom>
+          <a:ln w="19050">
+            <a:solidFill>
+              <a:srgbClr val="000000"/>
+            </a:solidFill>
+          </a:ln>
+        </p:spPr>
+      </p:cxnSp>
       <p:cxnSp>
         <p:nvCxnSpPr>
           <p:cNvPr id="22" name="Connector 21"/>
@@ -4818,17 +4808,18 @@
           <p:nvPr/>
         </p:nvCxnSpPr>
         <p:spPr>
-          <a:xfrm>
-            <a:off x="4882896" y="1719072"/>
-            <a:ext cx="0" cy="219456"/>
+          <a:xfrm flipV="1">
+            <a:off x="4750308" y="1624763"/>
+            <a:ext cx="103452" cy="103453"/>
           </a:xfrm>
           <a:prstGeom prst="line">
             <a:avLst/>
           </a:prstGeom>
           <a:ln w="19050">
             <a:solidFill>
-              <a:srgbClr val="E0B25B"/>
-            </a:solidFill>
+              <a:srgbClr val="FFD34D"/>
+            </a:solidFill>
+            <a:tailEnd type="triangle" w="med" len="med"/>
           </a:ln>
         </p:spPr>
       </p:cxnSp>
@@ -4840,7 +4831,7 @@
         </p:nvCxnSpPr>
         <p:spPr>
           <a:xfrm flipV="1">
-            <a:off x="4750308" y="1624763"/>
+            <a:off x="4850892" y="1624763"/>
             <a:ext cx="103452" cy="103453"/>
           </a:xfrm>
           <a:prstGeom prst="line">
@@ -4851,18 +4842,105 @@
               <a:srgbClr val="FFD34D"/>
             </a:solidFill>
             <a:tailEnd type="triangle" w="med" len="med"/>
+          </a:ln>
+        </p:spPr>
+      </p:cxnSp>
+      <p:sp>
+        <p:nvSpPr>
+          <p:cNvPr id="24" name="TextBox 23"/>
+          <p:cNvSpPr txBox="1"/>
+          <p:nvPr/>
+        </p:nvSpPr>
+        <p:spPr>
+          <a:xfrm>
+            <a:off x="4572000" y="1929384"/>
+            <a:ext cx="457200" cy="146304"/>
+          </a:xfrm>
+          <a:prstGeom prst="rect">
+            <a:avLst/>
+          </a:prstGeom>
+          <a:noFill/>
+        </p:spPr>
+        <p:txBody>
+          <a:bodyPr wrap="square" lIns="0" rIns="0" tIns="0" bIns="0" anchor="ctr">
+            <a:spAutoFit/>
+          </a:bodyPr>
+          <a:lstStyle/>
+          <a:p>
+            <a:pPr algn="ctr"/>
+            <a:r>
+              <a:rPr sz="700" b="0" i="0">
+                <a:solidFill>
+                  <a:srgbClr val="EAF0F6"/>
+                </a:solidFill>
+                <a:latin typeface="Calibri"/>
+              </a:rPr>
+              <a:t>LED1</a:t>
+            </a:r>
+          </a:p>
+        </p:txBody>
+      </p:sp>
+      <p:sp>
+        <p:nvSpPr>
+          <p:cNvPr id="25" name="Isosceles Triangle 24"/>
+          <p:cNvSpPr/>
+          <p:nvPr/>
+        </p:nvSpPr>
+        <p:spPr>
+          <a:xfrm rot="5400000">
+            <a:off x="5065776" y="1746504"/>
+            <a:ext cx="201168" cy="164592"/>
+          </a:xfrm>
+          <a:prstGeom prst="triangle">
+            <a:avLst/>
+          </a:prstGeom>
+          <a:solidFill>
+            <a:srgbClr val="D9D9D9"/>
+          </a:solidFill>
+          <a:ln w="12700">
+            <a:solidFill>
+              <a:srgbClr val="000000"/>
+            </a:solidFill>
+          </a:ln>
+        </p:spPr>
+        <p:txBody>
+          <a:bodyPr rtlCol="0" anchor="ctr"/>
+          <a:lstStyle/>
+          <a:p>
+            <a:pPr algn="ctr"/>
+          </a:p>
+        </p:txBody>
+      </p:sp>
+      <p:cxnSp>
+        <p:nvCxnSpPr>
+          <p:cNvPr id="26" name="Connector 25"/>
+          <p:cNvCxnSpPr/>
+          <p:nvPr/>
+        </p:nvCxnSpPr>
+        <p:spPr>
+          <a:xfrm>
+            <a:off x="5248656" y="1719072"/>
+            <a:ext cx="0" cy="219456"/>
+          </a:xfrm>
+          <a:prstGeom prst="line">
+            <a:avLst/>
+          </a:prstGeom>
+          <a:ln w="19050">
+            <a:solidFill>
+              <a:srgbClr val="000000"/>
+            </a:solidFill>
           </a:ln>
         </p:spPr>
       </p:cxnSp>
       <p:cxnSp>
         <p:nvCxnSpPr>
-          <p:cNvPr id="24" name="Connector 23"/>
+          <p:cNvPr id="27" name="Connector 26"/>
           <p:cNvCxnSpPr/>
           <p:nvPr/>
         </p:nvCxnSpPr>
         <p:spPr>
           <a:xfrm flipV="1">
-            <a:off x="4850892" y="1624763"/>
+            <a:off x="5116068" y="1624763"/>
             <a:ext cx="103452" cy="103453"/>
           </a:xfrm>
           <a:prstGeom prst="line">
@@ -4876,103 +4954,6 @@
           </a:ln>
         </p:spPr>
       </p:cxnSp>
-      <p:sp>
-        <p:nvSpPr>
-          <p:cNvPr id="25" name="TextBox 24"/>
-          <p:cNvSpPr txBox="1"/>
-          <p:nvPr/>
-        </p:nvSpPr>
-        <p:spPr>
-          <a:xfrm>
-            <a:off x="4572000" y="1929384"/>
-            <a:ext cx="457200" cy="146304"/>
-          </a:xfrm>
-          <a:prstGeom prst="rect">
-            <a:avLst/>
-          </a:prstGeom>
-          <a:noFill/>
-        </p:spPr>
-        <p:txBody>
-          <a:bodyPr wrap="square" lIns="0" rIns="0" tIns="0" bIns="0" anchor="ctr">
-            <a:spAutoFit/>
-          </a:bodyPr>
-          <a:lstStyle/>
-          <a:p>
-            <a:pPr algn="ctr"/>
-            <a:r>
-              <a:rPr sz="700" b="0" i="0">
-                <a:solidFill>
-                  <a:srgbClr val="EAF0F6"/>
-                </a:solidFill>
-                <a:latin typeface="Calibri"/>
-              </a:rPr>
-              <a:t>LED1</a:t>
-            </a:r>
-          </a:p>
-        </p:txBody>
-      </p:sp>
-      <p:sp>
-        <p:nvSpPr>
-          <p:cNvPr id="26" name="Oval 25"/>
-          <p:cNvSpPr/>
-          <p:nvPr/>
-        </p:nvSpPr>
-        <p:spPr>
-          <a:xfrm>
-            <a:off x="5010912" y="1563624"/>
-            <a:ext cx="310896" cy="310896"/>
-          </a:xfrm>
-          <a:prstGeom prst="ellipse">
-            <a:avLst/>
-          </a:prstGeom>
-          <a:solidFill>
-            <a:srgbClr val="FFD34D">
-              <a:alpha val="22000"/>
-            </a:srgbClr>
-          </a:solidFill>
-          <a:ln>
-            <a:noFill/>
-          </a:ln>
-        </p:spPr>
-        <p:txBody>
-          <a:bodyPr rtlCol="0" anchor="ctr"/>
-          <a:lstStyle/>
-          <a:p>
-            <a:pPr algn="ctr"/>
-          </a:p>
-        </p:txBody>
-      </p:sp>
-      <p:sp>
-        <p:nvSpPr>
-          <p:cNvPr id="27" name="Isosceles Triangle 26"/>
-          <p:cNvSpPr/>
-          <p:nvPr/>
-        </p:nvSpPr>
-        <p:spPr>
-          <a:xfrm rot="5400000">
-            <a:off x="5065776" y="1746504"/>
-            <a:ext cx="201168" cy="164592"/>
-          </a:xfrm>
-          <a:prstGeom prst="triangle">
-            <a:avLst/>
-          </a:prstGeom>
-          <a:solidFill>
-            <a:srgbClr val="FFF1C1"/>
-          </a:solidFill>
-          <a:ln w="12700">
-            <a:solidFill>
-              <a:srgbClr val="E0B25B"/>
-            </a:solidFill>
-          </a:ln>
-        </p:spPr>
-        <p:txBody>
-          <a:bodyPr rtlCol="0" anchor="ctr"/>
-          <a:lstStyle/>
-          <a:p>
-            <a:pPr algn="ctr"/>
-          </a:p>
-        </p:txBody>
-      </p:sp>
       <p:cxnSp>
         <p:nvCxnSpPr>
           <p:cNvPr id="28" name="Connector 27"/>
@@ -4980,8 +4961,96 @@
           <p:nvPr/>
         </p:nvCxnSpPr>
         <p:spPr>
-          <a:xfrm>
-            <a:off x="5248656" y="1719072"/>
+          <a:xfrm flipV="1">
+            <a:off x="5216652" y="1624763"/>
+            <a:ext cx="103452" cy="103453"/>
+          </a:xfrm>
+          <a:prstGeom prst="line">
+            <a:avLst/>
+          </a:prstGeom>
+          <a:ln w="19050">
+            <a:solidFill>
+              <a:srgbClr val="FFD34D"/>
+            </a:solidFill>
+            <a:tailEnd type="triangle" w="med" len="med"/>
+          </a:ln>
+        </p:spPr>
+      </p:cxnSp>
+      <p:sp>
+        <p:nvSpPr>
+          <p:cNvPr id="29" name="TextBox 28"/>
+          <p:cNvSpPr txBox="1"/>
+          <p:nvPr/>
+        </p:nvSpPr>
+        <p:spPr>
+          <a:xfrm>
+            <a:off x="4937760" y="1929384"/>
+            <a:ext cx="457200" cy="146304"/>
+          </a:xfrm>
+          <a:prstGeom prst="rect">
+            <a:avLst/>
+          </a:prstGeom>
+          <a:noFill/>
+        </p:spPr>
+        <p:txBody>
+          <a:bodyPr wrap="square" lIns="0" rIns="0" tIns="0" bIns="0" anchor="ctr">
+            <a:spAutoFit/>
+          </a:bodyPr>
+          <a:lstStyle/>
+          <a:p>
+            <a:pPr algn="ctr"/>
+            <a:r>
+              <a:rPr sz="700" b="0" i="0">
+                <a:solidFill>
+                  <a:srgbClr val="EAF0F6"/>
+                </a:solidFill>
+                <a:latin typeface="Calibri"/>
+              </a:rPr>
+              <a:t>LED2</a:t>
+            </a:r>
+          </a:p>
+        </p:txBody>
+      </p:sp>
+      <p:sp>
+        <p:nvSpPr>
+          <p:cNvPr id="30" name="Isosceles Triangle 29"/>
+          <p:cNvSpPr/>
+          <p:nvPr/>
+        </p:nvSpPr>
+        <p:spPr>
+          <a:xfrm rot="5400000">
+            <a:off x="5431536" y="1746504"/>
+            <a:ext cx="201168" cy="164592"/>
+          </a:xfrm>
+          <a:prstGeom prst="triangle">
+            <a:avLst/>
+          </a:prstGeom>
+          <a:solidFill>
+            <a:srgbClr val="D9D9D9"/>
+          </a:solidFill>
+          <a:ln w="12700">
+            <a:solidFill>
+              <a:srgbClr val="000000"/>
+            </a:solidFill>
+          </a:ln>
+        </p:spPr>
+        <p:txBody>
+          <a:bodyPr rtlCol="0" anchor="ctr"/>
+          <a:lstStyle/>
+          <a:p>
+            <a:pPr algn="ctr"/>
+          </a:p>
+        </p:txBody>
+      </p:sp>
+      <p:cxnSp>
+        <p:nvCxnSpPr>
+          <p:cNvPr id="31" name="Connector 30"/>
+          <p:cNvCxnSpPr/>
+          <p:nvPr/>
+        </p:nvCxnSpPr>
+        <p:spPr>
+          <a:xfrm>
+            <a:off x="5614416" y="1719072"/>
             <a:ext cx="0" cy="219456"/>
           </a:xfrm>
           <a:prstGeom prst="line">
@@ -4989,20 +5058,20 @@
           </a:prstGeom>
           <a:ln w="19050">
             <a:solidFill>
-              <a:srgbClr val="E0B25B"/>
+              <a:srgbClr val="000000"/>
             </a:solidFill>
           </a:ln>
         </p:spPr>
       </p:cxnSp>
       <p:cxnSp>
         <p:nvCxnSpPr>
-          <p:cNvPr id="29" name="Connector 28"/>
+          <p:cNvPr id="32" name="Connector 31"/>
           <p:cNvCxnSpPr/>
           <p:nvPr/>
         </p:nvCxnSpPr>
         <p:spPr>
           <a:xfrm flipV="1">
-            <a:off x="5116068" y="1624763"/>
+            <a:off x="5481828" y="1624763"/>
             <a:ext cx="103452" cy="103453"/>
           </a:xfrm>
           <a:prstGeom prst="line">
@@ -5018,13 +5087,13 @@
       </p:cxnSp>
       <p:cxnSp>
         <p:nvCxnSpPr>
-          <p:cNvPr id="30" name="Connector 29"/>
+          <p:cNvPr id="33" name="Connector 32"/>
           <p:cNvCxnSpPr/>
           <p:nvPr/>
         </p:nvCxnSpPr>
         <p:spPr>
           <a:xfrm flipV="1">
-            <a:off x="5216652" y="1624763"/>
+            <a:off x="5582412" y="1624763"/>
             <a:ext cx="103452" cy="103453"/>
           </a:xfrm>
           <a:prstGeom prst="line">
@@ -5040,13 +5109,13 @@
       </p:cxnSp>
       <p:sp>
         <p:nvSpPr>
-          <p:cNvPr id="31" name="TextBox 30"/>
+          <p:cNvPr id="34" name="TextBox 33"/>
           <p:cNvSpPr txBox="1"/>
           <p:nvPr/>
         </p:nvSpPr>
         <p:spPr>
           <a:xfrm>
-            <a:off x="4937760" y="1929384"/>
+            <a:off x="5303520" y="1929384"/>
             <a:ext cx="457200" cy="146304"/>
           </a:xfrm>
           <a:prstGeom prst="rect">
@@ -5068,62 +5137,31 @@
                 </a:solidFill>
                 <a:latin typeface="Calibri"/>
               </a:rPr>
-              <a:t>LED2</a:t>
-            </a:r>
-          </a:p>
-        </p:txBody>
-      </p:sp>
-      <p:sp>
-        <p:nvSpPr>
-          <p:cNvPr id="32" name="Oval 31"/>
+              <a:t>LED3</a:t>
+            </a:r>
+          </a:p>
+        </p:txBody>
+      </p:sp>
+      <p:sp>
+        <p:nvSpPr>
+          <p:cNvPr id="35" name="Isosceles Triangle 34"/>
           <p:cNvSpPr/>
           <p:nvPr/>
         </p:nvSpPr>
         <p:spPr>
-          <a:xfrm>
-            <a:off x="5376672" y="1563624"/>
-            <a:ext cx="310896" cy="310896"/>
-          </a:xfrm>
-          <a:prstGeom prst="ellipse">
+          <a:xfrm rot="5400000">
+            <a:off x="5797296" y="1746504"/>
+            <a:ext cx="201168" cy="164592"/>
+          </a:xfrm>
+          <a:prstGeom prst="triangle">
             <a:avLst/>
           </a:prstGeom>
           <a:solidFill>
-            <a:srgbClr val="FFD34D">
-              <a:alpha val="22000"/>
-            </a:srgbClr>
-          </a:solidFill>
-          <a:ln>
-            <a:noFill/>
-          </a:ln>
-        </p:spPr>
-        <p:txBody>
-          <a:bodyPr rtlCol="0" anchor="ctr"/>
-          <a:lstStyle/>
-          <a:p>
-            <a:pPr algn="ctr"/>
-          </a:p>
-        </p:txBody>
-      </p:sp>
-      <p:sp>
-        <p:nvSpPr>
-          <p:cNvPr id="33" name="Isosceles Triangle 32"/>
-          <p:cNvSpPr/>
-          <p:nvPr/>
-        </p:nvSpPr>
-        <p:spPr>
-          <a:xfrm rot="5400000">
-            <a:off x="5431536" y="1746504"/>
-            <a:ext cx="201168" cy="164592"/>
-          </a:xfrm>
-          <a:prstGeom prst="triangle">
-            <a:avLst/>
-          </a:prstGeom>
-          <a:solidFill>
-            <a:srgbClr val="FFF1C1"/>
+            <a:srgbClr val="D9D9D9"/>
           </a:solidFill>
           <a:ln w="12700">
             <a:solidFill>
-              <a:srgbClr val="E0B25B"/>
+              <a:srgbClr val="000000"/>
             </a:solidFill>
           </a:ln>
         </p:spPr>
@@ -5135,49 +5173,6 @@
           </a:p>
         </p:txBody>
       </p:sp>
-      <p:cxnSp>
-        <p:nvCxnSpPr>
-          <p:cNvPr id="34" name="Connector 33"/>
-          <p:cNvCxnSpPr/>
-          <p:nvPr/>
-        </p:nvCxnSpPr>
-        <p:spPr>
-          <a:xfrm>
-            <a:off x="5614416" y="1719072"/>
-            <a:ext cx="0" cy="219456"/>
-          </a:xfrm>
-          <a:prstGeom prst="line">
-            <a:avLst/>
-          </a:prstGeom>
-          <a:ln w="19050">
-            <a:solidFill>
-              <a:srgbClr val="E0B25B"/>
-            </a:solidFill>
-          </a:ln>
-        </p:spPr>
-      </p:cxnSp>
-      <p:cxnSp>
-        <p:nvCxnSpPr>
-          <p:cNvPr id="35" name="Connector 34"/>
-          <p:cNvCxnSpPr/>
-          <p:nvPr/>
-        </p:nvCxnSpPr>
-        <p:spPr>
-          <a:xfrm flipV="1">
-            <a:off x="5481828" y="1624763"/>
-            <a:ext cx="103452" cy="103453"/>
-          </a:xfrm>
-          <a:prstGeom prst="line">
-            <a:avLst/>
-          </a:prstGeom>
-          <a:ln w="19050">
-            <a:solidFill>
-              <a:srgbClr val="FFD34D"/>
-            </a:solidFill>
-            <a:tailEnd type="triangle" w="med" len="med"/>
-          </a:ln>
-        </p:spPr>
-      </p:cxnSp>
       <p:cxnSp>
         <p:nvCxnSpPr>
           <p:cNvPr id="36" name="Connector 35"/>
@@ -5185,8 +5180,29 @@
           <p:nvPr/>
         </p:nvCxnSpPr>
         <p:spPr>
+          <a:xfrm>
+            <a:off x="5980176" y="1719072"/>
+            <a:ext cx="0" cy="219456"/>
+          </a:xfrm>
+          <a:prstGeom prst="line">
+            <a:avLst/>
+          </a:prstGeom>
+          <a:ln w="19050">
+            <a:solidFill>
+              <a:srgbClr val="000000"/>
+            </a:solidFill>
+          </a:ln>
+        </p:spPr>
+      </p:cxnSp>
+      <p:cxnSp>
+        <p:nvCxnSpPr>
+          <p:cNvPr id="37" name="Connector 36"/>
+          <p:cNvCxnSpPr/>
+          <p:nvPr/>
+        </p:nvCxnSpPr>
+        <p:spPr>
           <a:xfrm flipV="1">
-            <a:off x="5582412" y="1624763"/>
+            <a:off x="5847588" y="1624763"/>
             <a:ext cx="103452" cy="103453"/>
           </a:xfrm>
           <a:prstGeom prst="line">
@@ -5200,15 +5216,37 @@
           </a:ln>
         </p:spPr>
       </p:cxnSp>
-      <p:sp>
-        <p:nvSpPr>
-          <p:cNvPr id="37" name="TextBox 36"/>
+      <p:cxnSp>
+        <p:nvCxnSpPr>
+          <p:cNvPr id="38" name="Connector 37"/>
+          <p:cNvCxnSpPr/>
+          <p:nvPr/>
+        </p:nvCxnSpPr>
+        <p:spPr>
+          <a:xfrm flipV="1">
+            <a:off x="5948172" y="1624763"/>
+            <a:ext cx="103452" cy="103453"/>
+          </a:xfrm>
+          <a:prstGeom prst="line">
+            <a:avLst/>
+          </a:prstGeom>
+          <a:ln w="19050">
+            <a:solidFill>
+              <a:srgbClr val="FFD34D"/>
+            </a:solidFill>
+            <a:tailEnd type="triangle" w="med" len="med"/>
+          </a:ln>
+        </p:spPr>
+      </p:cxnSp>
+      <p:sp>
+        <p:nvSpPr>
+          <p:cNvPr id="39" name="TextBox 38"/>
           <p:cNvSpPr txBox="1"/>
           <p:nvPr/>
         </p:nvSpPr>
         <p:spPr>
           <a:xfrm>
-            <a:off x="5303520" y="1929384"/>
+            <a:off x="5669280" y="1929384"/>
             <a:ext cx="457200" cy="146304"/>
           </a:xfrm>
           <a:prstGeom prst="rect">
@@ -5230,62 +5268,31 @@
                 </a:solidFill>
                 <a:latin typeface="Calibri"/>
               </a:rPr>
-              <a:t>LED3</a:t>
-            </a:r>
-          </a:p>
-        </p:txBody>
-      </p:sp>
-      <p:sp>
-        <p:nvSpPr>
-          <p:cNvPr id="38" name="Oval 37"/>
+              <a:t>LED4</a:t>
+            </a:r>
+          </a:p>
+        </p:txBody>
+      </p:sp>
+      <p:sp>
+        <p:nvSpPr>
+          <p:cNvPr id="40" name="Isosceles Triangle 39"/>
           <p:cNvSpPr/>
           <p:nvPr/>
         </p:nvSpPr>
         <p:spPr>
-          <a:xfrm>
-            <a:off x="5742432" y="1563624"/>
-            <a:ext cx="310896" cy="310896"/>
-          </a:xfrm>
-          <a:prstGeom prst="ellipse">
+          <a:xfrm rot="5400000">
+            <a:off x="6163055" y="1746504"/>
+            <a:ext cx="201168" cy="164592"/>
+          </a:xfrm>
+          <a:prstGeom prst="triangle">
             <a:avLst/>
           </a:prstGeom>
           <a:solidFill>
-            <a:srgbClr val="FFD34D">
-              <a:alpha val="22000"/>
-            </a:srgbClr>
-          </a:solidFill>
-          <a:ln>
-            <a:noFill/>
-          </a:ln>
-        </p:spPr>
-        <p:txBody>
-          <a:bodyPr rtlCol="0" anchor="ctr"/>
-          <a:lstStyle/>
-          <a:p>
-            <a:pPr algn="ctr"/>
-          </a:p>
-        </p:txBody>
-      </p:sp>
-      <p:sp>
-        <p:nvSpPr>
-          <p:cNvPr id="39" name="Isosceles Triangle 38"/>
-          <p:cNvSpPr/>
-          <p:nvPr/>
-        </p:nvSpPr>
-        <p:spPr>
-          <a:xfrm rot="5400000">
-            <a:off x="5797296" y="1746504"/>
-            <a:ext cx="201168" cy="164592"/>
-          </a:xfrm>
-          <a:prstGeom prst="triangle">
-            <a:avLst/>
-          </a:prstGeom>
-          <a:solidFill>
-            <a:srgbClr val="FFF1C1"/>
+            <a:srgbClr val="D9D9D9"/>
           </a:solidFill>
           <a:ln w="12700">
             <a:solidFill>
-              <a:srgbClr val="E0B25B"/>
+              <a:srgbClr val="000000"/>
             </a:solidFill>
           </a:ln>
         </p:spPr>
@@ -5297,27 +5304,6 @@
           </a:p>
         </p:txBody>
       </p:sp>
-      <p:cxnSp>
-        <p:nvCxnSpPr>
-          <p:cNvPr id="40" name="Connector 39"/>
-          <p:cNvCxnSpPr/>
-          <p:nvPr/>
-        </p:nvCxnSpPr>
-        <p:spPr>
-          <a:xfrm>
-            <a:off x="5980176" y="1719072"/>
-            <a:ext cx="0" cy="219456"/>
-          </a:xfrm>
-          <a:prstGeom prst="line">
-            <a:avLst/>
-          </a:prstGeom>
-          <a:ln w="19050">
-            <a:solidFill>
-              <a:srgbClr val="E0B25B"/>
-            </a:solidFill>
-          </a:ln>
-        </p:spPr>
-      </p:cxnSp>
       <p:cxnSp>
         <p:nvCxnSpPr>
           <p:cNvPr id="41" name="Connector 40"/>
@@ -5325,18 +5311,17 @@
           <p:nvPr/>
         </p:nvCxnSpPr>
         <p:spPr>
-          <a:xfrm flipV="1">
-            <a:off x="5847588" y="1624763"/>
-            <a:ext cx="103452" cy="103453"/>
+          <a:xfrm>
+            <a:off x="6345936" y="1719072"/>
+            <a:ext cx="0" cy="219456"/>
           </a:xfrm>
           <a:prstGeom prst="line">
             <a:avLst/>
           </a:prstGeom>
           <a:ln w="19050">
             <a:solidFill>
-              <a:srgbClr val="FFD34D"/>
-            </a:solidFill>
-            <a:tailEnd type="triangle" w="med" len="med"/>
+              <a:srgbClr val="000000"/>
+            </a:solidFill>
           </a:ln>
         </p:spPr>
       </p:cxnSp>
@@ -5348,7 +5333,7 @@
         </p:nvCxnSpPr>
         <p:spPr>
           <a:xfrm flipV="1">
-            <a:off x="5948172" y="1624763"/>
+            <a:off x="6213348" y="1624763"/>
             <a:ext cx="103452" cy="103453"/>
           </a:xfrm>
           <a:prstGeom prst="line">
@@ -5362,15 +5347,37 @@
           </a:ln>
         </p:spPr>
       </p:cxnSp>
-      <p:sp>
-        <p:nvSpPr>
-          <p:cNvPr id="43" name="TextBox 42"/>
+      <p:cxnSp>
+        <p:nvCxnSpPr>
+          <p:cNvPr id="43" name="Connector 42"/>
+          <p:cNvCxnSpPr/>
+          <p:nvPr/>
+        </p:nvCxnSpPr>
+        <p:spPr>
+          <a:xfrm flipV="1">
+            <a:off x="6313931" y="1624763"/>
+            <a:ext cx="103453" cy="103453"/>
+          </a:xfrm>
+          <a:prstGeom prst="line">
+            <a:avLst/>
+          </a:prstGeom>
+          <a:ln w="19050">
+            <a:solidFill>
+              <a:srgbClr val="FFD34D"/>
+            </a:solidFill>
+            <a:tailEnd type="triangle" w="med" len="med"/>
+          </a:ln>
+        </p:spPr>
+      </p:cxnSp>
+      <p:sp>
+        <p:nvSpPr>
+          <p:cNvPr id="44" name="TextBox 43"/>
           <p:cNvSpPr txBox="1"/>
           <p:nvPr/>
         </p:nvSpPr>
         <p:spPr>
           <a:xfrm>
-            <a:off x="5669280" y="1929384"/>
+            <a:off x="6035040" y="1929384"/>
             <a:ext cx="457200" cy="146304"/>
           </a:xfrm>
           <a:prstGeom prst="rect">
@@ -5392,39 +5399,8 @@
                 </a:solidFill>
                 <a:latin typeface="Calibri"/>
               </a:rPr>
-              <a:t>LED4</a:t>
-            </a:r>
-          </a:p>
-        </p:txBody>
-      </p:sp>
-      <p:sp>
-        <p:nvSpPr>
-          <p:cNvPr id="44" name="Oval 43"/>
-          <p:cNvSpPr/>
-          <p:nvPr/>
-        </p:nvSpPr>
-        <p:spPr>
-          <a:xfrm>
-            <a:off x="6108192" y="1563624"/>
-            <a:ext cx="310896" cy="310896"/>
-          </a:xfrm>
-          <a:prstGeom prst="ellipse">
-            <a:avLst/>
-          </a:prstGeom>
-          <a:solidFill>
-            <a:srgbClr val="FFD34D">
-              <a:alpha val="22000"/>
-            </a:srgbClr>
-          </a:solidFill>
-          <a:ln>
-            <a:noFill/>
-          </a:ln>
-        </p:spPr>
-        <p:txBody>
-          <a:bodyPr rtlCol="0" anchor="ctr"/>
-          <a:lstStyle/>
-          <a:p>
-            <a:pPr algn="ctr"/>
+              <a:t>LED5</a:t>
+            </a:r>
           </a:p>
         </p:txBody>
       </p:sp>
@@ -5436,18 +5412,18 @@
         </p:nvSpPr>
         <p:spPr>
           <a:xfrm rot="5400000">
-            <a:off x="6163055" y="1746504"/>
+            <a:off x="6528816" y="1746504"/>
             <a:ext cx="201168" cy="164592"/>
           </a:xfrm>
           <a:prstGeom prst="triangle">
             <a:avLst/>
           </a:prstGeom>
           <a:solidFill>
-            <a:srgbClr val="FFF1C1"/>
+            <a:srgbClr val="D9D9D9"/>
           </a:solidFill>
           <a:ln w="12700">
             <a:solidFill>
-              <a:srgbClr val="E0B25B"/>
+              <a:srgbClr val="000000"/>
             </a:solidFill>
           </a:ln>
         </p:spPr>
@@ -5467,7 +5443,7 @@
         </p:nvCxnSpPr>
         <p:spPr>
           <a:xfrm>
-            <a:off x="6345936" y="1719072"/>
+            <a:off x="6711696" y="1719072"/>
             <a:ext cx="0" cy="219456"/>
           </a:xfrm>
           <a:prstGeom prst="line">
@@ -5475,7 +5451,7 @@
           </a:prstGeom>
           <a:ln w="19050">
             <a:solidFill>
-              <a:srgbClr val="E0B25B"/>
+              <a:srgbClr val="000000"/>
             </a:solidFill>
           </a:ln>
         </p:spPr>
@@ -5488,7 +5464,7 @@
         </p:nvCxnSpPr>
         <p:spPr>
           <a:xfrm flipV="1">
-            <a:off x="6213348" y="1624763"/>
+            <a:off x="6579108" y="1624763"/>
             <a:ext cx="103452" cy="103453"/>
           </a:xfrm>
           <a:prstGeom prst="line">
@@ -5510,8 +5486,8 @@
         </p:nvCxnSpPr>
         <p:spPr>
           <a:xfrm flipV="1">
-            <a:off x="6313931" y="1624763"/>
-            <a:ext cx="103453" cy="103453"/>
+            <a:off x="6679692" y="1624763"/>
+            <a:ext cx="103452" cy="103453"/>
           </a:xfrm>
           <a:prstGeom prst="line">
             <a:avLst/>
@@ -5532,7 +5508,7 @@
         </p:nvSpPr>
         <p:spPr>
           <a:xfrm>
-            <a:off x="6035040" y="1929384"/>
+            <a:off x="6400800" y="1929384"/>
             <a:ext cx="457200" cy="146304"/>
           </a:xfrm>
           <a:prstGeom prst="rect">
@@ -5554,62 +5530,31 @@
                 </a:solidFill>
                 <a:latin typeface="Calibri"/>
               </a:rPr>
-              <a:t>LED5</a:t>
-            </a:r>
-          </a:p>
-        </p:txBody>
-      </p:sp>
-      <p:sp>
-        <p:nvSpPr>
-          <p:cNvPr id="50" name="Oval 49"/>
+              <a:t>LED6</a:t>
+            </a:r>
+          </a:p>
+        </p:txBody>
+      </p:sp>
+      <p:sp>
+        <p:nvSpPr>
+          <p:cNvPr id="50" name="Isosceles Triangle 49"/>
           <p:cNvSpPr/>
           <p:nvPr/>
         </p:nvSpPr>
         <p:spPr>
-          <a:xfrm>
-            <a:off x="6473952" y="1563624"/>
-            <a:ext cx="310896" cy="310896"/>
-          </a:xfrm>
-          <a:prstGeom prst="ellipse">
+          <a:xfrm rot="5400000">
+            <a:off x="6894576" y="1746504"/>
+            <a:ext cx="201168" cy="164592"/>
+          </a:xfrm>
+          <a:prstGeom prst="triangle">
             <a:avLst/>
           </a:prstGeom>
           <a:solidFill>
-            <a:srgbClr val="FFD34D">
-              <a:alpha val="22000"/>
-            </a:srgbClr>
-          </a:solidFill>
-          <a:ln>
-            <a:noFill/>
-          </a:ln>
-        </p:spPr>
-        <p:txBody>
-          <a:bodyPr rtlCol="0" anchor="ctr"/>
-          <a:lstStyle/>
-          <a:p>
-            <a:pPr algn="ctr"/>
-          </a:p>
-        </p:txBody>
-      </p:sp>
-      <p:sp>
-        <p:nvSpPr>
-          <p:cNvPr id="51" name="Isosceles Triangle 50"/>
-          <p:cNvSpPr/>
-          <p:nvPr/>
-        </p:nvSpPr>
-        <p:spPr>
-          <a:xfrm rot="5400000">
-            <a:off x="6528816" y="1746504"/>
-            <a:ext cx="201168" cy="164592"/>
-          </a:xfrm>
-          <a:prstGeom prst="triangle">
-            <a:avLst/>
-          </a:prstGeom>
-          <a:solidFill>
-            <a:srgbClr val="FFF1C1"/>
+            <a:srgbClr val="D9D9D9"/>
           </a:solidFill>
           <a:ln w="12700">
             <a:solidFill>
-              <a:srgbClr val="E0B25B"/>
+              <a:srgbClr val="000000"/>
             </a:solidFill>
           </a:ln>
         </p:spPr>
@@ -5621,6 +5566,27 @@
           </a:p>
         </p:txBody>
       </p:sp>
+      <p:cxnSp>
+        <p:nvCxnSpPr>
+          <p:cNvPr id="51" name="Connector 50"/>
+          <p:cNvCxnSpPr/>
+          <p:nvPr/>
+        </p:nvCxnSpPr>
+        <p:spPr>
+          <a:xfrm>
+            <a:off x="7077456" y="1719072"/>
+            <a:ext cx="0" cy="219456"/>
+          </a:xfrm>
+          <a:prstGeom prst="line">
+            <a:avLst/>
+          </a:prstGeom>
+          <a:ln w="19050">
+            <a:solidFill>
+              <a:srgbClr val="000000"/>
+            </a:solidFill>
+          </a:ln>
+        </p:spPr>
+      </p:cxnSp>
       <p:cxnSp>
         <p:nvCxnSpPr>
           <p:cNvPr id="52" name="Connector 51"/>
@@ -5628,17 +5594,18 @@
           <p:nvPr/>
         </p:nvCxnSpPr>
         <p:spPr>
-          <a:xfrm>
-            <a:off x="6711696" y="1719072"/>
-            <a:ext cx="0" cy="219456"/>
+          <a:xfrm flipV="1">
+            <a:off x="6944868" y="1624763"/>
+            <a:ext cx="103452" cy="103453"/>
           </a:xfrm>
           <a:prstGeom prst="line">
             <a:avLst/>
           </a:prstGeom>
           <a:ln w="19050">
             <a:solidFill>
-              <a:srgbClr val="E0B25B"/>
-            </a:solidFill>
+              <a:srgbClr val="FFD34D"/>
+            </a:solidFill>
+            <a:tailEnd type="triangle" w="med" len="med"/>
           </a:ln>
         </p:spPr>
       </p:cxnSp>
@@ -5650,7 +5617,7 @@
         </p:nvCxnSpPr>
         <p:spPr>
           <a:xfrm flipV="1">
-            <a:off x="6579108" y="1624763"/>
+            <a:off x="7045452" y="1624763"/>
             <a:ext cx="103452" cy="103453"/>
           </a:xfrm>
           <a:prstGeom prst="line">
@@ -5661,18 +5628,105 @@
               <a:srgbClr val="FFD34D"/>
             </a:solidFill>
             <a:tailEnd type="triangle" w="med" len="med"/>
+          </a:ln>
+        </p:spPr>
+      </p:cxnSp>
+      <p:sp>
+        <p:nvSpPr>
+          <p:cNvPr id="54" name="TextBox 53"/>
+          <p:cNvSpPr txBox="1"/>
+          <p:nvPr/>
+        </p:nvSpPr>
+        <p:spPr>
+          <a:xfrm>
+            <a:off x="6766560" y="1929384"/>
+            <a:ext cx="457200" cy="146304"/>
+          </a:xfrm>
+          <a:prstGeom prst="rect">
+            <a:avLst/>
+          </a:prstGeom>
+          <a:noFill/>
+        </p:spPr>
+        <p:txBody>
+          <a:bodyPr wrap="square" lIns="0" rIns="0" tIns="0" bIns="0" anchor="ctr">
+            <a:spAutoFit/>
+          </a:bodyPr>
+          <a:lstStyle/>
+          <a:p>
+            <a:pPr algn="ctr"/>
+            <a:r>
+              <a:rPr sz="700" b="0" i="0">
+                <a:solidFill>
+                  <a:srgbClr val="EAF0F6"/>
+                </a:solidFill>
+                <a:latin typeface="Calibri"/>
+              </a:rPr>
+              <a:t>LED7</a:t>
+            </a:r>
+          </a:p>
+        </p:txBody>
+      </p:sp>
+      <p:sp>
+        <p:nvSpPr>
+          <p:cNvPr id="55" name="Isosceles Triangle 54"/>
+          <p:cNvSpPr/>
+          <p:nvPr/>
+        </p:nvSpPr>
+        <p:spPr>
+          <a:xfrm rot="5400000">
+            <a:off x="7260336" y="1746504"/>
+            <a:ext cx="201168" cy="164592"/>
+          </a:xfrm>
+          <a:prstGeom prst="triangle">
+            <a:avLst/>
+          </a:prstGeom>
+          <a:solidFill>
+            <a:srgbClr val="D9D9D9"/>
+          </a:solidFill>
+          <a:ln w="12700">
+            <a:solidFill>
+              <a:srgbClr val="000000"/>
+            </a:solidFill>
+          </a:ln>
+        </p:spPr>
+        <p:txBody>
+          <a:bodyPr rtlCol="0" anchor="ctr"/>
+          <a:lstStyle/>
+          <a:p>
+            <a:pPr algn="ctr"/>
+          </a:p>
+        </p:txBody>
+      </p:sp>
+      <p:cxnSp>
+        <p:nvCxnSpPr>
+          <p:cNvPr id="56" name="Connector 55"/>
+          <p:cNvCxnSpPr/>
+          <p:nvPr/>
+        </p:nvCxnSpPr>
+        <p:spPr>
+          <a:xfrm>
+            <a:off x="7443216" y="1719072"/>
+            <a:ext cx="0" cy="219456"/>
+          </a:xfrm>
+          <a:prstGeom prst="line">
+            <a:avLst/>
+          </a:prstGeom>
+          <a:ln w="19050">
+            <a:solidFill>
+              <a:srgbClr val="000000"/>
+            </a:solidFill>
           </a:ln>
         </p:spPr>
       </p:cxnSp>
       <p:cxnSp>
         <p:nvCxnSpPr>
-          <p:cNvPr id="54" name="Connector 53"/>
+          <p:cNvPr id="57" name="Connector 56"/>
           <p:cNvCxnSpPr/>
           <p:nvPr/>
         </p:nvCxnSpPr>
         <p:spPr>
           <a:xfrm flipV="1">
-            <a:off x="6679692" y="1624763"/>
+            <a:off x="7310628" y="1624763"/>
             <a:ext cx="103452" cy="103453"/>
           </a:xfrm>
           <a:prstGeom prst="line">
@@ -5686,103 +5740,6 @@
           </a:ln>
         </p:spPr>
       </p:cxnSp>
-      <p:sp>
-        <p:nvSpPr>
-          <p:cNvPr id="55" name="TextBox 54"/>
-          <p:cNvSpPr txBox="1"/>
-          <p:nvPr/>
-        </p:nvSpPr>
-        <p:spPr>
-          <a:xfrm>
-            <a:off x="6400800" y="1929384"/>
-            <a:ext cx="457200" cy="146304"/>
-          </a:xfrm>
-          <a:prstGeom prst="rect">
-            <a:avLst/>
-          </a:prstGeom>
-          <a:noFill/>
-        </p:spPr>
-        <p:txBody>
-          <a:bodyPr wrap="square" lIns="0" rIns="0" tIns="0" bIns="0" anchor="ctr">
-            <a:spAutoFit/>
-          </a:bodyPr>
-          <a:lstStyle/>
-          <a:p>
-            <a:pPr algn="ctr"/>
-            <a:r>
-              <a:rPr sz="700" b="0" i="0">
-                <a:solidFill>
-                  <a:srgbClr val="EAF0F6"/>
-                </a:solidFill>
-                <a:latin typeface="Calibri"/>
-              </a:rPr>
-              <a:t>LED6</a:t>
-            </a:r>
-          </a:p>
-        </p:txBody>
-      </p:sp>
-      <p:sp>
-        <p:nvSpPr>
-          <p:cNvPr id="56" name="Oval 55"/>
-          <p:cNvSpPr/>
-          <p:nvPr/>
-        </p:nvSpPr>
-        <p:spPr>
-          <a:xfrm>
-            <a:off x="6839712" y="1563624"/>
-            <a:ext cx="310896" cy="310896"/>
-          </a:xfrm>
-          <a:prstGeom prst="ellipse">
-            <a:avLst/>
-          </a:prstGeom>
-          <a:solidFill>
-            <a:srgbClr val="FFD34D">
-              <a:alpha val="22000"/>
-            </a:srgbClr>
-          </a:solidFill>
-          <a:ln>
-            <a:noFill/>
-          </a:ln>
-        </p:spPr>
-        <p:txBody>
-          <a:bodyPr rtlCol="0" anchor="ctr"/>
-          <a:lstStyle/>
-          <a:p>
-            <a:pPr algn="ctr"/>
-          </a:p>
-        </p:txBody>
-      </p:sp>
-      <p:sp>
-        <p:nvSpPr>
-          <p:cNvPr id="57" name="Isosceles Triangle 56"/>
-          <p:cNvSpPr/>
-          <p:nvPr/>
-        </p:nvSpPr>
-        <p:spPr>
-          <a:xfrm rot="5400000">
-            <a:off x="6894576" y="1746504"/>
-            <a:ext cx="201168" cy="164592"/>
-          </a:xfrm>
-          <a:prstGeom prst="triangle">
-            <a:avLst/>
-          </a:prstGeom>
-          <a:solidFill>
-            <a:srgbClr val="FFF1C1"/>
-          </a:solidFill>
-          <a:ln w="12700">
-            <a:solidFill>
-              <a:srgbClr val="E0B25B"/>
-            </a:solidFill>
-          </a:ln>
-        </p:spPr>
-        <p:txBody>
-          <a:bodyPr rtlCol="0" anchor="ctr"/>
-          <a:lstStyle/>
-          <a:p>
-            <a:pPr algn="ctr"/>
-          </a:p>
-        </p:txBody>
-      </p:sp>
       <p:cxnSp>
         <p:nvCxnSpPr>
           <p:cNvPr id="58" name="Connector 57"/>
@@ -5790,29 +5747,117 @@
           <p:nvPr/>
         </p:nvCxnSpPr>
         <p:spPr>
-          <a:xfrm>
-            <a:off x="7077456" y="1719072"/>
-            <a:ext cx="0" cy="219456"/>
+          <a:xfrm flipV="1">
+            <a:off x="7411212" y="1624763"/>
+            <a:ext cx="103452" cy="103453"/>
           </a:xfrm>
           <a:prstGeom prst="line">
             <a:avLst/>
           </a:prstGeom>
           <a:ln w="19050">
             <a:solidFill>
-              <a:srgbClr val="E0B25B"/>
+              <a:srgbClr val="FFD34D"/>
+            </a:solidFill>
+            <a:tailEnd type="triangle" w="med" len="med"/>
+          </a:ln>
+        </p:spPr>
+      </p:cxnSp>
+      <p:sp>
+        <p:nvSpPr>
+          <p:cNvPr id="59" name="TextBox 58"/>
+          <p:cNvSpPr txBox="1"/>
+          <p:nvPr/>
+        </p:nvSpPr>
+        <p:spPr>
+          <a:xfrm>
+            <a:off x="7132320" y="1929384"/>
+            <a:ext cx="457200" cy="146304"/>
+          </a:xfrm>
+          <a:prstGeom prst="rect">
+            <a:avLst/>
+          </a:prstGeom>
+          <a:noFill/>
+        </p:spPr>
+        <p:txBody>
+          <a:bodyPr wrap="square" lIns="0" rIns="0" tIns="0" bIns="0" anchor="ctr">
+            <a:spAutoFit/>
+          </a:bodyPr>
+          <a:lstStyle/>
+          <a:p>
+            <a:pPr algn="ctr"/>
+            <a:r>
+              <a:rPr sz="700" b="0" i="0">
+                <a:solidFill>
+                  <a:srgbClr val="EAF0F6"/>
+                </a:solidFill>
+                <a:latin typeface="Calibri"/>
+              </a:rPr>
+              <a:t>LED8</a:t>
+            </a:r>
+          </a:p>
+        </p:txBody>
+      </p:sp>
+      <p:sp>
+        <p:nvSpPr>
+          <p:cNvPr id="60" name="Isosceles Triangle 59"/>
+          <p:cNvSpPr/>
+          <p:nvPr/>
+        </p:nvSpPr>
+        <p:spPr>
+          <a:xfrm rot="10800000">
+            <a:off x="7854696" y="2386584"/>
+            <a:ext cx="201168" cy="164592"/>
+          </a:xfrm>
+          <a:prstGeom prst="triangle">
+            <a:avLst/>
+          </a:prstGeom>
+          <a:solidFill>
+            <a:srgbClr val="D9D9D9"/>
+          </a:solidFill>
+          <a:ln w="12700">
+            <a:solidFill>
+              <a:srgbClr val="000000"/>
+            </a:solidFill>
+          </a:ln>
+        </p:spPr>
+        <p:txBody>
+          <a:bodyPr rtlCol="0" anchor="ctr"/>
+          <a:lstStyle/>
+          <a:p>
+            <a:pPr algn="ctr"/>
+          </a:p>
+        </p:txBody>
+      </p:sp>
+      <p:cxnSp>
+        <p:nvCxnSpPr>
+          <p:cNvPr id="61" name="Connector 60"/>
+          <p:cNvCxnSpPr/>
+          <p:nvPr/>
+        </p:nvCxnSpPr>
+        <p:spPr>
+          <a:xfrm flipH="1">
+            <a:off x="7845552" y="2551176"/>
+            <a:ext cx="219456" cy="0"/>
+          </a:xfrm>
+          <a:prstGeom prst="line">
+            <a:avLst/>
+          </a:prstGeom>
+          <a:ln w="19050">
+            <a:solidFill>
+              <a:srgbClr val="000000"/>
             </a:solidFill>
           </a:ln>
         </p:spPr>
       </p:cxnSp>
       <p:cxnSp>
         <p:nvCxnSpPr>
-          <p:cNvPr id="59" name="Connector 58"/>
+          <p:cNvPr id="62" name="Connector 61"/>
           <p:cNvCxnSpPr/>
           <p:nvPr/>
         </p:nvCxnSpPr>
         <p:spPr>
           <a:xfrm flipV="1">
-            <a:off x="6944868" y="1624763"/>
+            <a:off x="8055864" y="2315135"/>
             <a:ext cx="103452" cy="103453"/>
           </a:xfrm>
           <a:prstGeom prst="line">
@@ -5828,13 +5873,13 @@
       </p:cxnSp>
       <p:cxnSp>
         <p:nvCxnSpPr>
-          <p:cNvPr id="60" name="Connector 59"/>
+          <p:cNvPr id="63" name="Connector 62"/>
           <p:cNvCxnSpPr/>
           <p:nvPr/>
         </p:nvCxnSpPr>
         <p:spPr>
           <a:xfrm flipV="1">
-            <a:off x="7045452" y="1624763"/>
+            <a:off x="8055864" y="2415719"/>
             <a:ext cx="103452" cy="103453"/>
           </a:xfrm>
           <a:prstGeom prst="line">
@@ -5850,13 +5895,13 @@
       </p:cxnSp>
       <p:sp>
         <p:nvSpPr>
-          <p:cNvPr id="61" name="TextBox 60"/>
+          <p:cNvPr id="64" name="TextBox 63"/>
           <p:cNvSpPr txBox="1"/>
           <p:nvPr/>
         </p:nvSpPr>
         <p:spPr>
           <a:xfrm>
-            <a:off x="6766560" y="1929384"/>
+            <a:off x="7552944" y="2395728"/>
             <a:ext cx="457200" cy="146304"/>
           </a:xfrm>
           <a:prstGeom prst="rect">
@@ -5878,62 +5923,31 @@
                 </a:solidFill>
                 <a:latin typeface="Calibri"/>
               </a:rPr>
-              <a:t>LED7</a:t>
-            </a:r>
-          </a:p>
-        </p:txBody>
-      </p:sp>
-      <p:sp>
-        <p:nvSpPr>
-          <p:cNvPr id="62" name="Oval 61"/>
+              <a:t>LED1</a:t>
+            </a:r>
+          </a:p>
+        </p:txBody>
+      </p:sp>
+      <p:sp>
+        <p:nvSpPr>
+          <p:cNvPr id="65" name="Isosceles Triangle 64"/>
           <p:cNvSpPr/>
           <p:nvPr/>
         </p:nvSpPr>
         <p:spPr>
-          <a:xfrm>
-            <a:off x="7205472" y="1563624"/>
-            <a:ext cx="310896" cy="310896"/>
-          </a:xfrm>
-          <a:prstGeom prst="ellipse">
+          <a:xfrm rot="10800000">
+            <a:off x="7854696" y="2752344"/>
+            <a:ext cx="201168" cy="164592"/>
+          </a:xfrm>
+          <a:prstGeom prst="triangle">
             <a:avLst/>
           </a:prstGeom>
           <a:solidFill>
-            <a:srgbClr val="FFD34D">
-              <a:alpha val="22000"/>
-            </a:srgbClr>
-          </a:solidFill>
-          <a:ln>
-            <a:noFill/>
-          </a:ln>
-        </p:spPr>
-        <p:txBody>
-          <a:bodyPr rtlCol="0" anchor="ctr"/>
-          <a:lstStyle/>
-          <a:p>
-            <a:pPr algn="ctr"/>
-          </a:p>
-        </p:txBody>
-      </p:sp>
-      <p:sp>
-        <p:nvSpPr>
-          <p:cNvPr id="63" name="Isosceles Triangle 62"/>
-          <p:cNvSpPr/>
-          <p:nvPr/>
-        </p:nvSpPr>
-        <p:spPr>
-          <a:xfrm rot="5400000">
-            <a:off x="7260336" y="1746504"/>
-            <a:ext cx="201168" cy="164592"/>
-          </a:xfrm>
-          <a:prstGeom prst="triangle">
-            <a:avLst/>
-          </a:prstGeom>
-          <a:solidFill>
-            <a:srgbClr val="FFF1C1"/>
+            <a:srgbClr val="D9D9D9"/>
           </a:solidFill>
           <a:ln w="12700">
             <a:solidFill>
-              <a:srgbClr val="E0B25B"/>
+              <a:srgbClr val="000000"/>
             </a:solidFill>
           </a:ln>
         </p:spPr>
@@ -5945,49 +5959,6 @@
           </a:p>
         </p:txBody>
       </p:sp>
-      <p:cxnSp>
-        <p:nvCxnSpPr>
-          <p:cNvPr id="64" name="Connector 63"/>
-          <p:cNvCxnSpPr/>
-          <p:nvPr/>
-        </p:nvCxnSpPr>
-        <p:spPr>
-          <a:xfrm>
-            <a:off x="7443216" y="1719072"/>
-            <a:ext cx="0" cy="219456"/>
-          </a:xfrm>
-          <a:prstGeom prst="line">
-            <a:avLst/>
-          </a:prstGeom>
-          <a:ln w="19050">
-            <a:solidFill>
-              <a:srgbClr val="E0B25B"/>
-            </a:solidFill>
-          </a:ln>
-        </p:spPr>
-      </p:cxnSp>
-      <p:cxnSp>
-        <p:nvCxnSpPr>
-          <p:cNvPr id="65" name="Connector 64"/>
-          <p:cNvCxnSpPr/>
-          <p:nvPr/>
-        </p:nvCxnSpPr>
-        <p:spPr>
-          <a:xfrm flipV="1">
-            <a:off x="7310628" y="1624763"/>
-            <a:ext cx="103452" cy="103453"/>
-          </a:xfrm>
-          <a:prstGeom prst="line">
-            <a:avLst/>
-          </a:prstGeom>
-          <a:ln w="19050">
-            <a:solidFill>
-              <a:srgbClr val="FFD34D"/>
-            </a:solidFill>
-            <a:tailEnd type="triangle" w="med" len="med"/>
-          </a:ln>
-        </p:spPr>
-      </p:cxnSp>
       <p:cxnSp>
         <p:nvCxnSpPr>
           <p:cNvPr id="66" name="Connector 65"/>
@@ -5995,8 +5966,29 @@
           <p:nvPr/>
         </p:nvCxnSpPr>
         <p:spPr>
+          <a:xfrm flipH="1">
+            <a:off x="7845552" y="2916936"/>
+            <a:ext cx="219456" cy="0"/>
+          </a:xfrm>
+          <a:prstGeom prst="line">
+            <a:avLst/>
+          </a:prstGeom>
+          <a:ln w="19050">
+            <a:solidFill>
+              <a:srgbClr val="000000"/>
+            </a:solidFill>
+          </a:ln>
+        </p:spPr>
+      </p:cxnSp>
+      <p:cxnSp>
+        <p:nvCxnSpPr>
+          <p:cNvPr id="67" name="Connector 66"/>
+          <p:cNvCxnSpPr/>
+          <p:nvPr/>
+        </p:nvCxnSpPr>
+        <p:spPr>
           <a:xfrm flipV="1">
-            <a:off x="7411212" y="1624763"/>
+            <a:off x="8055864" y="2680895"/>
             <a:ext cx="103452" cy="103453"/>
           </a:xfrm>
           <a:prstGeom prst="line">
@@ -6010,15 +6002,37 @@
           </a:ln>
         </p:spPr>
       </p:cxnSp>
-      <p:sp>
-        <p:nvSpPr>
-          <p:cNvPr id="67" name="TextBox 66"/>
+      <p:cxnSp>
+        <p:nvCxnSpPr>
+          <p:cNvPr id="68" name="Connector 67"/>
+          <p:cNvCxnSpPr/>
+          <p:nvPr/>
+        </p:nvCxnSpPr>
+        <p:spPr>
+          <a:xfrm flipV="1">
+            <a:off x="8055864" y="2781479"/>
+            <a:ext cx="103452" cy="103453"/>
+          </a:xfrm>
+          <a:prstGeom prst="line">
+            <a:avLst/>
+          </a:prstGeom>
+          <a:ln w="19050">
+            <a:solidFill>
+              <a:srgbClr val="FFD34D"/>
+            </a:solidFill>
+            <a:tailEnd type="triangle" w="med" len="med"/>
+          </a:ln>
+        </p:spPr>
+      </p:cxnSp>
+      <p:sp>
+        <p:nvSpPr>
+          <p:cNvPr id="69" name="TextBox 68"/>
           <p:cNvSpPr txBox="1"/>
           <p:nvPr/>
         </p:nvSpPr>
         <p:spPr>
           <a:xfrm>
-            <a:off x="7132320" y="1929384"/>
+            <a:off x="7552944" y="2761488"/>
             <a:ext cx="457200" cy="146304"/>
           </a:xfrm>
           <a:prstGeom prst="rect">
@@ -6040,62 +6054,31 @@
                 </a:solidFill>
                 <a:latin typeface="Calibri"/>
               </a:rPr>
-              <a:t>LED8</a:t>
-            </a:r>
-          </a:p>
-        </p:txBody>
-      </p:sp>
-      <p:sp>
-        <p:nvSpPr>
-          <p:cNvPr id="68" name="Oval 67"/>
+              <a:t>LED2</a:t>
+            </a:r>
+          </a:p>
+        </p:txBody>
+      </p:sp>
+      <p:sp>
+        <p:nvSpPr>
+          <p:cNvPr id="70" name="Isosceles Triangle 69"/>
           <p:cNvSpPr/>
           <p:nvPr/>
         </p:nvSpPr>
         <p:spPr>
-          <a:xfrm>
-            <a:off x="7909560" y="2313432"/>
-            <a:ext cx="310896" cy="310896"/>
-          </a:xfrm>
-          <a:prstGeom prst="ellipse">
+          <a:xfrm rot="10800000">
+            <a:off x="7854696" y="3118104"/>
+            <a:ext cx="201168" cy="164592"/>
+          </a:xfrm>
+          <a:prstGeom prst="triangle">
             <a:avLst/>
           </a:prstGeom>
           <a:solidFill>
-            <a:srgbClr val="FFD34D">
-              <a:alpha val="22000"/>
-            </a:srgbClr>
-          </a:solidFill>
-          <a:ln>
-            <a:noFill/>
-          </a:ln>
-        </p:spPr>
-        <p:txBody>
-          <a:bodyPr rtlCol="0" anchor="ctr"/>
-          <a:lstStyle/>
-          <a:p>
-            <a:pPr algn="ctr"/>
-          </a:p>
-        </p:txBody>
-      </p:sp>
-      <p:sp>
-        <p:nvSpPr>
-          <p:cNvPr id="69" name="Isosceles Triangle 68"/>
-          <p:cNvSpPr/>
-          <p:nvPr/>
-        </p:nvSpPr>
-        <p:spPr>
-          <a:xfrm rot="10800000">
-            <a:off x="7854696" y="2386584"/>
-            <a:ext cx="201168" cy="164592"/>
-          </a:xfrm>
-          <a:prstGeom prst="triangle">
-            <a:avLst/>
-          </a:prstGeom>
-          <a:solidFill>
-            <a:srgbClr val="FFF1C1"/>
+            <a:srgbClr val="D9D9D9"/>
           </a:solidFill>
           <a:ln w="12700">
             <a:solidFill>
-              <a:srgbClr val="E0B25B"/>
+              <a:srgbClr val="000000"/>
             </a:solidFill>
           </a:ln>
         </p:spPr>
@@ -6107,27 +6090,6 @@
           </a:p>
         </p:txBody>
       </p:sp>
-      <p:cxnSp>
-        <p:nvCxnSpPr>
-          <p:cNvPr id="70" name="Connector 69"/>
-          <p:cNvCxnSpPr/>
-          <p:nvPr/>
-        </p:nvCxnSpPr>
-        <p:spPr>
-          <a:xfrm flipH="1">
-            <a:off x="7845552" y="2551176"/>
-            <a:ext cx="219456" cy="0"/>
-          </a:xfrm>
-          <a:prstGeom prst="line">
-            <a:avLst/>
-          </a:prstGeom>
-          <a:ln w="19050">
-            <a:solidFill>
-              <a:srgbClr val="E0B25B"/>
-            </a:solidFill>
-          </a:ln>
-        </p:spPr>
-      </p:cxnSp>
       <p:cxnSp>
         <p:nvCxnSpPr>
           <p:cNvPr id="71" name="Connector 70"/>
@@ -6135,18 +6097,17 @@
           <p:nvPr/>
         </p:nvCxnSpPr>
         <p:spPr>
-          <a:xfrm flipV="1">
-            <a:off x="8055864" y="2315135"/>
-            <a:ext cx="103452" cy="103453"/>
+          <a:xfrm flipH="1">
+            <a:off x="7845552" y="3282696"/>
+            <a:ext cx="219456" cy="0"/>
           </a:xfrm>
           <a:prstGeom prst="line">
             <a:avLst/>
           </a:prstGeom>
           <a:ln w="19050">
             <a:solidFill>
-              <a:srgbClr val="FFD34D"/>
-            </a:solidFill>
-            <a:tailEnd type="triangle" w="med" len="med"/>
+              <a:srgbClr val="000000"/>
+            </a:solidFill>
           </a:ln>
         </p:spPr>
       </p:cxnSp>
@@ -6158,7 +6119,7 @@
         </p:nvCxnSpPr>
         <p:spPr>
           <a:xfrm flipV="1">
-            <a:off x="8055864" y="2415719"/>
+            <a:off x="8055864" y="3046655"/>
             <a:ext cx="103452" cy="103453"/>
           </a:xfrm>
           <a:prstGeom prst="line">
@@ -6172,15 +6133,37 @@
           </a:ln>
         </p:spPr>
       </p:cxnSp>
-      <p:sp>
-        <p:nvSpPr>
-          <p:cNvPr id="73" name="TextBox 72"/>
+      <p:cxnSp>
+        <p:nvCxnSpPr>
+          <p:cNvPr id="73" name="Connector 72"/>
+          <p:cNvCxnSpPr/>
+          <p:nvPr/>
+        </p:nvCxnSpPr>
+        <p:spPr>
+          <a:xfrm flipV="1">
+            <a:off x="8055864" y="3147239"/>
+            <a:ext cx="103452" cy="103453"/>
+          </a:xfrm>
+          <a:prstGeom prst="line">
+            <a:avLst/>
+          </a:prstGeom>
+          <a:ln w="19050">
+            <a:solidFill>
+              <a:srgbClr val="FFD34D"/>
+            </a:solidFill>
+            <a:tailEnd type="triangle" w="med" len="med"/>
+          </a:ln>
+        </p:spPr>
+      </p:cxnSp>
+      <p:sp>
+        <p:nvSpPr>
+          <p:cNvPr id="74" name="TextBox 73"/>
           <p:cNvSpPr txBox="1"/>
           <p:nvPr/>
         </p:nvSpPr>
         <p:spPr>
           <a:xfrm>
-            <a:off x="7552944" y="2395728"/>
+            <a:off x="7552944" y="3127248"/>
             <a:ext cx="457200" cy="146304"/>
           </a:xfrm>
           <a:prstGeom prst="rect">
@@ -6202,39 +6185,8 @@
                 </a:solidFill>
                 <a:latin typeface="Calibri"/>
               </a:rPr>
-              <a:t>LED1</a:t>
-            </a:r>
-          </a:p>
-        </p:txBody>
-      </p:sp>
-      <p:sp>
-        <p:nvSpPr>
-          <p:cNvPr id="74" name="Oval 73"/>
-          <p:cNvSpPr/>
-          <p:nvPr/>
-        </p:nvSpPr>
-        <p:spPr>
-          <a:xfrm>
-            <a:off x="7909560" y="2679192"/>
-            <a:ext cx="310896" cy="310896"/>
-          </a:xfrm>
-          <a:prstGeom prst="ellipse">
-            <a:avLst/>
-          </a:prstGeom>
-          <a:solidFill>
-            <a:srgbClr val="FFD34D">
-              <a:alpha val="22000"/>
-            </a:srgbClr>
-          </a:solidFill>
-          <a:ln>
-            <a:noFill/>
-          </a:ln>
-        </p:spPr>
-        <p:txBody>
-          <a:bodyPr rtlCol="0" anchor="ctr"/>
-          <a:lstStyle/>
-          <a:p>
-            <a:pPr algn="ctr"/>
+              <a:t>LED3</a:t>
+            </a:r>
           </a:p>
         </p:txBody>
       </p:sp>
@@ -6246,18 +6198,18 @@
         </p:nvSpPr>
         <p:spPr>
           <a:xfrm rot="10800000">
-            <a:off x="7854696" y="2752344"/>
+            <a:off x="7854696" y="3483864"/>
             <a:ext cx="201168" cy="164592"/>
           </a:xfrm>
           <a:prstGeom prst="triangle">
             <a:avLst/>
           </a:prstGeom>
           <a:solidFill>
-            <a:srgbClr val="FFF1C1"/>
+            <a:srgbClr val="D9D9D9"/>
           </a:solidFill>
           <a:ln w="12700">
             <a:solidFill>
-              <a:srgbClr val="E0B25B"/>
+              <a:srgbClr val="000000"/>
             </a:solidFill>
           </a:ln>
         </p:spPr>
@@ -6277,7 +6229,7 @@
         </p:nvCxnSpPr>
         <p:spPr>
           <a:xfrm flipH="1">
-            <a:off x="7845552" y="2916936"/>
+            <a:off x="7845552" y="3648456"/>
             <a:ext cx="219456" cy="0"/>
           </a:xfrm>
           <a:prstGeom prst="line">
@@ -6285,7 +6237,7 @@
           </a:prstGeom>
           <a:ln w="19050">
             <a:solidFill>
-              <a:srgbClr val="E0B25B"/>
+              <a:srgbClr val="000000"/>
             </a:solidFill>
           </a:ln>
         </p:spPr>
@@ -6298,7 +6250,7 @@
         </p:nvCxnSpPr>
         <p:spPr>
           <a:xfrm flipV="1">
-            <a:off x="8055864" y="2680895"/>
+            <a:off x="8055864" y="3412415"/>
             <a:ext cx="103452" cy="103453"/>
           </a:xfrm>
           <a:prstGeom prst="line">
@@ -6320,7 +6272,7 @@
         </p:nvCxnSpPr>
         <p:spPr>
           <a:xfrm flipV="1">
-            <a:off x="8055864" y="2781479"/>
+            <a:off x="8055864" y="3512999"/>
             <a:ext cx="103452" cy="103453"/>
           </a:xfrm>
           <a:prstGeom prst="line">
@@ -6342,7 +6294,7 @@
         </p:nvSpPr>
         <p:spPr>
           <a:xfrm>
-            <a:off x="7552944" y="2761488"/>
+            <a:off x="7552944" y="3493008"/>
             <a:ext cx="457200" cy="146304"/>
           </a:xfrm>
           <a:prstGeom prst="rect">
@@ -6364,62 +6316,31 @@
                 </a:solidFill>
                 <a:latin typeface="Calibri"/>
               </a:rPr>
-              <a:t>LED2</a:t>
-            </a:r>
-          </a:p>
-        </p:txBody>
-      </p:sp>
-      <p:sp>
-        <p:nvSpPr>
-          <p:cNvPr id="80" name="Oval 79"/>
+              <a:t>LED4</a:t>
+            </a:r>
+          </a:p>
+        </p:txBody>
+      </p:sp>
+      <p:sp>
+        <p:nvSpPr>
+          <p:cNvPr id="80" name="Isosceles Triangle 79"/>
           <p:cNvSpPr/>
           <p:nvPr/>
         </p:nvSpPr>
         <p:spPr>
-          <a:xfrm>
-            <a:off x="7909560" y="3044952"/>
-            <a:ext cx="310896" cy="310896"/>
-          </a:xfrm>
-          <a:prstGeom prst="ellipse">
+          <a:xfrm rot="10800000">
+            <a:off x="7854696" y="3849624"/>
+            <a:ext cx="201168" cy="164592"/>
+          </a:xfrm>
+          <a:prstGeom prst="triangle">
             <a:avLst/>
           </a:prstGeom>
           <a:solidFill>
-            <a:srgbClr val="FFD34D">
-              <a:alpha val="22000"/>
-            </a:srgbClr>
-          </a:solidFill>
-          <a:ln>
-            <a:noFill/>
-          </a:ln>
-        </p:spPr>
-        <p:txBody>
-          <a:bodyPr rtlCol="0" anchor="ctr"/>
-          <a:lstStyle/>
-          <a:p>
-            <a:pPr algn="ctr"/>
-          </a:p>
-        </p:txBody>
-      </p:sp>
-      <p:sp>
-        <p:nvSpPr>
-          <p:cNvPr id="81" name="Isosceles Triangle 80"/>
-          <p:cNvSpPr/>
-          <p:nvPr/>
-        </p:nvSpPr>
-        <p:spPr>
-          <a:xfrm rot="10800000">
-            <a:off x="7854696" y="3118104"/>
-            <a:ext cx="201168" cy="164592"/>
-          </a:xfrm>
-          <a:prstGeom prst="triangle">
-            <a:avLst/>
-          </a:prstGeom>
-          <a:solidFill>
-            <a:srgbClr val="FFF1C1"/>
+            <a:srgbClr val="D9D9D9"/>
           </a:solidFill>
           <a:ln w="12700">
             <a:solidFill>
-              <a:srgbClr val="E0B25B"/>
+              <a:srgbClr val="000000"/>
             </a:solidFill>
           </a:ln>
         </p:spPr>
@@ -6431,6 +6352,27 @@
           </a:p>
         </p:txBody>
       </p:sp>
+      <p:cxnSp>
+        <p:nvCxnSpPr>
+          <p:cNvPr id="81" name="Connector 80"/>
+          <p:cNvCxnSpPr/>
+          <p:nvPr/>
+        </p:nvCxnSpPr>
+        <p:spPr>
+          <a:xfrm flipH="1">
+            <a:off x="7845552" y="4014216"/>
+            <a:ext cx="219456" cy="0"/>
+          </a:xfrm>
+          <a:prstGeom prst="line">
+            <a:avLst/>
+          </a:prstGeom>
+          <a:ln w="19050">
+            <a:solidFill>
+              <a:srgbClr val="000000"/>
+            </a:solidFill>
+          </a:ln>
+        </p:spPr>
+      </p:cxnSp>
       <p:cxnSp>
         <p:nvCxnSpPr>
           <p:cNvPr id="82" name="Connector 81"/>
@@ -6438,17 +6380,18 @@
           <p:nvPr/>
         </p:nvCxnSpPr>
         <p:spPr>
-          <a:xfrm flipH="1">
-            <a:off x="7845552" y="3282696"/>
-            <a:ext cx="219456" cy="0"/>
+          <a:xfrm flipV="1">
+            <a:off x="8055864" y="3778175"/>
+            <a:ext cx="103452" cy="103453"/>
           </a:xfrm>
           <a:prstGeom prst="line">
             <a:avLst/>
           </a:prstGeom>
           <a:ln w="19050">
             <a:solidFill>
-              <a:srgbClr val="E0B25B"/>
-            </a:solidFill>
+              <a:srgbClr val="FFD34D"/>
+            </a:solidFill>
+            <a:tailEnd type="triangle" w="med" len="med"/>
           </a:ln>
         </p:spPr>
       </p:cxnSp>
@@ -6460,7 +6403,7 @@
         </p:nvCxnSpPr>
         <p:spPr>
           <a:xfrm flipV="1">
-            <a:off x="8055864" y="3046655"/>
+            <a:off x="8055864" y="3878759"/>
             <a:ext cx="103452" cy="103453"/>
           </a:xfrm>
           <a:prstGeom prst="line">
@@ -6471,18 +6414,105 @@
               <a:srgbClr val="FFD34D"/>
             </a:solidFill>
             <a:tailEnd type="triangle" w="med" len="med"/>
+          </a:ln>
+        </p:spPr>
+      </p:cxnSp>
+      <p:sp>
+        <p:nvSpPr>
+          <p:cNvPr id="84" name="TextBox 83"/>
+          <p:cNvSpPr txBox="1"/>
+          <p:nvPr/>
+        </p:nvSpPr>
+        <p:spPr>
+          <a:xfrm>
+            <a:off x="7552944" y="3858768"/>
+            <a:ext cx="457200" cy="146304"/>
+          </a:xfrm>
+          <a:prstGeom prst="rect">
+            <a:avLst/>
+          </a:prstGeom>
+          <a:noFill/>
+        </p:spPr>
+        <p:txBody>
+          <a:bodyPr wrap="square" lIns="0" rIns="0" tIns="0" bIns="0" anchor="ctr">
+            <a:spAutoFit/>
+          </a:bodyPr>
+          <a:lstStyle/>
+          <a:p>
+            <a:pPr algn="ctr"/>
+            <a:r>
+              <a:rPr sz="700" b="0" i="0">
+                <a:solidFill>
+                  <a:srgbClr val="EAF0F6"/>
+                </a:solidFill>
+                <a:latin typeface="Calibri"/>
+              </a:rPr>
+              <a:t>LED5</a:t>
+            </a:r>
+          </a:p>
+        </p:txBody>
+      </p:sp>
+      <p:sp>
+        <p:nvSpPr>
+          <p:cNvPr id="85" name="Isosceles Triangle 84"/>
+          <p:cNvSpPr/>
+          <p:nvPr/>
+        </p:nvSpPr>
+        <p:spPr>
+          <a:xfrm rot="10800000">
+            <a:off x="7854696" y="4215384"/>
+            <a:ext cx="201168" cy="164592"/>
+          </a:xfrm>
+          <a:prstGeom prst="triangle">
+            <a:avLst/>
+          </a:prstGeom>
+          <a:solidFill>
+            <a:srgbClr val="D9D9D9"/>
+          </a:solidFill>
+          <a:ln w="12700">
+            <a:solidFill>
+              <a:srgbClr val="000000"/>
+            </a:solidFill>
+          </a:ln>
+        </p:spPr>
+        <p:txBody>
+          <a:bodyPr rtlCol="0" anchor="ctr"/>
+          <a:lstStyle/>
+          <a:p>
+            <a:pPr algn="ctr"/>
+          </a:p>
+        </p:txBody>
+      </p:sp>
+      <p:cxnSp>
+        <p:nvCxnSpPr>
+          <p:cNvPr id="86" name="Connector 85"/>
+          <p:cNvCxnSpPr/>
+          <p:nvPr/>
+        </p:nvCxnSpPr>
+        <p:spPr>
+          <a:xfrm flipH="1">
+            <a:off x="7845552" y="4379976"/>
+            <a:ext cx="219456" cy="0"/>
+          </a:xfrm>
+          <a:prstGeom prst="line">
+            <a:avLst/>
+          </a:prstGeom>
+          <a:ln w="19050">
+            <a:solidFill>
+              <a:srgbClr val="000000"/>
+            </a:solidFill>
           </a:ln>
         </p:spPr>
       </p:cxnSp>
       <p:cxnSp>
         <p:nvCxnSpPr>
-          <p:cNvPr id="84" name="Connector 83"/>
+          <p:cNvPr id="87" name="Connector 86"/>
           <p:cNvCxnSpPr/>
           <p:nvPr/>
         </p:nvCxnSpPr>
         <p:spPr>
           <a:xfrm flipV="1">
-            <a:off x="8055864" y="3147239"/>
+            <a:off x="8055864" y="4143935"/>
             <a:ext cx="103452" cy="103453"/>
           </a:xfrm>
           <a:prstGeom prst="line">
@@ -6496,103 +6526,6 @@
           </a:ln>
         </p:spPr>
       </p:cxnSp>
-      <p:sp>
-        <p:nvSpPr>
-          <p:cNvPr id="85" name="TextBox 84"/>
-          <p:cNvSpPr txBox="1"/>
-          <p:nvPr/>
-        </p:nvSpPr>
-        <p:spPr>
-          <a:xfrm>
-            <a:off x="7552944" y="3127248"/>
-            <a:ext cx="457200" cy="146304"/>
-          </a:xfrm>
-          <a:prstGeom prst="rect">
-            <a:avLst/>
-          </a:prstGeom>
-          <a:noFill/>
-        </p:spPr>
-        <p:txBody>
-          <a:bodyPr wrap="square" lIns="0" rIns="0" tIns="0" bIns="0" anchor="ctr">
-            <a:spAutoFit/>
-          </a:bodyPr>
-          <a:lstStyle/>
-          <a:p>
-            <a:pPr algn="ctr"/>
-            <a:r>
-              <a:rPr sz="700" b="0" i="0">
-                <a:solidFill>
-                  <a:srgbClr val="EAF0F6"/>
-                </a:solidFill>
-                <a:latin typeface="Calibri"/>
-              </a:rPr>
-              <a:t>LED3</a:t>
-            </a:r>
-          </a:p>
-        </p:txBody>
-      </p:sp>
-      <p:sp>
-        <p:nvSpPr>
-          <p:cNvPr id="86" name="Oval 85"/>
-          <p:cNvSpPr/>
-          <p:nvPr/>
-        </p:nvSpPr>
-        <p:spPr>
-          <a:xfrm>
-            <a:off x="7909560" y="3410712"/>
-            <a:ext cx="310896" cy="310896"/>
-          </a:xfrm>
-          <a:prstGeom prst="ellipse">
-            <a:avLst/>
-          </a:prstGeom>
-          <a:solidFill>
-            <a:srgbClr val="FFD34D">
-              <a:alpha val="22000"/>
-            </a:srgbClr>
-          </a:solidFill>
-          <a:ln>
-            <a:noFill/>
-          </a:ln>
-        </p:spPr>
-        <p:txBody>
-          <a:bodyPr rtlCol="0" anchor="ctr"/>
-          <a:lstStyle/>
-          <a:p>
-            <a:pPr algn="ctr"/>
-          </a:p>
-        </p:txBody>
-      </p:sp>
-      <p:sp>
-        <p:nvSpPr>
-          <p:cNvPr id="87" name="Isosceles Triangle 86"/>
-          <p:cNvSpPr/>
-          <p:nvPr/>
-        </p:nvSpPr>
-        <p:spPr>
-          <a:xfrm rot="10800000">
-            <a:off x="7854696" y="3483864"/>
-            <a:ext cx="201168" cy="164592"/>
-          </a:xfrm>
-          <a:prstGeom prst="triangle">
-            <a:avLst/>
-          </a:prstGeom>
-          <a:solidFill>
-            <a:srgbClr val="FFF1C1"/>
-          </a:solidFill>
-          <a:ln w="12700">
-            <a:solidFill>
-              <a:srgbClr val="E0B25B"/>
-            </a:solidFill>
-          </a:ln>
-        </p:spPr>
-        <p:txBody>
-          <a:bodyPr rtlCol="0" anchor="ctr"/>
-          <a:lstStyle/>
-          <a:p>
-            <a:pPr algn="ctr"/>
-          </a:p>
-        </p:txBody>
-      </p:sp>
       <p:cxnSp>
         <p:nvCxnSpPr>
           <p:cNvPr id="88" name="Connector 87"/>
@@ -6600,8 +6533,96 @@
           <p:nvPr/>
         </p:nvCxnSpPr>
         <p:spPr>
+          <a:xfrm flipV="1">
+            <a:off x="8055864" y="4244519"/>
+            <a:ext cx="103452" cy="103453"/>
+          </a:xfrm>
+          <a:prstGeom prst="line">
+            <a:avLst/>
+          </a:prstGeom>
+          <a:ln w="19050">
+            <a:solidFill>
+              <a:srgbClr val="FFD34D"/>
+            </a:solidFill>
+            <a:tailEnd type="triangle" w="med" len="med"/>
+          </a:ln>
+        </p:spPr>
+      </p:cxnSp>
+      <p:sp>
+        <p:nvSpPr>
+          <p:cNvPr id="89" name="TextBox 88"/>
+          <p:cNvSpPr txBox="1"/>
+          <p:nvPr/>
+        </p:nvSpPr>
+        <p:spPr>
+          <a:xfrm>
+            <a:off x="7552944" y="4224528"/>
+            <a:ext cx="457200" cy="146304"/>
+          </a:xfrm>
+          <a:prstGeom prst="rect">
+            <a:avLst/>
+          </a:prstGeom>
+          <a:noFill/>
+        </p:spPr>
+        <p:txBody>
+          <a:bodyPr wrap="square" lIns="0" rIns="0" tIns="0" bIns="0" anchor="ctr">
+            <a:spAutoFit/>
+          </a:bodyPr>
+          <a:lstStyle/>
+          <a:p>
+            <a:pPr algn="ctr"/>
+            <a:r>
+              <a:rPr sz="700" b="0" i="0">
+                <a:solidFill>
+                  <a:srgbClr val="EAF0F6"/>
+                </a:solidFill>
+                <a:latin typeface="Calibri"/>
+              </a:rPr>
+              <a:t>LED6</a:t>
+            </a:r>
+          </a:p>
+        </p:txBody>
+      </p:sp>
+      <p:sp>
+        <p:nvSpPr>
+          <p:cNvPr id="90" name="Isosceles Triangle 89"/>
+          <p:cNvSpPr/>
+          <p:nvPr/>
+        </p:nvSpPr>
+        <p:spPr>
+          <a:xfrm rot="10800000">
+            <a:off x="7854696" y="4581144"/>
+            <a:ext cx="201168" cy="164592"/>
+          </a:xfrm>
+          <a:prstGeom prst="triangle">
+            <a:avLst/>
+          </a:prstGeom>
+          <a:solidFill>
+            <a:srgbClr val="D9D9D9"/>
+          </a:solidFill>
+          <a:ln w="12700">
+            <a:solidFill>
+              <a:srgbClr val="000000"/>
+            </a:solidFill>
+          </a:ln>
+        </p:spPr>
+        <p:txBody>
+          <a:bodyPr rtlCol="0" anchor="ctr"/>
+          <a:lstStyle/>
+          <a:p>
+            <a:pPr algn="ctr"/>
+          </a:p>
+        </p:txBody>
+      </p:sp>
+      <p:cxnSp>
+        <p:nvCxnSpPr>
+          <p:cNvPr id="91" name="Connector 90"/>
+          <p:cNvCxnSpPr/>
+          <p:nvPr/>
+        </p:nvCxnSpPr>
+        <p:spPr>
           <a:xfrm flipH="1">
-            <a:off x="7845552" y="3648456"/>
+            <a:off x="7845552" y="4745736"/>
             <a:ext cx="219456" cy="0"/>
           </a:xfrm>
           <a:prstGeom prst="line">
@@ -6609,20 +6630,20 @@
           </a:prstGeom>
           <a:ln w="19050">
             <a:solidFill>
-              <a:srgbClr val="E0B25B"/>
+              <a:srgbClr val="000000"/>
             </a:solidFill>
           </a:ln>
         </p:spPr>
       </p:cxnSp>
       <p:cxnSp>
         <p:nvCxnSpPr>
-          <p:cNvPr id="89" name="Connector 88"/>
+          <p:cNvPr id="92" name="Connector 91"/>
           <p:cNvCxnSpPr/>
           <p:nvPr/>
         </p:nvCxnSpPr>
         <p:spPr>
           <a:xfrm flipV="1">
-            <a:off x="8055864" y="3412415"/>
+            <a:off x="8055864" y="4509695"/>
             <a:ext cx="103452" cy="103453"/>
           </a:xfrm>
           <a:prstGeom prst="line">
@@ -6638,13 +6659,13 @@
       </p:cxnSp>
       <p:cxnSp>
         <p:nvCxnSpPr>
-          <p:cNvPr id="90" name="Connector 89"/>
+          <p:cNvPr id="93" name="Connector 92"/>
           <p:cNvCxnSpPr/>
           <p:nvPr/>
         </p:nvCxnSpPr>
         <p:spPr>
           <a:xfrm flipV="1">
-            <a:off x="8055864" y="3512999"/>
+            <a:off x="8055864" y="4610279"/>
             <a:ext cx="103452" cy="103453"/>
           </a:xfrm>
           <a:prstGeom prst="line">
@@ -6660,13 +6681,13 @@
       </p:cxnSp>
       <p:sp>
         <p:nvSpPr>
-          <p:cNvPr id="91" name="TextBox 90"/>
+          <p:cNvPr id="94" name="TextBox 93"/>
           <p:cNvSpPr txBox="1"/>
           <p:nvPr/>
         </p:nvSpPr>
         <p:spPr>
           <a:xfrm>
-            <a:off x="7552944" y="3493008"/>
+            <a:off x="7552944" y="4590288"/>
             <a:ext cx="457200" cy="146304"/>
           </a:xfrm>
           <a:prstGeom prst="rect">
@@ -6688,62 +6709,31 @@
                 </a:solidFill>
                 <a:latin typeface="Calibri"/>
               </a:rPr>
-              <a:t>LED4</a:t>
-            </a:r>
-          </a:p>
-        </p:txBody>
-      </p:sp>
-      <p:sp>
-        <p:nvSpPr>
-          <p:cNvPr id="92" name="Oval 91"/>
+              <a:t>LED7</a:t>
+            </a:r>
+          </a:p>
+        </p:txBody>
+      </p:sp>
+      <p:sp>
+        <p:nvSpPr>
+          <p:cNvPr id="95" name="Isosceles Triangle 94"/>
           <p:cNvSpPr/>
           <p:nvPr/>
         </p:nvSpPr>
         <p:spPr>
-          <a:xfrm>
-            <a:off x="7909560" y="3776472"/>
-            <a:ext cx="310896" cy="310896"/>
-          </a:xfrm>
-          <a:prstGeom prst="ellipse">
+          <a:xfrm rot="10800000">
+            <a:off x="7854696" y="4946904"/>
+            <a:ext cx="201168" cy="164592"/>
+          </a:xfrm>
+          <a:prstGeom prst="triangle">
             <a:avLst/>
           </a:prstGeom>
           <a:solidFill>
-            <a:srgbClr val="FFD34D">
-              <a:alpha val="22000"/>
-            </a:srgbClr>
-          </a:solidFill>
-          <a:ln>
-            <a:noFill/>
-          </a:ln>
-        </p:spPr>
-        <p:txBody>
-          <a:bodyPr rtlCol="0" anchor="ctr"/>
-          <a:lstStyle/>
-          <a:p>
-            <a:pPr algn="ctr"/>
-          </a:p>
-        </p:txBody>
-      </p:sp>
-      <p:sp>
-        <p:nvSpPr>
-          <p:cNvPr id="93" name="Isosceles Triangle 92"/>
-          <p:cNvSpPr/>
-          <p:nvPr/>
-        </p:nvSpPr>
-        <p:spPr>
-          <a:xfrm rot="10800000">
-            <a:off x="7854696" y="3849624"/>
-            <a:ext cx="201168" cy="164592"/>
-          </a:xfrm>
-          <a:prstGeom prst="triangle">
-            <a:avLst/>
-          </a:prstGeom>
-          <a:solidFill>
-            <a:srgbClr val="FFF1C1"/>
+            <a:srgbClr val="D9D9D9"/>
           </a:solidFill>
           <a:ln w="12700">
             <a:solidFill>
-              <a:srgbClr val="E0B25B"/>
+              <a:srgbClr val="000000"/>
             </a:solidFill>
           </a:ln>
         </p:spPr>
@@ -6755,49 +6745,6 @@
           </a:p>
         </p:txBody>
       </p:sp>
-      <p:cxnSp>
-        <p:nvCxnSpPr>
-          <p:cNvPr id="94" name="Connector 93"/>
-          <p:cNvCxnSpPr/>
-          <p:nvPr/>
-        </p:nvCxnSpPr>
-        <p:spPr>
-          <a:xfrm flipH="1">
-            <a:off x="7845552" y="4014216"/>
-            <a:ext cx="219456" cy="0"/>
-          </a:xfrm>
-          <a:prstGeom prst="line">
-            <a:avLst/>
-          </a:prstGeom>
-          <a:ln w="19050">
-            <a:solidFill>
-              <a:srgbClr val="E0B25B"/>
-            </a:solidFill>
-          </a:ln>
-        </p:spPr>
-      </p:cxnSp>
-      <p:cxnSp>
-        <p:nvCxnSpPr>
-          <p:cNvPr id="95" name="Connector 94"/>
-          <p:cNvCxnSpPr/>
-          <p:nvPr/>
-        </p:nvCxnSpPr>
-        <p:spPr>
-          <a:xfrm flipV="1">
-            <a:off x="8055864" y="3778175"/>
-            <a:ext cx="103452" cy="103453"/>
-          </a:xfrm>
-          <a:prstGeom prst="line">
-            <a:avLst/>
-          </a:prstGeom>
-          <a:ln w="19050">
-            <a:solidFill>
-              <a:srgbClr val="FFD34D"/>
-            </a:solidFill>
-            <a:tailEnd type="triangle" w="med" len="med"/>
-          </a:ln>
-        </p:spPr>
-      </p:cxnSp>
       <p:cxnSp>
         <p:nvCxnSpPr>
           <p:cNvPr id="96" name="Connector 95"/>
@@ -6805,8 +6752,29 @@
           <p:nvPr/>
         </p:nvCxnSpPr>
         <p:spPr>
+          <a:xfrm flipH="1">
+            <a:off x="7845552" y="5111496"/>
+            <a:ext cx="219456" cy="0"/>
+          </a:xfrm>
+          <a:prstGeom prst="line">
+            <a:avLst/>
+          </a:prstGeom>
+          <a:ln w="19050">
+            <a:solidFill>
+              <a:srgbClr val="000000"/>
+            </a:solidFill>
+          </a:ln>
+        </p:spPr>
+      </p:cxnSp>
+      <p:cxnSp>
+        <p:nvCxnSpPr>
+          <p:cNvPr id="97" name="Connector 96"/>
+          <p:cNvCxnSpPr/>
+          <p:nvPr/>
+        </p:nvCxnSpPr>
+        <p:spPr>
           <a:xfrm flipV="1">
-            <a:off x="8055864" y="3878759"/>
+            <a:off x="8055864" y="4875455"/>
             <a:ext cx="103452" cy="103453"/>
           </a:xfrm>
           <a:prstGeom prst="line">
@@ -6820,15 +6788,37 @@
           </a:ln>
         </p:spPr>
       </p:cxnSp>
-      <p:sp>
-        <p:nvSpPr>
-          <p:cNvPr id="97" name="TextBox 96"/>
+      <p:cxnSp>
+        <p:nvCxnSpPr>
+          <p:cNvPr id="98" name="Connector 97"/>
+          <p:cNvCxnSpPr/>
+          <p:nvPr/>
+        </p:nvCxnSpPr>
+        <p:spPr>
+          <a:xfrm flipV="1">
+            <a:off x="8055864" y="4976039"/>
+            <a:ext cx="103452" cy="103453"/>
+          </a:xfrm>
+          <a:prstGeom prst="line">
+            <a:avLst/>
+          </a:prstGeom>
+          <a:ln w="19050">
+            <a:solidFill>
+              <a:srgbClr val="FFD34D"/>
+            </a:solidFill>
+            <a:tailEnd type="triangle" w="med" len="med"/>
+          </a:ln>
+        </p:spPr>
+      </p:cxnSp>
+      <p:sp>
+        <p:nvSpPr>
+          <p:cNvPr id="99" name="TextBox 98"/>
           <p:cNvSpPr txBox="1"/>
           <p:nvPr/>
         </p:nvSpPr>
         <p:spPr>
           <a:xfrm>
-            <a:off x="7552944" y="3858768"/>
+            <a:off x="7552944" y="4956048"/>
             <a:ext cx="457200" cy="146304"/>
           </a:xfrm>
           <a:prstGeom prst="rect">
@@ -6850,62 +6840,31 @@
                 </a:solidFill>
                 <a:latin typeface="Calibri"/>
               </a:rPr>
-              <a:t>LED5</a:t>
-            </a:r>
-          </a:p>
-        </p:txBody>
-      </p:sp>
-      <p:sp>
-        <p:nvSpPr>
-          <p:cNvPr id="98" name="Oval 97"/>
+              <a:t>LED8</a:t>
+            </a:r>
+          </a:p>
+        </p:txBody>
+      </p:sp>
+      <p:sp>
+        <p:nvSpPr>
+          <p:cNvPr id="100" name="Isosceles Triangle 99"/>
           <p:cNvSpPr/>
           <p:nvPr/>
         </p:nvSpPr>
         <p:spPr>
-          <a:xfrm>
-            <a:off x="7909560" y="4142232"/>
-            <a:ext cx="310896" cy="310896"/>
-          </a:xfrm>
-          <a:prstGeom prst="ellipse">
+          <a:xfrm rot="16200000">
+            <a:off x="7260336" y="5586984"/>
+            <a:ext cx="201168" cy="164592"/>
+          </a:xfrm>
+          <a:prstGeom prst="triangle">
             <a:avLst/>
           </a:prstGeom>
           <a:solidFill>
-            <a:srgbClr val="FFD34D">
-              <a:alpha val="22000"/>
-            </a:srgbClr>
-          </a:solidFill>
-          <a:ln>
-            <a:noFill/>
-          </a:ln>
-        </p:spPr>
-        <p:txBody>
-          <a:bodyPr rtlCol="0" anchor="ctr"/>
-          <a:lstStyle/>
-          <a:p>
-            <a:pPr algn="ctr"/>
-          </a:p>
-        </p:txBody>
-      </p:sp>
-      <p:sp>
-        <p:nvSpPr>
-          <p:cNvPr id="99" name="Isosceles Triangle 98"/>
-          <p:cNvSpPr/>
-          <p:nvPr/>
-        </p:nvSpPr>
-        <p:spPr>
-          <a:xfrm rot="10800000">
-            <a:off x="7854696" y="4215384"/>
-            <a:ext cx="201168" cy="164592"/>
-          </a:xfrm>
-          <a:prstGeom prst="triangle">
-            <a:avLst/>
-          </a:prstGeom>
-          <a:solidFill>
-            <a:srgbClr val="FFF1C1"/>
+            <a:srgbClr val="D9D9D9"/>
           </a:solidFill>
           <a:ln w="12700">
             <a:solidFill>
-              <a:srgbClr val="E0B25B"/>
+              <a:srgbClr val="000000"/>
             </a:solidFill>
           </a:ln>
         </p:spPr>
@@ -6917,27 +6876,6 @@
           </a:p>
         </p:txBody>
       </p:sp>
-      <p:cxnSp>
-        <p:nvCxnSpPr>
-          <p:cNvPr id="100" name="Connector 99"/>
-          <p:cNvCxnSpPr/>
-          <p:nvPr/>
-        </p:nvCxnSpPr>
-        <p:spPr>
-          <a:xfrm flipH="1">
-            <a:off x="7845552" y="4379976"/>
-            <a:ext cx="219456" cy="0"/>
-          </a:xfrm>
-          <a:prstGeom prst="line">
-            <a:avLst/>
-          </a:prstGeom>
-          <a:ln w="19050">
-            <a:solidFill>
-              <a:srgbClr val="E0B25B"/>
-            </a:solidFill>
-          </a:ln>
-        </p:spPr>
-      </p:cxnSp>
       <p:cxnSp>
         <p:nvCxnSpPr>
           <p:cNvPr id="101" name="Connector 100"/>
@@ -6946,17 +6884,16 @@
         </p:nvCxnSpPr>
         <p:spPr>
           <a:xfrm flipV="1">
-            <a:off x="8055864" y="4143935"/>
-            <a:ext cx="103452" cy="103453"/>
+            <a:off x="7278624" y="5559552"/>
+            <a:ext cx="0" cy="219456"/>
           </a:xfrm>
           <a:prstGeom prst="line">
             <a:avLst/>
           </a:prstGeom>
           <a:ln w="19050">
             <a:solidFill>
-              <a:srgbClr val="FFD34D"/>
-            </a:solidFill>
-            <a:tailEnd type="triangle" w="med" len="med"/>
+              <a:srgbClr val="000000"/>
+            </a:solidFill>
           </a:ln>
         </p:spPr>
       </p:cxnSp>
@@ -6967,9 +6904,9 @@
           <p:nvPr/>
         </p:nvCxnSpPr>
         <p:spPr>
-          <a:xfrm flipV="1">
-            <a:off x="8055864" y="4244519"/>
-            <a:ext cx="103452" cy="103453"/>
+          <a:xfrm flipH="1">
+            <a:off x="7307759" y="5769864"/>
+            <a:ext cx="103453" cy="103452"/>
           </a:xfrm>
           <a:prstGeom prst="line">
             <a:avLst/>
@@ -6982,15 +6919,37 @@
           </a:ln>
         </p:spPr>
       </p:cxnSp>
-      <p:sp>
-        <p:nvSpPr>
-          <p:cNvPr id="103" name="TextBox 102"/>
+      <p:cxnSp>
+        <p:nvCxnSpPr>
+          <p:cNvPr id="103" name="Connector 102"/>
+          <p:cNvCxnSpPr/>
+          <p:nvPr/>
+        </p:nvCxnSpPr>
+        <p:spPr>
+          <a:xfrm flipH="1">
+            <a:off x="7207175" y="5769864"/>
+            <a:ext cx="103453" cy="103452"/>
+          </a:xfrm>
+          <a:prstGeom prst="line">
+            <a:avLst/>
+          </a:prstGeom>
+          <a:ln w="19050">
+            <a:solidFill>
+              <a:srgbClr val="FFD34D"/>
+            </a:solidFill>
+            <a:tailEnd type="triangle" w="med" len="med"/>
+          </a:ln>
+        </p:spPr>
+      </p:cxnSp>
+      <p:sp>
+        <p:nvSpPr>
+          <p:cNvPr id="104" name="TextBox 103"/>
           <p:cNvSpPr txBox="1"/>
           <p:nvPr/>
         </p:nvSpPr>
         <p:spPr>
           <a:xfrm>
-            <a:off x="7552944" y="4224528"/>
+            <a:off x="7132320" y="5422392"/>
             <a:ext cx="457200" cy="146304"/>
           </a:xfrm>
           <a:prstGeom prst="rect">
@@ -7012,39 +6971,8 @@
                 </a:solidFill>
                 <a:latin typeface="Calibri"/>
               </a:rPr>
-              <a:t>LED6</a:t>
-            </a:r>
-          </a:p>
-        </p:txBody>
-      </p:sp>
-      <p:sp>
-        <p:nvSpPr>
-          <p:cNvPr id="104" name="Oval 103"/>
-          <p:cNvSpPr/>
-          <p:nvPr/>
-        </p:nvSpPr>
-        <p:spPr>
-          <a:xfrm>
-            <a:off x="7909560" y="4507992"/>
-            <a:ext cx="310896" cy="310896"/>
-          </a:xfrm>
-          <a:prstGeom prst="ellipse">
-            <a:avLst/>
-          </a:prstGeom>
-          <a:solidFill>
-            <a:srgbClr val="FFD34D">
-              <a:alpha val="22000"/>
-            </a:srgbClr>
-          </a:solidFill>
-          <a:ln>
-            <a:noFill/>
-          </a:ln>
-        </p:spPr>
-        <p:txBody>
-          <a:bodyPr rtlCol="0" anchor="ctr"/>
-          <a:lstStyle/>
-          <a:p>
-            <a:pPr algn="ctr"/>
+              <a:t>LED1</a:t>
+            </a:r>
           </a:p>
         </p:txBody>
       </p:sp>
@@ -7055,19 +6983,19 @@
           <p:nvPr/>
         </p:nvSpPr>
         <p:spPr>
-          <a:xfrm rot="10800000">
-            <a:off x="7854696" y="4581144"/>
+          <a:xfrm rot="16200000">
+            <a:off x="6894576" y="5586984"/>
             <a:ext cx="201168" cy="164592"/>
           </a:xfrm>
           <a:prstGeom prst="triangle">
             <a:avLst/>
           </a:prstGeom>
           <a:solidFill>
-            <a:srgbClr val="FFF1C1"/>
+            <a:srgbClr val="D9D9D9"/>
           </a:solidFill>
           <a:ln w="12700">
             <a:solidFill>
-              <a:srgbClr val="E0B25B"/>
+              <a:srgbClr val="000000"/>
             </a:solidFill>
           </a:ln>
         </p:spPr>
@@ -7086,16 +7014,16 @@
           <p:nvPr/>
         </p:nvCxnSpPr>
         <p:spPr>
-          <a:xfrm flipH="1">
-            <a:off x="7845552" y="4745736"/>
-            <a:ext cx="219456" cy="0"/>
+          <a:xfrm flipV="1">
+            <a:off x="6912864" y="5559552"/>
+            <a:ext cx="0" cy="219456"/>
           </a:xfrm>
           <a:prstGeom prst="line">
             <a:avLst/>
           </a:prstGeom>
           <a:ln w="19050">
             <a:solidFill>
-              <a:srgbClr val="E0B25B"/>
+              <a:srgbClr val="000000"/>
             </a:solidFill>
           </a:ln>
         </p:spPr>
@@ -7107,9 +7035,9 @@
           <p:nvPr/>
         </p:nvCxnSpPr>
         <p:spPr>
-          <a:xfrm flipV="1">
-            <a:off x="8055864" y="4509695"/>
-            <a:ext cx="103452" cy="103453"/>
+          <a:xfrm flipH="1">
+            <a:off x="6941999" y="5769864"/>
+            <a:ext cx="103453" cy="103452"/>
           </a:xfrm>
           <a:prstGeom prst="line">
             <a:avLst/>
@@ -7129,9 +7057,9 @@
           <p:nvPr/>
         </p:nvCxnSpPr>
         <p:spPr>
-          <a:xfrm flipV="1">
-            <a:off x="8055864" y="4610279"/>
-            <a:ext cx="103452" cy="103453"/>
+          <a:xfrm flipH="1">
+            <a:off x="6841415" y="5769864"/>
+            <a:ext cx="103453" cy="103452"/>
           </a:xfrm>
           <a:prstGeom prst="line">
             <a:avLst/>
@@ -7152,7 +7080,7 @@
         </p:nvSpPr>
         <p:spPr>
           <a:xfrm>
-            <a:off x="7552944" y="4590288"/>
+            <a:off x="6766560" y="5422392"/>
             <a:ext cx="457200" cy="146304"/>
           </a:xfrm>
           <a:prstGeom prst="rect">
@@ -7174,62 +7102,31 @@
                 </a:solidFill>
                 <a:latin typeface="Calibri"/>
               </a:rPr>
-              <a:t>LED7</a:t>
-            </a:r>
-          </a:p>
-        </p:txBody>
-      </p:sp>
-      <p:sp>
-        <p:nvSpPr>
-          <p:cNvPr id="110" name="Oval 109"/>
+              <a:t>LED2</a:t>
+            </a:r>
+          </a:p>
+        </p:txBody>
+      </p:sp>
+      <p:sp>
+        <p:nvSpPr>
+          <p:cNvPr id="110" name="Isosceles Triangle 109"/>
           <p:cNvSpPr/>
           <p:nvPr/>
         </p:nvSpPr>
         <p:spPr>
-          <a:xfrm>
-            <a:off x="7909560" y="4873752"/>
-            <a:ext cx="310896" cy="310896"/>
-          </a:xfrm>
-          <a:prstGeom prst="ellipse">
+          <a:xfrm rot="16200000">
+            <a:off x="6528816" y="5586984"/>
+            <a:ext cx="201168" cy="164592"/>
+          </a:xfrm>
+          <a:prstGeom prst="triangle">
             <a:avLst/>
           </a:prstGeom>
           <a:solidFill>
-            <a:srgbClr val="FFD34D">
-              <a:alpha val="22000"/>
-            </a:srgbClr>
-          </a:solidFill>
-          <a:ln>
-            <a:noFill/>
-          </a:ln>
-        </p:spPr>
-        <p:txBody>
-          <a:bodyPr rtlCol="0" anchor="ctr"/>
-          <a:lstStyle/>
-          <a:p>
-            <a:pPr algn="ctr"/>
-          </a:p>
-        </p:txBody>
-      </p:sp>
-      <p:sp>
-        <p:nvSpPr>
-          <p:cNvPr id="111" name="Isosceles Triangle 110"/>
-          <p:cNvSpPr/>
-          <p:nvPr/>
-        </p:nvSpPr>
-        <p:spPr>
-          <a:xfrm rot="10800000">
-            <a:off x="7854696" y="4946904"/>
-            <a:ext cx="201168" cy="164592"/>
-          </a:xfrm>
-          <a:prstGeom prst="triangle">
-            <a:avLst/>
-          </a:prstGeom>
-          <a:solidFill>
-            <a:srgbClr val="FFF1C1"/>
+            <a:srgbClr val="D9D9D9"/>
           </a:solidFill>
           <a:ln w="12700">
             <a:solidFill>
-              <a:srgbClr val="E0B25B"/>
+              <a:srgbClr val="000000"/>
             </a:solidFill>
           </a:ln>
         </p:spPr>
@@ -7241,6 +7138,27 @@
           </a:p>
         </p:txBody>
       </p:sp>
+      <p:cxnSp>
+        <p:nvCxnSpPr>
+          <p:cNvPr id="111" name="Connector 110"/>
+          <p:cNvCxnSpPr/>
+          <p:nvPr/>
+        </p:nvCxnSpPr>
+        <p:spPr>
+          <a:xfrm flipV="1">
+            <a:off x="6547104" y="5559552"/>
+            <a:ext cx="0" cy="219456"/>
+          </a:xfrm>
+          <a:prstGeom prst="line">
+            <a:avLst/>
+          </a:prstGeom>
+          <a:ln w="19050">
+            <a:solidFill>
+              <a:srgbClr val="000000"/>
+            </a:solidFill>
+          </a:ln>
+        </p:spPr>
+      </p:cxnSp>
       <p:cxnSp>
         <p:nvCxnSpPr>
           <p:cNvPr id="112" name="Connector 111"/>
@@ -7249,16 +7167,17 @@
         </p:nvCxnSpPr>
         <p:spPr>
           <a:xfrm flipH="1">
-            <a:off x="7845552" y="5111496"/>
-            <a:ext cx="219456" cy="0"/>
+            <a:off x="6576239" y="5769864"/>
+            <a:ext cx="103453" cy="103452"/>
           </a:xfrm>
           <a:prstGeom prst="line">
             <a:avLst/>
           </a:prstGeom>
           <a:ln w="19050">
             <a:solidFill>
-              <a:srgbClr val="E0B25B"/>
-            </a:solidFill>
+              <a:srgbClr val="FFD34D"/>
+            </a:solidFill>
+            <a:tailEnd type="triangle" w="med" len="med"/>
           </a:ln>
         </p:spPr>
       </p:cxnSp>
@@ -7269,31 +7188,118 @@
           <p:nvPr/>
         </p:nvCxnSpPr>
         <p:spPr>
+          <a:xfrm flipH="1">
+            <a:off x="6475655" y="5769864"/>
+            <a:ext cx="103453" cy="103452"/>
+          </a:xfrm>
+          <a:prstGeom prst="line">
+            <a:avLst/>
+          </a:prstGeom>
+          <a:ln w="19050">
+            <a:solidFill>
+              <a:srgbClr val="FFD34D"/>
+            </a:solidFill>
+            <a:tailEnd type="triangle" w="med" len="med"/>
+          </a:ln>
+        </p:spPr>
+      </p:cxnSp>
+      <p:sp>
+        <p:nvSpPr>
+          <p:cNvPr id="114" name="TextBox 113"/>
+          <p:cNvSpPr txBox="1"/>
+          <p:nvPr/>
+        </p:nvSpPr>
+        <p:spPr>
+          <a:xfrm>
+            <a:off x="6400800" y="5422392"/>
+            <a:ext cx="457200" cy="146304"/>
+          </a:xfrm>
+          <a:prstGeom prst="rect">
+            <a:avLst/>
+          </a:prstGeom>
+          <a:noFill/>
+        </p:spPr>
+        <p:txBody>
+          <a:bodyPr wrap="square" lIns="0" rIns="0" tIns="0" bIns="0" anchor="ctr">
+            <a:spAutoFit/>
+          </a:bodyPr>
+          <a:lstStyle/>
+          <a:p>
+            <a:pPr algn="ctr"/>
+            <a:r>
+              <a:rPr sz="700" b="0" i="0">
+                <a:solidFill>
+                  <a:srgbClr val="EAF0F6"/>
+                </a:solidFill>
+                <a:latin typeface="Calibri"/>
+              </a:rPr>
+              <a:t>LED3</a:t>
+            </a:r>
+          </a:p>
+        </p:txBody>
+      </p:sp>
+      <p:sp>
+        <p:nvSpPr>
+          <p:cNvPr id="115" name="Isosceles Triangle 114"/>
+          <p:cNvSpPr/>
+          <p:nvPr/>
+        </p:nvSpPr>
+        <p:spPr>
+          <a:xfrm rot="16200000">
+            <a:off x="6163055" y="5586984"/>
+            <a:ext cx="201168" cy="164592"/>
+          </a:xfrm>
+          <a:prstGeom prst="triangle">
+            <a:avLst/>
+          </a:prstGeom>
+          <a:solidFill>
+            <a:srgbClr val="D9D9D9"/>
+          </a:solidFill>
+          <a:ln w="12700">
+            <a:solidFill>
+              <a:srgbClr val="000000"/>
+            </a:solidFill>
+          </a:ln>
+        </p:spPr>
+        <p:txBody>
+          <a:bodyPr rtlCol="0" anchor="ctr"/>
+          <a:lstStyle/>
+          <a:p>
+            <a:pPr algn="ctr"/>
+          </a:p>
+        </p:txBody>
+      </p:sp>
+      <p:cxnSp>
+        <p:nvCxnSpPr>
+          <p:cNvPr id="116" name="Connector 115"/>
+          <p:cNvCxnSpPr/>
+          <p:nvPr/>
+        </p:nvCxnSpPr>
+        <p:spPr>
           <a:xfrm flipV="1">
-            <a:off x="8055864" y="4875455"/>
-            <a:ext cx="103452" cy="103453"/>
+            <a:off x="6181344" y="5559552"/>
+            <a:ext cx="0" cy="219456"/>
           </a:xfrm>
           <a:prstGeom prst="line">
             <a:avLst/>
           </a:prstGeom>
           <a:ln w="19050">
             <a:solidFill>
-              <a:srgbClr val="FFD34D"/>
-            </a:solidFill>
-            <a:tailEnd type="triangle" w="med" len="med"/>
+              <a:srgbClr val="000000"/>
+            </a:solidFill>
           </a:ln>
         </p:spPr>
       </p:cxnSp>
       <p:cxnSp>
         <p:nvCxnSpPr>
-          <p:cNvPr id="114" name="Connector 113"/>
+          <p:cNvPr id="117" name="Connector 116"/>
           <p:cNvCxnSpPr/>
           <p:nvPr/>
         </p:nvCxnSpPr>
         <p:spPr>
-          <a:xfrm flipV="1">
-            <a:off x="8055864" y="4976039"/>
-            <a:ext cx="103452" cy="103453"/>
+          <a:xfrm flipH="1">
+            <a:off x="6210479" y="5769864"/>
+            <a:ext cx="103452" cy="103452"/>
           </a:xfrm>
           <a:prstGeom prst="line">
             <a:avLst/>
@@ -7306,103 +7312,6 @@
           </a:ln>
         </p:spPr>
       </p:cxnSp>
-      <p:sp>
-        <p:nvSpPr>
-          <p:cNvPr id="115" name="TextBox 114"/>
-          <p:cNvSpPr txBox="1"/>
-          <p:nvPr/>
-        </p:nvSpPr>
-        <p:spPr>
-          <a:xfrm>
-            <a:off x="7552944" y="4956048"/>
-            <a:ext cx="457200" cy="146304"/>
-          </a:xfrm>
-          <a:prstGeom prst="rect">
-            <a:avLst/>
-          </a:prstGeom>
-          <a:noFill/>
-        </p:spPr>
-        <p:txBody>
-          <a:bodyPr wrap="square" lIns="0" rIns="0" tIns="0" bIns="0" anchor="ctr">
-            <a:spAutoFit/>
-          </a:bodyPr>
-          <a:lstStyle/>
-          <a:p>
-            <a:pPr algn="ctr"/>
-            <a:r>
-              <a:rPr sz="700" b="0" i="0">
-                <a:solidFill>
-                  <a:srgbClr val="EAF0F6"/>
-                </a:solidFill>
-                <a:latin typeface="Calibri"/>
-              </a:rPr>
-              <a:t>LED8</a:t>
-            </a:r>
-          </a:p>
-        </p:txBody>
-      </p:sp>
-      <p:sp>
-        <p:nvSpPr>
-          <p:cNvPr id="116" name="Oval 115"/>
-          <p:cNvSpPr/>
-          <p:nvPr/>
-        </p:nvSpPr>
-        <p:spPr>
-          <a:xfrm>
-            <a:off x="7205472" y="5623560"/>
-            <a:ext cx="310896" cy="310896"/>
-          </a:xfrm>
-          <a:prstGeom prst="ellipse">
-            <a:avLst/>
-          </a:prstGeom>
-          <a:solidFill>
-            <a:srgbClr val="FFD34D">
-              <a:alpha val="22000"/>
-            </a:srgbClr>
-          </a:solidFill>
-          <a:ln>
-            <a:noFill/>
-          </a:ln>
-        </p:spPr>
-        <p:txBody>
-          <a:bodyPr rtlCol="0" anchor="ctr"/>
-          <a:lstStyle/>
-          <a:p>
-            <a:pPr algn="ctr"/>
-          </a:p>
-        </p:txBody>
-      </p:sp>
-      <p:sp>
-        <p:nvSpPr>
-          <p:cNvPr id="117" name="Isosceles Triangle 116"/>
-          <p:cNvSpPr/>
-          <p:nvPr/>
-        </p:nvSpPr>
-        <p:spPr>
-          <a:xfrm rot="16200000">
-            <a:off x="7260336" y="5586984"/>
-            <a:ext cx="201168" cy="164592"/>
-          </a:xfrm>
-          <a:prstGeom prst="triangle">
-            <a:avLst/>
-          </a:prstGeom>
-          <a:solidFill>
-            <a:srgbClr val="FFF1C1"/>
-          </a:solidFill>
-          <a:ln w="12700">
-            <a:solidFill>
-              <a:srgbClr val="E0B25B"/>
-            </a:solidFill>
-          </a:ln>
-        </p:spPr>
-        <p:txBody>
-          <a:bodyPr rtlCol="0" anchor="ctr"/>
-          <a:lstStyle/>
-          <a:p>
-            <a:pPr algn="ctr"/>
-          </a:p>
-        </p:txBody>
-      </p:sp>
       <p:cxnSp>
         <p:nvCxnSpPr>
           <p:cNvPr id="118" name="Connector 117"/>
@@ -7410,8 +7319,96 @@
           <p:nvPr/>
         </p:nvCxnSpPr>
         <p:spPr>
+          <a:xfrm flipH="1">
+            <a:off x="6109895" y="5769864"/>
+            <a:ext cx="103453" cy="103452"/>
+          </a:xfrm>
+          <a:prstGeom prst="line">
+            <a:avLst/>
+          </a:prstGeom>
+          <a:ln w="19050">
+            <a:solidFill>
+              <a:srgbClr val="FFD34D"/>
+            </a:solidFill>
+            <a:tailEnd type="triangle" w="med" len="med"/>
+          </a:ln>
+        </p:spPr>
+      </p:cxnSp>
+      <p:sp>
+        <p:nvSpPr>
+          <p:cNvPr id="119" name="TextBox 118"/>
+          <p:cNvSpPr txBox="1"/>
+          <p:nvPr/>
+        </p:nvSpPr>
+        <p:spPr>
+          <a:xfrm>
+            <a:off x="6035040" y="5422392"/>
+            <a:ext cx="457200" cy="146304"/>
+          </a:xfrm>
+          <a:prstGeom prst="rect">
+            <a:avLst/>
+          </a:prstGeom>
+          <a:noFill/>
+        </p:spPr>
+        <p:txBody>
+          <a:bodyPr wrap="square" lIns="0" rIns="0" tIns="0" bIns="0" anchor="ctr">
+            <a:spAutoFit/>
+          </a:bodyPr>
+          <a:lstStyle/>
+          <a:p>
+            <a:pPr algn="ctr"/>
+            <a:r>
+              <a:rPr sz="700" b="0" i="0">
+                <a:solidFill>
+                  <a:srgbClr val="EAF0F6"/>
+                </a:solidFill>
+                <a:latin typeface="Calibri"/>
+              </a:rPr>
+              <a:t>LED4</a:t>
+            </a:r>
+          </a:p>
+        </p:txBody>
+      </p:sp>
+      <p:sp>
+        <p:nvSpPr>
+          <p:cNvPr id="120" name="Isosceles Triangle 119"/>
+          <p:cNvSpPr/>
+          <p:nvPr/>
+        </p:nvSpPr>
+        <p:spPr>
+          <a:xfrm rot="16200000">
+            <a:off x="5797296" y="5586984"/>
+            <a:ext cx="201168" cy="164592"/>
+          </a:xfrm>
+          <a:prstGeom prst="triangle">
+            <a:avLst/>
+          </a:prstGeom>
+          <a:solidFill>
+            <a:srgbClr val="D9D9D9"/>
+          </a:solidFill>
+          <a:ln w="12700">
+            <a:solidFill>
+              <a:srgbClr val="000000"/>
+            </a:solidFill>
+          </a:ln>
+        </p:spPr>
+        <p:txBody>
+          <a:bodyPr rtlCol="0" anchor="ctr"/>
+          <a:lstStyle/>
+          <a:p>
+            <a:pPr algn="ctr"/>
+          </a:p>
+        </p:txBody>
+      </p:sp>
+      <p:cxnSp>
+        <p:nvCxnSpPr>
+          <p:cNvPr id="121" name="Connector 120"/>
+          <p:cNvCxnSpPr/>
+          <p:nvPr/>
+        </p:nvCxnSpPr>
+        <p:spPr>
           <a:xfrm flipV="1">
-            <a:off x="7278624" y="5559552"/>
+            <a:off x="5815584" y="5559552"/>
             <a:ext cx="0" cy="219456"/>
           </a:xfrm>
           <a:prstGeom prst="line">
@@ -7419,20 +7416,20 @@
           </a:prstGeom>
           <a:ln w="19050">
             <a:solidFill>
-              <a:srgbClr val="E0B25B"/>
+              <a:srgbClr val="000000"/>
             </a:solidFill>
           </a:ln>
         </p:spPr>
       </p:cxnSp>
       <p:cxnSp>
         <p:nvCxnSpPr>
-          <p:cNvPr id="119" name="Connector 118"/>
+          <p:cNvPr id="122" name="Connector 121"/>
           <p:cNvCxnSpPr/>
           <p:nvPr/>
         </p:nvCxnSpPr>
         <p:spPr>
           <a:xfrm flipH="1">
-            <a:off x="7307759" y="5769864"/>
+            <a:off x="5844719" y="5769864"/>
             <a:ext cx="103453" cy="103452"/>
           </a:xfrm>
           <a:prstGeom prst="line">
@@ -7448,13 +7445,13 @@
       </p:cxnSp>
       <p:cxnSp>
         <p:nvCxnSpPr>
-          <p:cNvPr id="120" name="Connector 119"/>
+          <p:cNvPr id="123" name="Connector 122"/>
           <p:cNvCxnSpPr/>
           <p:nvPr/>
         </p:nvCxnSpPr>
         <p:spPr>
           <a:xfrm flipH="1">
-            <a:off x="7207175" y="5769864"/>
+            <a:off x="5744135" y="5769864"/>
             <a:ext cx="103453" cy="103452"/>
           </a:xfrm>
           <a:prstGeom prst="line">
@@ -7470,13 +7467,13 @@
       </p:cxnSp>
       <p:sp>
         <p:nvSpPr>
-          <p:cNvPr id="121" name="TextBox 120"/>
+          <p:cNvPr id="124" name="TextBox 123"/>
           <p:cNvSpPr txBox="1"/>
           <p:nvPr/>
         </p:nvSpPr>
         <p:spPr>
           <a:xfrm>
-            <a:off x="7132320" y="5422392"/>
+            <a:off x="5669280" y="5422392"/>
             <a:ext cx="457200" cy="146304"/>
           </a:xfrm>
           <a:prstGeom prst="rect">
@@ -7498,62 +7495,31 @@
                 </a:solidFill>
                 <a:latin typeface="Calibri"/>
               </a:rPr>
-              <a:t>LED1</a:t>
-            </a:r>
-          </a:p>
-        </p:txBody>
-      </p:sp>
-      <p:sp>
-        <p:nvSpPr>
-          <p:cNvPr id="122" name="Oval 121"/>
+              <a:t>LED5</a:t>
+            </a:r>
+          </a:p>
+        </p:txBody>
+      </p:sp>
+      <p:sp>
+        <p:nvSpPr>
+          <p:cNvPr id="125" name="Isosceles Triangle 124"/>
           <p:cNvSpPr/>
           <p:nvPr/>
         </p:nvSpPr>
         <p:spPr>
-          <a:xfrm>
-            <a:off x="6839712" y="5623560"/>
-            <a:ext cx="310896" cy="310896"/>
-          </a:xfrm>
-          <a:prstGeom prst="ellipse">
+          <a:xfrm rot="16200000">
+            <a:off x="5431536" y="5586984"/>
+            <a:ext cx="201168" cy="164592"/>
+          </a:xfrm>
+          <a:prstGeom prst="triangle">
             <a:avLst/>
           </a:prstGeom>
           <a:solidFill>
-            <a:srgbClr val="FFD34D">
-              <a:alpha val="22000"/>
-            </a:srgbClr>
-          </a:solidFill>
-          <a:ln>
-            <a:noFill/>
-          </a:ln>
-        </p:spPr>
-        <p:txBody>
-          <a:bodyPr rtlCol="0" anchor="ctr"/>
-          <a:lstStyle/>
-          <a:p>
-            <a:pPr algn="ctr"/>
-          </a:p>
-        </p:txBody>
-      </p:sp>
-      <p:sp>
-        <p:nvSpPr>
-          <p:cNvPr id="123" name="Isosceles Triangle 122"/>
-          <p:cNvSpPr/>
-          <p:nvPr/>
-        </p:nvSpPr>
-        <p:spPr>
-          <a:xfrm rot="16200000">
-            <a:off x="6894576" y="5586984"/>
-            <a:ext cx="201168" cy="164592"/>
-          </a:xfrm>
-          <a:prstGeom prst="triangle">
-            <a:avLst/>
-          </a:prstGeom>
-          <a:solidFill>
-            <a:srgbClr val="FFF1C1"/>
+            <a:srgbClr val="D9D9D9"/>
           </a:solidFill>
           <a:ln w="12700">
             <a:solidFill>
-              <a:srgbClr val="E0B25B"/>
+              <a:srgbClr val="000000"/>
             </a:solidFill>
           </a:ln>
         </p:spPr>
@@ -7565,49 +7531,6 @@
           </a:p>
         </p:txBody>
       </p:sp>
-      <p:cxnSp>
-        <p:nvCxnSpPr>
-          <p:cNvPr id="124" name="Connector 123"/>
-          <p:cNvCxnSpPr/>
-          <p:nvPr/>
-        </p:nvCxnSpPr>
-        <p:spPr>
-          <a:xfrm flipV="1">
-            <a:off x="6912864" y="5559552"/>
-            <a:ext cx="0" cy="219456"/>
-          </a:xfrm>
-          <a:prstGeom prst="line">
-            <a:avLst/>
-          </a:prstGeom>
-          <a:ln w="19050">
-            <a:solidFill>
-              <a:srgbClr val="E0B25B"/>
-            </a:solidFill>
-          </a:ln>
-        </p:spPr>
-      </p:cxnSp>
-      <p:cxnSp>
-        <p:nvCxnSpPr>
-          <p:cNvPr id="125" name="Connector 124"/>
-          <p:cNvCxnSpPr/>
-          <p:nvPr/>
-        </p:nvCxnSpPr>
-        <p:spPr>
-          <a:xfrm flipH="1">
-            <a:off x="6941999" y="5769864"/>
-            <a:ext cx="103453" cy="103452"/>
-          </a:xfrm>
-          <a:prstGeom prst="line">
-            <a:avLst/>
-          </a:prstGeom>
-          <a:ln w="19050">
-            <a:solidFill>
-              <a:srgbClr val="FFD34D"/>
-            </a:solidFill>
-            <a:tailEnd type="triangle" w="med" len="med"/>
-          </a:ln>
-        </p:spPr>
-      </p:cxnSp>
       <p:cxnSp>
         <p:nvCxnSpPr>
           <p:cNvPr id="126" name="Connector 125"/>
@@ -7615,8 +7538,29 @@
           <p:nvPr/>
         </p:nvCxnSpPr>
         <p:spPr>
+          <a:xfrm flipV="1">
+            <a:off x="5449824" y="5559552"/>
+            <a:ext cx="0" cy="219456"/>
+          </a:xfrm>
+          <a:prstGeom prst="line">
+            <a:avLst/>
+          </a:prstGeom>
+          <a:ln w="19050">
+            <a:solidFill>
+              <a:srgbClr val="000000"/>
+            </a:solidFill>
+          </a:ln>
+        </p:spPr>
+      </p:cxnSp>
+      <p:cxnSp>
+        <p:nvCxnSpPr>
+          <p:cNvPr id="127" name="Connector 126"/>
+          <p:cNvCxnSpPr/>
+          <p:nvPr/>
+        </p:nvCxnSpPr>
+        <p:spPr>
           <a:xfrm flipH="1">
-            <a:off x="6841415" y="5769864"/>
+            <a:off x="5478959" y="5769864"/>
             <a:ext cx="103453" cy="103452"/>
           </a:xfrm>
           <a:prstGeom prst="line">
@@ -7630,15 +7574,37 @@
           </a:ln>
         </p:spPr>
       </p:cxnSp>
-      <p:sp>
-        <p:nvSpPr>
-          <p:cNvPr id="127" name="TextBox 126"/>
+      <p:cxnSp>
+        <p:nvCxnSpPr>
+          <p:cNvPr id="128" name="Connector 127"/>
+          <p:cNvCxnSpPr/>
+          <p:nvPr/>
+        </p:nvCxnSpPr>
+        <p:spPr>
+          <a:xfrm flipH="1">
+            <a:off x="5378375" y="5769864"/>
+            <a:ext cx="103453" cy="103452"/>
+          </a:xfrm>
+          <a:prstGeom prst="line">
+            <a:avLst/>
+          </a:prstGeom>
+          <a:ln w="19050">
+            <a:solidFill>
+              <a:srgbClr val="FFD34D"/>
+            </a:solidFill>
+            <a:tailEnd type="triangle" w="med" len="med"/>
+          </a:ln>
+        </p:spPr>
+      </p:cxnSp>
+      <p:sp>
+        <p:nvSpPr>
+          <p:cNvPr id="129" name="TextBox 128"/>
           <p:cNvSpPr txBox="1"/>
           <p:nvPr/>
         </p:nvSpPr>
         <p:spPr>
           <a:xfrm>
-            <a:off x="6766560" y="5422392"/>
+            <a:off x="5303520" y="5422392"/>
             <a:ext cx="457200" cy="146304"/>
           </a:xfrm>
           <a:prstGeom prst="rect">
@@ -7660,62 +7626,31 @@
                 </a:solidFill>
                 <a:latin typeface="Calibri"/>
               </a:rPr>
-              <a:t>LED2</a:t>
-            </a:r>
-          </a:p>
-        </p:txBody>
-      </p:sp>
-      <p:sp>
-        <p:nvSpPr>
-          <p:cNvPr id="128" name="Oval 127"/>
+              <a:t>LED6</a:t>
+            </a:r>
+          </a:p>
+        </p:txBody>
+      </p:sp>
+      <p:sp>
+        <p:nvSpPr>
+          <p:cNvPr id="130" name="Isosceles Triangle 129"/>
           <p:cNvSpPr/>
           <p:nvPr/>
         </p:nvSpPr>
         <p:spPr>
-          <a:xfrm>
-            <a:off x="6473952" y="5623560"/>
-            <a:ext cx="310896" cy="310896"/>
-          </a:xfrm>
-          <a:prstGeom prst="ellipse">
+          <a:xfrm rot="16200000">
+            <a:off x="5065776" y="5586984"/>
+            <a:ext cx="201168" cy="164592"/>
+          </a:xfrm>
+          <a:prstGeom prst="triangle">
             <a:avLst/>
           </a:prstGeom>
           <a:solidFill>
-            <a:srgbClr val="FFD34D">
-              <a:alpha val="22000"/>
-            </a:srgbClr>
-          </a:solidFill>
-          <a:ln>
-            <a:noFill/>
-          </a:ln>
-        </p:spPr>
-        <p:txBody>
-          <a:bodyPr rtlCol="0" anchor="ctr"/>
-          <a:lstStyle/>
-          <a:p>
-            <a:pPr algn="ctr"/>
-          </a:p>
-        </p:txBody>
-      </p:sp>
-      <p:sp>
-        <p:nvSpPr>
-          <p:cNvPr id="129" name="Isosceles Triangle 128"/>
-          <p:cNvSpPr/>
-          <p:nvPr/>
-        </p:nvSpPr>
-        <p:spPr>
-          <a:xfrm rot="16200000">
-            <a:off x="6528816" y="5586984"/>
-            <a:ext cx="201168" cy="164592"/>
-          </a:xfrm>
-          <a:prstGeom prst="triangle">
-            <a:avLst/>
-          </a:prstGeom>
-          <a:solidFill>
-            <a:srgbClr val="FFF1C1"/>
+            <a:srgbClr val="D9D9D9"/>
           </a:solidFill>
           <a:ln w="12700">
             <a:solidFill>
-              <a:srgbClr val="E0B25B"/>
+              <a:srgbClr val="000000"/>
             </a:solidFill>
           </a:ln>
         </p:spPr>
@@ -7727,27 +7662,6 @@
           </a:p>
         </p:txBody>
       </p:sp>
-      <p:cxnSp>
-        <p:nvCxnSpPr>
-          <p:cNvPr id="130" name="Connector 129"/>
-          <p:cNvCxnSpPr/>
-          <p:nvPr/>
-        </p:nvCxnSpPr>
-        <p:spPr>
-          <a:xfrm flipV="1">
-            <a:off x="6547104" y="5559552"/>
-            <a:ext cx="0" cy="219456"/>
-          </a:xfrm>
-          <a:prstGeom prst="line">
-            <a:avLst/>
-          </a:prstGeom>
-          <a:ln w="19050">
-            <a:solidFill>
-              <a:srgbClr val="E0B25B"/>
-            </a:solidFill>
-          </a:ln>
-        </p:spPr>
-      </p:cxnSp>
       <p:cxnSp>
         <p:nvCxnSpPr>
           <p:cNvPr id="131" name="Connector 130"/>
@@ -7755,18 +7669,17 @@
           <p:nvPr/>
         </p:nvCxnSpPr>
         <p:spPr>
-          <a:xfrm flipH="1">
-            <a:off x="6576239" y="5769864"/>
-            <a:ext cx="103453" cy="103452"/>
+          <a:xfrm flipV="1">
+            <a:off x="5084064" y="5559552"/>
+            <a:ext cx="0" cy="219456"/>
           </a:xfrm>
           <a:prstGeom prst="line">
             <a:avLst/>
           </a:prstGeom>
           <a:ln w="19050">
             <a:solidFill>
-              <a:srgbClr val="FFD34D"/>
-            </a:solidFill>
-            <a:tailEnd type="triangle" w="med" len="med"/>
+              <a:srgbClr val="000000"/>
+            </a:solidFill>
           </a:ln>
         </p:spPr>
       </p:cxnSp>
@@ -7778,7 +7691,7 @@
         </p:nvCxnSpPr>
         <p:spPr>
           <a:xfrm flipH="1">
-            <a:off x="6475655" y="5769864"/>
+            <a:off x="5113199" y="5769864"/>
             <a:ext cx="103453" cy="103452"/>
           </a:xfrm>
           <a:prstGeom prst="line">
@@ -7792,15 +7705,37 @@
           </a:ln>
         </p:spPr>
       </p:cxnSp>
-      <p:sp>
-        <p:nvSpPr>
-          <p:cNvPr id="133" name="TextBox 132"/>
+      <p:cxnSp>
+        <p:nvCxnSpPr>
+          <p:cNvPr id="133" name="Connector 132"/>
+          <p:cNvCxnSpPr/>
+          <p:nvPr/>
+        </p:nvCxnSpPr>
+        <p:spPr>
+          <a:xfrm flipH="1">
+            <a:off x="5012615" y="5769864"/>
+            <a:ext cx="103453" cy="103452"/>
+          </a:xfrm>
+          <a:prstGeom prst="line">
+            <a:avLst/>
+          </a:prstGeom>
+          <a:ln w="19050">
+            <a:solidFill>
+              <a:srgbClr val="FFD34D"/>
+            </a:solidFill>
+            <a:tailEnd type="triangle" w="med" len="med"/>
+          </a:ln>
+        </p:spPr>
+      </p:cxnSp>
+      <p:sp>
+        <p:nvSpPr>
+          <p:cNvPr id="134" name="TextBox 133"/>
           <p:cNvSpPr txBox="1"/>
           <p:nvPr/>
         </p:nvSpPr>
         <p:spPr>
           <a:xfrm>
-            <a:off x="6400800" y="5422392"/>
+            <a:off x="4937760" y="5422392"/>
             <a:ext cx="457200" cy="146304"/>
           </a:xfrm>
           <a:prstGeom prst="rect">
@@ -7822,39 +7757,8 @@
                 </a:solidFill>
                 <a:latin typeface="Calibri"/>
               </a:rPr>
-              <a:t>LED3</a:t>
-            </a:r>
-          </a:p>
-        </p:txBody>
-      </p:sp>
-      <p:sp>
-        <p:nvSpPr>
-          <p:cNvPr id="134" name="Oval 133"/>
-          <p:cNvSpPr/>
-          <p:nvPr/>
-        </p:nvSpPr>
-        <p:spPr>
-          <a:xfrm>
-            <a:off x="6108192" y="5623560"/>
-            <a:ext cx="310896" cy="310896"/>
-          </a:xfrm>
-          <a:prstGeom prst="ellipse">
-            <a:avLst/>
-          </a:prstGeom>
-          <a:solidFill>
-            <a:srgbClr val="FFD34D">
-              <a:alpha val="22000"/>
-            </a:srgbClr>
-          </a:solidFill>
-          <a:ln>
-            <a:noFill/>
-          </a:ln>
-        </p:spPr>
-        <p:txBody>
-          <a:bodyPr rtlCol="0" anchor="ctr"/>
-          <a:lstStyle/>
-          <a:p>
-            <a:pPr algn="ctr"/>
+              <a:t>LED7</a:t>
+            </a:r>
           </a:p>
         </p:txBody>
       </p:sp>
@@ -7866,18 +7770,18 @@
         </p:nvSpPr>
         <p:spPr>
           <a:xfrm rot="16200000">
-            <a:off x="6163055" y="5586984"/>
+            <a:off x="4700016" y="5586984"/>
             <a:ext cx="201168" cy="164592"/>
           </a:xfrm>
           <a:prstGeom prst="triangle">
             <a:avLst/>
           </a:prstGeom>
           <a:solidFill>
-            <a:srgbClr val="FFF1C1"/>
+            <a:srgbClr val="D9D9D9"/>
           </a:solidFill>
           <a:ln w="12700">
             <a:solidFill>
-              <a:srgbClr val="E0B25B"/>
+              <a:srgbClr val="000000"/>
             </a:solidFill>
           </a:ln>
         </p:spPr>
@@ -7897,7 +7801,7 @@
         </p:nvCxnSpPr>
         <p:spPr>
           <a:xfrm flipV="1">
-            <a:off x="6181344" y="5559552"/>
+            <a:off x="4718304" y="5559552"/>
             <a:ext cx="0" cy="219456"/>
           </a:xfrm>
           <a:prstGeom prst="line">
@@ -7905,7 +7809,7 @@
           </a:prstGeom>
           <a:ln w="19050">
             <a:solidFill>
-              <a:srgbClr val="E0B25B"/>
+              <a:srgbClr val="000000"/>
             </a:solidFill>
           </a:ln>
         </p:spPr>
@@ -7918,8 +7822,8 @@
         </p:nvCxnSpPr>
         <p:spPr>
           <a:xfrm flipH="1">
-            <a:off x="6210479" y="5769864"/>
-            <a:ext cx="103452" cy="103452"/>
+            <a:off x="4747439" y="5769864"/>
+            <a:ext cx="103453" cy="103452"/>
           </a:xfrm>
           <a:prstGeom prst="line">
             <a:avLst/>
@@ -7940,7 +7844,7 @@
         </p:nvCxnSpPr>
         <p:spPr>
           <a:xfrm flipH="1">
-            <a:off x="6109895" y="5769864"/>
+            <a:off x="4646855" y="5769864"/>
             <a:ext cx="103453" cy="103452"/>
           </a:xfrm>
           <a:prstGeom prst="line">
@@ -7962,7 +7866,7 @@
         </p:nvSpPr>
         <p:spPr>
           <a:xfrm>
-            <a:off x="6035040" y="5422392"/>
+            <a:off x="4572000" y="5422392"/>
             <a:ext cx="457200" cy="146304"/>
           </a:xfrm>
           <a:prstGeom prst="rect">
@@ -7984,32 +7888,190 @@
                 </a:solidFill>
                 <a:latin typeface="Calibri"/>
               </a:rPr>
-              <a:t>LED4</a:t>
-            </a:r>
-          </a:p>
-        </p:txBody>
-      </p:sp>
-      <p:sp>
-        <p:nvSpPr>
-          <p:cNvPr id="140" name="Oval 139"/>
+              <a:t>LED8</a:t>
+            </a:r>
+          </a:p>
+        </p:txBody>
+      </p:sp>
+      <p:sp>
+        <p:nvSpPr>
+          <p:cNvPr id="140" name="TextBox 139"/>
+          <p:cNvSpPr txBox="1"/>
+          <p:nvPr/>
+        </p:nvSpPr>
+        <p:spPr>
+          <a:xfrm>
+            <a:off x="4480560" y="1170432"/>
+            <a:ext cx="3200400" cy="310896"/>
+          </a:xfrm>
+          <a:prstGeom prst="rect">
+            <a:avLst/>
+          </a:prstGeom>
+          <a:noFill/>
+        </p:spPr>
+        <p:txBody>
+          <a:bodyPr wrap="square" lIns="0" rIns="0" tIns="0" bIns="0" anchor="b">
+            <a:spAutoFit/>
+          </a:bodyPr>
+          <a:lstStyle/>
+          <a:p>
+            <a:pPr algn="ctr"/>
+            <a:r>
+              <a:rPr sz="1400" b="1" i="0">
+                <a:solidFill>
+                  <a:srgbClr val="EAF0F6"/>
+                </a:solidFill>
+                <a:latin typeface="Calibri"/>
+              </a:rPr>
+              <a:t>DRL PCB 1</a:t>
+            </a:r>
+            <a:r>
+              <a:rPr sz="1100" b="0" i="0">
+                <a:solidFill>
+                  <a:srgbClr val="FFD34D"/>
+                </a:solidFill>
+                <a:latin typeface="Calibri"/>
+              </a:rPr>
+              <a:t>   light ↑</a:t>
+            </a:r>
+          </a:p>
+        </p:txBody>
+      </p:sp>
+      <p:sp>
+        <p:nvSpPr>
+          <p:cNvPr id="141" name="TextBox 140"/>
+          <p:cNvSpPr txBox="1"/>
+          <p:nvPr/>
+        </p:nvSpPr>
+        <p:spPr>
+          <a:xfrm>
+            <a:off x="4480560" y="6016752"/>
+            <a:ext cx="3200400" cy="310896"/>
+          </a:xfrm>
+          <a:prstGeom prst="rect">
+            <a:avLst/>
+          </a:prstGeom>
+          <a:noFill/>
+        </p:spPr>
+        <p:txBody>
+          <a:bodyPr wrap="square" lIns="0" rIns="0" tIns="0" bIns="0" anchor="t">
+            <a:spAutoFit/>
+          </a:bodyPr>
+          <a:lstStyle/>
+          <a:p>
+            <a:pPr algn="ctr"/>
+            <a:r>
+              <a:rPr sz="1400" b="1" i="0">
+                <a:solidFill>
+                  <a:srgbClr val="EAF0F6"/>
+                </a:solidFill>
+                <a:latin typeface="Calibri"/>
+              </a:rPr>
+              <a:t>DRL PCB 3</a:t>
+            </a:r>
+            <a:r>
+              <a:rPr sz="1100" b="0" i="0">
+                <a:solidFill>
+                  <a:srgbClr val="FFD34D"/>
+                </a:solidFill>
+                <a:latin typeface="Calibri"/>
+              </a:rPr>
+              <a:t>   light ↓</a:t>
+            </a:r>
+          </a:p>
+        </p:txBody>
+      </p:sp>
+      <p:sp>
+        <p:nvSpPr>
+          <p:cNvPr id="142" name="TextBox 141"/>
+          <p:cNvSpPr txBox="1"/>
+          <p:nvPr/>
+        </p:nvSpPr>
+        <p:spPr>
+          <a:xfrm rot="16200000">
+            <a:off x="6153912" y="3593591"/>
+            <a:ext cx="2560320" cy="310896"/>
+          </a:xfrm>
+          <a:prstGeom prst="rect">
+            <a:avLst/>
+          </a:prstGeom>
+          <a:noFill/>
+        </p:spPr>
+        <p:txBody>
+          <a:bodyPr wrap="square" lIns="0" rIns="0" tIns="0" bIns="0" anchor="ctr">
+            <a:spAutoFit/>
+          </a:bodyPr>
+          <a:lstStyle/>
+          <a:p>
+            <a:pPr algn="ctr"/>
+            <a:r>
+              <a:rPr sz="1400" b="1" i="0">
+                <a:solidFill>
+                  <a:srgbClr val="EAF0F6"/>
+                </a:solidFill>
+                <a:latin typeface="Calibri"/>
+              </a:rPr>
+              <a:t>DRL PCB 2</a:t>
+            </a:r>
+          </a:p>
+        </p:txBody>
+      </p:sp>
+      <p:sp>
+        <p:nvSpPr>
+          <p:cNvPr id="143" name="TextBox 142"/>
+          <p:cNvSpPr txBox="1"/>
+          <p:nvPr/>
+        </p:nvSpPr>
+        <p:spPr>
+          <a:xfrm>
+            <a:off x="6766560" y="4434840"/>
+            <a:ext cx="822960" cy="274320"/>
+          </a:xfrm>
+          <a:prstGeom prst="rect">
+            <a:avLst/>
+          </a:prstGeom>
+          <a:noFill/>
+        </p:spPr>
+        <p:txBody>
+          <a:bodyPr wrap="square" lIns="0" rIns="0" tIns="0" bIns="0" anchor="t">
+            <a:spAutoFit/>
+          </a:bodyPr>
+          <a:lstStyle/>
+          <a:p>
+            <a:pPr algn="r"/>
+            <a:r>
+              <a:rPr sz="1100" b="0" i="0">
+                <a:solidFill>
+                  <a:srgbClr val="FFD34D"/>
+                </a:solidFill>
+                <a:latin typeface="Calibri"/>
+              </a:rPr>
+              <a:t>light →</a:t>
+            </a:r>
+          </a:p>
+        </p:txBody>
+      </p:sp>
+      <p:sp>
+        <p:nvSpPr>
+          <p:cNvPr id="144" name="Rounded Rectangle 143"/>
           <p:cNvSpPr/>
           <p:nvPr/>
         </p:nvSpPr>
         <p:spPr>
           <a:xfrm>
-            <a:off x="5742432" y="5623560"/>
-            <a:ext cx="310896" cy="310896"/>
-          </a:xfrm>
-          <a:prstGeom prst="ellipse">
+            <a:off x="8302752" y="2103120"/>
+            <a:ext cx="118872" cy="3291840"/>
+          </a:xfrm>
+          <a:prstGeom prst="roundRect">
             <a:avLst/>
           </a:prstGeom>
           <a:solidFill>
-            <a:srgbClr val="FFD34D">
-              <a:alpha val="22000"/>
-            </a:srgbClr>
+            <a:srgbClr val="4A6FA5"/>
           </a:solidFill>
-          <a:ln>
-            <a:noFill/>
+          <a:ln w="9525">
+            <a:solidFill>
+              <a:srgbClr val="7FA7C9"/>
+            </a:solidFill>
           </a:ln>
         </p:spPr>
         <p:txBody>
@@ -8022,24 +8084,24 @@
       </p:sp>
       <p:sp>
         <p:nvSpPr>
-          <p:cNvPr id="141" name="Isosceles Triangle 140"/>
+          <p:cNvPr id="145" name="Rounded Rectangle 144"/>
           <p:cNvSpPr/>
           <p:nvPr/>
         </p:nvSpPr>
         <p:spPr>
-          <a:xfrm rot="16200000">
-            <a:off x="5797296" y="5586984"/>
-            <a:ext cx="201168" cy="164592"/>
-          </a:xfrm>
-          <a:prstGeom prst="triangle">
+          <a:xfrm>
+            <a:off x="10149840" y="2103120"/>
+            <a:ext cx="118872" cy="3291840"/>
+          </a:xfrm>
+          <a:prstGeom prst="roundRect">
             <a:avLst/>
           </a:prstGeom>
           <a:solidFill>
-            <a:srgbClr val="FFF1C1"/>
+            <a:srgbClr val="4A6FA5"/>
           </a:solidFill>
-          <a:ln w="12700">
-            <a:solidFill>
-              <a:srgbClr val="E0B25B"/>
+          <a:ln w="9525">
+            <a:solidFill>
+              <a:srgbClr val="7FA7C9"/>
             </a:solidFill>
           </a:ln>
         </p:spPr>
@@ -8053,166 +8115,46 @@
       </p:sp>
       <p:cxnSp>
         <p:nvCxnSpPr>
-          <p:cNvPr id="142" name="Connector 141"/>
+          <p:cNvPr id="146" name="Connector 145"/>
           <p:cNvCxnSpPr/>
           <p:nvPr/>
         </p:nvCxnSpPr>
         <p:spPr>
-          <a:xfrm flipV="1">
-            <a:off x="5815584" y="5559552"/>
-            <a:ext cx="0" cy="219456"/>
+          <a:xfrm>
+            <a:off x="8421624" y="2468880"/>
+            <a:ext cx="1728216" cy="0"/>
           </a:xfrm>
           <a:prstGeom prst="line">
             <a:avLst/>
           </a:prstGeom>
-          <a:ln w="19050">
-            <a:solidFill>
-              <a:srgbClr val="E0B25B"/>
+          <a:ln w="15875">
+            <a:solidFill>
+              <a:srgbClr val="7FA7C9"/>
             </a:solidFill>
           </a:ln>
         </p:spPr>
       </p:cxnSp>
       <p:cxnSp>
         <p:nvCxnSpPr>
-          <p:cNvPr id="143" name="Connector 142"/>
+          <p:cNvPr id="147" name="Connector 146"/>
           <p:cNvCxnSpPr/>
           <p:nvPr/>
         </p:nvCxnSpPr>
         <p:spPr>
-          <a:xfrm flipH="1">
-            <a:off x="5844719" y="5769864"/>
-            <a:ext cx="103453" cy="103452"/>
+          <a:xfrm>
+            <a:off x="8421624" y="2834640"/>
+            <a:ext cx="1728216" cy="0"/>
           </a:xfrm>
           <a:prstGeom prst="line">
             <a:avLst/>
           </a:prstGeom>
-          <a:ln w="19050">
-            <a:solidFill>
-              <a:srgbClr val="FFD34D"/>
-            </a:solidFill>
-            <a:tailEnd type="triangle" w="med" len="med"/>
+          <a:ln w="15875">
+            <a:solidFill>
+              <a:srgbClr val="7FA7C9"/>
+            </a:solidFill>
           </a:ln>
         </p:spPr>
       </p:cxnSp>
-      <p:cxnSp>
-        <p:nvCxnSpPr>
-          <p:cNvPr id="144" name="Connector 143"/>
-          <p:cNvCxnSpPr/>
-          <p:nvPr/>
-        </p:nvCxnSpPr>
-        <p:spPr>
-          <a:xfrm flipH="1">
-            <a:off x="5744135" y="5769864"/>
-            <a:ext cx="103453" cy="103452"/>
-          </a:xfrm>
-          <a:prstGeom prst="line">
-            <a:avLst/>
-          </a:prstGeom>
-          <a:ln w="19050">
-            <a:solidFill>
-              <a:srgbClr val="FFD34D"/>
-            </a:solidFill>
-            <a:tailEnd type="triangle" w="med" len="med"/>
-          </a:ln>
-        </p:spPr>
-      </p:cxnSp>
-      <p:sp>
-        <p:nvSpPr>
-          <p:cNvPr id="145" name="TextBox 144"/>
-          <p:cNvSpPr txBox="1"/>
-          <p:nvPr/>
-        </p:nvSpPr>
-        <p:spPr>
-          <a:xfrm>
-            <a:off x="5669280" y="5422392"/>
-            <a:ext cx="457200" cy="146304"/>
-          </a:xfrm>
-          <a:prstGeom prst="rect">
-            <a:avLst/>
-          </a:prstGeom>
-          <a:noFill/>
-        </p:spPr>
-        <p:txBody>
-          <a:bodyPr wrap="square" lIns="0" rIns="0" tIns="0" bIns="0" anchor="ctr">
-            <a:spAutoFit/>
-          </a:bodyPr>
-          <a:lstStyle/>
-          <a:p>
-            <a:pPr algn="ctr"/>
-            <a:r>
-              <a:rPr sz="700" b="0" i="0">
-                <a:solidFill>
-                  <a:srgbClr val="EAF0F6"/>
-                </a:solidFill>
-                <a:latin typeface="Calibri"/>
-              </a:rPr>
-              <a:t>LED5</a:t>
-            </a:r>
-          </a:p>
-        </p:txBody>
-      </p:sp>
-      <p:sp>
-        <p:nvSpPr>
-          <p:cNvPr id="146" name="Oval 145"/>
-          <p:cNvSpPr/>
-          <p:nvPr/>
-        </p:nvSpPr>
-        <p:spPr>
-          <a:xfrm>
-            <a:off x="5376672" y="5623560"/>
-            <a:ext cx="310896" cy="310896"/>
-          </a:xfrm>
-          <a:prstGeom prst="ellipse">
-            <a:avLst/>
-          </a:prstGeom>
-          <a:solidFill>
-            <a:srgbClr val="FFD34D">
-              <a:alpha val="22000"/>
-            </a:srgbClr>
-          </a:solidFill>
-          <a:ln>
-            <a:noFill/>
-          </a:ln>
-        </p:spPr>
-        <p:txBody>
-          <a:bodyPr rtlCol="0" anchor="ctr"/>
-          <a:lstStyle/>
-          <a:p>
-            <a:pPr algn="ctr"/>
-          </a:p>
-        </p:txBody>
-      </p:sp>
-      <p:sp>
-        <p:nvSpPr>
-          <p:cNvPr id="147" name="Isosceles Triangle 146"/>
-          <p:cNvSpPr/>
-          <p:nvPr/>
-        </p:nvSpPr>
-        <p:spPr>
-          <a:xfrm rot="16200000">
-            <a:off x="5431536" y="5586984"/>
-            <a:ext cx="201168" cy="164592"/>
-          </a:xfrm>
-          <a:prstGeom prst="triangle">
-            <a:avLst/>
-          </a:prstGeom>
-          <a:solidFill>
-            <a:srgbClr val="FFF1C1"/>
-          </a:solidFill>
-          <a:ln w="12700">
-            <a:solidFill>
-              <a:srgbClr val="E0B25B"/>
-            </a:solidFill>
-          </a:ln>
-        </p:spPr>
-        <p:txBody>
-          <a:bodyPr rtlCol="0" anchor="ctr"/>
-          <a:lstStyle/>
-          <a:p>
-            <a:pPr algn="ctr"/>
-          </a:p>
-        </p:txBody>
-      </p:sp>
       <p:cxnSp>
         <p:nvCxnSpPr>
           <p:cNvPr id="148" name="Connector 147"/>
@@ -8220,16 +8162,16 @@
           <p:nvPr/>
         </p:nvCxnSpPr>
         <p:spPr>
-          <a:xfrm flipV="1">
-            <a:off x="5449824" y="5559552"/>
-            <a:ext cx="0" cy="219456"/>
+          <a:xfrm>
+            <a:off x="8421624" y="3200400"/>
+            <a:ext cx="1728216" cy="0"/>
           </a:xfrm>
           <a:prstGeom prst="line">
             <a:avLst/>
           </a:prstGeom>
-          <a:ln w="19050">
-            <a:solidFill>
-              <a:srgbClr val="E0B25B"/>
+          <a:ln w="15875">
+            <a:solidFill>
+              <a:srgbClr val="7FA7C9"/>
             </a:solidFill>
           </a:ln>
         </p:spPr>
@@ -8241,18 +8183,17 @@
           <p:nvPr/>
         </p:nvCxnSpPr>
         <p:spPr>
-          <a:xfrm flipH="1">
-            <a:off x="5478959" y="5769864"/>
-            <a:ext cx="103453" cy="103452"/>
+          <a:xfrm>
+            <a:off x="8421624" y="3566160"/>
+            <a:ext cx="1728216" cy="0"/>
           </a:xfrm>
           <a:prstGeom prst="line">
             <a:avLst/>
           </a:prstGeom>
-          <a:ln w="19050">
-            <a:solidFill>
-              <a:srgbClr val="FFD34D"/>
-            </a:solidFill>
-            <a:tailEnd type="triangle" w="med" len="med"/>
+          <a:ln w="15875">
+            <a:solidFill>
+              <a:srgbClr val="7FA7C9"/>
+            </a:solidFill>
           </a:ln>
         </p:spPr>
       </p:cxnSp>
@@ -8263,434 +8204,93 @@
           <p:nvPr/>
         </p:nvCxnSpPr>
         <p:spPr>
-          <a:xfrm flipH="1">
-            <a:off x="5378375" y="5769864"/>
-            <a:ext cx="103453" cy="103452"/>
+          <a:xfrm>
+            <a:off x="8421624" y="3931920"/>
+            <a:ext cx="1728216" cy="0"/>
           </a:xfrm>
           <a:prstGeom prst="line">
             <a:avLst/>
           </a:prstGeom>
-          <a:ln w="19050">
-            <a:solidFill>
-              <a:srgbClr val="FFD34D"/>
-            </a:solidFill>
-            <a:tailEnd type="triangle" w="med" len="med"/>
-          </a:ln>
-        </p:spPr>
-      </p:cxnSp>
-      <p:sp>
-        <p:nvSpPr>
-          <p:cNvPr id="151" name="TextBox 150"/>
-          <p:cNvSpPr txBox="1"/>
-          <p:nvPr/>
-        </p:nvSpPr>
-        <p:spPr>
-          <a:xfrm>
-            <a:off x="5303520" y="5422392"/>
-            <a:ext cx="457200" cy="146304"/>
-          </a:xfrm>
-          <a:prstGeom prst="rect">
-            <a:avLst/>
-          </a:prstGeom>
-          <a:noFill/>
-        </p:spPr>
-        <p:txBody>
-          <a:bodyPr wrap="square" lIns="0" rIns="0" tIns="0" bIns="0" anchor="ctr">
-            <a:spAutoFit/>
-          </a:bodyPr>
-          <a:lstStyle/>
-          <a:p>
-            <a:pPr algn="ctr"/>
-            <a:r>
-              <a:rPr sz="700" b="0" i="0">
-                <a:solidFill>
-                  <a:srgbClr val="EAF0F6"/>
-                </a:solidFill>
-                <a:latin typeface="Calibri"/>
-              </a:rPr>
-              <a:t>LED6</a:t>
-            </a:r>
-          </a:p>
-        </p:txBody>
-      </p:sp>
-      <p:sp>
-        <p:nvSpPr>
-          <p:cNvPr id="152" name="Oval 151"/>
-          <p:cNvSpPr/>
-          <p:nvPr/>
-        </p:nvSpPr>
-        <p:spPr>
-          <a:xfrm>
-            <a:off x="5010912" y="5623560"/>
-            <a:ext cx="310896" cy="310896"/>
-          </a:xfrm>
-          <a:prstGeom prst="ellipse">
-            <a:avLst/>
-          </a:prstGeom>
-          <a:solidFill>
-            <a:srgbClr val="FFD34D">
-              <a:alpha val="22000"/>
-            </a:srgbClr>
-          </a:solidFill>
-          <a:ln>
-            <a:noFill/>
-          </a:ln>
-        </p:spPr>
-        <p:txBody>
-          <a:bodyPr rtlCol="0" anchor="ctr"/>
-          <a:lstStyle/>
-          <a:p>
-            <a:pPr algn="ctr"/>
-          </a:p>
-        </p:txBody>
-      </p:sp>
-      <p:sp>
-        <p:nvSpPr>
-          <p:cNvPr id="153" name="Isosceles Triangle 152"/>
-          <p:cNvSpPr/>
-          <p:nvPr/>
-        </p:nvSpPr>
-        <p:spPr>
-          <a:xfrm rot="16200000">
-            <a:off x="5065776" y="5586984"/>
-            <a:ext cx="201168" cy="164592"/>
-          </a:xfrm>
-          <a:prstGeom prst="triangle">
-            <a:avLst/>
-          </a:prstGeom>
-          <a:solidFill>
-            <a:srgbClr val="FFF1C1"/>
-          </a:solidFill>
-          <a:ln w="12700">
-            <a:solidFill>
-              <a:srgbClr val="E0B25B"/>
-            </a:solidFill>
-          </a:ln>
-        </p:spPr>
-        <p:txBody>
-          <a:bodyPr rtlCol="0" anchor="ctr"/>
-          <a:lstStyle/>
-          <a:p>
-            <a:pPr algn="ctr"/>
-          </a:p>
-        </p:txBody>
-      </p:sp>
-      <p:cxnSp>
-        <p:nvCxnSpPr>
-          <p:cNvPr id="154" name="Connector 153"/>
-          <p:cNvCxnSpPr/>
-          <p:nvPr/>
-        </p:nvCxnSpPr>
-        <p:spPr>
-          <a:xfrm flipV="1">
-            <a:off x="5084064" y="5559552"/>
-            <a:ext cx="0" cy="219456"/>
-          </a:xfrm>
-          <a:prstGeom prst="line">
-            <a:avLst/>
-          </a:prstGeom>
-          <a:ln w="19050">
-            <a:solidFill>
-              <a:srgbClr val="E0B25B"/>
+          <a:ln w="15875">
+            <a:solidFill>
+              <a:srgbClr val="7FA7C9"/>
             </a:solidFill>
           </a:ln>
         </p:spPr>
       </p:cxnSp>
       <p:cxnSp>
         <p:nvCxnSpPr>
-          <p:cNvPr id="155" name="Connector 154"/>
+          <p:cNvPr id="151" name="Connector 150"/>
           <p:cNvCxnSpPr/>
           <p:nvPr/>
         </p:nvCxnSpPr>
         <p:spPr>
-          <a:xfrm flipH="1">
-            <a:off x="5113199" y="5769864"/>
-            <a:ext cx="103453" cy="103452"/>
+          <a:xfrm>
+            <a:off x="8421624" y="4297680"/>
+            <a:ext cx="1728216" cy="0"/>
           </a:xfrm>
           <a:prstGeom prst="line">
             <a:avLst/>
           </a:prstGeom>
-          <a:ln w="19050">
-            <a:solidFill>
-              <a:srgbClr val="FFD34D"/>
-            </a:solidFill>
-            <a:tailEnd type="triangle" w="med" len="med"/>
+          <a:ln w="15875">
+            <a:solidFill>
+              <a:srgbClr val="7FA7C9"/>
+            </a:solidFill>
           </a:ln>
         </p:spPr>
       </p:cxnSp>
       <p:cxnSp>
         <p:nvCxnSpPr>
-          <p:cNvPr id="156" name="Connector 155"/>
+          <p:cNvPr id="152" name="Connector 151"/>
           <p:cNvCxnSpPr/>
           <p:nvPr/>
         </p:nvCxnSpPr>
         <p:spPr>
-          <a:xfrm flipH="1">
-            <a:off x="5012615" y="5769864"/>
-            <a:ext cx="103453" cy="103452"/>
+          <a:xfrm>
+            <a:off x="8421624" y="4663440"/>
+            <a:ext cx="1728216" cy="0"/>
           </a:xfrm>
           <a:prstGeom prst="line">
             <a:avLst/>
           </a:prstGeom>
-          <a:ln w="19050">
-            <a:solidFill>
-              <a:srgbClr val="FFD34D"/>
-            </a:solidFill>
-            <a:tailEnd type="triangle" w="med" len="med"/>
-          </a:ln>
-        </p:spPr>
-      </p:cxnSp>
-      <p:sp>
-        <p:nvSpPr>
-          <p:cNvPr id="157" name="TextBox 156"/>
-          <p:cNvSpPr txBox="1"/>
-          <p:nvPr/>
-        </p:nvSpPr>
-        <p:spPr>
-          <a:xfrm>
-            <a:off x="4937760" y="5422392"/>
-            <a:ext cx="457200" cy="146304"/>
-          </a:xfrm>
-          <a:prstGeom prst="rect">
-            <a:avLst/>
-          </a:prstGeom>
-          <a:noFill/>
-        </p:spPr>
-        <p:txBody>
-          <a:bodyPr wrap="square" lIns="0" rIns="0" tIns="0" bIns="0" anchor="ctr">
-            <a:spAutoFit/>
-          </a:bodyPr>
-          <a:lstStyle/>
-          <a:p>
-            <a:pPr algn="ctr"/>
-            <a:r>
-              <a:rPr sz="700" b="0" i="0">
-                <a:solidFill>
-                  <a:srgbClr val="EAF0F6"/>
-                </a:solidFill>
-                <a:latin typeface="Calibri"/>
-              </a:rPr>
-              <a:t>LED7</a:t>
-            </a:r>
-          </a:p>
-        </p:txBody>
-      </p:sp>
-      <p:sp>
-        <p:nvSpPr>
-          <p:cNvPr id="158" name="Oval 157"/>
-          <p:cNvSpPr/>
-          <p:nvPr/>
-        </p:nvSpPr>
-        <p:spPr>
-          <a:xfrm>
-            <a:off x="4645152" y="5623560"/>
-            <a:ext cx="310896" cy="310896"/>
-          </a:xfrm>
-          <a:prstGeom prst="ellipse">
-            <a:avLst/>
-          </a:prstGeom>
-          <a:solidFill>
-            <a:srgbClr val="FFD34D">
-              <a:alpha val="22000"/>
-            </a:srgbClr>
-          </a:solidFill>
-          <a:ln>
-            <a:noFill/>
-          </a:ln>
-        </p:spPr>
-        <p:txBody>
-          <a:bodyPr rtlCol="0" anchor="ctr"/>
-          <a:lstStyle/>
-          <a:p>
-            <a:pPr algn="ctr"/>
-          </a:p>
-        </p:txBody>
-      </p:sp>
-      <p:sp>
-        <p:nvSpPr>
-          <p:cNvPr id="159" name="Isosceles Triangle 158"/>
-          <p:cNvSpPr/>
-          <p:nvPr/>
-        </p:nvSpPr>
-        <p:spPr>
-          <a:xfrm rot="16200000">
-            <a:off x="4700016" y="5586984"/>
-            <a:ext cx="201168" cy="164592"/>
-          </a:xfrm>
-          <a:prstGeom prst="triangle">
-            <a:avLst/>
-          </a:prstGeom>
-          <a:solidFill>
-            <a:srgbClr val="FFF1C1"/>
-          </a:solidFill>
-          <a:ln w="12700">
-            <a:solidFill>
-              <a:srgbClr val="E0B25B"/>
-            </a:solidFill>
-          </a:ln>
-        </p:spPr>
-        <p:txBody>
-          <a:bodyPr rtlCol="0" anchor="ctr"/>
-          <a:lstStyle/>
-          <a:p>
-            <a:pPr algn="ctr"/>
-          </a:p>
-        </p:txBody>
-      </p:sp>
-      <p:cxnSp>
-        <p:nvCxnSpPr>
-          <p:cNvPr id="160" name="Connector 159"/>
-          <p:cNvCxnSpPr/>
-          <p:nvPr/>
-        </p:nvCxnSpPr>
-        <p:spPr>
-          <a:xfrm flipV="1">
-            <a:off x="4718304" y="5559552"/>
-            <a:ext cx="0" cy="219456"/>
-          </a:xfrm>
-          <a:prstGeom prst="line">
-            <a:avLst/>
-          </a:prstGeom>
-          <a:ln w="19050">
-            <a:solidFill>
-              <a:srgbClr val="E0B25B"/>
+          <a:ln w="15875">
+            <a:solidFill>
+              <a:srgbClr val="7FA7C9"/>
             </a:solidFill>
           </a:ln>
         </p:spPr>
       </p:cxnSp>
       <p:cxnSp>
         <p:nvCxnSpPr>
-          <p:cNvPr id="161" name="Connector 160"/>
+          <p:cNvPr id="153" name="Connector 152"/>
           <p:cNvCxnSpPr/>
           <p:nvPr/>
         </p:nvCxnSpPr>
         <p:spPr>
-          <a:xfrm flipH="1">
-            <a:off x="4747439" y="5769864"/>
-            <a:ext cx="103453" cy="103452"/>
+          <a:xfrm>
+            <a:off x="8421624" y="5029200"/>
+            <a:ext cx="1728216" cy="0"/>
           </a:xfrm>
           <a:prstGeom prst="line">
             <a:avLst/>
           </a:prstGeom>
-          <a:ln w="19050">
-            <a:solidFill>
-              <a:srgbClr val="FFD34D"/>
-            </a:solidFill>
-            <a:tailEnd type="triangle" w="med" len="med"/>
+          <a:ln w="15875">
+            <a:solidFill>
+              <a:srgbClr val="7FA7C9"/>
+            </a:solidFill>
           </a:ln>
         </p:spPr>
       </p:cxnSp>
-      <p:cxnSp>
-        <p:nvCxnSpPr>
-          <p:cNvPr id="162" name="Connector 161"/>
-          <p:cNvCxnSpPr/>
-          <p:nvPr/>
-        </p:nvCxnSpPr>
-        <p:spPr>
-          <a:xfrm flipH="1">
-            <a:off x="4646855" y="5769864"/>
-            <a:ext cx="103453" cy="103452"/>
-          </a:xfrm>
-          <a:prstGeom prst="line">
-            <a:avLst/>
-          </a:prstGeom>
-          <a:ln w="19050">
-            <a:solidFill>
-              <a:srgbClr val="FFD34D"/>
-            </a:solidFill>
-            <a:tailEnd type="triangle" w="med" len="med"/>
-          </a:ln>
-        </p:spPr>
-      </p:cxnSp>
-      <p:sp>
-        <p:nvSpPr>
-          <p:cNvPr id="163" name="TextBox 162"/>
+      <p:sp>
+        <p:nvSpPr>
+          <p:cNvPr id="154" name="TextBox 153"/>
           <p:cNvSpPr txBox="1"/>
           <p:nvPr/>
         </p:nvSpPr>
         <p:spPr>
           <a:xfrm>
-            <a:off x="4572000" y="5422392"/>
-            <a:ext cx="457200" cy="146304"/>
-          </a:xfrm>
-          <a:prstGeom prst="rect">
-            <a:avLst/>
-          </a:prstGeom>
-          <a:noFill/>
-        </p:spPr>
-        <p:txBody>
-          <a:bodyPr wrap="square" lIns="0" rIns="0" tIns="0" bIns="0" anchor="ctr">
-            <a:spAutoFit/>
-          </a:bodyPr>
-          <a:lstStyle/>
-          <a:p>
-            <a:pPr algn="ctr"/>
-            <a:r>
-              <a:rPr sz="700" b="0" i="0">
-                <a:solidFill>
-                  <a:srgbClr val="EAF0F6"/>
-                </a:solidFill>
-                <a:latin typeface="Calibri"/>
-              </a:rPr>
-              <a:t>LED8</a:t>
-            </a:r>
-          </a:p>
-        </p:txBody>
-      </p:sp>
-      <p:sp>
-        <p:nvSpPr>
-          <p:cNvPr id="164" name="TextBox 163"/>
-          <p:cNvSpPr txBox="1"/>
-          <p:nvPr/>
-        </p:nvSpPr>
-        <p:spPr>
-          <a:xfrm>
-            <a:off x="4480560" y="1170432"/>
-            <a:ext cx="3200400" cy="310896"/>
-          </a:xfrm>
-          <a:prstGeom prst="rect">
-            <a:avLst/>
-          </a:prstGeom>
-          <a:noFill/>
-        </p:spPr>
-        <p:txBody>
-          <a:bodyPr wrap="square" lIns="0" rIns="0" tIns="0" bIns="0" anchor="b">
-            <a:spAutoFit/>
-          </a:bodyPr>
-          <a:lstStyle/>
-          <a:p>
-            <a:pPr algn="ctr"/>
-            <a:r>
-              <a:rPr sz="1400" b="1" i="0">
-                <a:solidFill>
-                  <a:srgbClr val="EAF0F6"/>
-                </a:solidFill>
-                <a:latin typeface="Calibri"/>
-              </a:rPr>
-              <a:t>DRL PCB 1</a:t>
-            </a:r>
-            <a:r>
-              <a:rPr sz="1100" b="0" i="0">
-                <a:solidFill>
-                  <a:srgbClr val="FFD34D"/>
-                </a:solidFill>
-                <a:latin typeface="Calibri"/>
-              </a:rPr>
-              <a:t>   light ↑</a:t>
-            </a:r>
-          </a:p>
-        </p:txBody>
-      </p:sp>
-      <p:sp>
-        <p:nvSpPr>
-          <p:cNvPr id="165" name="TextBox 164"/>
-          <p:cNvSpPr txBox="1"/>
-          <p:nvPr/>
-        </p:nvSpPr>
-        <p:spPr>
-          <a:xfrm>
-            <a:off x="4480560" y="6016752"/>
-            <a:ext cx="3200400" cy="310896"/>
+            <a:off x="8421624" y="1773936"/>
+            <a:ext cx="1728215" cy="274320"/>
           </a:xfrm>
           <a:prstGeom prst="rect">
             <a:avLst/>
@@ -8705,350 +8305,6 @@
           <a:p>
             <a:pPr algn="ctr"/>
             <a:r>
-              <a:rPr sz="1400" b="1" i="0">
-                <a:solidFill>
-                  <a:srgbClr val="EAF0F6"/>
-                </a:solidFill>
-                <a:latin typeface="Calibri"/>
-              </a:rPr>
-              <a:t>DRL PCB 3</a:t>
-            </a:r>
-            <a:r>
-              <a:rPr sz="1100" b="0" i="0">
-                <a:solidFill>
-                  <a:srgbClr val="FFD34D"/>
-                </a:solidFill>
-                <a:latin typeface="Calibri"/>
-              </a:rPr>
-              <a:t>   light ↓</a:t>
-            </a:r>
-          </a:p>
-        </p:txBody>
-      </p:sp>
-      <p:sp>
-        <p:nvSpPr>
-          <p:cNvPr id="166" name="TextBox 165"/>
-          <p:cNvSpPr txBox="1"/>
-          <p:nvPr/>
-        </p:nvSpPr>
-        <p:spPr>
-          <a:xfrm rot="16200000">
-            <a:off x="6153912" y="3593591"/>
-            <a:ext cx="2560320" cy="310896"/>
-          </a:xfrm>
-          <a:prstGeom prst="rect">
-            <a:avLst/>
-          </a:prstGeom>
-          <a:noFill/>
-        </p:spPr>
-        <p:txBody>
-          <a:bodyPr wrap="square" lIns="0" rIns="0" tIns="0" bIns="0" anchor="ctr">
-            <a:spAutoFit/>
-          </a:bodyPr>
-          <a:lstStyle/>
-          <a:p>
-            <a:pPr algn="ctr"/>
-            <a:r>
-              <a:rPr sz="1400" b="1" i="0">
-                <a:solidFill>
-                  <a:srgbClr val="EAF0F6"/>
-                </a:solidFill>
-                <a:latin typeface="Calibri"/>
-              </a:rPr>
-              <a:t>DRL PCB 2</a:t>
-            </a:r>
-          </a:p>
-        </p:txBody>
-      </p:sp>
-      <p:sp>
-        <p:nvSpPr>
-          <p:cNvPr id="167" name="TextBox 166"/>
-          <p:cNvSpPr txBox="1"/>
-          <p:nvPr/>
-        </p:nvSpPr>
-        <p:spPr>
-          <a:xfrm>
-            <a:off x="6766560" y="4434840"/>
-            <a:ext cx="822960" cy="274320"/>
-          </a:xfrm>
-          <a:prstGeom prst="rect">
-            <a:avLst/>
-          </a:prstGeom>
-          <a:noFill/>
-        </p:spPr>
-        <p:txBody>
-          <a:bodyPr wrap="square" lIns="0" rIns="0" tIns="0" bIns="0" anchor="t">
-            <a:spAutoFit/>
-          </a:bodyPr>
-          <a:lstStyle/>
-          <a:p>
-            <a:pPr algn="r"/>
-            <a:r>
-              <a:rPr sz="1100" b="0" i="0">
-                <a:solidFill>
-                  <a:srgbClr val="FFD34D"/>
-                </a:solidFill>
-                <a:latin typeface="Calibri"/>
-              </a:rPr>
-              <a:t>light →</a:t>
-            </a:r>
-          </a:p>
-        </p:txBody>
-      </p:sp>
-      <p:sp>
-        <p:nvSpPr>
-          <p:cNvPr id="168" name="Rounded Rectangle 167"/>
-          <p:cNvSpPr/>
-          <p:nvPr/>
-        </p:nvSpPr>
-        <p:spPr>
-          <a:xfrm>
-            <a:off x="8302752" y="2103120"/>
-            <a:ext cx="118872" cy="3291840"/>
-          </a:xfrm>
-          <a:prstGeom prst="roundRect">
-            <a:avLst/>
-          </a:prstGeom>
-          <a:solidFill>
-            <a:srgbClr val="4A6FA5"/>
-          </a:solidFill>
-          <a:ln w="9525">
-            <a:solidFill>
-              <a:srgbClr val="7FA7C9"/>
-            </a:solidFill>
-          </a:ln>
-        </p:spPr>
-        <p:txBody>
-          <a:bodyPr rtlCol="0" anchor="ctr"/>
-          <a:lstStyle/>
-          <a:p>
-            <a:pPr algn="ctr"/>
-          </a:p>
-        </p:txBody>
-      </p:sp>
-      <p:sp>
-        <p:nvSpPr>
-          <p:cNvPr id="169" name="Rounded Rectangle 168"/>
-          <p:cNvSpPr/>
-          <p:nvPr/>
-        </p:nvSpPr>
-        <p:spPr>
-          <a:xfrm>
-            <a:off x="10149840" y="2103120"/>
-            <a:ext cx="118872" cy="3291840"/>
-          </a:xfrm>
-          <a:prstGeom prst="roundRect">
-            <a:avLst/>
-          </a:prstGeom>
-          <a:solidFill>
-            <a:srgbClr val="4A6FA5"/>
-          </a:solidFill>
-          <a:ln w="9525">
-            <a:solidFill>
-              <a:srgbClr val="7FA7C9"/>
-            </a:solidFill>
-          </a:ln>
-        </p:spPr>
-        <p:txBody>
-          <a:bodyPr rtlCol="0" anchor="ctr"/>
-          <a:lstStyle/>
-          <a:p>
-            <a:pPr algn="ctr"/>
-          </a:p>
-        </p:txBody>
-      </p:sp>
-      <p:cxnSp>
-        <p:nvCxnSpPr>
-          <p:cNvPr id="170" name="Connector 169"/>
-          <p:cNvCxnSpPr/>
-          <p:nvPr/>
-        </p:nvCxnSpPr>
-        <p:spPr>
-          <a:xfrm>
-            <a:off x="8421624" y="2468880"/>
-            <a:ext cx="1728216" cy="0"/>
-          </a:xfrm>
-          <a:prstGeom prst="line">
-            <a:avLst/>
-          </a:prstGeom>
-          <a:ln w="15875">
-            <a:solidFill>
-              <a:srgbClr val="7FA7C9"/>
-            </a:solidFill>
-          </a:ln>
-        </p:spPr>
-      </p:cxnSp>
-      <p:cxnSp>
-        <p:nvCxnSpPr>
-          <p:cNvPr id="171" name="Connector 170"/>
-          <p:cNvCxnSpPr/>
-          <p:nvPr/>
-        </p:nvCxnSpPr>
-        <p:spPr>
-          <a:xfrm>
-            <a:off x="8421624" y="2834640"/>
-            <a:ext cx="1728216" cy="0"/>
-          </a:xfrm>
-          <a:prstGeom prst="line">
-            <a:avLst/>
-          </a:prstGeom>
-          <a:ln w="15875">
-            <a:solidFill>
-              <a:srgbClr val="7FA7C9"/>
-            </a:solidFill>
-          </a:ln>
-        </p:spPr>
-      </p:cxnSp>
-      <p:cxnSp>
-        <p:nvCxnSpPr>
-          <p:cNvPr id="172" name="Connector 171"/>
-          <p:cNvCxnSpPr/>
-          <p:nvPr/>
-        </p:nvCxnSpPr>
-        <p:spPr>
-          <a:xfrm>
-            <a:off x="8421624" y="3200400"/>
-            <a:ext cx="1728216" cy="0"/>
-          </a:xfrm>
-          <a:prstGeom prst="line">
-            <a:avLst/>
-          </a:prstGeom>
-          <a:ln w="15875">
-            <a:solidFill>
-              <a:srgbClr val="7FA7C9"/>
-            </a:solidFill>
-          </a:ln>
-        </p:spPr>
-      </p:cxnSp>
-      <p:cxnSp>
-        <p:nvCxnSpPr>
-          <p:cNvPr id="173" name="Connector 172"/>
-          <p:cNvCxnSpPr/>
-          <p:nvPr/>
-        </p:nvCxnSpPr>
-        <p:spPr>
-          <a:xfrm>
-            <a:off x="8421624" y="3566160"/>
-            <a:ext cx="1728216" cy="0"/>
-          </a:xfrm>
-          <a:prstGeom prst="line">
-            <a:avLst/>
-          </a:prstGeom>
-          <a:ln w="15875">
-            <a:solidFill>
-              <a:srgbClr val="7FA7C9"/>
-            </a:solidFill>
-          </a:ln>
-        </p:spPr>
-      </p:cxnSp>
-      <p:cxnSp>
-        <p:nvCxnSpPr>
-          <p:cNvPr id="174" name="Connector 173"/>
-          <p:cNvCxnSpPr/>
-          <p:nvPr/>
-        </p:nvCxnSpPr>
-        <p:spPr>
-          <a:xfrm>
-            <a:off x="8421624" y="3931920"/>
-            <a:ext cx="1728216" cy="0"/>
-          </a:xfrm>
-          <a:prstGeom prst="line">
-            <a:avLst/>
-          </a:prstGeom>
-          <a:ln w="15875">
-            <a:solidFill>
-              <a:srgbClr val="7FA7C9"/>
-            </a:solidFill>
-          </a:ln>
-        </p:spPr>
-      </p:cxnSp>
-      <p:cxnSp>
-        <p:nvCxnSpPr>
-          <p:cNvPr id="175" name="Connector 174"/>
-          <p:cNvCxnSpPr/>
-          <p:nvPr/>
-        </p:nvCxnSpPr>
-        <p:spPr>
-          <a:xfrm>
-            <a:off x="8421624" y="4297680"/>
-            <a:ext cx="1728216" cy="0"/>
-          </a:xfrm>
-          <a:prstGeom prst="line">
-            <a:avLst/>
-          </a:prstGeom>
-          <a:ln w="15875">
-            <a:solidFill>
-              <a:srgbClr val="7FA7C9"/>
-            </a:solidFill>
-          </a:ln>
-        </p:spPr>
-      </p:cxnSp>
-      <p:cxnSp>
-        <p:nvCxnSpPr>
-          <p:cNvPr id="176" name="Connector 175"/>
-          <p:cNvCxnSpPr/>
-          <p:nvPr/>
-        </p:nvCxnSpPr>
-        <p:spPr>
-          <a:xfrm>
-            <a:off x="8421624" y="4663440"/>
-            <a:ext cx="1728216" cy="0"/>
-          </a:xfrm>
-          <a:prstGeom prst="line">
-            <a:avLst/>
-          </a:prstGeom>
-          <a:ln w="15875">
-            <a:solidFill>
-              <a:srgbClr val="7FA7C9"/>
-            </a:solidFill>
-          </a:ln>
-        </p:spPr>
-      </p:cxnSp>
-      <p:cxnSp>
-        <p:nvCxnSpPr>
-          <p:cNvPr id="177" name="Connector 176"/>
-          <p:cNvCxnSpPr/>
-          <p:nvPr/>
-        </p:nvCxnSpPr>
-        <p:spPr>
-          <a:xfrm>
-            <a:off x="8421624" y="5029200"/>
-            <a:ext cx="1728216" cy="0"/>
-          </a:xfrm>
-          <a:prstGeom prst="line">
-            <a:avLst/>
-          </a:prstGeom>
-          <a:ln w="15875">
-            <a:solidFill>
-              <a:srgbClr val="7FA7C9"/>
-            </a:solidFill>
-          </a:ln>
-        </p:spPr>
-      </p:cxnSp>
-      <p:sp>
-        <p:nvSpPr>
-          <p:cNvPr id="178" name="TextBox 177"/>
-          <p:cNvSpPr txBox="1"/>
-          <p:nvPr/>
-        </p:nvSpPr>
-        <p:spPr>
-          <a:xfrm>
-            <a:off x="8421624" y="1773936"/>
-            <a:ext cx="1728215" cy="274320"/>
-          </a:xfrm>
-          <a:prstGeom prst="rect">
-            <a:avLst/>
-          </a:prstGeom>
-          <a:noFill/>
-        </p:spPr>
-        <p:txBody>
-          <a:bodyPr wrap="square" lIns="0" rIns="0" tIns="0" bIns="0" anchor="t">
-            <a:spAutoFit/>
-          </a:bodyPr>
-          <a:lstStyle/>
-          <a:p>
-            <a:pPr algn="ctr"/>
-            <a:r>
               <a:rPr sz="1100" b="0" i="1">
                 <a:solidFill>
                   <a:srgbClr val="9FB0C3"/>
@@ -9062,7 +8318,7 @@
       </p:sp>
       <p:sp>
         <p:nvSpPr>
-          <p:cNvPr id="179" name="Rounded Rectangle 178"/>
+          <p:cNvPr id="155" name="Rounded Rectangle 154"/>
           <p:cNvSpPr/>
           <p:nvPr/>
         </p:nvSpPr>
@@ -9095,7 +8351,7 @@
       </p:sp>
       <p:sp>
         <p:nvSpPr>
-          <p:cNvPr id="180" name="TextBox 179"/>
+          <p:cNvPr id="156" name="TextBox 155"/>
           <p:cNvSpPr txBox="1"/>
           <p:nvPr/>
         </p:nvSpPr>
@@ -9142,7 +8398,7 @@
       </p:sp>
       <p:sp>
         <p:nvSpPr>
-          <p:cNvPr id="181" name="Rounded Rectangle 180"/>
+          <p:cNvPr id="157" name="Rounded Rectangle 156"/>
           <p:cNvSpPr/>
           <p:nvPr/>
         </p:nvSpPr>
@@ -9173,7 +8429,7 @@
       </p:sp>
       <p:sp>
         <p:nvSpPr>
-          <p:cNvPr id="182" name="TextBox 181"/>
+          <p:cNvPr id="158" name="TextBox 157"/>
           <p:cNvSpPr txBox="1"/>
           <p:nvPr/>
         </p:nvSpPr>
@@ -9208,7 +8464,7 @@
       </p:sp>
       <p:sp>
         <p:nvSpPr>
-          <p:cNvPr id="183" name="TextBox 182"/>
+          <p:cNvPr id="159" name="TextBox 158"/>
           <p:cNvSpPr txBox="1"/>
           <p:nvPr/>
         </p:nvSpPr>
@@ -9299,7 +8555,7 @@
       </p:sp>
       <p:sp>
         <p:nvSpPr>
-          <p:cNvPr id="184" name="TextBox 183"/>
+          <p:cNvPr id="160" name="TextBox 159"/>
           <p:cNvSpPr txBox="1"/>
           <p:nvPr/>
         </p:nvSpPr>
@@ -9334,38 +8590,7 @@
       </p:sp>
       <p:sp>
         <p:nvSpPr>
-          <p:cNvPr id="185" name="Oval 184"/>
-          <p:cNvSpPr/>
-          <p:nvPr/>
-        </p:nvSpPr>
-        <p:spPr>
-          <a:xfrm>
-            <a:off x="713231" y="4626864"/>
-            <a:ext cx="310896" cy="310896"/>
-          </a:xfrm>
-          <a:prstGeom prst="ellipse">
-            <a:avLst/>
-          </a:prstGeom>
-          <a:solidFill>
-            <a:srgbClr val="FFD34D">
-              <a:alpha val="22000"/>
-            </a:srgbClr>
-          </a:solidFill>
-          <a:ln>
-            <a:noFill/>
-          </a:ln>
-        </p:spPr>
-        <p:txBody>
-          <a:bodyPr rtlCol="0" anchor="ctr"/>
-          <a:lstStyle/>
-          <a:p>
-            <a:pPr algn="ctr"/>
-          </a:p>
-        </p:txBody>
-      </p:sp>
-      <p:sp>
-        <p:nvSpPr>
-          <p:cNvPr id="186" name="Isosceles Triangle 185"/>
+          <p:cNvPr id="161" name="Isosceles Triangle 160"/>
           <p:cNvSpPr/>
           <p:nvPr/>
         </p:nvSpPr>
@@ -9378,11 +8603,11 @@
             <a:avLst/>
           </a:prstGeom>
           <a:solidFill>
-            <a:srgbClr val="FFF1C1"/>
+            <a:srgbClr val="D9D9D9"/>
           </a:solidFill>
           <a:ln w="12700">
             <a:solidFill>
-              <a:srgbClr val="E0B25B"/>
+              <a:srgbClr val="000000"/>
             </a:solidFill>
           </a:ln>
         </p:spPr>
@@ -9396,7 +8621,7 @@
       </p:sp>
       <p:cxnSp>
         <p:nvCxnSpPr>
-          <p:cNvPr id="187" name="Connector 186"/>
+          <p:cNvPr id="162" name="Connector 161"/>
           <p:cNvCxnSpPr/>
           <p:nvPr/>
         </p:nvCxnSpPr>
@@ -9410,14 +8635,14 @@
           </a:prstGeom>
           <a:ln w="19050">
             <a:solidFill>
-              <a:srgbClr val="E0B25B"/>
+              <a:srgbClr val="000000"/>
             </a:solidFill>
           </a:ln>
         </p:spPr>
       </p:cxnSp>
       <p:cxnSp>
         <p:nvCxnSpPr>
-          <p:cNvPr id="188" name="Connector 187"/>
+          <p:cNvPr id="163" name="Connector 162"/>
           <p:cNvCxnSpPr/>
           <p:nvPr/>
         </p:nvCxnSpPr>
@@ -9439,7 +8664,7 @@
       </p:cxnSp>
       <p:cxnSp>
         <p:nvCxnSpPr>
-          <p:cNvPr id="189" name="Connector 188"/>
+          <p:cNvPr id="164" name="Connector 163"/>
           <p:cNvCxnSpPr/>
           <p:nvPr/>
         </p:nvCxnSpPr>
@@ -9461,7 +8686,7 @@
       </p:cxnSp>
       <p:sp>
         <p:nvSpPr>
-          <p:cNvPr id="190" name="TextBox 189"/>
+          <p:cNvPr id="165" name="TextBox 164"/>
           <p:cNvSpPr txBox="1"/>
           <p:nvPr/>
         </p:nvSpPr>
@@ -9496,7 +8721,7 @@
       </p:sp>
       <p:sp>
         <p:nvSpPr>
-          <p:cNvPr id="191" name="TextBox 190"/>
+          <p:cNvPr id="166" name="TextBox 165"/>
           <p:cNvSpPr txBox="1"/>
           <p:nvPr/>
         </p:nvSpPr>
@@ -9531,7 +8756,7 @@
       </p:sp>
       <p:sp>
         <p:nvSpPr>
-          <p:cNvPr id="192" name="Arc 191"/>
+          <p:cNvPr id="167" name="Arc 166"/>
           <p:cNvSpPr/>
           <p:nvPr/>
         </p:nvSpPr>
@@ -9563,7 +8788,7 @@
       </p:sp>
       <p:sp>
         <p:nvSpPr>
-          <p:cNvPr id="193" name="TextBox 192"/>
+          <p:cNvPr id="168" name="TextBox 167"/>
           <p:cNvSpPr txBox="1"/>
           <p:nvPr/>
         </p:nvSpPr>
@@ -9596,9 +8821,40 @@
           </a:p>
         </p:txBody>
       </p:sp>
+      <p:sp>
+        <p:nvSpPr>
+          <p:cNvPr id="169" name="Rounded Rectangle 168"/>
+          <p:cNvSpPr/>
+          <p:nvPr/>
+        </p:nvSpPr>
+        <p:spPr>
+          <a:xfrm>
+            <a:off x="713231" y="5321807"/>
+            <a:ext cx="402336" cy="237744"/>
+          </a:xfrm>
+          <a:prstGeom prst="roundRect">
+            <a:avLst/>
+          </a:prstGeom>
+          <a:solidFill>
+            <a:srgbClr val="1E5C3F"/>
+          </a:solidFill>
+          <a:ln w="9525">
+            <a:solidFill>
+              <a:srgbClr val="3FA46A"/>
+            </a:solidFill>
+          </a:ln>
+        </p:spPr>
+        <p:txBody>
+          <a:bodyPr rtlCol="0" anchor="ctr"/>
+          <a:lstStyle/>
+          <a:p>
+            <a:pPr algn="ctr"/>
+          </a:p>
+        </p:txBody>
+      </p:sp>
       <p:cxnSp>
         <p:nvCxnSpPr>
-          <p:cNvPr id="194" name="Connector 193"/>
+          <p:cNvPr id="170" name="Connector 169"/>
           <p:cNvCxnSpPr/>
           <p:nvPr/>
         </p:nvCxnSpPr>
@@ -9612,14 +8868,14 @@
           </a:prstGeom>
           <a:ln w="15875">
             <a:solidFill>
-              <a:srgbClr val="E0B25B"/>
+              <a:srgbClr val="000000"/>
             </a:solidFill>
           </a:ln>
         </p:spPr>
       </p:cxnSp>
       <p:sp>
         <p:nvSpPr>
-          <p:cNvPr id="195" name="TextBox 194"/>
+          <p:cNvPr id="171" name="TextBox 170"/>
           <p:cNvSpPr txBox="1"/>
           <p:nvPr/>
         </p:nvSpPr>
@@ -9654,7 +8910,7 @@
       </p:sp>
       <p:cxnSp>
         <p:nvCxnSpPr>
-          <p:cNvPr id="196" name="Connector 195"/>
+          <p:cNvPr id="172" name="Connector 171"/>
           <p:cNvCxnSpPr/>
           <p:nvPr/>
         </p:nvCxnSpPr>
@@ -9675,7 +8931,7 @@
       </p:cxnSp>
       <p:sp>
         <p:nvSpPr>
-          <p:cNvPr id="197" name="TextBox 196"/>
+          <p:cNvPr id="173" name="TextBox 172"/>
           <p:cNvSpPr txBox="1"/>
           <p:nvPr/>
         </p:nvSpPr>

--- a/PCB_LIGHTING_updated.pptx
+++ b/PCB_LIGHTING_updated.pptx
@@ -8,6 +8,7 @@
     <p:sldId id="256" r:id="rId2"/>
     <p:sldId id="257" r:id="rId3"/>
     <p:sldId id="258" r:id="rId8"/>
+    <p:sldId id="259" r:id="rId9"/>
   </p:sldIdLst>
   <p:sldSz cx="12192000" cy="6858000"/>
   <p:notesSz cx="6858000" cy="9144000"/>
@@ -10414,6 +10415,3517 @@
                 <a:latin typeface="Calibri"/>
               </a:rPr>
               <a:t>ESD ±8 kV / ±15 kV</a:t>
+            </a:r>
+          </a:p>
+        </p:txBody>
+      </p:sp>
+    </p:spTree>
+  </p:cSld>
+  <p:clrMapOvr>
+    <a:masterClrMapping/>
+  </p:clrMapOvr>
+</p:sld>
+</file>
+
+<file path=ppt/slides/slide4.xml><?xml version="1.0" encoding="utf-8"?>
+<p:sld xmlns:a="http://schemas.openxmlformats.org/drawingml/2006/main" xmlns:p="http://schemas.openxmlformats.org/presentationml/2006/main" xmlns:r="http://schemas.openxmlformats.org/officeDocument/2006/relationships">
+  <p:cSld>
+    <p:bg>
+      <p:bgPr>
+        <a:solidFill>
+          <a:srgbClr val="0E1621"/>
+        </a:solidFill>
+        <a:effectLst/>
+      </p:bgPr>
+    </p:bg>
+    <p:spTree>
+      <p:nvGrpSpPr>
+        <p:cNvPr id="1" name=""/>
+        <p:cNvGrpSpPr/>
+        <p:nvPr/>
+      </p:nvGrpSpPr>
+      <p:grpSpPr/>
+      <p:sp>
+        <p:nvSpPr>
+          <p:cNvPr id="2" name="TextBox 1"/>
+          <p:cNvSpPr txBox="1"/>
+          <p:nvPr/>
+        </p:nvSpPr>
+        <p:spPr>
+          <a:xfrm>
+            <a:off x="457200" y="292608"/>
+            <a:ext cx="11247120" cy="548640"/>
+          </a:xfrm>
+          <a:prstGeom prst="rect">
+            <a:avLst/>
+          </a:prstGeom>
+          <a:noFill/>
+        </p:spPr>
+        <p:txBody>
+          <a:bodyPr wrap="square" lIns="0" rIns="0" tIns="0" bIns="0" anchor="t">
+            <a:spAutoFit/>
+          </a:bodyPr>
+          <a:lstStyle/>
+          <a:p>
+            <a:pPr algn="l"/>
+            <a:r>
+              <a:rPr sz="3000" b="1" i="0">
+                <a:solidFill>
+                  <a:srgbClr val="EAF0F6"/>
+                </a:solidFill>
+                <a:latin typeface="Calibri"/>
+              </a:rPr>
+              <a:t>3-PCB C-Shape vs Single C-Shape PCB</a:t>
+            </a:r>
+          </a:p>
+        </p:txBody>
+      </p:sp>
+      <p:sp>
+        <p:nvSpPr>
+          <p:cNvPr id="3" name="TextBox 2"/>
+          <p:cNvSpPr txBox="1"/>
+          <p:nvPr/>
+        </p:nvSpPr>
+        <p:spPr>
+          <a:xfrm>
+            <a:off x="457200" y="841248"/>
+            <a:ext cx="11247120" cy="320040"/>
+          </a:xfrm>
+          <a:prstGeom prst="rect">
+            <a:avLst/>
+          </a:prstGeom>
+          <a:noFill/>
+        </p:spPr>
+        <p:txBody>
+          <a:bodyPr wrap="square" lIns="0" rIns="0" tIns="0" bIns="0" anchor="t">
+            <a:spAutoFit/>
+          </a:bodyPr>
+          <a:lstStyle/>
+          <a:p>
+            <a:pPr algn="l"/>
+            <a:r>
+              <a:rPr sz="1300" b="0" i="0">
+                <a:solidFill>
+                  <a:srgbClr val="9FB0C3"/>
+                </a:solidFill>
+                <a:latin typeface="Calibri"/>
+              </a:rPr>
+              <a:t>The 10 most relevant parameters for EMC, reliability and manufacturing  (★ = additional technical point)</a:t>
+            </a:r>
+          </a:p>
+        </p:txBody>
+      </p:sp>
+      <p:sp>
+        <p:nvSpPr>
+          <p:cNvPr id="4" name="Rectangle 3"/>
+          <p:cNvSpPr/>
+          <p:nvPr/>
+        </p:nvSpPr>
+        <p:spPr>
+          <a:xfrm>
+            <a:off x="457200" y="1280160"/>
+            <a:ext cx="11274552" cy="475488"/>
+          </a:xfrm>
+          <a:prstGeom prst="rect">
+            <a:avLst/>
+          </a:prstGeom>
+          <a:solidFill>
+            <a:srgbClr val="1D2B3B"/>
+          </a:solidFill>
+          <a:ln>
+            <a:noFill/>
+          </a:ln>
+        </p:spPr>
+        <p:txBody>
+          <a:bodyPr rtlCol="0" anchor="ctr"/>
+          <a:lstStyle/>
+          <a:p>
+            <a:pPr algn="ctr"/>
+          </a:p>
+        </p:txBody>
+      </p:sp>
+      <p:sp>
+        <p:nvSpPr>
+          <p:cNvPr id="5" name="Rectangle 4"/>
+          <p:cNvSpPr/>
+          <p:nvPr/>
+        </p:nvSpPr>
+        <p:spPr>
+          <a:xfrm>
+            <a:off x="7470648" y="1280160"/>
+            <a:ext cx="4261104" cy="475488"/>
+          </a:xfrm>
+          <a:prstGeom prst="rect">
+            <a:avLst/>
+          </a:prstGeom>
+          <a:solidFill>
+            <a:srgbClr val="1E5C3F"/>
+          </a:solidFill>
+          <a:ln>
+            <a:noFill/>
+          </a:ln>
+        </p:spPr>
+        <p:txBody>
+          <a:bodyPr rtlCol="0" anchor="ctr"/>
+          <a:lstStyle/>
+          <a:p>
+            <a:pPr algn="ctr"/>
+          </a:p>
+        </p:txBody>
+      </p:sp>
+      <p:sp>
+        <p:nvSpPr>
+          <p:cNvPr id="6" name="TextBox 5"/>
+          <p:cNvSpPr txBox="1"/>
+          <p:nvPr/>
+        </p:nvSpPr>
+        <p:spPr>
+          <a:xfrm>
+            <a:off x="566928" y="1280160"/>
+            <a:ext cx="228600" cy="475488"/>
+          </a:xfrm>
+          <a:prstGeom prst="rect">
+            <a:avLst/>
+          </a:prstGeom>
+          <a:noFill/>
+        </p:spPr>
+        <p:txBody>
+          <a:bodyPr wrap="square" lIns="0" rIns="0" tIns="0" bIns="0" anchor="ctr">
+            <a:spAutoFit/>
+          </a:bodyPr>
+          <a:lstStyle/>
+          <a:p>
+            <a:pPr algn="l"/>
+            <a:r>
+              <a:rPr sz="1400" b="1" i="0">
+                <a:solidFill>
+                  <a:srgbClr val="EAF0F6"/>
+                </a:solidFill>
+                <a:latin typeface="Calibri"/>
+              </a:rPr>
+              <a:t>#</a:t>
+            </a:r>
+          </a:p>
+        </p:txBody>
+      </p:sp>
+      <p:sp>
+        <p:nvSpPr>
+          <p:cNvPr id="7" name="TextBox 6"/>
+          <p:cNvSpPr txBox="1"/>
+          <p:nvPr/>
+        </p:nvSpPr>
+        <p:spPr>
+          <a:xfrm>
+            <a:off x="978407" y="1280160"/>
+            <a:ext cx="2194560" cy="475488"/>
+          </a:xfrm>
+          <a:prstGeom prst="rect">
+            <a:avLst/>
+          </a:prstGeom>
+          <a:noFill/>
+        </p:spPr>
+        <p:txBody>
+          <a:bodyPr wrap="square" lIns="0" rIns="0" tIns="0" bIns="0" anchor="ctr">
+            <a:spAutoFit/>
+          </a:bodyPr>
+          <a:lstStyle/>
+          <a:p>
+            <a:pPr algn="l"/>
+            <a:r>
+              <a:rPr sz="1400" b="1" i="0">
+                <a:solidFill>
+                  <a:srgbClr val="EAF0F6"/>
+                </a:solidFill>
+                <a:latin typeface="Calibri"/>
+              </a:rPr>
+              <a:t>Parameter</a:t>
+            </a:r>
+          </a:p>
+        </p:txBody>
+      </p:sp>
+      <p:sp>
+        <p:nvSpPr>
+          <p:cNvPr id="8" name="TextBox 7"/>
+          <p:cNvSpPr txBox="1"/>
+          <p:nvPr/>
+        </p:nvSpPr>
+        <p:spPr>
+          <a:xfrm>
+            <a:off x="3355848" y="1280160"/>
+            <a:ext cx="4041648" cy="475488"/>
+          </a:xfrm>
+          <a:prstGeom prst="rect">
+            <a:avLst/>
+          </a:prstGeom>
+          <a:noFill/>
+        </p:spPr>
+        <p:txBody>
+          <a:bodyPr wrap="square" lIns="0" rIns="0" tIns="0" bIns="0" anchor="ctr">
+            <a:spAutoFit/>
+          </a:bodyPr>
+          <a:lstStyle/>
+          <a:p>
+            <a:pPr algn="l"/>
+            <a:r>
+              <a:rPr sz="1400" b="1" i="0">
+                <a:solidFill>
+                  <a:srgbClr val="EAF0F6"/>
+                </a:solidFill>
+                <a:latin typeface="Calibri"/>
+              </a:rPr>
+              <a:t>3-PCB C-Shape</a:t>
+            </a:r>
+          </a:p>
+        </p:txBody>
+      </p:sp>
+      <p:sp>
+        <p:nvSpPr>
+          <p:cNvPr id="9" name="TextBox 8"/>
+          <p:cNvSpPr txBox="1"/>
+          <p:nvPr/>
+        </p:nvSpPr>
+        <p:spPr>
+          <a:xfrm>
+            <a:off x="7580375" y="1280160"/>
+            <a:ext cx="4078224" cy="475488"/>
+          </a:xfrm>
+          <a:prstGeom prst="rect">
+            <a:avLst/>
+          </a:prstGeom>
+          <a:noFill/>
+        </p:spPr>
+        <p:txBody>
+          <a:bodyPr wrap="square" lIns="0" rIns="0" tIns="0" bIns="0" anchor="ctr">
+            <a:spAutoFit/>
+          </a:bodyPr>
+          <a:lstStyle/>
+          <a:p>
+            <a:pPr algn="l"/>
+            <a:r>
+              <a:rPr sz="1400" b="1" i="0">
+                <a:solidFill>
+                  <a:srgbClr val="EAF0F6"/>
+                </a:solidFill>
+                <a:latin typeface="Calibri"/>
+              </a:rPr>
+              <a:t>Single C-Shape PCB</a:t>
+            </a:r>
+          </a:p>
+        </p:txBody>
+      </p:sp>
+      <p:sp>
+        <p:nvSpPr>
+          <p:cNvPr id="10" name="Rounded Rectangle 9"/>
+          <p:cNvSpPr/>
+          <p:nvPr/>
+        </p:nvSpPr>
+        <p:spPr>
+          <a:xfrm>
+            <a:off x="6510528" y="1399031"/>
+            <a:ext cx="822960" cy="265176"/>
+          </a:xfrm>
+          <a:prstGeom prst="roundRect">
+            <a:avLst>
+              <a:gd name="adj" fmla="val 50000"/>
+            </a:avLst>
+          </a:prstGeom>
+          <a:solidFill>
+            <a:srgbClr val="0E1621"/>
+          </a:solidFill>
+          <a:ln>
+            <a:noFill/>
+          </a:ln>
+        </p:spPr>
+        <p:txBody>
+          <a:bodyPr rtlCol="0" anchor="ctr"/>
+          <a:lstStyle/>
+          <a:p>
+            <a:pPr algn="ctr"/>
+          </a:p>
+        </p:txBody>
+      </p:sp>
+      <p:sp>
+        <p:nvSpPr>
+          <p:cNvPr id="11" name="TextBox 10"/>
+          <p:cNvSpPr txBox="1"/>
+          <p:nvPr/>
+        </p:nvSpPr>
+        <p:spPr>
+          <a:xfrm>
+            <a:off x="6510528" y="1399031"/>
+            <a:ext cx="822960" cy="265176"/>
+          </a:xfrm>
+          <a:prstGeom prst="rect">
+            <a:avLst/>
+          </a:prstGeom>
+          <a:noFill/>
+        </p:spPr>
+        <p:txBody>
+          <a:bodyPr wrap="square" lIns="0" rIns="0" tIns="0" bIns="0" anchor="ctr">
+            <a:spAutoFit/>
+          </a:bodyPr>
+          <a:lstStyle/>
+          <a:p>
+            <a:pPr algn="ctr"/>
+            <a:r>
+              <a:rPr sz="1100" b="1" i="0">
+                <a:solidFill>
+                  <a:srgbClr val="FFD34D"/>
+                </a:solidFill>
+                <a:latin typeface="Calibri"/>
+              </a:rPr>
+              <a:t>3 / 10</a:t>
+            </a:r>
+          </a:p>
+        </p:txBody>
+      </p:sp>
+      <p:sp>
+        <p:nvSpPr>
+          <p:cNvPr id="12" name="Rounded Rectangle 11"/>
+          <p:cNvSpPr/>
+          <p:nvPr/>
+        </p:nvSpPr>
+        <p:spPr>
+          <a:xfrm>
+            <a:off x="10771632" y="1399031"/>
+            <a:ext cx="822960" cy="265176"/>
+          </a:xfrm>
+          <a:prstGeom prst="roundRect">
+            <a:avLst>
+              <a:gd name="adj" fmla="val 50000"/>
+            </a:avLst>
+          </a:prstGeom>
+          <a:solidFill>
+            <a:srgbClr val="0E1621"/>
+          </a:solidFill>
+          <a:ln>
+            <a:noFill/>
+          </a:ln>
+        </p:spPr>
+        <p:txBody>
+          <a:bodyPr rtlCol="0" anchor="ctr"/>
+          <a:lstStyle/>
+          <a:p>
+            <a:pPr algn="ctr"/>
+          </a:p>
+        </p:txBody>
+      </p:sp>
+      <p:sp>
+        <p:nvSpPr>
+          <p:cNvPr id="13" name="TextBox 12"/>
+          <p:cNvSpPr txBox="1"/>
+          <p:nvPr/>
+        </p:nvSpPr>
+        <p:spPr>
+          <a:xfrm>
+            <a:off x="10771632" y="1399031"/>
+            <a:ext cx="822960" cy="265176"/>
+          </a:xfrm>
+          <a:prstGeom prst="rect">
+            <a:avLst/>
+          </a:prstGeom>
+          <a:noFill/>
+        </p:spPr>
+        <p:txBody>
+          <a:bodyPr wrap="square" lIns="0" rIns="0" tIns="0" bIns="0" anchor="ctr">
+            <a:spAutoFit/>
+          </a:bodyPr>
+          <a:lstStyle/>
+          <a:p>
+            <a:pPr algn="ctr"/>
+            <a:r>
+              <a:rPr sz="1100" b="1" i="0">
+                <a:solidFill>
+                  <a:srgbClr val="FFD34D"/>
+                </a:solidFill>
+                <a:latin typeface="Calibri"/>
+              </a:rPr>
+              <a:t>7 / 10</a:t>
+            </a:r>
+          </a:p>
+        </p:txBody>
+      </p:sp>
+      <p:sp>
+        <p:nvSpPr>
+          <p:cNvPr id="14" name="Rectangle 13"/>
+          <p:cNvSpPr/>
+          <p:nvPr/>
+        </p:nvSpPr>
+        <p:spPr>
+          <a:xfrm>
+            <a:off x="457200" y="1755648"/>
+            <a:ext cx="11274552" cy="384048"/>
+          </a:xfrm>
+          <a:prstGeom prst="rect">
+            <a:avLst/>
+          </a:prstGeom>
+          <a:solidFill>
+            <a:srgbClr val="172331"/>
+          </a:solidFill>
+          <a:ln>
+            <a:noFill/>
+          </a:ln>
+        </p:spPr>
+        <p:txBody>
+          <a:bodyPr rtlCol="0" anchor="ctr"/>
+          <a:lstStyle/>
+          <a:p>
+            <a:pPr algn="ctr"/>
+          </a:p>
+        </p:txBody>
+      </p:sp>
+      <p:sp>
+        <p:nvSpPr>
+          <p:cNvPr id="15" name="TextBox 14"/>
+          <p:cNvSpPr txBox="1"/>
+          <p:nvPr/>
+        </p:nvSpPr>
+        <p:spPr>
+          <a:xfrm>
+            <a:off x="566928" y="1755648"/>
+            <a:ext cx="274320" cy="384048"/>
+          </a:xfrm>
+          <a:prstGeom prst="rect">
+            <a:avLst/>
+          </a:prstGeom>
+          <a:noFill/>
+        </p:spPr>
+        <p:txBody>
+          <a:bodyPr wrap="square" lIns="0" rIns="0" tIns="0" bIns="0" anchor="ctr">
+            <a:spAutoFit/>
+          </a:bodyPr>
+          <a:lstStyle/>
+          <a:p>
+            <a:pPr algn="l"/>
+            <a:r>
+              <a:rPr sz="1100" b="0" i="0">
+                <a:solidFill>
+                  <a:srgbClr val="9FB0C3"/>
+                </a:solidFill>
+                <a:latin typeface="Calibri"/>
+              </a:rPr>
+              <a:t>1</a:t>
+            </a:r>
+          </a:p>
+        </p:txBody>
+      </p:sp>
+      <p:sp>
+        <p:nvSpPr>
+          <p:cNvPr id="16" name="TextBox 15"/>
+          <p:cNvSpPr txBox="1"/>
+          <p:nvPr/>
+        </p:nvSpPr>
+        <p:spPr>
+          <a:xfrm>
+            <a:off x="978407" y="1755648"/>
+            <a:ext cx="2194560" cy="384048"/>
+          </a:xfrm>
+          <a:prstGeom prst="rect">
+            <a:avLst/>
+          </a:prstGeom>
+          <a:noFill/>
+        </p:spPr>
+        <p:txBody>
+          <a:bodyPr wrap="square" lIns="0" rIns="0" tIns="0" bIns="0" anchor="ctr">
+            <a:spAutoFit/>
+          </a:bodyPr>
+          <a:lstStyle/>
+          <a:p>
+            <a:pPr algn="l"/>
+            <a:r>
+              <a:rPr sz="1150" b="1" i="0">
+                <a:solidFill>
+                  <a:srgbClr val="EAF0F6"/>
+                </a:solidFill>
+                <a:latin typeface="Calibri"/>
+              </a:rPr>
+              <a:t>EMI – Radiated emissions</a:t>
+            </a:r>
+          </a:p>
+        </p:txBody>
+      </p:sp>
+      <p:sp>
+        <p:nvSpPr>
+          <p:cNvPr id="17" name="Oval 16"/>
+          <p:cNvSpPr/>
+          <p:nvPr/>
+        </p:nvSpPr>
+        <p:spPr>
+          <a:xfrm>
+            <a:off x="3355848" y="1828800"/>
+            <a:ext cx="237744" cy="237744"/>
+          </a:xfrm>
+          <a:prstGeom prst="ellipse">
+            <a:avLst/>
+          </a:prstGeom>
+          <a:solidFill>
+            <a:srgbClr val="E05D5D"/>
+          </a:solidFill>
+          <a:ln>
+            <a:noFill/>
+          </a:ln>
+        </p:spPr>
+        <p:txBody>
+          <a:bodyPr rtlCol="0" anchor="ctr"/>
+          <a:lstStyle/>
+          <a:p>
+            <a:pPr algn="ctr"/>
+          </a:p>
+        </p:txBody>
+      </p:sp>
+      <p:sp>
+        <p:nvSpPr>
+          <p:cNvPr id="18" name="TextBox 17"/>
+          <p:cNvSpPr txBox="1"/>
+          <p:nvPr/>
+        </p:nvSpPr>
+        <p:spPr>
+          <a:xfrm>
+            <a:off x="3355848" y="1828800"/>
+            <a:ext cx="237744" cy="237744"/>
+          </a:xfrm>
+          <a:prstGeom prst="rect">
+            <a:avLst/>
+          </a:prstGeom>
+          <a:noFill/>
+        </p:spPr>
+        <p:txBody>
+          <a:bodyPr wrap="square" lIns="0" rIns="0" tIns="0" bIns="0" anchor="ctr">
+            <a:spAutoFit/>
+          </a:bodyPr>
+          <a:lstStyle/>
+          <a:p>
+            <a:pPr algn="ctr"/>
+            <a:r>
+              <a:rPr sz="1100" b="1" i="0">
+                <a:solidFill>
+                  <a:srgbClr val="EAF0F6"/>
+                </a:solidFill>
+                <a:latin typeface="Calibri"/>
+              </a:rPr>
+              <a:t>✗</a:t>
+            </a:r>
+          </a:p>
+        </p:txBody>
+      </p:sp>
+      <p:sp>
+        <p:nvSpPr>
+          <p:cNvPr id="19" name="TextBox 18"/>
+          <p:cNvSpPr txBox="1"/>
+          <p:nvPr/>
+        </p:nvSpPr>
+        <p:spPr>
+          <a:xfrm>
+            <a:off x="3703320" y="1755648"/>
+            <a:ext cx="3675888" cy="384048"/>
+          </a:xfrm>
+          <a:prstGeom prst="rect">
+            <a:avLst/>
+          </a:prstGeom>
+          <a:noFill/>
+        </p:spPr>
+        <p:txBody>
+          <a:bodyPr wrap="square" lIns="0" rIns="0" tIns="0" bIns="0" anchor="ctr">
+            <a:spAutoFit/>
+          </a:bodyPr>
+          <a:lstStyle/>
+          <a:p>
+            <a:pPr algn="l"/>
+            <a:r>
+              <a:rPr sz="1100" b="0" i="0">
+                <a:solidFill>
+                  <a:srgbClr val="9FB0C3"/>
+                </a:solidFill>
+                <a:latin typeface="Calibri"/>
+              </a:rPr>
+              <a:t>Inter-board wires act as unintended antennas</a:t>
+            </a:r>
+          </a:p>
+        </p:txBody>
+      </p:sp>
+      <p:sp>
+        <p:nvSpPr>
+          <p:cNvPr id="20" name="Oval 19"/>
+          <p:cNvSpPr/>
+          <p:nvPr/>
+        </p:nvSpPr>
+        <p:spPr>
+          <a:xfrm>
+            <a:off x="7580375" y="1828800"/>
+            <a:ext cx="237744" cy="237744"/>
+          </a:xfrm>
+          <a:prstGeom prst="ellipse">
+            <a:avLst/>
+          </a:prstGeom>
+          <a:solidFill>
+            <a:srgbClr val="3FA46A"/>
+          </a:solidFill>
+          <a:ln>
+            <a:noFill/>
+          </a:ln>
+        </p:spPr>
+        <p:txBody>
+          <a:bodyPr rtlCol="0" anchor="ctr"/>
+          <a:lstStyle/>
+          <a:p>
+            <a:pPr algn="ctr"/>
+          </a:p>
+        </p:txBody>
+      </p:sp>
+      <p:sp>
+        <p:nvSpPr>
+          <p:cNvPr id="21" name="TextBox 20"/>
+          <p:cNvSpPr txBox="1"/>
+          <p:nvPr/>
+        </p:nvSpPr>
+        <p:spPr>
+          <a:xfrm>
+            <a:off x="7580375" y="1828800"/>
+            <a:ext cx="237744" cy="237744"/>
+          </a:xfrm>
+          <a:prstGeom prst="rect">
+            <a:avLst/>
+          </a:prstGeom>
+          <a:noFill/>
+        </p:spPr>
+        <p:txBody>
+          <a:bodyPr wrap="square" lIns="0" rIns="0" tIns="0" bIns="0" anchor="ctr">
+            <a:spAutoFit/>
+          </a:bodyPr>
+          <a:lstStyle/>
+          <a:p>
+            <a:pPr algn="ctr"/>
+            <a:r>
+              <a:rPr sz="1100" b="1" i="0">
+                <a:solidFill>
+                  <a:srgbClr val="EAF0F6"/>
+                </a:solidFill>
+                <a:latin typeface="Calibri"/>
+              </a:rPr>
+              <a:t>✓</a:t>
+            </a:r>
+          </a:p>
+        </p:txBody>
+      </p:sp>
+      <p:sp>
+        <p:nvSpPr>
+          <p:cNvPr id="22" name="TextBox 21"/>
+          <p:cNvSpPr txBox="1"/>
+          <p:nvPr/>
+        </p:nvSpPr>
+        <p:spPr>
+          <a:xfrm>
+            <a:off x="7927848" y="1755648"/>
+            <a:ext cx="3712464" cy="384048"/>
+          </a:xfrm>
+          <a:prstGeom prst="rect">
+            <a:avLst/>
+          </a:prstGeom>
+          <a:noFill/>
+        </p:spPr>
+        <p:txBody>
+          <a:bodyPr wrap="square" lIns="0" rIns="0" tIns="0" bIns="0" anchor="ctr">
+            <a:spAutoFit/>
+          </a:bodyPr>
+          <a:lstStyle/>
+          <a:p>
+            <a:pPr algn="l"/>
+            <a:r>
+              <a:rPr sz="1100" b="0" i="0">
+                <a:solidFill>
+                  <a:srgbClr val="EAF0F6"/>
+                </a:solidFill>
+                <a:latin typeface="Calibri"/>
+              </a:rPr>
+              <a:t>No PCB-to-PCB harness left to radiate</a:t>
+            </a:r>
+          </a:p>
+        </p:txBody>
+      </p:sp>
+      <p:sp>
+        <p:nvSpPr>
+          <p:cNvPr id="23" name="Rectangle 22"/>
+          <p:cNvSpPr/>
+          <p:nvPr/>
+        </p:nvSpPr>
+        <p:spPr>
+          <a:xfrm>
+            <a:off x="457200" y="2139696"/>
+            <a:ext cx="11274552" cy="384048"/>
+          </a:xfrm>
+          <a:prstGeom prst="rect">
+            <a:avLst/>
+          </a:prstGeom>
+          <a:solidFill>
+            <a:srgbClr val="0E1621"/>
+          </a:solidFill>
+          <a:ln>
+            <a:noFill/>
+          </a:ln>
+        </p:spPr>
+        <p:txBody>
+          <a:bodyPr rtlCol="0" anchor="ctr"/>
+          <a:lstStyle/>
+          <a:p>
+            <a:pPr algn="ctr"/>
+          </a:p>
+        </p:txBody>
+      </p:sp>
+      <p:sp>
+        <p:nvSpPr>
+          <p:cNvPr id="24" name="TextBox 23"/>
+          <p:cNvSpPr txBox="1"/>
+          <p:nvPr/>
+        </p:nvSpPr>
+        <p:spPr>
+          <a:xfrm>
+            <a:off x="566928" y="2139696"/>
+            <a:ext cx="274320" cy="384048"/>
+          </a:xfrm>
+          <a:prstGeom prst="rect">
+            <a:avLst/>
+          </a:prstGeom>
+          <a:noFill/>
+        </p:spPr>
+        <p:txBody>
+          <a:bodyPr wrap="square" lIns="0" rIns="0" tIns="0" bIns="0" anchor="ctr">
+            <a:spAutoFit/>
+          </a:bodyPr>
+          <a:lstStyle/>
+          <a:p>
+            <a:pPr algn="l"/>
+            <a:r>
+              <a:rPr sz="1100" b="0" i="0">
+                <a:solidFill>
+                  <a:srgbClr val="9FB0C3"/>
+                </a:solidFill>
+                <a:latin typeface="Calibri"/>
+              </a:rPr>
+              <a:t>2</a:t>
+            </a:r>
+          </a:p>
+        </p:txBody>
+      </p:sp>
+      <p:sp>
+        <p:nvSpPr>
+          <p:cNvPr id="25" name="TextBox 24"/>
+          <p:cNvSpPr txBox="1"/>
+          <p:nvPr/>
+        </p:nvSpPr>
+        <p:spPr>
+          <a:xfrm>
+            <a:off x="978407" y="2139696"/>
+            <a:ext cx="2194560" cy="384048"/>
+          </a:xfrm>
+          <a:prstGeom prst="rect">
+            <a:avLst/>
+          </a:prstGeom>
+          <a:noFill/>
+        </p:spPr>
+        <p:txBody>
+          <a:bodyPr wrap="square" lIns="0" rIns="0" tIns="0" bIns="0" anchor="ctr">
+            <a:spAutoFit/>
+          </a:bodyPr>
+          <a:lstStyle/>
+          <a:p>
+            <a:pPr algn="l"/>
+            <a:r>
+              <a:rPr sz="1150" b="1" i="0">
+                <a:solidFill>
+                  <a:srgbClr val="EAF0F6"/>
+                </a:solidFill>
+                <a:latin typeface="Calibri"/>
+              </a:rPr>
+              <a:t>Common-mode noise</a:t>
+            </a:r>
+          </a:p>
+        </p:txBody>
+      </p:sp>
+      <p:sp>
+        <p:nvSpPr>
+          <p:cNvPr id="26" name="Oval 25"/>
+          <p:cNvSpPr/>
+          <p:nvPr/>
+        </p:nvSpPr>
+        <p:spPr>
+          <a:xfrm>
+            <a:off x="3355848" y="2212848"/>
+            <a:ext cx="237744" cy="237744"/>
+          </a:xfrm>
+          <a:prstGeom prst="ellipse">
+            <a:avLst/>
+          </a:prstGeom>
+          <a:solidFill>
+            <a:srgbClr val="E05D5D"/>
+          </a:solidFill>
+          <a:ln>
+            <a:noFill/>
+          </a:ln>
+        </p:spPr>
+        <p:txBody>
+          <a:bodyPr rtlCol="0" anchor="ctr"/>
+          <a:lstStyle/>
+          <a:p>
+            <a:pPr algn="ctr"/>
+          </a:p>
+        </p:txBody>
+      </p:sp>
+      <p:sp>
+        <p:nvSpPr>
+          <p:cNvPr id="27" name="TextBox 26"/>
+          <p:cNvSpPr txBox="1"/>
+          <p:nvPr/>
+        </p:nvSpPr>
+        <p:spPr>
+          <a:xfrm>
+            <a:off x="3355848" y="2212848"/>
+            <a:ext cx="237744" cy="237744"/>
+          </a:xfrm>
+          <a:prstGeom prst="rect">
+            <a:avLst/>
+          </a:prstGeom>
+          <a:noFill/>
+        </p:spPr>
+        <p:txBody>
+          <a:bodyPr wrap="square" lIns="0" rIns="0" tIns="0" bIns="0" anchor="ctr">
+            <a:spAutoFit/>
+          </a:bodyPr>
+          <a:lstStyle/>
+          <a:p>
+            <a:pPr algn="ctr"/>
+            <a:r>
+              <a:rPr sz="1100" b="1" i="0">
+                <a:solidFill>
+                  <a:srgbClr val="EAF0F6"/>
+                </a:solidFill>
+                <a:latin typeface="Calibri"/>
+              </a:rPr>
+              <a:t>✗</a:t>
+            </a:r>
+          </a:p>
+        </p:txBody>
+      </p:sp>
+      <p:sp>
+        <p:nvSpPr>
+          <p:cNvPr id="28" name="TextBox 27"/>
+          <p:cNvSpPr txBox="1"/>
+          <p:nvPr/>
+        </p:nvSpPr>
+        <p:spPr>
+          <a:xfrm>
+            <a:off x="3703320" y="2139696"/>
+            <a:ext cx="3675888" cy="384048"/>
+          </a:xfrm>
+          <a:prstGeom prst="rect">
+            <a:avLst/>
+          </a:prstGeom>
+          <a:noFill/>
+        </p:spPr>
+        <p:txBody>
+          <a:bodyPr wrap="square" lIns="0" rIns="0" tIns="0" bIns="0" anchor="ctr">
+            <a:spAutoFit/>
+          </a:bodyPr>
+          <a:lstStyle/>
+          <a:p>
+            <a:pPr algn="l"/>
+            <a:r>
+              <a:rPr sz="1100" b="0" i="0">
+                <a:solidFill>
+                  <a:srgbClr val="9FB0C3"/>
+                </a:solidFill>
+                <a:latin typeface="Calibri"/>
+              </a:rPr>
+              <a:t>Inter-board wires carry common-mode currents</a:t>
+            </a:r>
+          </a:p>
+        </p:txBody>
+      </p:sp>
+      <p:sp>
+        <p:nvSpPr>
+          <p:cNvPr id="29" name="Oval 28"/>
+          <p:cNvSpPr/>
+          <p:nvPr/>
+        </p:nvSpPr>
+        <p:spPr>
+          <a:xfrm>
+            <a:off x="7580375" y="2212848"/>
+            <a:ext cx="237744" cy="237744"/>
+          </a:xfrm>
+          <a:prstGeom prst="ellipse">
+            <a:avLst/>
+          </a:prstGeom>
+          <a:solidFill>
+            <a:srgbClr val="3FA46A"/>
+          </a:solidFill>
+          <a:ln>
+            <a:noFill/>
+          </a:ln>
+        </p:spPr>
+        <p:txBody>
+          <a:bodyPr rtlCol="0" anchor="ctr"/>
+          <a:lstStyle/>
+          <a:p>
+            <a:pPr algn="ctr"/>
+          </a:p>
+        </p:txBody>
+      </p:sp>
+      <p:sp>
+        <p:nvSpPr>
+          <p:cNvPr id="30" name="TextBox 29"/>
+          <p:cNvSpPr txBox="1"/>
+          <p:nvPr/>
+        </p:nvSpPr>
+        <p:spPr>
+          <a:xfrm>
+            <a:off x="7580375" y="2212848"/>
+            <a:ext cx="237744" cy="237744"/>
+          </a:xfrm>
+          <a:prstGeom prst="rect">
+            <a:avLst/>
+          </a:prstGeom>
+          <a:noFill/>
+        </p:spPr>
+        <p:txBody>
+          <a:bodyPr wrap="square" lIns="0" rIns="0" tIns="0" bIns="0" anchor="ctr">
+            <a:spAutoFit/>
+          </a:bodyPr>
+          <a:lstStyle/>
+          <a:p>
+            <a:pPr algn="ctr"/>
+            <a:r>
+              <a:rPr sz="1100" b="1" i="0">
+                <a:solidFill>
+                  <a:srgbClr val="EAF0F6"/>
+                </a:solidFill>
+                <a:latin typeface="Calibri"/>
+              </a:rPr>
+              <a:t>✓</a:t>
+            </a:r>
+          </a:p>
+        </p:txBody>
+      </p:sp>
+      <p:sp>
+        <p:nvSpPr>
+          <p:cNvPr id="31" name="TextBox 30"/>
+          <p:cNvSpPr txBox="1"/>
+          <p:nvPr/>
+        </p:nvSpPr>
+        <p:spPr>
+          <a:xfrm>
+            <a:off x="7927848" y="2139696"/>
+            <a:ext cx="3712464" cy="384048"/>
+          </a:xfrm>
+          <a:prstGeom prst="rect">
+            <a:avLst/>
+          </a:prstGeom>
+          <a:noFill/>
+        </p:spPr>
+        <p:txBody>
+          <a:bodyPr wrap="square" lIns="0" rIns="0" tIns="0" bIns="0" anchor="ctr">
+            <a:spAutoFit/>
+          </a:bodyPr>
+          <a:lstStyle/>
+          <a:p>
+            <a:pPr algn="l"/>
+            <a:r>
+              <a:rPr sz="1100" b="0" i="0">
+                <a:solidFill>
+                  <a:srgbClr val="EAF0F6"/>
+                </a:solidFill>
+                <a:latin typeface="Calibri"/>
+              </a:rPr>
+              <a:t>Short conductors, few CM coupling paths</a:t>
+            </a:r>
+          </a:p>
+        </p:txBody>
+      </p:sp>
+      <p:sp>
+        <p:nvSpPr>
+          <p:cNvPr id="32" name="Rectangle 31"/>
+          <p:cNvSpPr/>
+          <p:nvPr/>
+        </p:nvSpPr>
+        <p:spPr>
+          <a:xfrm>
+            <a:off x="457200" y="2523744"/>
+            <a:ext cx="11274552" cy="384048"/>
+          </a:xfrm>
+          <a:prstGeom prst="rect">
+            <a:avLst/>
+          </a:prstGeom>
+          <a:solidFill>
+            <a:srgbClr val="172331"/>
+          </a:solidFill>
+          <a:ln>
+            <a:noFill/>
+          </a:ln>
+        </p:spPr>
+        <p:txBody>
+          <a:bodyPr rtlCol="0" anchor="ctr"/>
+          <a:lstStyle/>
+          <a:p>
+            <a:pPr algn="ctr"/>
+          </a:p>
+        </p:txBody>
+      </p:sp>
+      <p:sp>
+        <p:nvSpPr>
+          <p:cNvPr id="33" name="TextBox 32"/>
+          <p:cNvSpPr txBox="1"/>
+          <p:nvPr/>
+        </p:nvSpPr>
+        <p:spPr>
+          <a:xfrm>
+            <a:off x="566928" y="2523744"/>
+            <a:ext cx="274320" cy="384048"/>
+          </a:xfrm>
+          <a:prstGeom prst="rect">
+            <a:avLst/>
+          </a:prstGeom>
+          <a:noFill/>
+        </p:spPr>
+        <p:txBody>
+          <a:bodyPr wrap="square" lIns="0" rIns="0" tIns="0" bIns="0" anchor="ctr">
+            <a:spAutoFit/>
+          </a:bodyPr>
+          <a:lstStyle/>
+          <a:p>
+            <a:pPr algn="l"/>
+            <a:r>
+              <a:rPr sz="1100" b="0" i="0">
+                <a:solidFill>
+                  <a:srgbClr val="9FB0C3"/>
+                </a:solidFill>
+                <a:latin typeface="Calibri"/>
+              </a:rPr>
+              <a:t>3</a:t>
+            </a:r>
+          </a:p>
+        </p:txBody>
+      </p:sp>
+      <p:sp>
+        <p:nvSpPr>
+          <p:cNvPr id="34" name="TextBox 33"/>
+          <p:cNvSpPr txBox="1"/>
+          <p:nvPr/>
+        </p:nvSpPr>
+        <p:spPr>
+          <a:xfrm>
+            <a:off x="978407" y="2523744"/>
+            <a:ext cx="2194560" cy="384048"/>
+          </a:xfrm>
+          <a:prstGeom prst="rect">
+            <a:avLst/>
+          </a:prstGeom>
+          <a:noFill/>
+        </p:spPr>
+        <p:txBody>
+          <a:bodyPr wrap="square" lIns="0" rIns="0" tIns="0" bIns="0" anchor="ctr">
+            <a:spAutoFit/>
+          </a:bodyPr>
+          <a:lstStyle/>
+          <a:p>
+            <a:pPr algn="l"/>
+            <a:r>
+              <a:rPr sz="1150" b="1" i="0">
+                <a:solidFill>
+                  <a:srgbClr val="EAF0F6"/>
+                </a:solidFill>
+                <a:latin typeface="Calibri"/>
+              </a:rPr>
+              <a:t>Current loop area</a:t>
+            </a:r>
+          </a:p>
+        </p:txBody>
+      </p:sp>
+      <p:sp>
+        <p:nvSpPr>
+          <p:cNvPr id="35" name="Oval 34"/>
+          <p:cNvSpPr/>
+          <p:nvPr/>
+        </p:nvSpPr>
+        <p:spPr>
+          <a:xfrm>
+            <a:off x="3355848" y="2596896"/>
+            <a:ext cx="237744" cy="237744"/>
+          </a:xfrm>
+          <a:prstGeom prst="ellipse">
+            <a:avLst/>
+          </a:prstGeom>
+          <a:solidFill>
+            <a:srgbClr val="E05D5D"/>
+          </a:solidFill>
+          <a:ln>
+            <a:noFill/>
+          </a:ln>
+        </p:spPr>
+        <p:txBody>
+          <a:bodyPr rtlCol="0" anchor="ctr"/>
+          <a:lstStyle/>
+          <a:p>
+            <a:pPr algn="ctr"/>
+          </a:p>
+        </p:txBody>
+      </p:sp>
+      <p:sp>
+        <p:nvSpPr>
+          <p:cNvPr id="36" name="TextBox 35"/>
+          <p:cNvSpPr txBox="1"/>
+          <p:nvPr/>
+        </p:nvSpPr>
+        <p:spPr>
+          <a:xfrm>
+            <a:off x="3355848" y="2596896"/>
+            <a:ext cx="237744" cy="237744"/>
+          </a:xfrm>
+          <a:prstGeom prst="rect">
+            <a:avLst/>
+          </a:prstGeom>
+          <a:noFill/>
+        </p:spPr>
+        <p:txBody>
+          <a:bodyPr wrap="square" lIns="0" rIns="0" tIns="0" bIns="0" anchor="ctr">
+            <a:spAutoFit/>
+          </a:bodyPr>
+          <a:lstStyle/>
+          <a:p>
+            <a:pPr algn="ctr"/>
+            <a:r>
+              <a:rPr sz="1100" b="1" i="0">
+                <a:solidFill>
+                  <a:srgbClr val="EAF0F6"/>
+                </a:solidFill>
+                <a:latin typeface="Calibri"/>
+              </a:rPr>
+              <a:t>✗</a:t>
+            </a:r>
+          </a:p>
+        </p:txBody>
+      </p:sp>
+      <p:sp>
+        <p:nvSpPr>
+          <p:cNvPr id="37" name="TextBox 36"/>
+          <p:cNvSpPr txBox="1"/>
+          <p:nvPr/>
+        </p:nvSpPr>
+        <p:spPr>
+          <a:xfrm>
+            <a:off x="3703320" y="2523744"/>
+            <a:ext cx="3675888" cy="384048"/>
+          </a:xfrm>
+          <a:prstGeom prst="rect">
+            <a:avLst/>
+          </a:prstGeom>
+          <a:noFill/>
+        </p:spPr>
+        <p:txBody>
+          <a:bodyPr wrap="square" lIns="0" rIns="0" tIns="0" bIns="0" anchor="ctr">
+            <a:spAutoFit/>
+          </a:bodyPr>
+          <a:lstStyle/>
+          <a:p>
+            <a:pPr algn="l"/>
+            <a:r>
+              <a:rPr sz="1100" b="0" i="0">
+                <a:solidFill>
+                  <a:srgbClr val="9FB0C3"/>
+                </a:solidFill>
+                <a:latin typeface="Calibri"/>
+              </a:rPr>
+              <a:t>Harness routing enlarges the loop area</a:t>
+            </a:r>
+          </a:p>
+        </p:txBody>
+      </p:sp>
+      <p:sp>
+        <p:nvSpPr>
+          <p:cNvPr id="38" name="Oval 37"/>
+          <p:cNvSpPr/>
+          <p:nvPr/>
+        </p:nvSpPr>
+        <p:spPr>
+          <a:xfrm>
+            <a:off x="7580375" y="2596896"/>
+            <a:ext cx="237744" cy="237744"/>
+          </a:xfrm>
+          <a:prstGeom prst="ellipse">
+            <a:avLst/>
+          </a:prstGeom>
+          <a:solidFill>
+            <a:srgbClr val="3FA46A"/>
+          </a:solidFill>
+          <a:ln>
+            <a:noFill/>
+          </a:ln>
+        </p:spPr>
+        <p:txBody>
+          <a:bodyPr rtlCol="0" anchor="ctr"/>
+          <a:lstStyle/>
+          <a:p>
+            <a:pPr algn="ctr"/>
+          </a:p>
+        </p:txBody>
+      </p:sp>
+      <p:sp>
+        <p:nvSpPr>
+          <p:cNvPr id="39" name="TextBox 38"/>
+          <p:cNvSpPr txBox="1"/>
+          <p:nvPr/>
+        </p:nvSpPr>
+        <p:spPr>
+          <a:xfrm>
+            <a:off x="7580375" y="2596896"/>
+            <a:ext cx="237744" cy="237744"/>
+          </a:xfrm>
+          <a:prstGeom prst="rect">
+            <a:avLst/>
+          </a:prstGeom>
+          <a:noFill/>
+        </p:spPr>
+        <p:txBody>
+          <a:bodyPr wrap="square" lIns="0" rIns="0" tIns="0" bIns="0" anchor="ctr">
+            <a:spAutoFit/>
+          </a:bodyPr>
+          <a:lstStyle/>
+          <a:p>
+            <a:pPr algn="ctr"/>
+            <a:r>
+              <a:rPr sz="1100" b="1" i="0">
+                <a:solidFill>
+                  <a:srgbClr val="EAF0F6"/>
+                </a:solidFill>
+                <a:latin typeface="Calibri"/>
+              </a:rPr>
+              <a:t>✓</a:t>
+            </a:r>
+          </a:p>
+        </p:txBody>
+      </p:sp>
+      <p:sp>
+        <p:nvSpPr>
+          <p:cNvPr id="40" name="TextBox 39"/>
+          <p:cNvSpPr txBox="1"/>
+          <p:nvPr/>
+        </p:nvSpPr>
+        <p:spPr>
+          <a:xfrm>
+            <a:off x="7927848" y="2523744"/>
+            <a:ext cx="3712464" cy="384048"/>
+          </a:xfrm>
+          <a:prstGeom prst="rect">
+            <a:avLst/>
+          </a:prstGeom>
+          <a:noFill/>
+        </p:spPr>
+        <p:txBody>
+          <a:bodyPr wrap="square" lIns="0" rIns="0" tIns="0" bIns="0" anchor="ctr">
+            <a:spAutoFit/>
+          </a:bodyPr>
+          <a:lstStyle/>
+          <a:p>
+            <a:pPr algn="l"/>
+            <a:r>
+              <a:rPr sz="1100" b="0" i="0">
+                <a:solidFill>
+                  <a:srgbClr val="EAF0F6"/>
+                </a:solidFill>
+                <a:latin typeface="Calibri"/>
+              </a:rPr>
+              <a:t>Forward &amp; return routed tightly in copper</a:t>
+            </a:r>
+          </a:p>
+        </p:txBody>
+      </p:sp>
+      <p:sp>
+        <p:nvSpPr>
+          <p:cNvPr id="41" name="Rectangle 40"/>
+          <p:cNvSpPr/>
+          <p:nvPr/>
+        </p:nvSpPr>
+        <p:spPr>
+          <a:xfrm>
+            <a:off x="457200" y="2907791"/>
+            <a:ext cx="11274552" cy="384048"/>
+          </a:xfrm>
+          <a:prstGeom prst="rect">
+            <a:avLst/>
+          </a:prstGeom>
+          <a:solidFill>
+            <a:srgbClr val="0E1621"/>
+          </a:solidFill>
+          <a:ln>
+            <a:noFill/>
+          </a:ln>
+        </p:spPr>
+        <p:txBody>
+          <a:bodyPr rtlCol="0" anchor="ctr"/>
+          <a:lstStyle/>
+          <a:p>
+            <a:pPr algn="ctr"/>
+          </a:p>
+        </p:txBody>
+      </p:sp>
+      <p:sp>
+        <p:nvSpPr>
+          <p:cNvPr id="42" name="TextBox 41"/>
+          <p:cNvSpPr txBox="1"/>
+          <p:nvPr/>
+        </p:nvSpPr>
+        <p:spPr>
+          <a:xfrm>
+            <a:off x="566928" y="2907791"/>
+            <a:ext cx="274320" cy="384048"/>
+          </a:xfrm>
+          <a:prstGeom prst="rect">
+            <a:avLst/>
+          </a:prstGeom>
+          <a:noFill/>
+        </p:spPr>
+        <p:txBody>
+          <a:bodyPr wrap="square" lIns="0" rIns="0" tIns="0" bIns="0" anchor="ctr">
+            <a:spAutoFit/>
+          </a:bodyPr>
+          <a:lstStyle/>
+          <a:p>
+            <a:pPr algn="l"/>
+            <a:r>
+              <a:rPr sz="1100" b="0" i="0">
+                <a:solidFill>
+                  <a:srgbClr val="9FB0C3"/>
+                </a:solidFill>
+                <a:latin typeface="Calibri"/>
+              </a:rPr>
+              <a:t>4</a:t>
+            </a:r>
+          </a:p>
+        </p:txBody>
+      </p:sp>
+      <p:sp>
+        <p:nvSpPr>
+          <p:cNvPr id="43" name="TextBox 42"/>
+          <p:cNvSpPr txBox="1"/>
+          <p:nvPr/>
+        </p:nvSpPr>
+        <p:spPr>
+          <a:xfrm>
+            <a:off x="978407" y="2907791"/>
+            <a:ext cx="2194560" cy="384048"/>
+          </a:xfrm>
+          <a:prstGeom prst="rect">
+            <a:avLst/>
+          </a:prstGeom>
+          <a:noFill/>
+        </p:spPr>
+        <p:txBody>
+          <a:bodyPr wrap="square" lIns="0" rIns="0" tIns="0" bIns="0" anchor="ctr">
+            <a:spAutoFit/>
+          </a:bodyPr>
+          <a:lstStyle/>
+          <a:p>
+            <a:pPr algn="l"/>
+            <a:r>
+              <a:rPr sz="1150" b="1" i="0">
+                <a:solidFill>
+                  <a:srgbClr val="EAF0F6"/>
+                </a:solidFill>
+                <a:latin typeface="Calibri"/>
+              </a:rPr>
+              <a:t>Ground reference ★</a:t>
+            </a:r>
+          </a:p>
+        </p:txBody>
+      </p:sp>
+      <p:sp>
+        <p:nvSpPr>
+          <p:cNvPr id="44" name="Oval 43"/>
+          <p:cNvSpPr/>
+          <p:nvPr/>
+        </p:nvSpPr>
+        <p:spPr>
+          <a:xfrm>
+            <a:off x="3355848" y="2980944"/>
+            <a:ext cx="237744" cy="237744"/>
+          </a:xfrm>
+          <a:prstGeom prst="ellipse">
+            <a:avLst/>
+          </a:prstGeom>
+          <a:solidFill>
+            <a:srgbClr val="E05D5D"/>
+          </a:solidFill>
+          <a:ln>
+            <a:noFill/>
+          </a:ln>
+        </p:spPr>
+        <p:txBody>
+          <a:bodyPr rtlCol="0" anchor="ctr"/>
+          <a:lstStyle/>
+          <a:p>
+            <a:pPr algn="ctr"/>
+          </a:p>
+        </p:txBody>
+      </p:sp>
+      <p:sp>
+        <p:nvSpPr>
+          <p:cNvPr id="45" name="TextBox 44"/>
+          <p:cNvSpPr txBox="1"/>
+          <p:nvPr/>
+        </p:nvSpPr>
+        <p:spPr>
+          <a:xfrm>
+            <a:off x="3355848" y="2980944"/>
+            <a:ext cx="237744" cy="237744"/>
+          </a:xfrm>
+          <a:prstGeom prst="rect">
+            <a:avLst/>
+          </a:prstGeom>
+          <a:noFill/>
+        </p:spPr>
+        <p:txBody>
+          <a:bodyPr wrap="square" lIns="0" rIns="0" tIns="0" bIns="0" anchor="ctr">
+            <a:spAutoFit/>
+          </a:bodyPr>
+          <a:lstStyle/>
+          <a:p>
+            <a:pPr algn="ctr"/>
+            <a:r>
+              <a:rPr sz="1100" b="1" i="0">
+                <a:solidFill>
+                  <a:srgbClr val="EAF0F6"/>
+                </a:solidFill>
+                <a:latin typeface="Calibri"/>
+              </a:rPr>
+              <a:t>✗</a:t>
+            </a:r>
+          </a:p>
+        </p:txBody>
+      </p:sp>
+      <p:sp>
+        <p:nvSpPr>
+          <p:cNvPr id="46" name="TextBox 45"/>
+          <p:cNvSpPr txBox="1"/>
+          <p:nvPr/>
+        </p:nvSpPr>
+        <p:spPr>
+          <a:xfrm>
+            <a:off x="3703320" y="2907791"/>
+            <a:ext cx="3675888" cy="384048"/>
+          </a:xfrm>
+          <a:prstGeom prst="rect">
+            <a:avLst/>
+          </a:prstGeom>
+          <a:noFill/>
+        </p:spPr>
+        <p:txBody>
+          <a:bodyPr wrap="square" lIns="0" rIns="0" tIns="0" bIns="0" anchor="ctr">
+            <a:spAutoFit/>
+          </a:bodyPr>
+          <a:lstStyle/>
+          <a:p>
+            <a:pPr algn="l"/>
+            <a:r>
+              <a:rPr sz="1100" b="0" i="0">
+                <a:solidFill>
+                  <a:srgbClr val="9FB0C3"/>
+                </a:solidFill>
+                <a:latin typeface="Calibri"/>
+              </a:rPr>
+              <a:t>Ground offset across the harness between boards</a:t>
+            </a:r>
+          </a:p>
+        </p:txBody>
+      </p:sp>
+      <p:sp>
+        <p:nvSpPr>
+          <p:cNvPr id="47" name="Oval 46"/>
+          <p:cNvSpPr/>
+          <p:nvPr/>
+        </p:nvSpPr>
+        <p:spPr>
+          <a:xfrm>
+            <a:off x="7580375" y="2980944"/>
+            <a:ext cx="237744" cy="237744"/>
+          </a:xfrm>
+          <a:prstGeom prst="ellipse">
+            <a:avLst/>
+          </a:prstGeom>
+          <a:solidFill>
+            <a:srgbClr val="3FA46A"/>
+          </a:solidFill>
+          <a:ln>
+            <a:noFill/>
+          </a:ln>
+        </p:spPr>
+        <p:txBody>
+          <a:bodyPr rtlCol="0" anchor="ctr"/>
+          <a:lstStyle/>
+          <a:p>
+            <a:pPr algn="ctr"/>
+          </a:p>
+        </p:txBody>
+      </p:sp>
+      <p:sp>
+        <p:nvSpPr>
+          <p:cNvPr id="48" name="TextBox 47"/>
+          <p:cNvSpPr txBox="1"/>
+          <p:nvPr/>
+        </p:nvSpPr>
+        <p:spPr>
+          <a:xfrm>
+            <a:off x="7580375" y="2980944"/>
+            <a:ext cx="237744" cy="237744"/>
+          </a:xfrm>
+          <a:prstGeom prst="rect">
+            <a:avLst/>
+          </a:prstGeom>
+          <a:noFill/>
+        </p:spPr>
+        <p:txBody>
+          <a:bodyPr wrap="square" lIns="0" rIns="0" tIns="0" bIns="0" anchor="ctr">
+            <a:spAutoFit/>
+          </a:bodyPr>
+          <a:lstStyle/>
+          <a:p>
+            <a:pPr algn="ctr"/>
+            <a:r>
+              <a:rPr sz="1100" b="1" i="0">
+                <a:solidFill>
+                  <a:srgbClr val="EAF0F6"/>
+                </a:solidFill>
+                <a:latin typeface="Calibri"/>
+              </a:rPr>
+              <a:t>✓</a:t>
+            </a:r>
+          </a:p>
+        </p:txBody>
+      </p:sp>
+      <p:sp>
+        <p:nvSpPr>
+          <p:cNvPr id="49" name="TextBox 48"/>
+          <p:cNvSpPr txBox="1"/>
+          <p:nvPr/>
+        </p:nvSpPr>
+        <p:spPr>
+          <a:xfrm>
+            <a:off x="7927848" y="2907791"/>
+            <a:ext cx="3712464" cy="384048"/>
+          </a:xfrm>
+          <a:prstGeom prst="rect">
+            <a:avLst/>
+          </a:prstGeom>
+          <a:noFill/>
+        </p:spPr>
+        <p:txBody>
+          <a:bodyPr wrap="square" lIns="0" rIns="0" tIns="0" bIns="0" anchor="ctr">
+            <a:spAutoFit/>
+          </a:bodyPr>
+          <a:lstStyle/>
+          <a:p>
+            <a:pPr algn="l"/>
+            <a:r>
+              <a:rPr sz="1100" b="0" i="0">
+                <a:solidFill>
+                  <a:srgbClr val="EAF0F6"/>
+                </a:solidFill>
+                <a:latin typeface="Calibri"/>
+              </a:rPr>
+              <a:t>One continuous ground plane end to end</a:t>
+            </a:r>
+          </a:p>
+        </p:txBody>
+      </p:sp>
+      <p:sp>
+        <p:nvSpPr>
+          <p:cNvPr id="50" name="Rectangle 49"/>
+          <p:cNvSpPr/>
+          <p:nvPr/>
+        </p:nvSpPr>
+        <p:spPr>
+          <a:xfrm>
+            <a:off x="457200" y="3291839"/>
+            <a:ext cx="11274552" cy="384048"/>
+          </a:xfrm>
+          <a:prstGeom prst="rect">
+            <a:avLst/>
+          </a:prstGeom>
+          <a:solidFill>
+            <a:srgbClr val="172331"/>
+          </a:solidFill>
+          <a:ln>
+            <a:noFill/>
+          </a:ln>
+        </p:spPr>
+        <p:txBody>
+          <a:bodyPr rtlCol="0" anchor="ctr"/>
+          <a:lstStyle/>
+          <a:p>
+            <a:pPr algn="ctr"/>
+          </a:p>
+        </p:txBody>
+      </p:sp>
+      <p:sp>
+        <p:nvSpPr>
+          <p:cNvPr id="51" name="TextBox 50"/>
+          <p:cNvSpPr txBox="1"/>
+          <p:nvPr/>
+        </p:nvSpPr>
+        <p:spPr>
+          <a:xfrm>
+            <a:off x="566928" y="3291839"/>
+            <a:ext cx="274320" cy="384048"/>
+          </a:xfrm>
+          <a:prstGeom prst="rect">
+            <a:avLst/>
+          </a:prstGeom>
+          <a:noFill/>
+        </p:spPr>
+        <p:txBody>
+          <a:bodyPr wrap="square" lIns="0" rIns="0" tIns="0" bIns="0" anchor="ctr">
+            <a:spAutoFit/>
+          </a:bodyPr>
+          <a:lstStyle/>
+          <a:p>
+            <a:pPr algn="l"/>
+            <a:r>
+              <a:rPr sz="1100" b="0" i="0">
+                <a:solidFill>
+                  <a:srgbClr val="9FB0C3"/>
+                </a:solidFill>
+                <a:latin typeface="Calibri"/>
+              </a:rPr>
+              <a:t>5</a:t>
+            </a:r>
+          </a:p>
+        </p:txBody>
+      </p:sp>
+      <p:sp>
+        <p:nvSpPr>
+          <p:cNvPr id="52" name="TextBox 51"/>
+          <p:cNvSpPr txBox="1"/>
+          <p:nvPr/>
+        </p:nvSpPr>
+        <p:spPr>
+          <a:xfrm>
+            <a:off x="978407" y="3291839"/>
+            <a:ext cx="2194560" cy="384048"/>
+          </a:xfrm>
+          <a:prstGeom prst="rect">
+            <a:avLst/>
+          </a:prstGeom>
+          <a:noFill/>
+        </p:spPr>
+        <p:txBody>
+          <a:bodyPr wrap="square" lIns="0" rIns="0" tIns="0" bIns="0" anchor="ctr">
+            <a:spAutoFit/>
+          </a:bodyPr>
+          <a:lstStyle/>
+          <a:p>
+            <a:pPr algn="l"/>
+            <a:r>
+              <a:rPr sz="1150" b="1" i="0">
+                <a:solidFill>
+                  <a:srgbClr val="EAF0F6"/>
+                </a:solidFill>
+                <a:latin typeface="Calibri"/>
+              </a:rPr>
+              <a:t>RF immunity &amp; ESD</a:t>
+            </a:r>
+          </a:p>
+        </p:txBody>
+      </p:sp>
+      <p:sp>
+        <p:nvSpPr>
+          <p:cNvPr id="53" name="Oval 52"/>
+          <p:cNvSpPr/>
+          <p:nvPr/>
+        </p:nvSpPr>
+        <p:spPr>
+          <a:xfrm>
+            <a:off x="3355848" y="3364991"/>
+            <a:ext cx="237744" cy="237744"/>
+          </a:xfrm>
+          <a:prstGeom prst="ellipse">
+            <a:avLst/>
+          </a:prstGeom>
+          <a:solidFill>
+            <a:srgbClr val="E05D5D"/>
+          </a:solidFill>
+          <a:ln>
+            <a:noFill/>
+          </a:ln>
+        </p:spPr>
+        <p:txBody>
+          <a:bodyPr rtlCol="0" anchor="ctr"/>
+          <a:lstStyle/>
+          <a:p>
+            <a:pPr algn="ctr"/>
+          </a:p>
+        </p:txBody>
+      </p:sp>
+      <p:sp>
+        <p:nvSpPr>
+          <p:cNvPr id="54" name="TextBox 53"/>
+          <p:cNvSpPr txBox="1"/>
+          <p:nvPr/>
+        </p:nvSpPr>
+        <p:spPr>
+          <a:xfrm>
+            <a:off x="3355848" y="3364991"/>
+            <a:ext cx="237744" cy="237744"/>
+          </a:xfrm>
+          <a:prstGeom prst="rect">
+            <a:avLst/>
+          </a:prstGeom>
+          <a:noFill/>
+        </p:spPr>
+        <p:txBody>
+          <a:bodyPr wrap="square" lIns="0" rIns="0" tIns="0" bIns="0" anchor="ctr">
+            <a:spAutoFit/>
+          </a:bodyPr>
+          <a:lstStyle/>
+          <a:p>
+            <a:pPr algn="ctr"/>
+            <a:r>
+              <a:rPr sz="1100" b="1" i="0">
+                <a:solidFill>
+                  <a:srgbClr val="EAF0F6"/>
+                </a:solidFill>
+                <a:latin typeface="Calibri"/>
+              </a:rPr>
+              <a:t>✗</a:t>
+            </a:r>
+          </a:p>
+        </p:txBody>
+      </p:sp>
+      <p:sp>
+        <p:nvSpPr>
+          <p:cNvPr id="55" name="TextBox 54"/>
+          <p:cNvSpPr txBox="1"/>
+          <p:nvPr/>
+        </p:nvSpPr>
+        <p:spPr>
+          <a:xfrm>
+            <a:off x="3703320" y="3291839"/>
+            <a:ext cx="3675888" cy="384048"/>
+          </a:xfrm>
+          <a:prstGeom prst="rect">
+            <a:avLst/>
+          </a:prstGeom>
+          <a:noFill/>
+        </p:spPr>
+        <p:txBody>
+          <a:bodyPr wrap="square" lIns="0" rIns="0" tIns="0" bIns="0" anchor="ctr">
+            <a:spAutoFit/>
+          </a:bodyPr>
+          <a:lstStyle/>
+          <a:p>
+            <a:pPr algn="l"/>
+            <a:r>
+              <a:rPr sz="1100" b="0" i="0">
+                <a:solidFill>
+                  <a:srgbClr val="9FB0C3"/>
+                </a:solidFill>
+                <a:latin typeface="Calibri"/>
+              </a:rPr>
+              <a:t>Harnesses pick up RF; more ESD entry points</a:t>
+            </a:r>
+          </a:p>
+        </p:txBody>
+      </p:sp>
+      <p:sp>
+        <p:nvSpPr>
+          <p:cNvPr id="56" name="Oval 55"/>
+          <p:cNvSpPr/>
+          <p:nvPr/>
+        </p:nvSpPr>
+        <p:spPr>
+          <a:xfrm>
+            <a:off x="7580375" y="3364991"/>
+            <a:ext cx="237744" cy="237744"/>
+          </a:xfrm>
+          <a:prstGeom prst="ellipse">
+            <a:avLst/>
+          </a:prstGeom>
+          <a:solidFill>
+            <a:srgbClr val="3FA46A"/>
+          </a:solidFill>
+          <a:ln>
+            <a:noFill/>
+          </a:ln>
+        </p:spPr>
+        <p:txBody>
+          <a:bodyPr rtlCol="0" anchor="ctr"/>
+          <a:lstStyle/>
+          <a:p>
+            <a:pPr algn="ctr"/>
+          </a:p>
+        </p:txBody>
+      </p:sp>
+      <p:sp>
+        <p:nvSpPr>
+          <p:cNvPr id="57" name="TextBox 56"/>
+          <p:cNvSpPr txBox="1"/>
+          <p:nvPr/>
+        </p:nvSpPr>
+        <p:spPr>
+          <a:xfrm>
+            <a:off x="7580375" y="3364991"/>
+            <a:ext cx="237744" cy="237744"/>
+          </a:xfrm>
+          <a:prstGeom prst="rect">
+            <a:avLst/>
+          </a:prstGeom>
+          <a:noFill/>
+        </p:spPr>
+        <p:txBody>
+          <a:bodyPr wrap="square" lIns="0" rIns="0" tIns="0" bIns="0" anchor="ctr">
+            <a:spAutoFit/>
+          </a:bodyPr>
+          <a:lstStyle/>
+          <a:p>
+            <a:pPr algn="ctr"/>
+            <a:r>
+              <a:rPr sz="1100" b="1" i="0">
+                <a:solidFill>
+                  <a:srgbClr val="EAF0F6"/>
+                </a:solidFill>
+                <a:latin typeface="Calibri"/>
+              </a:rPr>
+              <a:t>✓</a:t>
+            </a:r>
+          </a:p>
+        </p:txBody>
+      </p:sp>
+      <p:sp>
+        <p:nvSpPr>
+          <p:cNvPr id="58" name="TextBox 57"/>
+          <p:cNvSpPr txBox="1"/>
+          <p:nvPr/>
+        </p:nvSpPr>
+        <p:spPr>
+          <a:xfrm>
+            <a:off x="7927848" y="3291839"/>
+            <a:ext cx="3712464" cy="384048"/>
+          </a:xfrm>
+          <a:prstGeom prst="rect">
+            <a:avLst/>
+          </a:prstGeom>
+          <a:noFill/>
+        </p:spPr>
+        <p:txBody>
+          <a:bodyPr wrap="square" lIns="0" rIns="0" tIns="0" bIns="0" anchor="ctr">
+            <a:spAutoFit/>
+          </a:bodyPr>
+          <a:lstStyle/>
+          <a:p>
+            <a:pPr algn="l"/>
+            <a:r>
+              <a:rPr sz="1100" b="0" i="0">
+                <a:solidFill>
+                  <a:srgbClr val="EAF0F6"/>
+                </a:solidFill>
+                <a:latin typeface="Calibri"/>
+              </a:rPr>
+              <a:t>Fewer conductors and interfaces to protect</a:t>
+            </a:r>
+          </a:p>
+        </p:txBody>
+      </p:sp>
+      <p:sp>
+        <p:nvSpPr>
+          <p:cNvPr id="59" name="Rectangle 58"/>
+          <p:cNvSpPr/>
+          <p:nvPr/>
+        </p:nvSpPr>
+        <p:spPr>
+          <a:xfrm>
+            <a:off x="457200" y="3675887"/>
+            <a:ext cx="11274552" cy="384048"/>
+          </a:xfrm>
+          <a:prstGeom prst="rect">
+            <a:avLst/>
+          </a:prstGeom>
+          <a:solidFill>
+            <a:srgbClr val="0E1621"/>
+          </a:solidFill>
+          <a:ln>
+            <a:noFill/>
+          </a:ln>
+        </p:spPr>
+        <p:txBody>
+          <a:bodyPr rtlCol="0" anchor="ctr"/>
+          <a:lstStyle/>
+          <a:p>
+            <a:pPr algn="ctr"/>
+          </a:p>
+        </p:txBody>
+      </p:sp>
+      <p:sp>
+        <p:nvSpPr>
+          <p:cNvPr id="60" name="TextBox 59"/>
+          <p:cNvSpPr txBox="1"/>
+          <p:nvPr/>
+        </p:nvSpPr>
+        <p:spPr>
+          <a:xfrm>
+            <a:off x="566928" y="3675887"/>
+            <a:ext cx="274320" cy="384048"/>
+          </a:xfrm>
+          <a:prstGeom prst="rect">
+            <a:avLst/>
+          </a:prstGeom>
+          <a:noFill/>
+        </p:spPr>
+        <p:txBody>
+          <a:bodyPr wrap="square" lIns="0" rIns="0" tIns="0" bIns="0" anchor="ctr">
+            <a:spAutoFit/>
+          </a:bodyPr>
+          <a:lstStyle/>
+          <a:p>
+            <a:pPr algn="l"/>
+            <a:r>
+              <a:rPr sz="1100" b="0" i="0">
+                <a:solidFill>
+                  <a:srgbClr val="9FB0C3"/>
+                </a:solidFill>
+                <a:latin typeface="Calibri"/>
+              </a:rPr>
+              <a:t>6</a:t>
+            </a:r>
+          </a:p>
+        </p:txBody>
+      </p:sp>
+      <p:sp>
+        <p:nvSpPr>
+          <p:cNvPr id="61" name="TextBox 60"/>
+          <p:cNvSpPr txBox="1"/>
+          <p:nvPr/>
+        </p:nvSpPr>
+        <p:spPr>
+          <a:xfrm>
+            <a:off x="978407" y="3675887"/>
+            <a:ext cx="2194560" cy="384048"/>
+          </a:xfrm>
+          <a:prstGeom prst="rect">
+            <a:avLst/>
+          </a:prstGeom>
+          <a:noFill/>
+        </p:spPr>
+        <p:txBody>
+          <a:bodyPr wrap="square" lIns="0" rIns="0" tIns="0" bIns="0" anchor="ctr">
+            <a:spAutoFit/>
+          </a:bodyPr>
+          <a:lstStyle/>
+          <a:p>
+            <a:pPr algn="l"/>
+            <a:r>
+              <a:rPr sz="1150" b="1" i="0">
+                <a:solidFill>
+                  <a:srgbClr val="EAF0F6"/>
+                </a:solidFill>
+                <a:latin typeface="Calibri"/>
+              </a:rPr>
+              <a:t>Connector reliability</a:t>
+            </a:r>
+          </a:p>
+        </p:txBody>
+      </p:sp>
+      <p:sp>
+        <p:nvSpPr>
+          <p:cNvPr id="62" name="Oval 61"/>
+          <p:cNvSpPr/>
+          <p:nvPr/>
+        </p:nvSpPr>
+        <p:spPr>
+          <a:xfrm>
+            <a:off x="3355848" y="3749039"/>
+            <a:ext cx="237744" cy="237744"/>
+          </a:xfrm>
+          <a:prstGeom prst="ellipse">
+            <a:avLst/>
+          </a:prstGeom>
+          <a:solidFill>
+            <a:srgbClr val="E05D5D"/>
+          </a:solidFill>
+          <a:ln>
+            <a:noFill/>
+          </a:ln>
+        </p:spPr>
+        <p:txBody>
+          <a:bodyPr rtlCol="0" anchor="ctr"/>
+          <a:lstStyle/>
+          <a:p>
+            <a:pPr algn="ctr"/>
+          </a:p>
+        </p:txBody>
+      </p:sp>
+      <p:sp>
+        <p:nvSpPr>
+          <p:cNvPr id="63" name="TextBox 62"/>
+          <p:cNvSpPr txBox="1"/>
+          <p:nvPr/>
+        </p:nvSpPr>
+        <p:spPr>
+          <a:xfrm>
+            <a:off x="3355848" y="3749039"/>
+            <a:ext cx="237744" cy="237744"/>
+          </a:xfrm>
+          <a:prstGeom prst="rect">
+            <a:avLst/>
+          </a:prstGeom>
+          <a:noFill/>
+        </p:spPr>
+        <p:txBody>
+          <a:bodyPr wrap="square" lIns="0" rIns="0" tIns="0" bIns="0" anchor="ctr">
+            <a:spAutoFit/>
+          </a:bodyPr>
+          <a:lstStyle/>
+          <a:p>
+            <a:pPr algn="ctr"/>
+            <a:r>
+              <a:rPr sz="1100" b="1" i="0">
+                <a:solidFill>
+                  <a:srgbClr val="EAF0F6"/>
+                </a:solidFill>
+                <a:latin typeface="Calibri"/>
+              </a:rPr>
+              <a:t>✗</a:t>
+            </a:r>
+          </a:p>
+        </p:txBody>
+      </p:sp>
+      <p:sp>
+        <p:nvSpPr>
+          <p:cNvPr id="64" name="TextBox 63"/>
+          <p:cNvSpPr txBox="1"/>
+          <p:nvPr/>
+        </p:nvSpPr>
+        <p:spPr>
+          <a:xfrm>
+            <a:off x="3703320" y="3675887"/>
+            <a:ext cx="3675888" cy="384048"/>
+          </a:xfrm>
+          <a:prstGeom prst="rect">
+            <a:avLst/>
+          </a:prstGeom>
+          <a:noFill/>
+        </p:spPr>
+        <p:txBody>
+          <a:bodyPr wrap="square" lIns="0" rIns="0" tIns="0" bIns="0" anchor="ctr">
+            <a:spAutoFit/>
+          </a:bodyPr>
+          <a:lstStyle/>
+          <a:p>
+            <a:pPr algn="l"/>
+            <a:r>
+              <a:rPr sz="1100" b="0" i="0">
+                <a:solidFill>
+                  <a:srgbClr val="9FB0C3"/>
+                </a:solidFill>
+                <a:latin typeface="Calibri"/>
+              </a:rPr>
+              <a:t>More connectors/crimps stressed by vibration</a:t>
+            </a:r>
+          </a:p>
+        </p:txBody>
+      </p:sp>
+      <p:sp>
+        <p:nvSpPr>
+          <p:cNvPr id="65" name="Oval 64"/>
+          <p:cNvSpPr/>
+          <p:nvPr/>
+        </p:nvSpPr>
+        <p:spPr>
+          <a:xfrm>
+            <a:off x="7580375" y="3749039"/>
+            <a:ext cx="237744" cy="237744"/>
+          </a:xfrm>
+          <a:prstGeom prst="ellipse">
+            <a:avLst/>
+          </a:prstGeom>
+          <a:solidFill>
+            <a:srgbClr val="3FA46A"/>
+          </a:solidFill>
+          <a:ln>
+            <a:noFill/>
+          </a:ln>
+        </p:spPr>
+        <p:txBody>
+          <a:bodyPr rtlCol="0" anchor="ctr"/>
+          <a:lstStyle/>
+          <a:p>
+            <a:pPr algn="ctr"/>
+          </a:p>
+        </p:txBody>
+      </p:sp>
+      <p:sp>
+        <p:nvSpPr>
+          <p:cNvPr id="66" name="TextBox 65"/>
+          <p:cNvSpPr txBox="1"/>
+          <p:nvPr/>
+        </p:nvSpPr>
+        <p:spPr>
+          <a:xfrm>
+            <a:off x="7580375" y="3749039"/>
+            <a:ext cx="237744" cy="237744"/>
+          </a:xfrm>
+          <a:prstGeom prst="rect">
+            <a:avLst/>
+          </a:prstGeom>
+          <a:noFill/>
+        </p:spPr>
+        <p:txBody>
+          <a:bodyPr wrap="square" lIns="0" rIns="0" tIns="0" bIns="0" anchor="ctr">
+            <a:spAutoFit/>
+          </a:bodyPr>
+          <a:lstStyle/>
+          <a:p>
+            <a:pPr algn="ctr"/>
+            <a:r>
+              <a:rPr sz="1100" b="1" i="0">
+                <a:solidFill>
+                  <a:srgbClr val="EAF0F6"/>
+                </a:solidFill>
+                <a:latin typeface="Calibri"/>
+              </a:rPr>
+              <a:t>✓</a:t>
+            </a:r>
+          </a:p>
+        </p:txBody>
+      </p:sp>
+      <p:sp>
+        <p:nvSpPr>
+          <p:cNvPr id="67" name="TextBox 66"/>
+          <p:cNvSpPr txBox="1"/>
+          <p:nvPr/>
+        </p:nvSpPr>
+        <p:spPr>
+          <a:xfrm>
+            <a:off x="7927848" y="3675887"/>
+            <a:ext cx="3712464" cy="384048"/>
+          </a:xfrm>
+          <a:prstGeom prst="rect">
+            <a:avLst/>
+          </a:prstGeom>
+          <a:noFill/>
+        </p:spPr>
+        <p:txBody>
+          <a:bodyPr wrap="square" lIns="0" rIns="0" tIns="0" bIns="0" anchor="ctr">
+            <a:spAutoFit/>
+          </a:bodyPr>
+          <a:lstStyle/>
+          <a:p>
+            <a:pPr algn="l"/>
+            <a:r>
+              <a:rPr sz="1100" b="0" i="0">
+                <a:solidFill>
+                  <a:srgbClr val="EAF0F6"/>
+                </a:solidFill>
+                <a:latin typeface="Calibri"/>
+              </a:rPr>
+              <a:t>Fewer interfaces, fewer failure points</a:t>
+            </a:r>
+          </a:p>
+        </p:txBody>
+      </p:sp>
+      <p:sp>
+        <p:nvSpPr>
+          <p:cNvPr id="68" name="Rectangle 67"/>
+          <p:cNvSpPr/>
+          <p:nvPr/>
+        </p:nvSpPr>
+        <p:spPr>
+          <a:xfrm>
+            <a:off x="457200" y="4059935"/>
+            <a:ext cx="11274552" cy="384048"/>
+          </a:xfrm>
+          <a:prstGeom prst="rect">
+            <a:avLst/>
+          </a:prstGeom>
+          <a:solidFill>
+            <a:srgbClr val="172331"/>
+          </a:solidFill>
+          <a:ln>
+            <a:noFill/>
+          </a:ln>
+        </p:spPr>
+        <p:txBody>
+          <a:bodyPr rtlCol="0" anchor="ctr"/>
+          <a:lstStyle/>
+          <a:p>
+            <a:pPr algn="ctr"/>
+          </a:p>
+        </p:txBody>
+      </p:sp>
+      <p:sp>
+        <p:nvSpPr>
+          <p:cNvPr id="69" name="TextBox 68"/>
+          <p:cNvSpPr txBox="1"/>
+          <p:nvPr/>
+        </p:nvSpPr>
+        <p:spPr>
+          <a:xfrm>
+            <a:off x="566928" y="4059935"/>
+            <a:ext cx="274320" cy="384048"/>
+          </a:xfrm>
+          <a:prstGeom prst="rect">
+            <a:avLst/>
+          </a:prstGeom>
+          <a:noFill/>
+        </p:spPr>
+        <p:txBody>
+          <a:bodyPr wrap="square" lIns="0" rIns="0" tIns="0" bIns="0" anchor="ctr">
+            <a:spAutoFit/>
+          </a:bodyPr>
+          <a:lstStyle/>
+          <a:p>
+            <a:pPr algn="l"/>
+            <a:r>
+              <a:rPr sz="1100" b="0" i="0">
+                <a:solidFill>
+                  <a:srgbClr val="9FB0C3"/>
+                </a:solidFill>
+                <a:latin typeface="Calibri"/>
+              </a:rPr>
+              <a:t>7</a:t>
+            </a:r>
+          </a:p>
+        </p:txBody>
+      </p:sp>
+      <p:sp>
+        <p:nvSpPr>
+          <p:cNvPr id="70" name="TextBox 69"/>
+          <p:cNvSpPr txBox="1"/>
+          <p:nvPr/>
+        </p:nvSpPr>
+        <p:spPr>
+          <a:xfrm>
+            <a:off x="978407" y="4059935"/>
+            <a:ext cx="2194560" cy="384048"/>
+          </a:xfrm>
+          <a:prstGeom prst="rect">
+            <a:avLst/>
+          </a:prstGeom>
+          <a:noFill/>
+        </p:spPr>
+        <p:txBody>
+          <a:bodyPr wrap="square" lIns="0" rIns="0" tIns="0" bIns="0" anchor="ctr">
+            <a:spAutoFit/>
+          </a:bodyPr>
+          <a:lstStyle/>
+          <a:p>
+            <a:pPr algn="l"/>
+            <a:r>
+              <a:rPr sz="1150" b="1" i="0">
+                <a:solidFill>
+                  <a:srgbClr val="EAF0F6"/>
+                </a:solidFill>
+                <a:latin typeface="Calibri"/>
+              </a:rPr>
+              <a:t>BOM &amp; assembly</a:t>
+            </a:r>
+          </a:p>
+        </p:txBody>
+      </p:sp>
+      <p:sp>
+        <p:nvSpPr>
+          <p:cNvPr id="71" name="Oval 70"/>
+          <p:cNvSpPr/>
+          <p:nvPr/>
+        </p:nvSpPr>
+        <p:spPr>
+          <a:xfrm>
+            <a:off x="3355848" y="4133087"/>
+            <a:ext cx="237744" cy="237744"/>
+          </a:xfrm>
+          <a:prstGeom prst="ellipse">
+            <a:avLst/>
+          </a:prstGeom>
+          <a:solidFill>
+            <a:srgbClr val="E05D5D"/>
+          </a:solidFill>
+          <a:ln>
+            <a:noFill/>
+          </a:ln>
+        </p:spPr>
+        <p:txBody>
+          <a:bodyPr rtlCol="0" anchor="ctr"/>
+          <a:lstStyle/>
+          <a:p>
+            <a:pPr algn="ctr"/>
+          </a:p>
+        </p:txBody>
+      </p:sp>
+      <p:sp>
+        <p:nvSpPr>
+          <p:cNvPr id="72" name="TextBox 71"/>
+          <p:cNvSpPr txBox="1"/>
+          <p:nvPr/>
+        </p:nvSpPr>
+        <p:spPr>
+          <a:xfrm>
+            <a:off x="3355848" y="4133087"/>
+            <a:ext cx="237744" cy="237744"/>
+          </a:xfrm>
+          <a:prstGeom prst="rect">
+            <a:avLst/>
+          </a:prstGeom>
+          <a:noFill/>
+        </p:spPr>
+        <p:txBody>
+          <a:bodyPr wrap="square" lIns="0" rIns="0" tIns="0" bIns="0" anchor="ctr">
+            <a:spAutoFit/>
+          </a:bodyPr>
+          <a:lstStyle/>
+          <a:p>
+            <a:pPr algn="ctr"/>
+            <a:r>
+              <a:rPr sz="1100" b="1" i="0">
+                <a:solidFill>
+                  <a:srgbClr val="EAF0F6"/>
+                </a:solidFill>
+                <a:latin typeface="Calibri"/>
+              </a:rPr>
+              <a:t>✗</a:t>
+            </a:r>
+          </a:p>
+        </p:txBody>
+      </p:sp>
+      <p:sp>
+        <p:nvSpPr>
+          <p:cNvPr id="73" name="TextBox 72"/>
+          <p:cNvSpPr txBox="1"/>
+          <p:nvPr/>
+        </p:nvSpPr>
+        <p:spPr>
+          <a:xfrm>
+            <a:off x="3703320" y="4059935"/>
+            <a:ext cx="3675888" cy="384048"/>
+          </a:xfrm>
+          <a:prstGeom prst="rect">
+            <a:avLst/>
+          </a:prstGeom>
+          <a:noFill/>
+        </p:spPr>
+        <p:txBody>
+          <a:bodyPr wrap="square" lIns="0" rIns="0" tIns="0" bIns="0" anchor="ctr">
+            <a:spAutoFit/>
+          </a:bodyPr>
+          <a:lstStyle/>
+          <a:p>
+            <a:pPr algn="l"/>
+            <a:r>
+              <a:rPr sz="1100" b="0" i="0">
+                <a:solidFill>
+                  <a:srgbClr val="9FB0C3"/>
+                </a:solidFill>
+                <a:latin typeface="Calibri"/>
+              </a:rPr>
+              <a:t>Extra connectors, wires, terminals, 3 PCBs</a:t>
+            </a:r>
+          </a:p>
+        </p:txBody>
+      </p:sp>
+      <p:sp>
+        <p:nvSpPr>
+          <p:cNvPr id="74" name="Oval 73"/>
+          <p:cNvSpPr/>
+          <p:nvPr/>
+        </p:nvSpPr>
+        <p:spPr>
+          <a:xfrm>
+            <a:off x="7580375" y="4133087"/>
+            <a:ext cx="237744" cy="237744"/>
+          </a:xfrm>
+          <a:prstGeom prst="ellipse">
+            <a:avLst/>
+          </a:prstGeom>
+          <a:solidFill>
+            <a:srgbClr val="3FA46A"/>
+          </a:solidFill>
+          <a:ln>
+            <a:noFill/>
+          </a:ln>
+        </p:spPr>
+        <p:txBody>
+          <a:bodyPr rtlCol="0" anchor="ctr"/>
+          <a:lstStyle/>
+          <a:p>
+            <a:pPr algn="ctr"/>
+          </a:p>
+        </p:txBody>
+      </p:sp>
+      <p:sp>
+        <p:nvSpPr>
+          <p:cNvPr id="75" name="TextBox 74"/>
+          <p:cNvSpPr txBox="1"/>
+          <p:nvPr/>
+        </p:nvSpPr>
+        <p:spPr>
+          <a:xfrm>
+            <a:off x="7580375" y="4133087"/>
+            <a:ext cx="237744" cy="237744"/>
+          </a:xfrm>
+          <a:prstGeom prst="rect">
+            <a:avLst/>
+          </a:prstGeom>
+          <a:noFill/>
+        </p:spPr>
+        <p:txBody>
+          <a:bodyPr wrap="square" lIns="0" rIns="0" tIns="0" bIns="0" anchor="ctr">
+            <a:spAutoFit/>
+          </a:bodyPr>
+          <a:lstStyle/>
+          <a:p>
+            <a:pPr algn="ctr"/>
+            <a:r>
+              <a:rPr sz="1100" b="1" i="0">
+                <a:solidFill>
+                  <a:srgbClr val="EAF0F6"/>
+                </a:solidFill>
+                <a:latin typeface="Calibri"/>
+              </a:rPr>
+              <a:t>✓</a:t>
+            </a:r>
+          </a:p>
+        </p:txBody>
+      </p:sp>
+      <p:sp>
+        <p:nvSpPr>
+          <p:cNvPr id="76" name="TextBox 75"/>
+          <p:cNvSpPr txBox="1"/>
+          <p:nvPr/>
+        </p:nvSpPr>
+        <p:spPr>
+          <a:xfrm>
+            <a:off x="7927848" y="4059935"/>
+            <a:ext cx="3712464" cy="384048"/>
+          </a:xfrm>
+          <a:prstGeom prst="rect">
+            <a:avLst/>
+          </a:prstGeom>
+          <a:noFill/>
+        </p:spPr>
+        <p:txBody>
+          <a:bodyPr wrap="square" lIns="0" rIns="0" tIns="0" bIns="0" anchor="ctr">
+            <a:spAutoFit/>
+          </a:bodyPr>
+          <a:lstStyle/>
+          <a:p>
+            <a:pPr algn="l"/>
+            <a:r>
+              <a:rPr sz="1100" b="0" i="0">
+                <a:solidFill>
+                  <a:srgbClr val="EAF0F6"/>
+                </a:solidFill>
+                <a:latin typeface="Calibri"/>
+              </a:rPr>
+              <a:t>One part number, single assembly step</a:t>
+            </a:r>
+          </a:p>
+        </p:txBody>
+      </p:sp>
+      <p:sp>
+        <p:nvSpPr>
+          <p:cNvPr id="77" name="Rectangle 76"/>
+          <p:cNvSpPr/>
+          <p:nvPr/>
+        </p:nvSpPr>
+        <p:spPr>
+          <a:xfrm>
+            <a:off x="457200" y="4443983"/>
+            <a:ext cx="11274552" cy="384048"/>
+          </a:xfrm>
+          <a:prstGeom prst="rect">
+            <a:avLst/>
+          </a:prstGeom>
+          <a:solidFill>
+            <a:srgbClr val="0E1621"/>
+          </a:solidFill>
+          <a:ln>
+            <a:noFill/>
+          </a:ln>
+        </p:spPr>
+        <p:txBody>
+          <a:bodyPr rtlCol="0" anchor="ctr"/>
+          <a:lstStyle/>
+          <a:p>
+            <a:pPr algn="ctr"/>
+          </a:p>
+        </p:txBody>
+      </p:sp>
+      <p:sp>
+        <p:nvSpPr>
+          <p:cNvPr id="78" name="TextBox 77"/>
+          <p:cNvSpPr txBox="1"/>
+          <p:nvPr/>
+        </p:nvSpPr>
+        <p:spPr>
+          <a:xfrm>
+            <a:off x="566928" y="4443983"/>
+            <a:ext cx="274320" cy="384048"/>
+          </a:xfrm>
+          <a:prstGeom prst="rect">
+            <a:avLst/>
+          </a:prstGeom>
+          <a:noFill/>
+        </p:spPr>
+        <p:txBody>
+          <a:bodyPr wrap="square" lIns="0" rIns="0" tIns="0" bIns="0" anchor="ctr">
+            <a:spAutoFit/>
+          </a:bodyPr>
+          <a:lstStyle/>
+          <a:p>
+            <a:pPr algn="l"/>
+            <a:r>
+              <a:rPr sz="1100" b="0" i="0">
+                <a:solidFill>
+                  <a:srgbClr val="9FB0C3"/>
+                </a:solidFill>
+                <a:latin typeface="Calibri"/>
+              </a:rPr>
+              <a:t>8</a:t>
+            </a:r>
+          </a:p>
+        </p:txBody>
+      </p:sp>
+      <p:sp>
+        <p:nvSpPr>
+          <p:cNvPr id="79" name="TextBox 78"/>
+          <p:cNvSpPr txBox="1"/>
+          <p:nvPr/>
+        </p:nvSpPr>
+        <p:spPr>
+          <a:xfrm>
+            <a:off x="978407" y="4443983"/>
+            <a:ext cx="2194560" cy="384048"/>
+          </a:xfrm>
+          <a:prstGeom prst="rect">
+            <a:avLst/>
+          </a:prstGeom>
+          <a:noFill/>
+        </p:spPr>
+        <p:txBody>
+          <a:bodyPr wrap="square" lIns="0" rIns="0" tIns="0" bIns="0" anchor="ctr">
+            <a:spAutoFit/>
+          </a:bodyPr>
+          <a:lstStyle/>
+          <a:p>
+            <a:pPr algn="l"/>
+            <a:r>
+              <a:rPr sz="1150" b="1" i="0">
+                <a:solidFill>
+                  <a:srgbClr val="EAF0F6"/>
+                </a:solidFill>
+                <a:latin typeface="Calibri"/>
+              </a:rPr>
+              <a:t>Panel utilization</a:t>
+            </a:r>
+          </a:p>
+        </p:txBody>
+      </p:sp>
+      <p:sp>
+        <p:nvSpPr>
+          <p:cNvPr id="80" name="Oval 79"/>
+          <p:cNvSpPr/>
+          <p:nvPr/>
+        </p:nvSpPr>
+        <p:spPr>
+          <a:xfrm>
+            <a:off x="3355848" y="4517136"/>
+            <a:ext cx="237744" cy="237744"/>
+          </a:xfrm>
+          <a:prstGeom prst="ellipse">
+            <a:avLst/>
+          </a:prstGeom>
+          <a:solidFill>
+            <a:srgbClr val="3FA46A"/>
+          </a:solidFill>
+          <a:ln>
+            <a:noFill/>
+          </a:ln>
+        </p:spPr>
+        <p:txBody>
+          <a:bodyPr rtlCol="0" anchor="ctr"/>
+          <a:lstStyle/>
+          <a:p>
+            <a:pPr algn="ctr"/>
+          </a:p>
+        </p:txBody>
+      </p:sp>
+      <p:sp>
+        <p:nvSpPr>
+          <p:cNvPr id="81" name="TextBox 80"/>
+          <p:cNvSpPr txBox="1"/>
+          <p:nvPr/>
+        </p:nvSpPr>
+        <p:spPr>
+          <a:xfrm>
+            <a:off x="3355848" y="4517136"/>
+            <a:ext cx="237744" cy="237744"/>
+          </a:xfrm>
+          <a:prstGeom prst="rect">
+            <a:avLst/>
+          </a:prstGeom>
+          <a:noFill/>
+        </p:spPr>
+        <p:txBody>
+          <a:bodyPr wrap="square" lIns="0" rIns="0" tIns="0" bIns="0" anchor="ctr">
+            <a:spAutoFit/>
+          </a:bodyPr>
+          <a:lstStyle/>
+          <a:p>
+            <a:pPr algn="ctr"/>
+            <a:r>
+              <a:rPr sz="1100" b="1" i="0">
+                <a:solidFill>
+                  <a:srgbClr val="EAF0F6"/>
+                </a:solidFill>
+                <a:latin typeface="Calibri"/>
+              </a:rPr>
+              <a:t>✓</a:t>
+            </a:r>
+          </a:p>
+        </p:txBody>
+      </p:sp>
+      <p:sp>
+        <p:nvSpPr>
+          <p:cNvPr id="82" name="TextBox 81"/>
+          <p:cNvSpPr txBox="1"/>
+          <p:nvPr/>
+        </p:nvSpPr>
+        <p:spPr>
+          <a:xfrm>
+            <a:off x="3703320" y="4443983"/>
+            <a:ext cx="3675888" cy="384048"/>
+          </a:xfrm>
+          <a:prstGeom prst="rect">
+            <a:avLst/>
+          </a:prstGeom>
+          <a:noFill/>
+        </p:spPr>
+        <p:txBody>
+          <a:bodyPr wrap="square" lIns="0" rIns="0" tIns="0" bIns="0" anchor="ctr">
+            <a:spAutoFit/>
+          </a:bodyPr>
+          <a:lstStyle/>
+          <a:p>
+            <a:pPr algn="l"/>
+            <a:r>
+              <a:rPr sz="1100" b="0" i="0">
+                <a:solidFill>
+                  <a:srgbClr val="EAF0F6"/>
+                </a:solidFill>
+                <a:latin typeface="Calibri"/>
+              </a:rPr>
+              <a:t>Small rectangular boards nest efficiently</a:t>
+            </a:r>
+          </a:p>
+        </p:txBody>
+      </p:sp>
+      <p:sp>
+        <p:nvSpPr>
+          <p:cNvPr id="83" name="Oval 82"/>
+          <p:cNvSpPr/>
+          <p:nvPr/>
+        </p:nvSpPr>
+        <p:spPr>
+          <a:xfrm>
+            <a:off x="7580375" y="4517136"/>
+            <a:ext cx="237744" cy="237744"/>
+          </a:xfrm>
+          <a:prstGeom prst="ellipse">
+            <a:avLst/>
+          </a:prstGeom>
+          <a:solidFill>
+            <a:srgbClr val="E05D5D"/>
+          </a:solidFill>
+          <a:ln>
+            <a:noFill/>
+          </a:ln>
+        </p:spPr>
+        <p:txBody>
+          <a:bodyPr rtlCol="0" anchor="ctr"/>
+          <a:lstStyle/>
+          <a:p>
+            <a:pPr algn="ctr"/>
+          </a:p>
+        </p:txBody>
+      </p:sp>
+      <p:sp>
+        <p:nvSpPr>
+          <p:cNvPr id="84" name="TextBox 83"/>
+          <p:cNvSpPr txBox="1"/>
+          <p:nvPr/>
+        </p:nvSpPr>
+        <p:spPr>
+          <a:xfrm>
+            <a:off x="7580375" y="4517136"/>
+            <a:ext cx="237744" cy="237744"/>
+          </a:xfrm>
+          <a:prstGeom prst="rect">
+            <a:avLst/>
+          </a:prstGeom>
+          <a:noFill/>
+        </p:spPr>
+        <p:txBody>
+          <a:bodyPr wrap="square" lIns="0" rIns="0" tIns="0" bIns="0" anchor="ctr">
+            <a:spAutoFit/>
+          </a:bodyPr>
+          <a:lstStyle/>
+          <a:p>
+            <a:pPr algn="ctr"/>
+            <a:r>
+              <a:rPr sz="1100" b="1" i="0">
+                <a:solidFill>
+                  <a:srgbClr val="EAF0F6"/>
+                </a:solidFill>
+                <a:latin typeface="Calibri"/>
+              </a:rPr>
+              <a:t>✗</a:t>
+            </a:r>
+          </a:p>
+        </p:txBody>
+      </p:sp>
+      <p:sp>
+        <p:nvSpPr>
+          <p:cNvPr id="85" name="TextBox 84"/>
+          <p:cNvSpPr txBox="1"/>
+          <p:nvPr/>
+        </p:nvSpPr>
+        <p:spPr>
+          <a:xfrm>
+            <a:off x="7927848" y="4443983"/>
+            <a:ext cx="3712464" cy="384048"/>
+          </a:xfrm>
+          <a:prstGeom prst="rect">
+            <a:avLst/>
+          </a:prstGeom>
+          <a:noFill/>
+        </p:spPr>
+        <p:txBody>
+          <a:bodyPr wrap="square" lIns="0" rIns="0" tIns="0" bIns="0" anchor="ctr">
+            <a:spAutoFit/>
+          </a:bodyPr>
+          <a:lstStyle/>
+          <a:p>
+            <a:pPr algn="l"/>
+            <a:r>
+              <a:rPr sz="1100" b="0" i="0">
+                <a:solidFill>
+                  <a:srgbClr val="9FB0C3"/>
+                </a:solidFill>
+                <a:latin typeface="Calibri"/>
+              </a:rPr>
+              <a:t>C-outline leaves unused panel area</a:t>
+            </a:r>
+          </a:p>
+        </p:txBody>
+      </p:sp>
+      <p:sp>
+        <p:nvSpPr>
+          <p:cNvPr id="86" name="Rectangle 85"/>
+          <p:cNvSpPr/>
+          <p:nvPr/>
+        </p:nvSpPr>
+        <p:spPr>
+          <a:xfrm>
+            <a:off x="457200" y="4828031"/>
+            <a:ext cx="11274552" cy="384048"/>
+          </a:xfrm>
+          <a:prstGeom prst="rect">
+            <a:avLst/>
+          </a:prstGeom>
+          <a:solidFill>
+            <a:srgbClr val="172331"/>
+          </a:solidFill>
+          <a:ln>
+            <a:noFill/>
+          </a:ln>
+        </p:spPr>
+        <p:txBody>
+          <a:bodyPr rtlCol="0" anchor="ctr"/>
+          <a:lstStyle/>
+          <a:p>
+            <a:pPr algn="ctr"/>
+          </a:p>
+        </p:txBody>
+      </p:sp>
+      <p:sp>
+        <p:nvSpPr>
+          <p:cNvPr id="87" name="TextBox 86"/>
+          <p:cNvSpPr txBox="1"/>
+          <p:nvPr/>
+        </p:nvSpPr>
+        <p:spPr>
+          <a:xfrm>
+            <a:off x="566928" y="4828031"/>
+            <a:ext cx="274320" cy="384048"/>
+          </a:xfrm>
+          <a:prstGeom prst="rect">
+            <a:avLst/>
+          </a:prstGeom>
+          <a:noFill/>
+        </p:spPr>
+        <p:txBody>
+          <a:bodyPr wrap="square" lIns="0" rIns="0" tIns="0" bIns="0" anchor="ctr">
+            <a:spAutoFit/>
+          </a:bodyPr>
+          <a:lstStyle/>
+          <a:p>
+            <a:pPr algn="l"/>
+            <a:r>
+              <a:rPr sz="1100" b="0" i="0">
+                <a:solidFill>
+                  <a:srgbClr val="9FB0C3"/>
+                </a:solidFill>
+                <a:latin typeface="Calibri"/>
+              </a:rPr>
+              <a:t>9</a:t>
+            </a:r>
+          </a:p>
+        </p:txBody>
+      </p:sp>
+      <p:sp>
+        <p:nvSpPr>
+          <p:cNvPr id="88" name="TextBox 87"/>
+          <p:cNvSpPr txBox="1"/>
+          <p:nvPr/>
+        </p:nvSpPr>
+        <p:spPr>
+          <a:xfrm>
+            <a:off x="978407" y="4828031"/>
+            <a:ext cx="2194560" cy="384048"/>
+          </a:xfrm>
+          <a:prstGeom prst="rect">
+            <a:avLst/>
+          </a:prstGeom>
+          <a:noFill/>
+        </p:spPr>
+        <p:txBody>
+          <a:bodyPr wrap="square" lIns="0" rIns="0" tIns="0" bIns="0" anchor="ctr">
+            <a:spAutoFit/>
+          </a:bodyPr>
+          <a:lstStyle/>
+          <a:p>
+            <a:pPr algn="l"/>
+            <a:r>
+              <a:rPr sz="1150" b="1" i="0">
+                <a:solidFill>
+                  <a:srgbClr val="EAF0F6"/>
+                </a:solidFill>
+                <a:latin typeface="Calibri"/>
+              </a:rPr>
+              <a:t>Warpage &amp; depaneling ★</a:t>
+            </a:r>
+          </a:p>
+        </p:txBody>
+      </p:sp>
+      <p:sp>
+        <p:nvSpPr>
+          <p:cNvPr id="89" name="Oval 88"/>
+          <p:cNvSpPr/>
+          <p:nvPr/>
+        </p:nvSpPr>
+        <p:spPr>
+          <a:xfrm>
+            <a:off x="3355848" y="4901183"/>
+            <a:ext cx="237744" cy="237744"/>
+          </a:xfrm>
+          <a:prstGeom prst="ellipse">
+            <a:avLst/>
+          </a:prstGeom>
+          <a:solidFill>
+            <a:srgbClr val="3FA46A"/>
+          </a:solidFill>
+          <a:ln>
+            <a:noFill/>
+          </a:ln>
+        </p:spPr>
+        <p:txBody>
+          <a:bodyPr rtlCol="0" anchor="ctr"/>
+          <a:lstStyle/>
+          <a:p>
+            <a:pPr algn="ctr"/>
+          </a:p>
+        </p:txBody>
+      </p:sp>
+      <p:sp>
+        <p:nvSpPr>
+          <p:cNvPr id="90" name="TextBox 89"/>
+          <p:cNvSpPr txBox="1"/>
+          <p:nvPr/>
+        </p:nvSpPr>
+        <p:spPr>
+          <a:xfrm>
+            <a:off x="3355848" y="4901183"/>
+            <a:ext cx="237744" cy="237744"/>
+          </a:xfrm>
+          <a:prstGeom prst="rect">
+            <a:avLst/>
+          </a:prstGeom>
+          <a:noFill/>
+        </p:spPr>
+        <p:txBody>
+          <a:bodyPr wrap="square" lIns="0" rIns="0" tIns="0" bIns="0" anchor="ctr">
+            <a:spAutoFit/>
+          </a:bodyPr>
+          <a:lstStyle/>
+          <a:p>
+            <a:pPr algn="ctr"/>
+            <a:r>
+              <a:rPr sz="1100" b="1" i="0">
+                <a:solidFill>
+                  <a:srgbClr val="EAF0F6"/>
+                </a:solidFill>
+                <a:latin typeface="Calibri"/>
+              </a:rPr>
+              <a:t>✓</a:t>
+            </a:r>
+          </a:p>
+        </p:txBody>
+      </p:sp>
+      <p:sp>
+        <p:nvSpPr>
+          <p:cNvPr id="91" name="TextBox 90"/>
+          <p:cNvSpPr txBox="1"/>
+          <p:nvPr/>
+        </p:nvSpPr>
+        <p:spPr>
+          <a:xfrm>
+            <a:off x="3703320" y="4828031"/>
+            <a:ext cx="3675888" cy="384048"/>
+          </a:xfrm>
+          <a:prstGeom prst="rect">
+            <a:avLst/>
+          </a:prstGeom>
+          <a:noFill/>
+        </p:spPr>
+        <p:txBody>
+          <a:bodyPr wrap="square" lIns="0" rIns="0" tIns="0" bIns="0" anchor="ctr">
+            <a:spAutoFit/>
+          </a:bodyPr>
+          <a:lstStyle/>
+          <a:p>
+            <a:pPr algn="l"/>
+            <a:r>
+              <a:rPr sz="1100" b="0" i="0">
+                <a:solidFill>
+                  <a:srgbClr val="EAF0F6"/>
+                </a:solidFill>
+                <a:latin typeface="Calibri"/>
+              </a:rPr>
+              <a:t>Short boards stay flat; low joint stress</a:t>
+            </a:r>
+          </a:p>
+        </p:txBody>
+      </p:sp>
+      <p:sp>
+        <p:nvSpPr>
+          <p:cNvPr id="92" name="Oval 91"/>
+          <p:cNvSpPr/>
+          <p:nvPr/>
+        </p:nvSpPr>
+        <p:spPr>
+          <a:xfrm>
+            <a:off x="7580375" y="4901183"/>
+            <a:ext cx="237744" cy="237744"/>
+          </a:xfrm>
+          <a:prstGeom prst="ellipse">
+            <a:avLst/>
+          </a:prstGeom>
+          <a:solidFill>
+            <a:srgbClr val="E05D5D"/>
+          </a:solidFill>
+          <a:ln>
+            <a:noFill/>
+          </a:ln>
+        </p:spPr>
+        <p:txBody>
+          <a:bodyPr rtlCol="0" anchor="ctr"/>
+          <a:lstStyle/>
+          <a:p>
+            <a:pPr algn="ctr"/>
+          </a:p>
+        </p:txBody>
+      </p:sp>
+      <p:sp>
+        <p:nvSpPr>
+          <p:cNvPr id="93" name="TextBox 92"/>
+          <p:cNvSpPr txBox="1"/>
+          <p:nvPr/>
+        </p:nvSpPr>
+        <p:spPr>
+          <a:xfrm>
+            <a:off x="7580375" y="4901183"/>
+            <a:ext cx="237744" cy="237744"/>
+          </a:xfrm>
+          <a:prstGeom prst="rect">
+            <a:avLst/>
+          </a:prstGeom>
+          <a:noFill/>
+        </p:spPr>
+        <p:txBody>
+          <a:bodyPr wrap="square" lIns="0" rIns="0" tIns="0" bIns="0" anchor="ctr">
+            <a:spAutoFit/>
+          </a:bodyPr>
+          <a:lstStyle/>
+          <a:p>
+            <a:pPr algn="ctr"/>
+            <a:r>
+              <a:rPr sz="1100" b="1" i="0">
+                <a:solidFill>
+                  <a:srgbClr val="EAF0F6"/>
+                </a:solidFill>
+                <a:latin typeface="Calibri"/>
+              </a:rPr>
+              <a:t>✗</a:t>
+            </a:r>
+          </a:p>
+        </p:txBody>
+      </p:sp>
+      <p:sp>
+        <p:nvSpPr>
+          <p:cNvPr id="94" name="TextBox 93"/>
+          <p:cNvSpPr txBox="1"/>
+          <p:nvPr/>
+        </p:nvSpPr>
+        <p:spPr>
+          <a:xfrm>
+            <a:off x="7927848" y="4828031"/>
+            <a:ext cx="3712464" cy="384048"/>
+          </a:xfrm>
+          <a:prstGeom prst="rect">
+            <a:avLst/>
+          </a:prstGeom>
+          <a:noFill/>
+        </p:spPr>
+        <p:txBody>
+          <a:bodyPr wrap="square" lIns="0" rIns="0" tIns="0" bIns="0" anchor="ctr">
+            <a:spAutoFit/>
+          </a:bodyPr>
+          <a:lstStyle/>
+          <a:p>
+            <a:pPr algn="l"/>
+            <a:r>
+              <a:rPr sz="1100" b="0" i="0">
+                <a:solidFill>
+                  <a:srgbClr val="9FB0C3"/>
+                </a:solidFill>
+                <a:latin typeface="Calibri"/>
+              </a:rPr>
+              <a:t>Long C-shape can warp, stressing LED joints</a:t>
+            </a:r>
+          </a:p>
+        </p:txBody>
+      </p:sp>
+      <p:sp>
+        <p:nvSpPr>
+          <p:cNvPr id="95" name="Rectangle 94"/>
+          <p:cNvSpPr/>
+          <p:nvPr/>
+        </p:nvSpPr>
+        <p:spPr>
+          <a:xfrm>
+            <a:off x="457200" y="5212079"/>
+            <a:ext cx="11274552" cy="384048"/>
+          </a:xfrm>
+          <a:prstGeom prst="rect">
+            <a:avLst/>
+          </a:prstGeom>
+          <a:solidFill>
+            <a:srgbClr val="0E1621"/>
+          </a:solidFill>
+          <a:ln>
+            <a:noFill/>
+          </a:ln>
+        </p:spPr>
+        <p:txBody>
+          <a:bodyPr rtlCol="0" anchor="ctr"/>
+          <a:lstStyle/>
+          <a:p>
+            <a:pPr algn="ctr"/>
+          </a:p>
+        </p:txBody>
+      </p:sp>
+      <p:sp>
+        <p:nvSpPr>
+          <p:cNvPr id="96" name="TextBox 95"/>
+          <p:cNvSpPr txBox="1"/>
+          <p:nvPr/>
+        </p:nvSpPr>
+        <p:spPr>
+          <a:xfrm>
+            <a:off x="566928" y="5212079"/>
+            <a:ext cx="274320" cy="384048"/>
+          </a:xfrm>
+          <a:prstGeom prst="rect">
+            <a:avLst/>
+          </a:prstGeom>
+          <a:noFill/>
+        </p:spPr>
+        <p:txBody>
+          <a:bodyPr wrap="square" lIns="0" rIns="0" tIns="0" bIns="0" anchor="ctr">
+            <a:spAutoFit/>
+          </a:bodyPr>
+          <a:lstStyle/>
+          <a:p>
+            <a:pPr algn="l"/>
+            <a:r>
+              <a:rPr sz="1100" b="0" i="0">
+                <a:solidFill>
+                  <a:srgbClr val="9FB0C3"/>
+                </a:solidFill>
+                <a:latin typeface="Calibri"/>
+              </a:rPr>
+              <a:t>10</a:t>
+            </a:r>
+          </a:p>
+        </p:txBody>
+      </p:sp>
+      <p:sp>
+        <p:nvSpPr>
+          <p:cNvPr id="97" name="TextBox 96"/>
+          <p:cNvSpPr txBox="1"/>
+          <p:nvPr/>
+        </p:nvSpPr>
+        <p:spPr>
+          <a:xfrm>
+            <a:off x="978407" y="5212079"/>
+            <a:ext cx="2194560" cy="384048"/>
+          </a:xfrm>
+          <a:prstGeom prst="rect">
+            <a:avLst/>
+          </a:prstGeom>
+          <a:noFill/>
+        </p:spPr>
+        <p:txBody>
+          <a:bodyPr wrap="square" lIns="0" rIns="0" tIns="0" bIns="0" anchor="ctr">
+            <a:spAutoFit/>
+          </a:bodyPr>
+          <a:lstStyle/>
+          <a:p>
+            <a:pPr algn="l"/>
+            <a:r>
+              <a:rPr sz="1150" b="1" i="0">
+                <a:solidFill>
+                  <a:srgbClr val="EAF0F6"/>
+                </a:solidFill>
+                <a:latin typeface="Calibri"/>
+              </a:rPr>
+              <a:t>Mechanical fit &amp; service</a:t>
+            </a:r>
+          </a:p>
+        </p:txBody>
+      </p:sp>
+      <p:sp>
+        <p:nvSpPr>
+          <p:cNvPr id="98" name="Oval 97"/>
+          <p:cNvSpPr/>
+          <p:nvPr/>
+        </p:nvSpPr>
+        <p:spPr>
+          <a:xfrm>
+            <a:off x="3355848" y="5285231"/>
+            <a:ext cx="237744" cy="237744"/>
+          </a:xfrm>
+          <a:prstGeom prst="ellipse">
+            <a:avLst/>
+          </a:prstGeom>
+          <a:solidFill>
+            <a:srgbClr val="3FA46A"/>
+          </a:solidFill>
+          <a:ln>
+            <a:noFill/>
+          </a:ln>
+        </p:spPr>
+        <p:txBody>
+          <a:bodyPr rtlCol="0" anchor="ctr"/>
+          <a:lstStyle/>
+          <a:p>
+            <a:pPr algn="ctr"/>
+          </a:p>
+        </p:txBody>
+      </p:sp>
+      <p:sp>
+        <p:nvSpPr>
+          <p:cNvPr id="99" name="TextBox 98"/>
+          <p:cNvSpPr txBox="1"/>
+          <p:nvPr/>
+        </p:nvSpPr>
+        <p:spPr>
+          <a:xfrm>
+            <a:off x="3355848" y="5285231"/>
+            <a:ext cx="237744" cy="237744"/>
+          </a:xfrm>
+          <a:prstGeom prst="rect">
+            <a:avLst/>
+          </a:prstGeom>
+          <a:noFill/>
+        </p:spPr>
+        <p:txBody>
+          <a:bodyPr wrap="square" lIns="0" rIns="0" tIns="0" bIns="0" anchor="ctr">
+            <a:spAutoFit/>
+          </a:bodyPr>
+          <a:lstStyle/>
+          <a:p>
+            <a:pPr algn="ctr"/>
+            <a:r>
+              <a:rPr sz="1100" b="1" i="0">
+                <a:solidFill>
+                  <a:srgbClr val="EAF0F6"/>
+                </a:solidFill>
+                <a:latin typeface="Calibri"/>
+              </a:rPr>
+              <a:t>✓</a:t>
+            </a:r>
+          </a:p>
+        </p:txBody>
+      </p:sp>
+      <p:sp>
+        <p:nvSpPr>
+          <p:cNvPr id="100" name="TextBox 99"/>
+          <p:cNvSpPr txBox="1"/>
+          <p:nvPr/>
+        </p:nvSpPr>
+        <p:spPr>
+          <a:xfrm>
+            <a:off x="3703320" y="5212079"/>
+            <a:ext cx="3675888" cy="384048"/>
+          </a:xfrm>
+          <a:prstGeom prst="rect">
+            <a:avLst/>
+          </a:prstGeom>
+          <a:noFill/>
+        </p:spPr>
+        <p:txBody>
+          <a:bodyPr wrap="square" lIns="0" rIns="0" tIns="0" bIns="0" anchor="ctr">
+            <a:spAutoFit/>
+          </a:bodyPr>
+          <a:lstStyle/>
+          <a:p>
+            <a:pPr algn="l"/>
+            <a:r>
+              <a:rPr sz="1100" b="0" i="0">
+                <a:solidFill>
+                  <a:srgbClr val="EAF0F6"/>
+                </a:solidFill>
+                <a:latin typeface="Calibri"/>
+              </a:rPr>
+              <a:t>Boards placed and replaced independently</a:t>
+            </a:r>
+          </a:p>
+        </p:txBody>
+      </p:sp>
+      <p:sp>
+        <p:nvSpPr>
+          <p:cNvPr id="101" name="Oval 100"/>
+          <p:cNvSpPr/>
+          <p:nvPr/>
+        </p:nvSpPr>
+        <p:spPr>
+          <a:xfrm>
+            <a:off x="7580375" y="5285231"/>
+            <a:ext cx="237744" cy="237744"/>
+          </a:xfrm>
+          <a:prstGeom prst="ellipse">
+            <a:avLst/>
+          </a:prstGeom>
+          <a:solidFill>
+            <a:srgbClr val="E05D5D"/>
+          </a:solidFill>
+          <a:ln>
+            <a:noFill/>
+          </a:ln>
+        </p:spPr>
+        <p:txBody>
+          <a:bodyPr rtlCol="0" anchor="ctr"/>
+          <a:lstStyle/>
+          <a:p>
+            <a:pPr algn="ctr"/>
+          </a:p>
+        </p:txBody>
+      </p:sp>
+      <p:sp>
+        <p:nvSpPr>
+          <p:cNvPr id="102" name="TextBox 101"/>
+          <p:cNvSpPr txBox="1"/>
+          <p:nvPr/>
+        </p:nvSpPr>
+        <p:spPr>
+          <a:xfrm>
+            <a:off x="7580375" y="5285231"/>
+            <a:ext cx="237744" cy="237744"/>
+          </a:xfrm>
+          <a:prstGeom prst="rect">
+            <a:avLst/>
+          </a:prstGeom>
+          <a:noFill/>
+        </p:spPr>
+        <p:txBody>
+          <a:bodyPr wrap="square" lIns="0" rIns="0" tIns="0" bIns="0" anchor="ctr">
+            <a:spAutoFit/>
+          </a:bodyPr>
+          <a:lstStyle/>
+          <a:p>
+            <a:pPr algn="ctr"/>
+            <a:r>
+              <a:rPr sz="1100" b="1" i="0">
+                <a:solidFill>
+                  <a:srgbClr val="EAF0F6"/>
+                </a:solidFill>
+                <a:latin typeface="Calibri"/>
+              </a:rPr>
+              <a:t>✗</a:t>
+            </a:r>
+          </a:p>
+        </p:txBody>
+      </p:sp>
+      <p:sp>
+        <p:nvSpPr>
+          <p:cNvPr id="103" name="TextBox 102"/>
+          <p:cNvSpPr txBox="1"/>
+          <p:nvPr/>
+        </p:nvSpPr>
+        <p:spPr>
+          <a:xfrm>
+            <a:off x="7927848" y="5212079"/>
+            <a:ext cx="3712464" cy="384048"/>
+          </a:xfrm>
+          <a:prstGeom prst="rect">
+            <a:avLst/>
+          </a:prstGeom>
+          <a:noFill/>
+        </p:spPr>
+        <p:txBody>
+          <a:bodyPr wrap="square" lIns="0" rIns="0" tIns="0" bIns="0" anchor="ctr">
+            <a:spAutoFit/>
+          </a:bodyPr>
+          <a:lstStyle/>
+          <a:p>
+            <a:pPr algn="l"/>
+            <a:r>
+              <a:rPr sz="1100" b="0" i="0">
+                <a:solidFill>
+                  <a:srgbClr val="9FB0C3"/>
+                </a:solidFill>
+                <a:latin typeface="Calibri"/>
+              </a:rPr>
+              <a:t>Whole C must meet the housing tolerance</a:t>
+            </a:r>
+          </a:p>
+        </p:txBody>
+      </p:sp>
+      <p:sp>
+        <p:nvSpPr>
+          <p:cNvPr id="104" name="Rounded Rectangle 103"/>
+          <p:cNvSpPr/>
+          <p:nvPr/>
+        </p:nvSpPr>
+        <p:spPr>
+          <a:xfrm>
+            <a:off x="457200" y="5760720"/>
+            <a:ext cx="11274552" cy="731519"/>
+          </a:xfrm>
+          <a:prstGeom prst="roundRect">
+            <a:avLst>
+              <a:gd name="adj" fmla="val 12000"/>
+            </a:avLst>
+          </a:prstGeom>
+          <a:solidFill>
+            <a:srgbClr val="1D2B3B"/>
+          </a:solidFill>
+          <a:ln w="15875">
+            <a:solidFill>
+              <a:srgbClr val="3FA46A"/>
+            </a:solidFill>
+          </a:ln>
+        </p:spPr>
+        <p:txBody>
+          <a:bodyPr rtlCol="0" anchor="ctr"/>
+          <a:lstStyle/>
+          <a:p>
+            <a:pPr algn="ctr"/>
+          </a:p>
+        </p:txBody>
+      </p:sp>
+      <p:sp>
+        <p:nvSpPr>
+          <p:cNvPr id="105" name="TextBox 104"/>
+          <p:cNvSpPr txBox="1"/>
+          <p:nvPr/>
+        </p:nvSpPr>
+        <p:spPr>
+          <a:xfrm>
+            <a:off x="685800" y="5760720"/>
+            <a:ext cx="3108960" cy="731519"/>
+          </a:xfrm>
+          <a:prstGeom prst="rect">
+            <a:avLst/>
+          </a:prstGeom>
+          <a:noFill/>
+        </p:spPr>
+        <p:txBody>
+          <a:bodyPr wrap="square" lIns="0" rIns="0" tIns="0" bIns="0" anchor="ctr">
+            <a:spAutoFit/>
+          </a:bodyPr>
+          <a:lstStyle/>
+          <a:p>
+            <a:pPr algn="l"/>
+            <a:r>
+              <a:rPr sz="1100" b="0" i="0">
+                <a:solidFill>
+                  <a:srgbClr val="9FB0C3"/>
+                </a:solidFill>
+                <a:latin typeface="Calibri"/>
+              </a:rPr>
+              <a:t>Best overall</a:t>
+            </a:r>
+          </a:p>
+          <a:p>
+            <a:pPr algn="l"/>
+            <a:r>
+              <a:rPr sz="1700" b="1" i="0">
+                <a:solidFill>
+                  <a:srgbClr val="FFD34D"/>
+                </a:solidFill>
+                <a:latin typeface="Calibri"/>
+              </a:rPr>
+              <a:t>Single C-Shape PCB</a:t>
+            </a:r>
+          </a:p>
+        </p:txBody>
+      </p:sp>
+      <p:sp>
+        <p:nvSpPr>
+          <p:cNvPr id="106" name="TextBox 105"/>
+          <p:cNvSpPr txBox="1"/>
+          <p:nvPr/>
+        </p:nvSpPr>
+        <p:spPr>
+          <a:xfrm>
+            <a:off x="3840480" y="5760720"/>
+            <a:ext cx="7680960" cy="731519"/>
+          </a:xfrm>
+          <a:prstGeom prst="rect">
+            <a:avLst/>
+          </a:prstGeom>
+          <a:noFill/>
+        </p:spPr>
+        <p:txBody>
+          <a:bodyPr wrap="square" lIns="0" rIns="0" tIns="0" bIns="0" anchor="ctr">
+            <a:spAutoFit/>
+          </a:bodyPr>
+          <a:lstStyle/>
+          <a:p>
+            <a:pPr algn="l"/>
+            <a:r>
+              <a:rPr sz="1100" b="0" i="0">
+                <a:solidFill>
+                  <a:srgbClr val="EAF0F6"/>
+                </a:solidFill>
+                <a:latin typeface="Calibri"/>
+              </a:rPr>
+              <a:t>Wins 7 of 10, including every EMC criterion: removing the inter-board harness removes the main emission, immunity and reliability risk. Pick the 3-PCB split only when panel cost or housing tolerance dominates, and then use flex jumpers with common-mode filtering at each interface.</a:t>
             </a:r>
           </a:p>
         </p:txBody>

--- a/PCB_LIGHTING_updated.pptx
+++ b/PCB_LIGHTING_updated.pptx
@@ -10433,7 +10433,7 @@
     <p:bg>
       <p:bgPr>
         <a:solidFill>
-          <a:srgbClr val="0E1621"/>
+          <a:srgbClr val="FFFFFF"/>
         </a:solidFill>
         <a:effectLst/>
       </p:bgPr>
@@ -10453,7 +10453,7 @@
         </p:nvSpPr>
         <p:spPr>
           <a:xfrm>
-            <a:off x="457200" y="292608"/>
+            <a:off x="457200" y="274320"/>
             <a:ext cx="11247120" cy="548640"/>
           </a:xfrm>
           <a:prstGeom prst="rect">
@@ -10469,9 +10469,9 @@
           <a:p>
             <a:pPr algn="l"/>
             <a:r>
-              <a:rPr sz="3000" b="1" i="0">
+              <a:rPr sz="2800" b="1" i="0">
                 <a:solidFill>
-                  <a:srgbClr val="EAF0F6"/>
+                  <a:srgbClr val="000000"/>
                 </a:solidFill>
                 <a:latin typeface="Calibri"/>
               </a:rPr>
@@ -10480,16 +10480,726 @@
           </a:p>
         </p:txBody>
       </p:sp>
-      <p:sp>
-        <p:nvSpPr>
-          <p:cNvPr id="3" name="TextBox 2"/>
+      <p:graphicFrame>
+        <p:nvGraphicFramePr>
+          <p:cNvPr id="3" name="Table 2"/>
+          <p:cNvGraphicFramePr>
+            <a:graphicFrameLocks noGrp="1"/>
+          </p:cNvGraphicFramePr>
+          <p:nvPr/>
+        </p:nvGraphicFramePr>
+        <p:xfrm>
+          <a:off x="457200" y="1005840"/>
+          <a:ext cx="11274552" cy="4937760"/>
+        </p:xfrm>
+        <a:graphic>
+          <a:graphicData uri="http://schemas.openxmlformats.org/drawingml/2006/table">
+            <a:tbl>
+              <a:tblPr firstRow="1" bandRow="1">
+                <a:tableStyleId>{5C22544A-7EE6-4342-B048-85BDC9FD1C3A}</a:tableStyleId>
+              </a:tblPr>
+              <a:tblGrid>
+                <a:gridCol w="457200"/>
+                <a:gridCol w="2377440"/>
+                <a:gridCol w="4206240"/>
+                <a:gridCol w="4233672"/>
+              </a:tblGrid>
+              <a:tr h="448887">
+                <a:tc>
+                  <a:txBody>
+                    <a:bodyPr/>
+                    <a:lstStyle/>
+                    <a:p>
+                      <a:r>
+                        <a:rPr sz="1200">
+                          <a:latin typeface="Calibri"/>
+                        </a:rPr>
+                        <a:t>#</a:t>
+                      </a:r>
+                    </a:p>
+                  </a:txBody>
+                  <a:tcPr/>
+                </a:tc>
+                <a:tc>
+                  <a:txBody>
+                    <a:bodyPr/>
+                    <a:lstStyle/>
+                    <a:p>
+                      <a:r>
+                        <a:rPr sz="1200">
+                          <a:latin typeface="Calibri"/>
+                        </a:rPr>
+                        <a:t>Parameter</a:t>
+                      </a:r>
+                    </a:p>
+                  </a:txBody>
+                  <a:tcPr/>
+                </a:tc>
+                <a:tc>
+                  <a:txBody>
+                    <a:bodyPr/>
+                    <a:lstStyle/>
+                    <a:p>
+                      <a:r>
+                        <a:rPr sz="1200">
+                          <a:latin typeface="Calibri"/>
+                        </a:rPr>
+                        <a:t>3-PCB C-Shape</a:t>
+                      </a:r>
+                    </a:p>
+                  </a:txBody>
+                  <a:tcPr/>
+                </a:tc>
+                <a:tc>
+                  <a:txBody>
+                    <a:bodyPr/>
+                    <a:lstStyle/>
+                    <a:p>
+                      <a:r>
+                        <a:rPr sz="1200">
+                          <a:latin typeface="Calibri"/>
+                        </a:rPr>
+                        <a:t>Single C-Shape PCB</a:t>
+                      </a:r>
+                    </a:p>
+                  </a:txBody>
+                  <a:tcPr/>
+                </a:tc>
+              </a:tr>
+              <a:tr h="448887">
+                <a:tc>
+                  <a:txBody>
+                    <a:bodyPr/>
+                    <a:lstStyle/>
+                    <a:p>
+                      <a:r>
+                        <a:rPr sz="1200">
+                          <a:latin typeface="Calibri"/>
+                        </a:rPr>
+                        <a:t>1</a:t>
+                      </a:r>
+                    </a:p>
+                  </a:txBody>
+                  <a:tcPr/>
+                </a:tc>
+                <a:tc>
+                  <a:txBody>
+                    <a:bodyPr/>
+                    <a:lstStyle/>
+                    <a:p>
+                      <a:r>
+                        <a:rPr sz="1200">
+                          <a:latin typeface="Calibri"/>
+                        </a:rPr>
+                        <a:t>EMI – Radiated Emissions</a:t>
+                      </a:r>
+                    </a:p>
+                  </a:txBody>
+                  <a:tcPr/>
+                </a:tc>
+                <a:tc>
+                  <a:txBody>
+                    <a:bodyPr/>
+                    <a:lstStyle/>
+                    <a:p>
+                      <a:r>
+                        <a:rPr sz="1200">
+                          <a:latin typeface="Calibri"/>
+                        </a:rPr>
+                        <a:t>❌ Interconnecting wires can act as unintended antennas.</a:t>
+                      </a:r>
+                    </a:p>
+                  </a:txBody>
+                  <a:tcPr/>
+                </a:tc>
+                <a:tc>
+                  <a:txBody>
+                    <a:bodyPr/>
+                    <a:lstStyle/>
+                    <a:p>
+                      <a:r>
+                        <a:rPr sz="1200">
+                          <a:latin typeface="Calibri"/>
+                        </a:rPr>
+                        <a:t>✅ PCB-to-PCB harnesses are eliminated.</a:t>
+                      </a:r>
+                    </a:p>
+                  </a:txBody>
+                  <a:tcPr/>
+                </a:tc>
+              </a:tr>
+              <a:tr h="448887">
+                <a:tc>
+                  <a:txBody>
+                    <a:bodyPr/>
+                    <a:lstStyle/>
+                    <a:p>
+                      <a:r>
+                        <a:rPr sz="1200">
+                          <a:latin typeface="Calibri"/>
+                        </a:rPr>
+                        <a:t>2</a:t>
+                      </a:r>
+                    </a:p>
+                  </a:txBody>
+                  <a:tcPr/>
+                </a:tc>
+                <a:tc>
+                  <a:txBody>
+                    <a:bodyPr/>
+                    <a:lstStyle/>
+                    <a:p>
+                      <a:r>
+                        <a:rPr sz="1200">
+                          <a:latin typeface="Calibri"/>
+                        </a:rPr>
+                        <a:t>Common-Mode Noise</a:t>
+                      </a:r>
+                    </a:p>
+                  </a:txBody>
+                  <a:tcPr/>
+                </a:tc>
+                <a:tc>
+                  <a:txBody>
+                    <a:bodyPr/>
+                    <a:lstStyle/>
+                    <a:p>
+                      <a:r>
+                        <a:rPr sz="1200">
+                          <a:latin typeface="Calibri"/>
+                        </a:rPr>
+                        <a:t>❌ Inter-board wires can carry common-mode currents.</a:t>
+                      </a:r>
+                    </a:p>
+                  </a:txBody>
+                  <a:tcPr/>
+                </a:tc>
+                <a:tc>
+                  <a:txBody>
+                    <a:bodyPr/>
+                    <a:lstStyle/>
+                    <a:p>
+                      <a:r>
+                        <a:rPr sz="1200">
+                          <a:latin typeface="Calibri"/>
+                        </a:rPr>
+                        <a:t>✅ Shorter external conductors, fewer common-mode coupling paths.</a:t>
+                      </a:r>
+                    </a:p>
+                  </a:txBody>
+                  <a:tcPr/>
+                </a:tc>
+              </a:tr>
+              <a:tr h="448887">
+                <a:tc>
+                  <a:txBody>
+                    <a:bodyPr/>
+                    <a:lstStyle/>
+                    <a:p>
+                      <a:r>
+                        <a:rPr sz="1200">
+                          <a:latin typeface="Calibri"/>
+                        </a:rPr>
+                        <a:t>3</a:t>
+                      </a:r>
+                    </a:p>
+                  </a:txBody>
+                  <a:tcPr/>
+                </a:tc>
+                <a:tc>
+                  <a:txBody>
+                    <a:bodyPr/>
+                    <a:lstStyle/>
+                    <a:p>
+                      <a:r>
+                        <a:rPr sz="1200">
+                          <a:latin typeface="Calibri"/>
+                        </a:rPr>
+                        <a:t>Current Loop Area</a:t>
+                      </a:r>
+                    </a:p>
+                  </a:txBody>
+                  <a:tcPr/>
+                </a:tc>
+                <a:tc>
+                  <a:txBody>
+                    <a:bodyPr/>
+                    <a:lstStyle/>
+                    <a:p>
+                      <a:r>
+                        <a:rPr sz="1200">
+                          <a:latin typeface="Calibri"/>
+                        </a:rPr>
+                        <a:t>❌ Harness routing can increase loop area and magnetic coupling.</a:t>
+                      </a:r>
+                    </a:p>
+                  </a:txBody>
+                  <a:tcPr/>
+                </a:tc>
+                <a:tc>
+                  <a:txBody>
+                    <a:bodyPr/>
+                    <a:lstStyle/>
+                    <a:p>
+                      <a:r>
+                        <a:rPr sz="1200">
+                          <a:latin typeface="Calibri"/>
+                        </a:rPr>
+                        <a:t>✅ Forward and return paths routed closely, minimising loop area.</a:t>
+                      </a:r>
+                    </a:p>
+                  </a:txBody>
+                  <a:tcPr/>
+                </a:tc>
+              </a:tr>
+              <a:tr h="448887">
+                <a:tc>
+                  <a:txBody>
+                    <a:bodyPr/>
+                    <a:lstStyle/>
+                    <a:p>
+                      <a:r>
+                        <a:rPr sz="1200">
+                          <a:latin typeface="Calibri"/>
+                        </a:rPr>
+                        <a:t>4</a:t>
+                      </a:r>
+                    </a:p>
+                  </a:txBody>
+                  <a:tcPr/>
+                </a:tc>
+                <a:tc>
+                  <a:txBody>
+                    <a:bodyPr/>
+                    <a:lstStyle/>
+                    <a:p>
+                      <a:r>
+                        <a:rPr sz="1200">
+                          <a:latin typeface="Calibri"/>
+                        </a:rPr>
+                        <a:t>Ground Reference</a:t>
+                      </a:r>
+                    </a:p>
+                  </a:txBody>
+                  <a:tcPr/>
+                </a:tc>
+                <a:tc>
+                  <a:txBody>
+                    <a:bodyPr/>
+                    <a:lstStyle/>
+                    <a:p>
+                      <a:r>
+                        <a:rPr sz="1200">
+                          <a:latin typeface="Calibri"/>
+                        </a:rPr>
+                        <a:t>❌ Ground potential can shift between boards across the interconnect.</a:t>
+                      </a:r>
+                    </a:p>
+                  </a:txBody>
+                  <a:tcPr/>
+                </a:tc>
+                <a:tc>
+                  <a:txBody>
+                    <a:bodyPr/>
+                    <a:lstStyle/>
+                    <a:p>
+                      <a:r>
+                        <a:rPr sz="1200">
+                          <a:latin typeface="Calibri"/>
+                        </a:rPr>
+                        <a:t>✅ One continuous ground plane across the whole PCB.</a:t>
+                      </a:r>
+                    </a:p>
+                  </a:txBody>
+                  <a:tcPr/>
+                </a:tc>
+              </a:tr>
+              <a:tr h="448887">
+                <a:tc>
+                  <a:txBody>
+                    <a:bodyPr/>
+                    <a:lstStyle/>
+                    <a:p>
+                      <a:r>
+                        <a:rPr sz="1200">
+                          <a:latin typeface="Calibri"/>
+                        </a:rPr>
+                        <a:t>5</a:t>
+                      </a:r>
+                    </a:p>
+                  </a:txBody>
+                  <a:tcPr/>
+                </a:tc>
+                <a:tc>
+                  <a:txBody>
+                    <a:bodyPr/>
+                    <a:lstStyle/>
+                    <a:p>
+                      <a:r>
+                        <a:rPr sz="1200">
+                          <a:latin typeface="Calibri"/>
+                        </a:rPr>
+                        <a:t>Radiated Immunity &amp; ESD</a:t>
+                      </a:r>
+                    </a:p>
+                  </a:txBody>
+                  <a:tcPr/>
+                </a:tc>
+                <a:tc>
+                  <a:txBody>
+                    <a:bodyPr/>
+                    <a:lstStyle/>
+                    <a:p>
+                      <a:r>
+                        <a:rPr sz="1200">
+                          <a:latin typeface="Calibri"/>
+                        </a:rPr>
+                        <a:t>❌ Harnesses act as receiving antennas; more connectors add ESD paths.</a:t>
+                      </a:r>
+                    </a:p>
+                  </a:txBody>
+                  <a:tcPr/>
+                </a:tc>
+                <a:tc>
+                  <a:txBody>
+                    <a:bodyPr/>
+                    <a:lstStyle/>
+                    <a:p>
+                      <a:r>
+                        <a:rPr sz="1200">
+                          <a:latin typeface="Calibri"/>
+                        </a:rPr>
+                        <a:t>✅ Fewer conductors and interfaces simplify immunity and ESD protection.</a:t>
+                      </a:r>
+                    </a:p>
+                  </a:txBody>
+                  <a:tcPr/>
+                </a:tc>
+              </a:tr>
+              <a:tr h="448887">
+                <a:tc>
+                  <a:txBody>
+                    <a:bodyPr/>
+                    <a:lstStyle/>
+                    <a:p>
+                      <a:r>
+                        <a:rPr sz="1200">
+                          <a:latin typeface="Calibri"/>
+                        </a:rPr>
+                        <a:t>6</a:t>
+                      </a:r>
+                    </a:p>
+                  </a:txBody>
+                  <a:tcPr/>
+                </a:tc>
+                <a:tc>
+                  <a:txBody>
+                    <a:bodyPr/>
+                    <a:lstStyle/>
+                    <a:p>
+                      <a:r>
+                        <a:rPr sz="1200">
+                          <a:latin typeface="Calibri"/>
+                        </a:rPr>
+                        <a:t>Electrical &amp; Vibration Reliability</a:t>
+                      </a:r>
+                    </a:p>
+                  </a:txBody>
+                  <a:tcPr/>
+                </a:tc>
+                <a:tc>
+                  <a:txBody>
+                    <a:bodyPr/>
+                    <a:lstStyle/>
+                    <a:p>
+                      <a:r>
+                        <a:rPr sz="1200">
+                          <a:latin typeface="Calibri"/>
+                        </a:rPr>
+                        <a:t>❌ More connectors and crimps are potential failure points under vibration.</a:t>
+                      </a:r>
+                    </a:p>
+                  </a:txBody>
+                  <a:tcPr/>
+                </a:tc>
+                <a:tc>
+                  <a:txBody>
+                    <a:bodyPr/>
+                    <a:lstStyle/>
+                    <a:p>
+                      <a:r>
+                        <a:rPr sz="1200">
+                          <a:latin typeface="Calibri"/>
+                        </a:rPr>
+                        <a:t>✅ Fewer electrical/mechanical interfaces reduce failure mechanisms.</a:t>
+                      </a:r>
+                    </a:p>
+                  </a:txBody>
+                  <a:tcPr/>
+                </a:tc>
+              </a:tr>
+              <a:tr h="448887">
+                <a:tc>
+                  <a:txBody>
+                    <a:bodyPr/>
+                    <a:lstStyle/>
+                    <a:p>
+                      <a:r>
+                        <a:rPr sz="1200">
+                          <a:latin typeface="Calibri"/>
+                        </a:rPr>
+                        <a:t>7</a:t>
+                      </a:r>
+                    </a:p>
+                  </a:txBody>
+                  <a:tcPr/>
+                </a:tc>
+                <a:tc>
+                  <a:txBody>
+                    <a:bodyPr/>
+                    <a:lstStyle/>
+                    <a:p>
+                      <a:r>
+                        <a:rPr sz="1200">
+                          <a:latin typeface="Calibri"/>
+                        </a:rPr>
+                        <a:t>BOM &amp; Assembly</a:t>
+                      </a:r>
+                    </a:p>
+                  </a:txBody>
+                  <a:tcPr/>
+                </a:tc>
+                <a:tc>
+                  <a:txBody>
+                    <a:bodyPr/>
+                    <a:lstStyle/>
+                    <a:p>
+                      <a:r>
+                        <a:rPr sz="1200">
+                          <a:latin typeface="Calibri"/>
+                        </a:rPr>
+                        <a:t>❌ Three PCBs plus connectors, wires, terminals and harness assembly.</a:t>
+                      </a:r>
+                    </a:p>
+                  </a:txBody>
+                  <a:tcPr/>
+                </a:tc>
+                <a:tc>
+                  <a:txBody>
+                    <a:bodyPr/>
+                    <a:lstStyle/>
+                    <a:p>
+                      <a:r>
+                        <a:rPr sz="1200">
+                          <a:latin typeface="Calibri"/>
+                        </a:rPr>
+                        <a:t>✅ One PCB part number and a single assembly.</a:t>
+                      </a:r>
+                    </a:p>
+                  </a:txBody>
+                  <a:tcPr/>
+                </a:tc>
+              </a:tr>
+              <a:tr h="448887">
+                <a:tc>
+                  <a:txBody>
+                    <a:bodyPr/>
+                    <a:lstStyle/>
+                    <a:p>
+                      <a:r>
+                        <a:rPr sz="1200">
+                          <a:latin typeface="Calibri"/>
+                        </a:rPr>
+                        <a:t>8</a:t>
+                      </a:r>
+                    </a:p>
+                  </a:txBody>
+                  <a:tcPr/>
+                </a:tc>
+                <a:tc>
+                  <a:txBody>
+                    <a:bodyPr/>
+                    <a:lstStyle/>
+                    <a:p>
+                      <a:r>
+                        <a:rPr sz="1200">
+                          <a:latin typeface="Calibri"/>
+                        </a:rPr>
+                        <a:t>Panel Utilization</a:t>
+                      </a:r>
+                    </a:p>
+                  </a:txBody>
+                  <a:tcPr/>
+                </a:tc>
+                <a:tc>
+                  <a:txBody>
+                    <a:bodyPr/>
+                    <a:lstStyle/>
+                    <a:p>
+                      <a:r>
+                        <a:rPr sz="1200">
+                          <a:latin typeface="Calibri"/>
+                        </a:rPr>
+                        <a:t>✅ Rectangular boards nest efficiently on panels.</a:t>
+                      </a:r>
+                    </a:p>
+                  </a:txBody>
+                  <a:tcPr/>
+                </a:tc>
+                <a:tc>
+                  <a:txBody>
+                    <a:bodyPr/>
+                    <a:lstStyle/>
+                    <a:p>
+                      <a:r>
+                        <a:rPr sz="1200">
+                          <a:latin typeface="Calibri"/>
+                        </a:rPr>
+                        <a:t>❌ C-shaped outline leaves more unused panel area.</a:t>
+                      </a:r>
+                    </a:p>
+                  </a:txBody>
+                  <a:tcPr/>
+                </a:tc>
+              </a:tr>
+              <a:tr h="448887">
+                <a:tc>
+                  <a:txBody>
+                    <a:bodyPr/>
+                    <a:lstStyle/>
+                    <a:p>
+                      <a:r>
+                        <a:rPr sz="1200">
+                          <a:latin typeface="Calibri"/>
+                        </a:rPr>
+                        <a:t>9</a:t>
+                      </a:r>
+                    </a:p>
+                  </a:txBody>
+                  <a:tcPr/>
+                </a:tc>
+                <a:tc>
+                  <a:txBody>
+                    <a:bodyPr/>
+                    <a:lstStyle/>
+                    <a:p>
+                      <a:r>
+                        <a:rPr sz="1200">
+                          <a:latin typeface="Calibri"/>
+                        </a:rPr>
+                        <a:t>Warpage &amp; Depaneling</a:t>
+                      </a:r>
+                    </a:p>
+                  </a:txBody>
+                  <a:tcPr/>
+                </a:tc>
+                <a:tc>
+                  <a:txBody>
+                    <a:bodyPr/>
+                    <a:lstStyle/>
+                    <a:p>
+                      <a:r>
+                        <a:rPr sz="1200">
+                          <a:latin typeface="Calibri"/>
+                        </a:rPr>
+                        <a:t>✅ Short boards stay flat, with low stress on LED solder joints.</a:t>
+                      </a:r>
+                    </a:p>
+                  </a:txBody>
+                  <a:tcPr/>
+                </a:tc>
+                <a:tc>
+                  <a:txBody>
+                    <a:bodyPr/>
+                    <a:lstStyle/>
+                    <a:p>
+                      <a:r>
+                        <a:rPr sz="1200">
+                          <a:latin typeface="Calibri"/>
+                        </a:rPr>
+                        <a:t>❌ Long C-shape can warp during reflow and depaneling, stressing LED joints.</a:t>
+                      </a:r>
+                    </a:p>
+                  </a:txBody>
+                  <a:tcPr/>
+                </a:tc>
+              </a:tr>
+              <a:tr h="448890">
+                <a:tc>
+                  <a:txBody>
+                    <a:bodyPr/>
+                    <a:lstStyle/>
+                    <a:p>
+                      <a:r>
+                        <a:rPr sz="1200">
+                          <a:latin typeface="Calibri"/>
+                        </a:rPr>
+                        <a:t>10</a:t>
+                      </a:r>
+                    </a:p>
+                  </a:txBody>
+                  <a:tcPr/>
+                </a:tc>
+                <a:tc>
+                  <a:txBody>
+                    <a:bodyPr/>
+                    <a:lstStyle/>
+                    <a:p>
+                      <a:r>
+                        <a:rPr sz="1200">
+                          <a:latin typeface="Calibri"/>
+                        </a:rPr>
+                        <a:t>Mechanical Flexibility &amp; Serviceability</a:t>
+                      </a:r>
+                    </a:p>
+                  </a:txBody>
+                  <a:tcPr/>
+                </a:tc>
+                <a:tc>
+                  <a:txBody>
+                    <a:bodyPr/>
+                    <a:lstStyle/>
+                    <a:p>
+                      <a:r>
+                        <a:rPr sz="1200">
+                          <a:latin typeface="Calibri"/>
+                        </a:rPr>
+                        <a:t>✅ Boards can be positioned and replaced independently.</a:t>
+                      </a:r>
+                    </a:p>
+                  </a:txBody>
+                  <a:tcPr/>
+                </a:tc>
+                <a:tc>
+                  <a:txBody>
+                    <a:bodyPr/>
+                    <a:lstStyle/>
+                    <a:p>
+                      <a:r>
+                        <a:rPr sz="1200">
+                          <a:latin typeface="Calibri"/>
+                        </a:rPr>
+                        <a:t>❌ Whole C-shape must fit the housing tolerance and is replaced as one part.</a:t>
+                      </a:r>
+                    </a:p>
+                  </a:txBody>
+                  <a:tcPr/>
+                </a:tc>
+              </a:tr>
+            </a:tbl>
+          </a:graphicData>
+        </a:graphic>
+      </p:graphicFrame>
+      <p:sp>
+        <p:nvSpPr>
+          <p:cNvPr id="4" name="TextBox 3"/>
           <p:cNvSpPr txBox="1"/>
           <p:nvPr/>
         </p:nvSpPr>
         <p:spPr>
           <a:xfrm>
-            <a:off x="457200" y="841248"/>
-            <a:ext cx="11247120" cy="320040"/>
+            <a:off x="457200" y="6172200"/>
+            <a:ext cx="11247120" cy="365760"/>
           </a:xfrm>
           <a:prstGeom prst="rect">
             <a:avLst/>
@@ -10504,3428 +11214,22 @@
           <a:p>
             <a:pPr algn="l"/>
             <a:r>
-              <a:rPr sz="1300" b="0" i="0">
+              <a:rPr sz="1400" b="1" i="0">
                 <a:solidFill>
-                  <a:srgbClr val="9FB0C3"/>
+                  <a:srgbClr val="000000"/>
                 </a:solidFill>
                 <a:latin typeface="Calibri"/>
               </a:rPr>
-              <a:t>The 10 most relevant parameters for EMC, reliability and manufacturing  (★ = additional technical point)</a:t>
-            </a:r>
-          </a:p>
-        </p:txBody>
-      </p:sp>
-      <p:sp>
-        <p:nvSpPr>
-          <p:cNvPr id="4" name="Rectangle 3"/>
-          <p:cNvSpPr/>
-          <p:nvPr/>
-        </p:nvSpPr>
-        <p:spPr>
-          <a:xfrm>
-            <a:off x="457200" y="1280160"/>
-            <a:ext cx="11274552" cy="475488"/>
-          </a:xfrm>
-          <a:prstGeom prst="rect">
-            <a:avLst/>
-          </a:prstGeom>
-          <a:solidFill>
-            <a:srgbClr val="1D2B3B"/>
-          </a:solidFill>
-          <a:ln>
-            <a:noFill/>
-          </a:ln>
-        </p:spPr>
-        <p:txBody>
-          <a:bodyPr rtlCol="0" anchor="ctr"/>
-          <a:lstStyle/>
-          <a:p>
-            <a:pPr algn="ctr"/>
-          </a:p>
-        </p:txBody>
-      </p:sp>
-      <p:sp>
-        <p:nvSpPr>
-          <p:cNvPr id="5" name="Rectangle 4"/>
-          <p:cNvSpPr/>
-          <p:nvPr/>
-        </p:nvSpPr>
-        <p:spPr>
-          <a:xfrm>
-            <a:off x="7470648" y="1280160"/>
-            <a:ext cx="4261104" cy="475488"/>
-          </a:xfrm>
-          <a:prstGeom prst="rect">
-            <a:avLst/>
-          </a:prstGeom>
-          <a:solidFill>
-            <a:srgbClr val="1E5C3F"/>
-          </a:solidFill>
-          <a:ln>
-            <a:noFill/>
-          </a:ln>
-        </p:spPr>
-        <p:txBody>
-          <a:bodyPr rtlCol="0" anchor="ctr"/>
-          <a:lstStyle/>
-          <a:p>
-            <a:pPr algn="ctr"/>
-          </a:p>
-        </p:txBody>
-      </p:sp>
-      <p:sp>
-        <p:nvSpPr>
-          <p:cNvPr id="6" name="TextBox 5"/>
-          <p:cNvSpPr txBox="1"/>
-          <p:nvPr/>
-        </p:nvSpPr>
-        <p:spPr>
-          <a:xfrm>
-            <a:off x="566928" y="1280160"/>
-            <a:ext cx="228600" cy="475488"/>
-          </a:xfrm>
-          <a:prstGeom prst="rect">
-            <a:avLst/>
-          </a:prstGeom>
-          <a:noFill/>
-        </p:spPr>
-        <p:txBody>
-          <a:bodyPr wrap="square" lIns="0" rIns="0" tIns="0" bIns="0" anchor="ctr">
-            <a:spAutoFit/>
-          </a:bodyPr>
-          <a:lstStyle/>
-          <a:p>
-            <a:pPr algn="l"/>
-            <a:r>
-              <a:rPr sz="1400" b="1" i="0">
+              <a:t>Best overall: Single C-Shape PCB</a:t>
+            </a:r>
+            <a:r>
+              <a:rPr sz="1400" b="0" i="0">
                 <a:solidFill>
-                  <a:srgbClr val="EAF0F6"/>
+                  <a:srgbClr val="000000"/>
                 </a:solidFill>
                 <a:latin typeface="Calibri"/>
               </a:rPr>
-              <a:t>#</a:t>
-            </a:r>
-          </a:p>
-        </p:txBody>
-      </p:sp>
-      <p:sp>
-        <p:nvSpPr>
-          <p:cNvPr id="7" name="TextBox 6"/>
-          <p:cNvSpPr txBox="1"/>
-          <p:nvPr/>
-        </p:nvSpPr>
-        <p:spPr>
-          <a:xfrm>
-            <a:off x="978407" y="1280160"/>
-            <a:ext cx="2194560" cy="475488"/>
-          </a:xfrm>
-          <a:prstGeom prst="rect">
-            <a:avLst/>
-          </a:prstGeom>
-          <a:noFill/>
-        </p:spPr>
-        <p:txBody>
-          <a:bodyPr wrap="square" lIns="0" rIns="0" tIns="0" bIns="0" anchor="ctr">
-            <a:spAutoFit/>
-          </a:bodyPr>
-          <a:lstStyle/>
-          <a:p>
-            <a:pPr algn="l"/>
-            <a:r>
-              <a:rPr sz="1400" b="1" i="0">
-                <a:solidFill>
-                  <a:srgbClr val="EAF0F6"/>
-                </a:solidFill>
-                <a:latin typeface="Calibri"/>
-              </a:rPr>
-              <a:t>Parameter</a:t>
-            </a:r>
-          </a:p>
-        </p:txBody>
-      </p:sp>
-      <p:sp>
-        <p:nvSpPr>
-          <p:cNvPr id="8" name="TextBox 7"/>
-          <p:cNvSpPr txBox="1"/>
-          <p:nvPr/>
-        </p:nvSpPr>
-        <p:spPr>
-          <a:xfrm>
-            <a:off x="3355848" y="1280160"/>
-            <a:ext cx="4041648" cy="475488"/>
-          </a:xfrm>
-          <a:prstGeom prst="rect">
-            <a:avLst/>
-          </a:prstGeom>
-          <a:noFill/>
-        </p:spPr>
-        <p:txBody>
-          <a:bodyPr wrap="square" lIns="0" rIns="0" tIns="0" bIns="0" anchor="ctr">
-            <a:spAutoFit/>
-          </a:bodyPr>
-          <a:lstStyle/>
-          <a:p>
-            <a:pPr algn="l"/>
-            <a:r>
-              <a:rPr sz="1400" b="1" i="0">
-                <a:solidFill>
-                  <a:srgbClr val="EAF0F6"/>
-                </a:solidFill>
-                <a:latin typeface="Calibri"/>
-              </a:rPr>
-              <a:t>3-PCB C-Shape</a:t>
-            </a:r>
-          </a:p>
-        </p:txBody>
-      </p:sp>
-      <p:sp>
-        <p:nvSpPr>
-          <p:cNvPr id="9" name="TextBox 8"/>
-          <p:cNvSpPr txBox="1"/>
-          <p:nvPr/>
-        </p:nvSpPr>
-        <p:spPr>
-          <a:xfrm>
-            <a:off x="7580375" y="1280160"/>
-            <a:ext cx="4078224" cy="475488"/>
-          </a:xfrm>
-          <a:prstGeom prst="rect">
-            <a:avLst/>
-          </a:prstGeom>
-          <a:noFill/>
-        </p:spPr>
-        <p:txBody>
-          <a:bodyPr wrap="square" lIns="0" rIns="0" tIns="0" bIns="0" anchor="ctr">
-            <a:spAutoFit/>
-          </a:bodyPr>
-          <a:lstStyle/>
-          <a:p>
-            <a:pPr algn="l"/>
-            <a:r>
-              <a:rPr sz="1400" b="1" i="0">
-                <a:solidFill>
-                  <a:srgbClr val="EAF0F6"/>
-                </a:solidFill>
-                <a:latin typeface="Calibri"/>
-              </a:rPr>
-              <a:t>Single C-Shape PCB</a:t>
-            </a:r>
-          </a:p>
-        </p:txBody>
-      </p:sp>
-      <p:sp>
-        <p:nvSpPr>
-          <p:cNvPr id="10" name="Rounded Rectangle 9"/>
-          <p:cNvSpPr/>
-          <p:nvPr/>
-        </p:nvSpPr>
-        <p:spPr>
-          <a:xfrm>
-            <a:off x="6510528" y="1399031"/>
-            <a:ext cx="822960" cy="265176"/>
-          </a:xfrm>
-          <a:prstGeom prst="roundRect">
-            <a:avLst>
-              <a:gd name="adj" fmla="val 50000"/>
-            </a:avLst>
-          </a:prstGeom>
-          <a:solidFill>
-            <a:srgbClr val="0E1621"/>
-          </a:solidFill>
-          <a:ln>
-            <a:noFill/>
-          </a:ln>
-        </p:spPr>
-        <p:txBody>
-          <a:bodyPr rtlCol="0" anchor="ctr"/>
-          <a:lstStyle/>
-          <a:p>
-            <a:pPr algn="ctr"/>
-          </a:p>
-        </p:txBody>
-      </p:sp>
-      <p:sp>
-        <p:nvSpPr>
-          <p:cNvPr id="11" name="TextBox 10"/>
-          <p:cNvSpPr txBox="1"/>
-          <p:nvPr/>
-        </p:nvSpPr>
-        <p:spPr>
-          <a:xfrm>
-            <a:off x="6510528" y="1399031"/>
-            <a:ext cx="822960" cy="265176"/>
-          </a:xfrm>
-          <a:prstGeom prst="rect">
-            <a:avLst/>
-          </a:prstGeom>
-          <a:noFill/>
-        </p:spPr>
-        <p:txBody>
-          <a:bodyPr wrap="square" lIns="0" rIns="0" tIns="0" bIns="0" anchor="ctr">
-            <a:spAutoFit/>
-          </a:bodyPr>
-          <a:lstStyle/>
-          <a:p>
-            <a:pPr algn="ctr"/>
-            <a:r>
-              <a:rPr sz="1100" b="1" i="0">
-                <a:solidFill>
-                  <a:srgbClr val="FFD34D"/>
-                </a:solidFill>
-                <a:latin typeface="Calibri"/>
-              </a:rPr>
-              <a:t>3 / 10</a:t>
-            </a:r>
-          </a:p>
-        </p:txBody>
-      </p:sp>
-      <p:sp>
-        <p:nvSpPr>
-          <p:cNvPr id="12" name="Rounded Rectangle 11"/>
-          <p:cNvSpPr/>
-          <p:nvPr/>
-        </p:nvSpPr>
-        <p:spPr>
-          <a:xfrm>
-            <a:off x="10771632" y="1399031"/>
-            <a:ext cx="822960" cy="265176"/>
-          </a:xfrm>
-          <a:prstGeom prst="roundRect">
-            <a:avLst>
-              <a:gd name="adj" fmla="val 50000"/>
-            </a:avLst>
-          </a:prstGeom>
-          <a:solidFill>
-            <a:srgbClr val="0E1621"/>
-          </a:solidFill>
-          <a:ln>
-            <a:noFill/>
-          </a:ln>
-        </p:spPr>
-        <p:txBody>
-          <a:bodyPr rtlCol="0" anchor="ctr"/>
-          <a:lstStyle/>
-          <a:p>
-            <a:pPr algn="ctr"/>
-          </a:p>
-        </p:txBody>
-      </p:sp>
-      <p:sp>
-        <p:nvSpPr>
-          <p:cNvPr id="13" name="TextBox 12"/>
-          <p:cNvSpPr txBox="1"/>
-          <p:nvPr/>
-        </p:nvSpPr>
-        <p:spPr>
-          <a:xfrm>
-            <a:off x="10771632" y="1399031"/>
-            <a:ext cx="822960" cy="265176"/>
-          </a:xfrm>
-          <a:prstGeom prst="rect">
-            <a:avLst/>
-          </a:prstGeom>
-          <a:noFill/>
-        </p:spPr>
-        <p:txBody>
-          <a:bodyPr wrap="square" lIns="0" rIns="0" tIns="0" bIns="0" anchor="ctr">
-            <a:spAutoFit/>
-          </a:bodyPr>
-          <a:lstStyle/>
-          <a:p>
-            <a:pPr algn="ctr"/>
-            <a:r>
-              <a:rPr sz="1100" b="1" i="0">
-                <a:solidFill>
-                  <a:srgbClr val="FFD34D"/>
-                </a:solidFill>
-                <a:latin typeface="Calibri"/>
-              </a:rPr>
-              <a:t>7 / 10</a:t>
-            </a:r>
-          </a:p>
-        </p:txBody>
-      </p:sp>
-      <p:sp>
-        <p:nvSpPr>
-          <p:cNvPr id="14" name="Rectangle 13"/>
-          <p:cNvSpPr/>
-          <p:nvPr/>
-        </p:nvSpPr>
-        <p:spPr>
-          <a:xfrm>
-            <a:off x="457200" y="1755648"/>
-            <a:ext cx="11274552" cy="384048"/>
-          </a:xfrm>
-          <a:prstGeom prst="rect">
-            <a:avLst/>
-          </a:prstGeom>
-          <a:solidFill>
-            <a:srgbClr val="172331"/>
-          </a:solidFill>
-          <a:ln>
-            <a:noFill/>
-          </a:ln>
-        </p:spPr>
-        <p:txBody>
-          <a:bodyPr rtlCol="0" anchor="ctr"/>
-          <a:lstStyle/>
-          <a:p>
-            <a:pPr algn="ctr"/>
-          </a:p>
-        </p:txBody>
-      </p:sp>
-      <p:sp>
-        <p:nvSpPr>
-          <p:cNvPr id="15" name="TextBox 14"/>
-          <p:cNvSpPr txBox="1"/>
-          <p:nvPr/>
-        </p:nvSpPr>
-        <p:spPr>
-          <a:xfrm>
-            <a:off x="566928" y="1755648"/>
-            <a:ext cx="274320" cy="384048"/>
-          </a:xfrm>
-          <a:prstGeom prst="rect">
-            <a:avLst/>
-          </a:prstGeom>
-          <a:noFill/>
-        </p:spPr>
-        <p:txBody>
-          <a:bodyPr wrap="square" lIns="0" rIns="0" tIns="0" bIns="0" anchor="ctr">
-            <a:spAutoFit/>
-          </a:bodyPr>
-          <a:lstStyle/>
-          <a:p>
-            <a:pPr algn="l"/>
-            <a:r>
-              <a:rPr sz="1100" b="0" i="0">
-                <a:solidFill>
-                  <a:srgbClr val="9FB0C3"/>
-                </a:solidFill>
-                <a:latin typeface="Calibri"/>
-              </a:rPr>
-              <a:t>1</a:t>
-            </a:r>
-          </a:p>
-        </p:txBody>
-      </p:sp>
-      <p:sp>
-        <p:nvSpPr>
-          <p:cNvPr id="16" name="TextBox 15"/>
-          <p:cNvSpPr txBox="1"/>
-          <p:nvPr/>
-        </p:nvSpPr>
-        <p:spPr>
-          <a:xfrm>
-            <a:off x="978407" y="1755648"/>
-            <a:ext cx="2194560" cy="384048"/>
-          </a:xfrm>
-          <a:prstGeom prst="rect">
-            <a:avLst/>
-          </a:prstGeom>
-          <a:noFill/>
-        </p:spPr>
-        <p:txBody>
-          <a:bodyPr wrap="square" lIns="0" rIns="0" tIns="0" bIns="0" anchor="ctr">
-            <a:spAutoFit/>
-          </a:bodyPr>
-          <a:lstStyle/>
-          <a:p>
-            <a:pPr algn="l"/>
-            <a:r>
-              <a:rPr sz="1150" b="1" i="0">
-                <a:solidFill>
-                  <a:srgbClr val="EAF0F6"/>
-                </a:solidFill>
-                <a:latin typeface="Calibri"/>
-              </a:rPr>
-              <a:t>EMI – Radiated emissions</a:t>
-            </a:r>
-          </a:p>
-        </p:txBody>
-      </p:sp>
-      <p:sp>
-        <p:nvSpPr>
-          <p:cNvPr id="17" name="Oval 16"/>
-          <p:cNvSpPr/>
-          <p:nvPr/>
-        </p:nvSpPr>
-        <p:spPr>
-          <a:xfrm>
-            <a:off x="3355848" y="1828800"/>
-            <a:ext cx="237744" cy="237744"/>
-          </a:xfrm>
-          <a:prstGeom prst="ellipse">
-            <a:avLst/>
-          </a:prstGeom>
-          <a:solidFill>
-            <a:srgbClr val="E05D5D"/>
-          </a:solidFill>
-          <a:ln>
-            <a:noFill/>
-          </a:ln>
-        </p:spPr>
-        <p:txBody>
-          <a:bodyPr rtlCol="0" anchor="ctr"/>
-          <a:lstStyle/>
-          <a:p>
-            <a:pPr algn="ctr"/>
-          </a:p>
-        </p:txBody>
-      </p:sp>
-      <p:sp>
-        <p:nvSpPr>
-          <p:cNvPr id="18" name="TextBox 17"/>
-          <p:cNvSpPr txBox="1"/>
-          <p:nvPr/>
-        </p:nvSpPr>
-        <p:spPr>
-          <a:xfrm>
-            <a:off x="3355848" y="1828800"/>
-            <a:ext cx="237744" cy="237744"/>
-          </a:xfrm>
-          <a:prstGeom prst="rect">
-            <a:avLst/>
-          </a:prstGeom>
-          <a:noFill/>
-        </p:spPr>
-        <p:txBody>
-          <a:bodyPr wrap="square" lIns="0" rIns="0" tIns="0" bIns="0" anchor="ctr">
-            <a:spAutoFit/>
-          </a:bodyPr>
-          <a:lstStyle/>
-          <a:p>
-            <a:pPr algn="ctr"/>
-            <a:r>
-              <a:rPr sz="1100" b="1" i="0">
-                <a:solidFill>
-                  <a:srgbClr val="EAF0F6"/>
-                </a:solidFill>
-                <a:latin typeface="Calibri"/>
-              </a:rPr>
-              <a:t>✗</a:t>
-            </a:r>
-          </a:p>
-        </p:txBody>
-      </p:sp>
-      <p:sp>
-        <p:nvSpPr>
-          <p:cNvPr id="19" name="TextBox 18"/>
-          <p:cNvSpPr txBox="1"/>
-          <p:nvPr/>
-        </p:nvSpPr>
-        <p:spPr>
-          <a:xfrm>
-            <a:off x="3703320" y="1755648"/>
-            <a:ext cx="3675888" cy="384048"/>
-          </a:xfrm>
-          <a:prstGeom prst="rect">
-            <a:avLst/>
-          </a:prstGeom>
-          <a:noFill/>
-        </p:spPr>
-        <p:txBody>
-          <a:bodyPr wrap="square" lIns="0" rIns="0" tIns="0" bIns="0" anchor="ctr">
-            <a:spAutoFit/>
-          </a:bodyPr>
-          <a:lstStyle/>
-          <a:p>
-            <a:pPr algn="l"/>
-            <a:r>
-              <a:rPr sz="1100" b="0" i="0">
-                <a:solidFill>
-                  <a:srgbClr val="9FB0C3"/>
-                </a:solidFill>
-                <a:latin typeface="Calibri"/>
-              </a:rPr>
-              <a:t>Inter-board wires act as unintended antennas</a:t>
-            </a:r>
-          </a:p>
-        </p:txBody>
-      </p:sp>
-      <p:sp>
-        <p:nvSpPr>
-          <p:cNvPr id="20" name="Oval 19"/>
-          <p:cNvSpPr/>
-          <p:nvPr/>
-        </p:nvSpPr>
-        <p:spPr>
-          <a:xfrm>
-            <a:off x="7580375" y="1828800"/>
-            <a:ext cx="237744" cy="237744"/>
-          </a:xfrm>
-          <a:prstGeom prst="ellipse">
-            <a:avLst/>
-          </a:prstGeom>
-          <a:solidFill>
-            <a:srgbClr val="3FA46A"/>
-          </a:solidFill>
-          <a:ln>
-            <a:noFill/>
-          </a:ln>
-        </p:spPr>
-        <p:txBody>
-          <a:bodyPr rtlCol="0" anchor="ctr"/>
-          <a:lstStyle/>
-          <a:p>
-            <a:pPr algn="ctr"/>
-          </a:p>
-        </p:txBody>
-      </p:sp>
-      <p:sp>
-        <p:nvSpPr>
-          <p:cNvPr id="21" name="TextBox 20"/>
-          <p:cNvSpPr txBox="1"/>
-          <p:nvPr/>
-        </p:nvSpPr>
-        <p:spPr>
-          <a:xfrm>
-            <a:off x="7580375" y="1828800"/>
-            <a:ext cx="237744" cy="237744"/>
-          </a:xfrm>
-          <a:prstGeom prst="rect">
-            <a:avLst/>
-          </a:prstGeom>
-          <a:noFill/>
-        </p:spPr>
-        <p:txBody>
-          <a:bodyPr wrap="square" lIns="0" rIns="0" tIns="0" bIns="0" anchor="ctr">
-            <a:spAutoFit/>
-          </a:bodyPr>
-          <a:lstStyle/>
-          <a:p>
-            <a:pPr algn="ctr"/>
-            <a:r>
-              <a:rPr sz="1100" b="1" i="0">
-                <a:solidFill>
-                  <a:srgbClr val="EAF0F6"/>
-                </a:solidFill>
-                <a:latin typeface="Calibri"/>
-              </a:rPr>
-              <a:t>✓</a:t>
-            </a:r>
-          </a:p>
-        </p:txBody>
-      </p:sp>
-      <p:sp>
-        <p:nvSpPr>
-          <p:cNvPr id="22" name="TextBox 21"/>
-          <p:cNvSpPr txBox="1"/>
-          <p:nvPr/>
-        </p:nvSpPr>
-        <p:spPr>
-          <a:xfrm>
-            <a:off x="7927848" y="1755648"/>
-            <a:ext cx="3712464" cy="384048"/>
-          </a:xfrm>
-          <a:prstGeom prst="rect">
-            <a:avLst/>
-          </a:prstGeom>
-          <a:noFill/>
-        </p:spPr>
-        <p:txBody>
-          <a:bodyPr wrap="square" lIns="0" rIns="0" tIns="0" bIns="0" anchor="ctr">
-            <a:spAutoFit/>
-          </a:bodyPr>
-          <a:lstStyle/>
-          <a:p>
-            <a:pPr algn="l"/>
-            <a:r>
-              <a:rPr sz="1100" b="0" i="0">
-                <a:solidFill>
-                  <a:srgbClr val="EAF0F6"/>
-                </a:solidFill>
-                <a:latin typeface="Calibri"/>
-              </a:rPr>
-              <a:t>No PCB-to-PCB harness left to radiate</a:t>
-            </a:r>
-          </a:p>
-        </p:txBody>
-      </p:sp>
-      <p:sp>
-        <p:nvSpPr>
-          <p:cNvPr id="23" name="Rectangle 22"/>
-          <p:cNvSpPr/>
-          <p:nvPr/>
-        </p:nvSpPr>
-        <p:spPr>
-          <a:xfrm>
-            <a:off x="457200" y="2139696"/>
-            <a:ext cx="11274552" cy="384048"/>
-          </a:xfrm>
-          <a:prstGeom prst="rect">
-            <a:avLst/>
-          </a:prstGeom>
-          <a:solidFill>
-            <a:srgbClr val="0E1621"/>
-          </a:solidFill>
-          <a:ln>
-            <a:noFill/>
-          </a:ln>
-        </p:spPr>
-        <p:txBody>
-          <a:bodyPr rtlCol="0" anchor="ctr"/>
-          <a:lstStyle/>
-          <a:p>
-            <a:pPr algn="ctr"/>
-          </a:p>
-        </p:txBody>
-      </p:sp>
-      <p:sp>
-        <p:nvSpPr>
-          <p:cNvPr id="24" name="TextBox 23"/>
-          <p:cNvSpPr txBox="1"/>
-          <p:nvPr/>
-        </p:nvSpPr>
-        <p:spPr>
-          <a:xfrm>
-            <a:off x="566928" y="2139696"/>
-            <a:ext cx="274320" cy="384048"/>
-          </a:xfrm>
-          <a:prstGeom prst="rect">
-            <a:avLst/>
-          </a:prstGeom>
-          <a:noFill/>
-        </p:spPr>
-        <p:txBody>
-          <a:bodyPr wrap="square" lIns="0" rIns="0" tIns="0" bIns="0" anchor="ctr">
-            <a:spAutoFit/>
-          </a:bodyPr>
-          <a:lstStyle/>
-          <a:p>
-            <a:pPr algn="l"/>
-            <a:r>
-              <a:rPr sz="1100" b="0" i="0">
-                <a:solidFill>
-                  <a:srgbClr val="9FB0C3"/>
-                </a:solidFill>
-                <a:latin typeface="Calibri"/>
-              </a:rPr>
-              <a:t>2</a:t>
-            </a:r>
-          </a:p>
-        </p:txBody>
-      </p:sp>
-      <p:sp>
-        <p:nvSpPr>
-          <p:cNvPr id="25" name="TextBox 24"/>
-          <p:cNvSpPr txBox="1"/>
-          <p:nvPr/>
-        </p:nvSpPr>
-        <p:spPr>
-          <a:xfrm>
-            <a:off x="978407" y="2139696"/>
-            <a:ext cx="2194560" cy="384048"/>
-          </a:xfrm>
-          <a:prstGeom prst="rect">
-            <a:avLst/>
-          </a:prstGeom>
-          <a:noFill/>
-        </p:spPr>
-        <p:txBody>
-          <a:bodyPr wrap="square" lIns="0" rIns="0" tIns="0" bIns="0" anchor="ctr">
-            <a:spAutoFit/>
-          </a:bodyPr>
-          <a:lstStyle/>
-          <a:p>
-            <a:pPr algn="l"/>
-            <a:r>
-              <a:rPr sz="1150" b="1" i="0">
-                <a:solidFill>
-                  <a:srgbClr val="EAF0F6"/>
-                </a:solidFill>
-                <a:latin typeface="Calibri"/>
-              </a:rPr>
-              <a:t>Common-mode noise</a:t>
-            </a:r>
-          </a:p>
-        </p:txBody>
-      </p:sp>
-      <p:sp>
-        <p:nvSpPr>
-          <p:cNvPr id="26" name="Oval 25"/>
-          <p:cNvSpPr/>
-          <p:nvPr/>
-        </p:nvSpPr>
-        <p:spPr>
-          <a:xfrm>
-            <a:off x="3355848" y="2212848"/>
-            <a:ext cx="237744" cy="237744"/>
-          </a:xfrm>
-          <a:prstGeom prst="ellipse">
-            <a:avLst/>
-          </a:prstGeom>
-          <a:solidFill>
-            <a:srgbClr val="E05D5D"/>
-          </a:solidFill>
-          <a:ln>
-            <a:noFill/>
-          </a:ln>
-        </p:spPr>
-        <p:txBody>
-          <a:bodyPr rtlCol="0" anchor="ctr"/>
-          <a:lstStyle/>
-          <a:p>
-            <a:pPr algn="ctr"/>
-          </a:p>
-        </p:txBody>
-      </p:sp>
-      <p:sp>
-        <p:nvSpPr>
-          <p:cNvPr id="27" name="TextBox 26"/>
-          <p:cNvSpPr txBox="1"/>
-          <p:nvPr/>
-        </p:nvSpPr>
-        <p:spPr>
-          <a:xfrm>
-            <a:off x="3355848" y="2212848"/>
-            <a:ext cx="237744" cy="237744"/>
-          </a:xfrm>
-          <a:prstGeom prst="rect">
-            <a:avLst/>
-          </a:prstGeom>
-          <a:noFill/>
-        </p:spPr>
-        <p:txBody>
-          <a:bodyPr wrap="square" lIns="0" rIns="0" tIns="0" bIns="0" anchor="ctr">
-            <a:spAutoFit/>
-          </a:bodyPr>
-          <a:lstStyle/>
-          <a:p>
-            <a:pPr algn="ctr"/>
-            <a:r>
-              <a:rPr sz="1100" b="1" i="0">
-                <a:solidFill>
-                  <a:srgbClr val="EAF0F6"/>
-                </a:solidFill>
-                <a:latin typeface="Calibri"/>
-              </a:rPr>
-              <a:t>✗</a:t>
-            </a:r>
-          </a:p>
-        </p:txBody>
-      </p:sp>
-      <p:sp>
-        <p:nvSpPr>
-          <p:cNvPr id="28" name="TextBox 27"/>
-          <p:cNvSpPr txBox="1"/>
-          <p:nvPr/>
-        </p:nvSpPr>
-        <p:spPr>
-          <a:xfrm>
-            <a:off x="3703320" y="2139696"/>
-            <a:ext cx="3675888" cy="384048"/>
-          </a:xfrm>
-          <a:prstGeom prst="rect">
-            <a:avLst/>
-          </a:prstGeom>
-          <a:noFill/>
-        </p:spPr>
-        <p:txBody>
-          <a:bodyPr wrap="square" lIns="0" rIns="0" tIns="0" bIns="0" anchor="ctr">
-            <a:spAutoFit/>
-          </a:bodyPr>
-          <a:lstStyle/>
-          <a:p>
-            <a:pPr algn="l"/>
-            <a:r>
-              <a:rPr sz="1100" b="0" i="0">
-                <a:solidFill>
-                  <a:srgbClr val="9FB0C3"/>
-                </a:solidFill>
-                <a:latin typeface="Calibri"/>
-              </a:rPr>
-              <a:t>Inter-board wires carry common-mode currents</a:t>
-            </a:r>
-          </a:p>
-        </p:txBody>
-      </p:sp>
-      <p:sp>
-        <p:nvSpPr>
-          <p:cNvPr id="29" name="Oval 28"/>
-          <p:cNvSpPr/>
-          <p:nvPr/>
-        </p:nvSpPr>
-        <p:spPr>
-          <a:xfrm>
-            <a:off x="7580375" y="2212848"/>
-            <a:ext cx="237744" cy="237744"/>
-          </a:xfrm>
-          <a:prstGeom prst="ellipse">
-            <a:avLst/>
-          </a:prstGeom>
-          <a:solidFill>
-            <a:srgbClr val="3FA46A"/>
-          </a:solidFill>
-          <a:ln>
-            <a:noFill/>
-          </a:ln>
-        </p:spPr>
-        <p:txBody>
-          <a:bodyPr rtlCol="0" anchor="ctr"/>
-          <a:lstStyle/>
-          <a:p>
-            <a:pPr algn="ctr"/>
-          </a:p>
-        </p:txBody>
-      </p:sp>
-      <p:sp>
-        <p:nvSpPr>
-          <p:cNvPr id="30" name="TextBox 29"/>
-          <p:cNvSpPr txBox="1"/>
-          <p:nvPr/>
-        </p:nvSpPr>
-        <p:spPr>
-          <a:xfrm>
-            <a:off x="7580375" y="2212848"/>
-            <a:ext cx="237744" cy="237744"/>
-          </a:xfrm>
-          <a:prstGeom prst="rect">
-            <a:avLst/>
-          </a:prstGeom>
-          <a:noFill/>
-        </p:spPr>
-        <p:txBody>
-          <a:bodyPr wrap="square" lIns="0" rIns="0" tIns="0" bIns="0" anchor="ctr">
-            <a:spAutoFit/>
-          </a:bodyPr>
-          <a:lstStyle/>
-          <a:p>
-            <a:pPr algn="ctr"/>
-            <a:r>
-              <a:rPr sz="1100" b="1" i="0">
-                <a:solidFill>
-                  <a:srgbClr val="EAF0F6"/>
-                </a:solidFill>
-                <a:latin typeface="Calibri"/>
-              </a:rPr>
-              <a:t>✓</a:t>
-            </a:r>
-          </a:p>
-        </p:txBody>
-      </p:sp>
-      <p:sp>
-        <p:nvSpPr>
-          <p:cNvPr id="31" name="TextBox 30"/>
-          <p:cNvSpPr txBox="1"/>
-          <p:nvPr/>
-        </p:nvSpPr>
-        <p:spPr>
-          <a:xfrm>
-            <a:off x="7927848" y="2139696"/>
-            <a:ext cx="3712464" cy="384048"/>
-          </a:xfrm>
-          <a:prstGeom prst="rect">
-            <a:avLst/>
-          </a:prstGeom>
-          <a:noFill/>
-        </p:spPr>
-        <p:txBody>
-          <a:bodyPr wrap="square" lIns="0" rIns="0" tIns="0" bIns="0" anchor="ctr">
-            <a:spAutoFit/>
-          </a:bodyPr>
-          <a:lstStyle/>
-          <a:p>
-            <a:pPr algn="l"/>
-            <a:r>
-              <a:rPr sz="1100" b="0" i="0">
-                <a:solidFill>
-                  <a:srgbClr val="EAF0F6"/>
-                </a:solidFill>
-                <a:latin typeface="Calibri"/>
-              </a:rPr>
-              <a:t>Short conductors, few CM coupling paths</a:t>
-            </a:r>
-          </a:p>
-        </p:txBody>
-      </p:sp>
-      <p:sp>
-        <p:nvSpPr>
-          <p:cNvPr id="32" name="Rectangle 31"/>
-          <p:cNvSpPr/>
-          <p:nvPr/>
-        </p:nvSpPr>
-        <p:spPr>
-          <a:xfrm>
-            <a:off x="457200" y="2523744"/>
-            <a:ext cx="11274552" cy="384048"/>
-          </a:xfrm>
-          <a:prstGeom prst="rect">
-            <a:avLst/>
-          </a:prstGeom>
-          <a:solidFill>
-            <a:srgbClr val="172331"/>
-          </a:solidFill>
-          <a:ln>
-            <a:noFill/>
-          </a:ln>
-        </p:spPr>
-        <p:txBody>
-          <a:bodyPr rtlCol="0" anchor="ctr"/>
-          <a:lstStyle/>
-          <a:p>
-            <a:pPr algn="ctr"/>
-          </a:p>
-        </p:txBody>
-      </p:sp>
-      <p:sp>
-        <p:nvSpPr>
-          <p:cNvPr id="33" name="TextBox 32"/>
-          <p:cNvSpPr txBox="1"/>
-          <p:nvPr/>
-        </p:nvSpPr>
-        <p:spPr>
-          <a:xfrm>
-            <a:off x="566928" y="2523744"/>
-            <a:ext cx="274320" cy="384048"/>
-          </a:xfrm>
-          <a:prstGeom prst="rect">
-            <a:avLst/>
-          </a:prstGeom>
-          <a:noFill/>
-        </p:spPr>
-        <p:txBody>
-          <a:bodyPr wrap="square" lIns="0" rIns="0" tIns="0" bIns="0" anchor="ctr">
-            <a:spAutoFit/>
-          </a:bodyPr>
-          <a:lstStyle/>
-          <a:p>
-            <a:pPr algn="l"/>
-            <a:r>
-              <a:rPr sz="1100" b="0" i="0">
-                <a:solidFill>
-                  <a:srgbClr val="9FB0C3"/>
-                </a:solidFill>
-                <a:latin typeface="Calibri"/>
-              </a:rPr>
-              <a:t>3</a:t>
-            </a:r>
-          </a:p>
-        </p:txBody>
-      </p:sp>
-      <p:sp>
-        <p:nvSpPr>
-          <p:cNvPr id="34" name="TextBox 33"/>
-          <p:cNvSpPr txBox="1"/>
-          <p:nvPr/>
-        </p:nvSpPr>
-        <p:spPr>
-          <a:xfrm>
-            <a:off x="978407" y="2523744"/>
-            <a:ext cx="2194560" cy="384048"/>
-          </a:xfrm>
-          <a:prstGeom prst="rect">
-            <a:avLst/>
-          </a:prstGeom>
-          <a:noFill/>
-        </p:spPr>
-        <p:txBody>
-          <a:bodyPr wrap="square" lIns="0" rIns="0" tIns="0" bIns="0" anchor="ctr">
-            <a:spAutoFit/>
-          </a:bodyPr>
-          <a:lstStyle/>
-          <a:p>
-            <a:pPr algn="l"/>
-            <a:r>
-              <a:rPr sz="1150" b="1" i="0">
-                <a:solidFill>
-                  <a:srgbClr val="EAF0F6"/>
-                </a:solidFill>
-                <a:latin typeface="Calibri"/>
-              </a:rPr>
-              <a:t>Current loop area</a:t>
-            </a:r>
-          </a:p>
-        </p:txBody>
-      </p:sp>
-      <p:sp>
-        <p:nvSpPr>
-          <p:cNvPr id="35" name="Oval 34"/>
-          <p:cNvSpPr/>
-          <p:nvPr/>
-        </p:nvSpPr>
-        <p:spPr>
-          <a:xfrm>
-            <a:off x="3355848" y="2596896"/>
-            <a:ext cx="237744" cy="237744"/>
-          </a:xfrm>
-          <a:prstGeom prst="ellipse">
-            <a:avLst/>
-          </a:prstGeom>
-          <a:solidFill>
-            <a:srgbClr val="E05D5D"/>
-          </a:solidFill>
-          <a:ln>
-            <a:noFill/>
-          </a:ln>
-        </p:spPr>
-        <p:txBody>
-          <a:bodyPr rtlCol="0" anchor="ctr"/>
-          <a:lstStyle/>
-          <a:p>
-            <a:pPr algn="ctr"/>
-          </a:p>
-        </p:txBody>
-      </p:sp>
-      <p:sp>
-        <p:nvSpPr>
-          <p:cNvPr id="36" name="TextBox 35"/>
-          <p:cNvSpPr txBox="1"/>
-          <p:nvPr/>
-        </p:nvSpPr>
-        <p:spPr>
-          <a:xfrm>
-            <a:off x="3355848" y="2596896"/>
-            <a:ext cx="237744" cy="237744"/>
-          </a:xfrm>
-          <a:prstGeom prst="rect">
-            <a:avLst/>
-          </a:prstGeom>
-          <a:noFill/>
-        </p:spPr>
-        <p:txBody>
-          <a:bodyPr wrap="square" lIns="0" rIns="0" tIns="0" bIns="0" anchor="ctr">
-            <a:spAutoFit/>
-          </a:bodyPr>
-          <a:lstStyle/>
-          <a:p>
-            <a:pPr algn="ctr"/>
-            <a:r>
-              <a:rPr sz="1100" b="1" i="0">
-                <a:solidFill>
-                  <a:srgbClr val="EAF0F6"/>
-                </a:solidFill>
-                <a:latin typeface="Calibri"/>
-              </a:rPr>
-              <a:t>✗</a:t>
-            </a:r>
-          </a:p>
-        </p:txBody>
-      </p:sp>
-      <p:sp>
-        <p:nvSpPr>
-          <p:cNvPr id="37" name="TextBox 36"/>
-          <p:cNvSpPr txBox="1"/>
-          <p:nvPr/>
-        </p:nvSpPr>
-        <p:spPr>
-          <a:xfrm>
-            <a:off x="3703320" y="2523744"/>
-            <a:ext cx="3675888" cy="384048"/>
-          </a:xfrm>
-          <a:prstGeom prst="rect">
-            <a:avLst/>
-          </a:prstGeom>
-          <a:noFill/>
-        </p:spPr>
-        <p:txBody>
-          <a:bodyPr wrap="square" lIns="0" rIns="0" tIns="0" bIns="0" anchor="ctr">
-            <a:spAutoFit/>
-          </a:bodyPr>
-          <a:lstStyle/>
-          <a:p>
-            <a:pPr algn="l"/>
-            <a:r>
-              <a:rPr sz="1100" b="0" i="0">
-                <a:solidFill>
-                  <a:srgbClr val="9FB0C3"/>
-                </a:solidFill>
-                <a:latin typeface="Calibri"/>
-              </a:rPr>
-              <a:t>Harness routing enlarges the loop area</a:t>
-            </a:r>
-          </a:p>
-        </p:txBody>
-      </p:sp>
-      <p:sp>
-        <p:nvSpPr>
-          <p:cNvPr id="38" name="Oval 37"/>
-          <p:cNvSpPr/>
-          <p:nvPr/>
-        </p:nvSpPr>
-        <p:spPr>
-          <a:xfrm>
-            <a:off x="7580375" y="2596896"/>
-            <a:ext cx="237744" cy="237744"/>
-          </a:xfrm>
-          <a:prstGeom prst="ellipse">
-            <a:avLst/>
-          </a:prstGeom>
-          <a:solidFill>
-            <a:srgbClr val="3FA46A"/>
-          </a:solidFill>
-          <a:ln>
-            <a:noFill/>
-          </a:ln>
-        </p:spPr>
-        <p:txBody>
-          <a:bodyPr rtlCol="0" anchor="ctr"/>
-          <a:lstStyle/>
-          <a:p>
-            <a:pPr algn="ctr"/>
-          </a:p>
-        </p:txBody>
-      </p:sp>
-      <p:sp>
-        <p:nvSpPr>
-          <p:cNvPr id="39" name="TextBox 38"/>
-          <p:cNvSpPr txBox="1"/>
-          <p:nvPr/>
-        </p:nvSpPr>
-        <p:spPr>
-          <a:xfrm>
-            <a:off x="7580375" y="2596896"/>
-            <a:ext cx="237744" cy="237744"/>
-          </a:xfrm>
-          <a:prstGeom prst="rect">
-            <a:avLst/>
-          </a:prstGeom>
-          <a:noFill/>
-        </p:spPr>
-        <p:txBody>
-          <a:bodyPr wrap="square" lIns="0" rIns="0" tIns="0" bIns="0" anchor="ctr">
-            <a:spAutoFit/>
-          </a:bodyPr>
-          <a:lstStyle/>
-          <a:p>
-            <a:pPr algn="ctr"/>
-            <a:r>
-              <a:rPr sz="1100" b="1" i="0">
-                <a:solidFill>
-                  <a:srgbClr val="EAF0F6"/>
-                </a:solidFill>
-                <a:latin typeface="Calibri"/>
-              </a:rPr>
-              <a:t>✓</a:t>
-            </a:r>
-          </a:p>
-        </p:txBody>
-      </p:sp>
-      <p:sp>
-        <p:nvSpPr>
-          <p:cNvPr id="40" name="TextBox 39"/>
-          <p:cNvSpPr txBox="1"/>
-          <p:nvPr/>
-        </p:nvSpPr>
-        <p:spPr>
-          <a:xfrm>
-            <a:off x="7927848" y="2523744"/>
-            <a:ext cx="3712464" cy="384048"/>
-          </a:xfrm>
-          <a:prstGeom prst="rect">
-            <a:avLst/>
-          </a:prstGeom>
-          <a:noFill/>
-        </p:spPr>
-        <p:txBody>
-          <a:bodyPr wrap="square" lIns="0" rIns="0" tIns="0" bIns="0" anchor="ctr">
-            <a:spAutoFit/>
-          </a:bodyPr>
-          <a:lstStyle/>
-          <a:p>
-            <a:pPr algn="l"/>
-            <a:r>
-              <a:rPr sz="1100" b="0" i="0">
-                <a:solidFill>
-                  <a:srgbClr val="EAF0F6"/>
-                </a:solidFill>
-                <a:latin typeface="Calibri"/>
-              </a:rPr>
-              <a:t>Forward &amp; return routed tightly in copper</a:t>
-            </a:r>
-          </a:p>
-        </p:txBody>
-      </p:sp>
-      <p:sp>
-        <p:nvSpPr>
-          <p:cNvPr id="41" name="Rectangle 40"/>
-          <p:cNvSpPr/>
-          <p:nvPr/>
-        </p:nvSpPr>
-        <p:spPr>
-          <a:xfrm>
-            <a:off x="457200" y="2907791"/>
-            <a:ext cx="11274552" cy="384048"/>
-          </a:xfrm>
-          <a:prstGeom prst="rect">
-            <a:avLst/>
-          </a:prstGeom>
-          <a:solidFill>
-            <a:srgbClr val="0E1621"/>
-          </a:solidFill>
-          <a:ln>
-            <a:noFill/>
-          </a:ln>
-        </p:spPr>
-        <p:txBody>
-          <a:bodyPr rtlCol="0" anchor="ctr"/>
-          <a:lstStyle/>
-          <a:p>
-            <a:pPr algn="ctr"/>
-          </a:p>
-        </p:txBody>
-      </p:sp>
-      <p:sp>
-        <p:nvSpPr>
-          <p:cNvPr id="42" name="TextBox 41"/>
-          <p:cNvSpPr txBox="1"/>
-          <p:nvPr/>
-        </p:nvSpPr>
-        <p:spPr>
-          <a:xfrm>
-            <a:off x="566928" y="2907791"/>
-            <a:ext cx="274320" cy="384048"/>
-          </a:xfrm>
-          <a:prstGeom prst="rect">
-            <a:avLst/>
-          </a:prstGeom>
-          <a:noFill/>
-        </p:spPr>
-        <p:txBody>
-          <a:bodyPr wrap="square" lIns="0" rIns="0" tIns="0" bIns="0" anchor="ctr">
-            <a:spAutoFit/>
-          </a:bodyPr>
-          <a:lstStyle/>
-          <a:p>
-            <a:pPr algn="l"/>
-            <a:r>
-              <a:rPr sz="1100" b="0" i="0">
-                <a:solidFill>
-                  <a:srgbClr val="9FB0C3"/>
-                </a:solidFill>
-                <a:latin typeface="Calibri"/>
-              </a:rPr>
-              <a:t>4</a:t>
-            </a:r>
-          </a:p>
-        </p:txBody>
-      </p:sp>
-      <p:sp>
-        <p:nvSpPr>
-          <p:cNvPr id="43" name="TextBox 42"/>
-          <p:cNvSpPr txBox="1"/>
-          <p:nvPr/>
-        </p:nvSpPr>
-        <p:spPr>
-          <a:xfrm>
-            <a:off x="978407" y="2907791"/>
-            <a:ext cx="2194560" cy="384048"/>
-          </a:xfrm>
-          <a:prstGeom prst="rect">
-            <a:avLst/>
-          </a:prstGeom>
-          <a:noFill/>
-        </p:spPr>
-        <p:txBody>
-          <a:bodyPr wrap="square" lIns="0" rIns="0" tIns="0" bIns="0" anchor="ctr">
-            <a:spAutoFit/>
-          </a:bodyPr>
-          <a:lstStyle/>
-          <a:p>
-            <a:pPr algn="l"/>
-            <a:r>
-              <a:rPr sz="1150" b="1" i="0">
-                <a:solidFill>
-                  <a:srgbClr val="EAF0F6"/>
-                </a:solidFill>
-                <a:latin typeface="Calibri"/>
-              </a:rPr>
-              <a:t>Ground reference ★</a:t>
-            </a:r>
-          </a:p>
-        </p:txBody>
-      </p:sp>
-      <p:sp>
-        <p:nvSpPr>
-          <p:cNvPr id="44" name="Oval 43"/>
-          <p:cNvSpPr/>
-          <p:nvPr/>
-        </p:nvSpPr>
-        <p:spPr>
-          <a:xfrm>
-            <a:off x="3355848" y="2980944"/>
-            <a:ext cx="237744" cy="237744"/>
-          </a:xfrm>
-          <a:prstGeom prst="ellipse">
-            <a:avLst/>
-          </a:prstGeom>
-          <a:solidFill>
-            <a:srgbClr val="E05D5D"/>
-          </a:solidFill>
-          <a:ln>
-            <a:noFill/>
-          </a:ln>
-        </p:spPr>
-        <p:txBody>
-          <a:bodyPr rtlCol="0" anchor="ctr"/>
-          <a:lstStyle/>
-          <a:p>
-            <a:pPr algn="ctr"/>
-          </a:p>
-        </p:txBody>
-      </p:sp>
-      <p:sp>
-        <p:nvSpPr>
-          <p:cNvPr id="45" name="TextBox 44"/>
-          <p:cNvSpPr txBox="1"/>
-          <p:nvPr/>
-        </p:nvSpPr>
-        <p:spPr>
-          <a:xfrm>
-            <a:off x="3355848" y="2980944"/>
-            <a:ext cx="237744" cy="237744"/>
-          </a:xfrm>
-          <a:prstGeom prst="rect">
-            <a:avLst/>
-          </a:prstGeom>
-          <a:noFill/>
-        </p:spPr>
-        <p:txBody>
-          <a:bodyPr wrap="square" lIns="0" rIns="0" tIns="0" bIns="0" anchor="ctr">
-            <a:spAutoFit/>
-          </a:bodyPr>
-          <a:lstStyle/>
-          <a:p>
-            <a:pPr algn="ctr"/>
-            <a:r>
-              <a:rPr sz="1100" b="1" i="0">
-                <a:solidFill>
-                  <a:srgbClr val="EAF0F6"/>
-                </a:solidFill>
-                <a:latin typeface="Calibri"/>
-              </a:rPr>
-              <a:t>✗</a:t>
-            </a:r>
-          </a:p>
-        </p:txBody>
-      </p:sp>
-      <p:sp>
-        <p:nvSpPr>
-          <p:cNvPr id="46" name="TextBox 45"/>
-          <p:cNvSpPr txBox="1"/>
-          <p:nvPr/>
-        </p:nvSpPr>
-        <p:spPr>
-          <a:xfrm>
-            <a:off x="3703320" y="2907791"/>
-            <a:ext cx="3675888" cy="384048"/>
-          </a:xfrm>
-          <a:prstGeom prst="rect">
-            <a:avLst/>
-          </a:prstGeom>
-          <a:noFill/>
-        </p:spPr>
-        <p:txBody>
-          <a:bodyPr wrap="square" lIns="0" rIns="0" tIns="0" bIns="0" anchor="ctr">
-            <a:spAutoFit/>
-          </a:bodyPr>
-          <a:lstStyle/>
-          <a:p>
-            <a:pPr algn="l"/>
-            <a:r>
-              <a:rPr sz="1100" b="0" i="0">
-                <a:solidFill>
-                  <a:srgbClr val="9FB0C3"/>
-                </a:solidFill>
-                <a:latin typeface="Calibri"/>
-              </a:rPr>
-              <a:t>Ground offset across the harness between boards</a:t>
-            </a:r>
-          </a:p>
-        </p:txBody>
-      </p:sp>
-      <p:sp>
-        <p:nvSpPr>
-          <p:cNvPr id="47" name="Oval 46"/>
-          <p:cNvSpPr/>
-          <p:nvPr/>
-        </p:nvSpPr>
-        <p:spPr>
-          <a:xfrm>
-            <a:off x="7580375" y="2980944"/>
-            <a:ext cx="237744" cy="237744"/>
-          </a:xfrm>
-          <a:prstGeom prst="ellipse">
-            <a:avLst/>
-          </a:prstGeom>
-          <a:solidFill>
-            <a:srgbClr val="3FA46A"/>
-          </a:solidFill>
-          <a:ln>
-            <a:noFill/>
-          </a:ln>
-        </p:spPr>
-        <p:txBody>
-          <a:bodyPr rtlCol="0" anchor="ctr"/>
-          <a:lstStyle/>
-          <a:p>
-            <a:pPr algn="ctr"/>
-          </a:p>
-        </p:txBody>
-      </p:sp>
-      <p:sp>
-        <p:nvSpPr>
-          <p:cNvPr id="48" name="TextBox 47"/>
-          <p:cNvSpPr txBox="1"/>
-          <p:nvPr/>
-        </p:nvSpPr>
-        <p:spPr>
-          <a:xfrm>
-            <a:off x="7580375" y="2980944"/>
-            <a:ext cx="237744" cy="237744"/>
-          </a:xfrm>
-          <a:prstGeom prst="rect">
-            <a:avLst/>
-          </a:prstGeom>
-          <a:noFill/>
-        </p:spPr>
-        <p:txBody>
-          <a:bodyPr wrap="square" lIns="0" rIns="0" tIns="0" bIns="0" anchor="ctr">
-            <a:spAutoFit/>
-          </a:bodyPr>
-          <a:lstStyle/>
-          <a:p>
-            <a:pPr algn="ctr"/>
-            <a:r>
-              <a:rPr sz="1100" b="1" i="0">
-                <a:solidFill>
-                  <a:srgbClr val="EAF0F6"/>
-                </a:solidFill>
-                <a:latin typeface="Calibri"/>
-              </a:rPr>
-              <a:t>✓</a:t>
-            </a:r>
-          </a:p>
-        </p:txBody>
-      </p:sp>
-      <p:sp>
-        <p:nvSpPr>
-          <p:cNvPr id="49" name="TextBox 48"/>
-          <p:cNvSpPr txBox="1"/>
-          <p:nvPr/>
-        </p:nvSpPr>
-        <p:spPr>
-          <a:xfrm>
-            <a:off x="7927848" y="2907791"/>
-            <a:ext cx="3712464" cy="384048"/>
-          </a:xfrm>
-          <a:prstGeom prst="rect">
-            <a:avLst/>
-          </a:prstGeom>
-          <a:noFill/>
-        </p:spPr>
-        <p:txBody>
-          <a:bodyPr wrap="square" lIns="0" rIns="0" tIns="0" bIns="0" anchor="ctr">
-            <a:spAutoFit/>
-          </a:bodyPr>
-          <a:lstStyle/>
-          <a:p>
-            <a:pPr algn="l"/>
-            <a:r>
-              <a:rPr sz="1100" b="0" i="0">
-                <a:solidFill>
-                  <a:srgbClr val="EAF0F6"/>
-                </a:solidFill>
-                <a:latin typeface="Calibri"/>
-              </a:rPr>
-              <a:t>One continuous ground plane end to end</a:t>
-            </a:r>
-          </a:p>
-        </p:txBody>
-      </p:sp>
-      <p:sp>
-        <p:nvSpPr>
-          <p:cNvPr id="50" name="Rectangle 49"/>
-          <p:cNvSpPr/>
-          <p:nvPr/>
-        </p:nvSpPr>
-        <p:spPr>
-          <a:xfrm>
-            <a:off x="457200" y="3291839"/>
-            <a:ext cx="11274552" cy="384048"/>
-          </a:xfrm>
-          <a:prstGeom prst="rect">
-            <a:avLst/>
-          </a:prstGeom>
-          <a:solidFill>
-            <a:srgbClr val="172331"/>
-          </a:solidFill>
-          <a:ln>
-            <a:noFill/>
-          </a:ln>
-        </p:spPr>
-        <p:txBody>
-          <a:bodyPr rtlCol="0" anchor="ctr"/>
-          <a:lstStyle/>
-          <a:p>
-            <a:pPr algn="ctr"/>
-          </a:p>
-        </p:txBody>
-      </p:sp>
-      <p:sp>
-        <p:nvSpPr>
-          <p:cNvPr id="51" name="TextBox 50"/>
-          <p:cNvSpPr txBox="1"/>
-          <p:nvPr/>
-        </p:nvSpPr>
-        <p:spPr>
-          <a:xfrm>
-            <a:off x="566928" y="3291839"/>
-            <a:ext cx="274320" cy="384048"/>
-          </a:xfrm>
-          <a:prstGeom prst="rect">
-            <a:avLst/>
-          </a:prstGeom>
-          <a:noFill/>
-        </p:spPr>
-        <p:txBody>
-          <a:bodyPr wrap="square" lIns="0" rIns="0" tIns="0" bIns="0" anchor="ctr">
-            <a:spAutoFit/>
-          </a:bodyPr>
-          <a:lstStyle/>
-          <a:p>
-            <a:pPr algn="l"/>
-            <a:r>
-              <a:rPr sz="1100" b="0" i="0">
-                <a:solidFill>
-                  <a:srgbClr val="9FB0C3"/>
-                </a:solidFill>
-                <a:latin typeface="Calibri"/>
-              </a:rPr>
-              <a:t>5</a:t>
-            </a:r>
-          </a:p>
-        </p:txBody>
-      </p:sp>
-      <p:sp>
-        <p:nvSpPr>
-          <p:cNvPr id="52" name="TextBox 51"/>
-          <p:cNvSpPr txBox="1"/>
-          <p:nvPr/>
-        </p:nvSpPr>
-        <p:spPr>
-          <a:xfrm>
-            <a:off x="978407" y="3291839"/>
-            <a:ext cx="2194560" cy="384048"/>
-          </a:xfrm>
-          <a:prstGeom prst="rect">
-            <a:avLst/>
-          </a:prstGeom>
-          <a:noFill/>
-        </p:spPr>
-        <p:txBody>
-          <a:bodyPr wrap="square" lIns="0" rIns="0" tIns="0" bIns="0" anchor="ctr">
-            <a:spAutoFit/>
-          </a:bodyPr>
-          <a:lstStyle/>
-          <a:p>
-            <a:pPr algn="l"/>
-            <a:r>
-              <a:rPr sz="1150" b="1" i="0">
-                <a:solidFill>
-                  <a:srgbClr val="EAF0F6"/>
-                </a:solidFill>
-                <a:latin typeface="Calibri"/>
-              </a:rPr>
-              <a:t>RF immunity &amp; ESD</a:t>
-            </a:r>
-          </a:p>
-        </p:txBody>
-      </p:sp>
-      <p:sp>
-        <p:nvSpPr>
-          <p:cNvPr id="53" name="Oval 52"/>
-          <p:cNvSpPr/>
-          <p:nvPr/>
-        </p:nvSpPr>
-        <p:spPr>
-          <a:xfrm>
-            <a:off x="3355848" y="3364991"/>
-            <a:ext cx="237744" cy="237744"/>
-          </a:xfrm>
-          <a:prstGeom prst="ellipse">
-            <a:avLst/>
-          </a:prstGeom>
-          <a:solidFill>
-            <a:srgbClr val="E05D5D"/>
-          </a:solidFill>
-          <a:ln>
-            <a:noFill/>
-          </a:ln>
-        </p:spPr>
-        <p:txBody>
-          <a:bodyPr rtlCol="0" anchor="ctr"/>
-          <a:lstStyle/>
-          <a:p>
-            <a:pPr algn="ctr"/>
-          </a:p>
-        </p:txBody>
-      </p:sp>
-      <p:sp>
-        <p:nvSpPr>
-          <p:cNvPr id="54" name="TextBox 53"/>
-          <p:cNvSpPr txBox="1"/>
-          <p:nvPr/>
-        </p:nvSpPr>
-        <p:spPr>
-          <a:xfrm>
-            <a:off x="3355848" y="3364991"/>
-            <a:ext cx="237744" cy="237744"/>
-          </a:xfrm>
-          <a:prstGeom prst="rect">
-            <a:avLst/>
-          </a:prstGeom>
-          <a:noFill/>
-        </p:spPr>
-        <p:txBody>
-          <a:bodyPr wrap="square" lIns="0" rIns="0" tIns="0" bIns="0" anchor="ctr">
-            <a:spAutoFit/>
-          </a:bodyPr>
-          <a:lstStyle/>
-          <a:p>
-            <a:pPr algn="ctr"/>
-            <a:r>
-              <a:rPr sz="1100" b="1" i="0">
-                <a:solidFill>
-                  <a:srgbClr val="EAF0F6"/>
-                </a:solidFill>
-                <a:latin typeface="Calibri"/>
-              </a:rPr>
-              <a:t>✗</a:t>
-            </a:r>
-          </a:p>
-        </p:txBody>
-      </p:sp>
-      <p:sp>
-        <p:nvSpPr>
-          <p:cNvPr id="55" name="TextBox 54"/>
-          <p:cNvSpPr txBox="1"/>
-          <p:nvPr/>
-        </p:nvSpPr>
-        <p:spPr>
-          <a:xfrm>
-            <a:off x="3703320" y="3291839"/>
-            <a:ext cx="3675888" cy="384048"/>
-          </a:xfrm>
-          <a:prstGeom prst="rect">
-            <a:avLst/>
-          </a:prstGeom>
-          <a:noFill/>
-        </p:spPr>
-        <p:txBody>
-          <a:bodyPr wrap="square" lIns="0" rIns="0" tIns="0" bIns="0" anchor="ctr">
-            <a:spAutoFit/>
-          </a:bodyPr>
-          <a:lstStyle/>
-          <a:p>
-            <a:pPr algn="l"/>
-            <a:r>
-              <a:rPr sz="1100" b="0" i="0">
-                <a:solidFill>
-                  <a:srgbClr val="9FB0C3"/>
-                </a:solidFill>
-                <a:latin typeface="Calibri"/>
-              </a:rPr>
-              <a:t>Harnesses pick up RF; more ESD entry points</a:t>
-            </a:r>
-          </a:p>
-        </p:txBody>
-      </p:sp>
-      <p:sp>
-        <p:nvSpPr>
-          <p:cNvPr id="56" name="Oval 55"/>
-          <p:cNvSpPr/>
-          <p:nvPr/>
-        </p:nvSpPr>
-        <p:spPr>
-          <a:xfrm>
-            <a:off x="7580375" y="3364991"/>
-            <a:ext cx="237744" cy="237744"/>
-          </a:xfrm>
-          <a:prstGeom prst="ellipse">
-            <a:avLst/>
-          </a:prstGeom>
-          <a:solidFill>
-            <a:srgbClr val="3FA46A"/>
-          </a:solidFill>
-          <a:ln>
-            <a:noFill/>
-          </a:ln>
-        </p:spPr>
-        <p:txBody>
-          <a:bodyPr rtlCol="0" anchor="ctr"/>
-          <a:lstStyle/>
-          <a:p>
-            <a:pPr algn="ctr"/>
-          </a:p>
-        </p:txBody>
-      </p:sp>
-      <p:sp>
-        <p:nvSpPr>
-          <p:cNvPr id="57" name="TextBox 56"/>
-          <p:cNvSpPr txBox="1"/>
-          <p:nvPr/>
-        </p:nvSpPr>
-        <p:spPr>
-          <a:xfrm>
-            <a:off x="7580375" y="3364991"/>
-            <a:ext cx="237744" cy="237744"/>
-          </a:xfrm>
-          <a:prstGeom prst="rect">
-            <a:avLst/>
-          </a:prstGeom>
-          <a:noFill/>
-        </p:spPr>
-        <p:txBody>
-          <a:bodyPr wrap="square" lIns="0" rIns="0" tIns="0" bIns="0" anchor="ctr">
-            <a:spAutoFit/>
-          </a:bodyPr>
-          <a:lstStyle/>
-          <a:p>
-            <a:pPr algn="ctr"/>
-            <a:r>
-              <a:rPr sz="1100" b="1" i="0">
-                <a:solidFill>
-                  <a:srgbClr val="EAF0F6"/>
-                </a:solidFill>
-                <a:latin typeface="Calibri"/>
-              </a:rPr>
-              <a:t>✓</a:t>
-            </a:r>
-          </a:p>
-        </p:txBody>
-      </p:sp>
-      <p:sp>
-        <p:nvSpPr>
-          <p:cNvPr id="58" name="TextBox 57"/>
-          <p:cNvSpPr txBox="1"/>
-          <p:nvPr/>
-        </p:nvSpPr>
-        <p:spPr>
-          <a:xfrm>
-            <a:off x="7927848" y="3291839"/>
-            <a:ext cx="3712464" cy="384048"/>
-          </a:xfrm>
-          <a:prstGeom prst="rect">
-            <a:avLst/>
-          </a:prstGeom>
-          <a:noFill/>
-        </p:spPr>
-        <p:txBody>
-          <a:bodyPr wrap="square" lIns="0" rIns="0" tIns="0" bIns="0" anchor="ctr">
-            <a:spAutoFit/>
-          </a:bodyPr>
-          <a:lstStyle/>
-          <a:p>
-            <a:pPr algn="l"/>
-            <a:r>
-              <a:rPr sz="1100" b="0" i="0">
-                <a:solidFill>
-                  <a:srgbClr val="EAF0F6"/>
-                </a:solidFill>
-                <a:latin typeface="Calibri"/>
-              </a:rPr>
-              <a:t>Fewer conductors and interfaces to protect</a:t>
-            </a:r>
-          </a:p>
-        </p:txBody>
-      </p:sp>
-      <p:sp>
-        <p:nvSpPr>
-          <p:cNvPr id="59" name="Rectangle 58"/>
-          <p:cNvSpPr/>
-          <p:nvPr/>
-        </p:nvSpPr>
-        <p:spPr>
-          <a:xfrm>
-            <a:off x="457200" y="3675887"/>
-            <a:ext cx="11274552" cy="384048"/>
-          </a:xfrm>
-          <a:prstGeom prst="rect">
-            <a:avLst/>
-          </a:prstGeom>
-          <a:solidFill>
-            <a:srgbClr val="0E1621"/>
-          </a:solidFill>
-          <a:ln>
-            <a:noFill/>
-          </a:ln>
-        </p:spPr>
-        <p:txBody>
-          <a:bodyPr rtlCol="0" anchor="ctr"/>
-          <a:lstStyle/>
-          <a:p>
-            <a:pPr algn="ctr"/>
-          </a:p>
-        </p:txBody>
-      </p:sp>
-      <p:sp>
-        <p:nvSpPr>
-          <p:cNvPr id="60" name="TextBox 59"/>
-          <p:cNvSpPr txBox="1"/>
-          <p:nvPr/>
-        </p:nvSpPr>
-        <p:spPr>
-          <a:xfrm>
-            <a:off x="566928" y="3675887"/>
-            <a:ext cx="274320" cy="384048"/>
-          </a:xfrm>
-          <a:prstGeom prst="rect">
-            <a:avLst/>
-          </a:prstGeom>
-          <a:noFill/>
-        </p:spPr>
-        <p:txBody>
-          <a:bodyPr wrap="square" lIns="0" rIns="0" tIns="0" bIns="0" anchor="ctr">
-            <a:spAutoFit/>
-          </a:bodyPr>
-          <a:lstStyle/>
-          <a:p>
-            <a:pPr algn="l"/>
-            <a:r>
-              <a:rPr sz="1100" b="0" i="0">
-                <a:solidFill>
-                  <a:srgbClr val="9FB0C3"/>
-                </a:solidFill>
-                <a:latin typeface="Calibri"/>
-              </a:rPr>
-              <a:t>6</a:t>
-            </a:r>
-          </a:p>
-        </p:txBody>
-      </p:sp>
-      <p:sp>
-        <p:nvSpPr>
-          <p:cNvPr id="61" name="TextBox 60"/>
-          <p:cNvSpPr txBox="1"/>
-          <p:nvPr/>
-        </p:nvSpPr>
-        <p:spPr>
-          <a:xfrm>
-            <a:off x="978407" y="3675887"/>
-            <a:ext cx="2194560" cy="384048"/>
-          </a:xfrm>
-          <a:prstGeom prst="rect">
-            <a:avLst/>
-          </a:prstGeom>
-          <a:noFill/>
-        </p:spPr>
-        <p:txBody>
-          <a:bodyPr wrap="square" lIns="0" rIns="0" tIns="0" bIns="0" anchor="ctr">
-            <a:spAutoFit/>
-          </a:bodyPr>
-          <a:lstStyle/>
-          <a:p>
-            <a:pPr algn="l"/>
-            <a:r>
-              <a:rPr sz="1150" b="1" i="0">
-                <a:solidFill>
-                  <a:srgbClr val="EAF0F6"/>
-                </a:solidFill>
-                <a:latin typeface="Calibri"/>
-              </a:rPr>
-              <a:t>Connector reliability</a:t>
-            </a:r>
-          </a:p>
-        </p:txBody>
-      </p:sp>
-      <p:sp>
-        <p:nvSpPr>
-          <p:cNvPr id="62" name="Oval 61"/>
-          <p:cNvSpPr/>
-          <p:nvPr/>
-        </p:nvSpPr>
-        <p:spPr>
-          <a:xfrm>
-            <a:off x="3355848" y="3749039"/>
-            <a:ext cx="237744" cy="237744"/>
-          </a:xfrm>
-          <a:prstGeom prst="ellipse">
-            <a:avLst/>
-          </a:prstGeom>
-          <a:solidFill>
-            <a:srgbClr val="E05D5D"/>
-          </a:solidFill>
-          <a:ln>
-            <a:noFill/>
-          </a:ln>
-        </p:spPr>
-        <p:txBody>
-          <a:bodyPr rtlCol="0" anchor="ctr"/>
-          <a:lstStyle/>
-          <a:p>
-            <a:pPr algn="ctr"/>
-          </a:p>
-        </p:txBody>
-      </p:sp>
-      <p:sp>
-        <p:nvSpPr>
-          <p:cNvPr id="63" name="TextBox 62"/>
-          <p:cNvSpPr txBox="1"/>
-          <p:nvPr/>
-        </p:nvSpPr>
-        <p:spPr>
-          <a:xfrm>
-            <a:off x="3355848" y="3749039"/>
-            <a:ext cx="237744" cy="237744"/>
-          </a:xfrm>
-          <a:prstGeom prst="rect">
-            <a:avLst/>
-          </a:prstGeom>
-          <a:noFill/>
-        </p:spPr>
-        <p:txBody>
-          <a:bodyPr wrap="square" lIns="0" rIns="0" tIns="0" bIns="0" anchor="ctr">
-            <a:spAutoFit/>
-          </a:bodyPr>
-          <a:lstStyle/>
-          <a:p>
-            <a:pPr algn="ctr"/>
-            <a:r>
-              <a:rPr sz="1100" b="1" i="0">
-                <a:solidFill>
-                  <a:srgbClr val="EAF0F6"/>
-                </a:solidFill>
-                <a:latin typeface="Calibri"/>
-              </a:rPr>
-              <a:t>✗</a:t>
-            </a:r>
-          </a:p>
-        </p:txBody>
-      </p:sp>
-      <p:sp>
-        <p:nvSpPr>
-          <p:cNvPr id="64" name="TextBox 63"/>
-          <p:cNvSpPr txBox="1"/>
-          <p:nvPr/>
-        </p:nvSpPr>
-        <p:spPr>
-          <a:xfrm>
-            <a:off x="3703320" y="3675887"/>
-            <a:ext cx="3675888" cy="384048"/>
-          </a:xfrm>
-          <a:prstGeom prst="rect">
-            <a:avLst/>
-          </a:prstGeom>
-          <a:noFill/>
-        </p:spPr>
-        <p:txBody>
-          <a:bodyPr wrap="square" lIns="0" rIns="0" tIns="0" bIns="0" anchor="ctr">
-            <a:spAutoFit/>
-          </a:bodyPr>
-          <a:lstStyle/>
-          <a:p>
-            <a:pPr algn="l"/>
-            <a:r>
-              <a:rPr sz="1100" b="0" i="0">
-                <a:solidFill>
-                  <a:srgbClr val="9FB0C3"/>
-                </a:solidFill>
-                <a:latin typeface="Calibri"/>
-              </a:rPr>
-              <a:t>More connectors/crimps stressed by vibration</a:t>
-            </a:r>
-          </a:p>
-        </p:txBody>
-      </p:sp>
-      <p:sp>
-        <p:nvSpPr>
-          <p:cNvPr id="65" name="Oval 64"/>
-          <p:cNvSpPr/>
-          <p:nvPr/>
-        </p:nvSpPr>
-        <p:spPr>
-          <a:xfrm>
-            <a:off x="7580375" y="3749039"/>
-            <a:ext cx="237744" cy="237744"/>
-          </a:xfrm>
-          <a:prstGeom prst="ellipse">
-            <a:avLst/>
-          </a:prstGeom>
-          <a:solidFill>
-            <a:srgbClr val="3FA46A"/>
-          </a:solidFill>
-          <a:ln>
-            <a:noFill/>
-          </a:ln>
-        </p:spPr>
-        <p:txBody>
-          <a:bodyPr rtlCol="0" anchor="ctr"/>
-          <a:lstStyle/>
-          <a:p>
-            <a:pPr algn="ctr"/>
-          </a:p>
-        </p:txBody>
-      </p:sp>
-      <p:sp>
-        <p:nvSpPr>
-          <p:cNvPr id="66" name="TextBox 65"/>
-          <p:cNvSpPr txBox="1"/>
-          <p:nvPr/>
-        </p:nvSpPr>
-        <p:spPr>
-          <a:xfrm>
-            <a:off x="7580375" y="3749039"/>
-            <a:ext cx="237744" cy="237744"/>
-          </a:xfrm>
-          <a:prstGeom prst="rect">
-            <a:avLst/>
-          </a:prstGeom>
-          <a:noFill/>
-        </p:spPr>
-        <p:txBody>
-          <a:bodyPr wrap="square" lIns="0" rIns="0" tIns="0" bIns="0" anchor="ctr">
-            <a:spAutoFit/>
-          </a:bodyPr>
-          <a:lstStyle/>
-          <a:p>
-            <a:pPr algn="ctr"/>
-            <a:r>
-              <a:rPr sz="1100" b="1" i="0">
-                <a:solidFill>
-                  <a:srgbClr val="EAF0F6"/>
-                </a:solidFill>
-                <a:latin typeface="Calibri"/>
-              </a:rPr>
-              <a:t>✓</a:t>
-            </a:r>
-          </a:p>
-        </p:txBody>
-      </p:sp>
-      <p:sp>
-        <p:nvSpPr>
-          <p:cNvPr id="67" name="TextBox 66"/>
-          <p:cNvSpPr txBox="1"/>
-          <p:nvPr/>
-        </p:nvSpPr>
-        <p:spPr>
-          <a:xfrm>
-            <a:off x="7927848" y="3675887"/>
-            <a:ext cx="3712464" cy="384048"/>
-          </a:xfrm>
-          <a:prstGeom prst="rect">
-            <a:avLst/>
-          </a:prstGeom>
-          <a:noFill/>
-        </p:spPr>
-        <p:txBody>
-          <a:bodyPr wrap="square" lIns="0" rIns="0" tIns="0" bIns="0" anchor="ctr">
-            <a:spAutoFit/>
-          </a:bodyPr>
-          <a:lstStyle/>
-          <a:p>
-            <a:pPr algn="l"/>
-            <a:r>
-              <a:rPr sz="1100" b="0" i="0">
-                <a:solidFill>
-                  <a:srgbClr val="EAF0F6"/>
-                </a:solidFill>
-                <a:latin typeface="Calibri"/>
-              </a:rPr>
-              <a:t>Fewer interfaces, fewer failure points</a:t>
-            </a:r>
-          </a:p>
-        </p:txBody>
-      </p:sp>
-      <p:sp>
-        <p:nvSpPr>
-          <p:cNvPr id="68" name="Rectangle 67"/>
-          <p:cNvSpPr/>
-          <p:nvPr/>
-        </p:nvSpPr>
-        <p:spPr>
-          <a:xfrm>
-            <a:off x="457200" y="4059935"/>
-            <a:ext cx="11274552" cy="384048"/>
-          </a:xfrm>
-          <a:prstGeom prst="rect">
-            <a:avLst/>
-          </a:prstGeom>
-          <a:solidFill>
-            <a:srgbClr val="172331"/>
-          </a:solidFill>
-          <a:ln>
-            <a:noFill/>
-          </a:ln>
-        </p:spPr>
-        <p:txBody>
-          <a:bodyPr rtlCol="0" anchor="ctr"/>
-          <a:lstStyle/>
-          <a:p>
-            <a:pPr algn="ctr"/>
-          </a:p>
-        </p:txBody>
-      </p:sp>
-      <p:sp>
-        <p:nvSpPr>
-          <p:cNvPr id="69" name="TextBox 68"/>
-          <p:cNvSpPr txBox="1"/>
-          <p:nvPr/>
-        </p:nvSpPr>
-        <p:spPr>
-          <a:xfrm>
-            <a:off x="566928" y="4059935"/>
-            <a:ext cx="274320" cy="384048"/>
-          </a:xfrm>
-          <a:prstGeom prst="rect">
-            <a:avLst/>
-          </a:prstGeom>
-          <a:noFill/>
-        </p:spPr>
-        <p:txBody>
-          <a:bodyPr wrap="square" lIns="0" rIns="0" tIns="0" bIns="0" anchor="ctr">
-            <a:spAutoFit/>
-          </a:bodyPr>
-          <a:lstStyle/>
-          <a:p>
-            <a:pPr algn="l"/>
-            <a:r>
-              <a:rPr sz="1100" b="0" i="0">
-                <a:solidFill>
-                  <a:srgbClr val="9FB0C3"/>
-                </a:solidFill>
-                <a:latin typeface="Calibri"/>
-              </a:rPr>
-              <a:t>7</a:t>
-            </a:r>
-          </a:p>
-        </p:txBody>
-      </p:sp>
-      <p:sp>
-        <p:nvSpPr>
-          <p:cNvPr id="70" name="TextBox 69"/>
-          <p:cNvSpPr txBox="1"/>
-          <p:nvPr/>
-        </p:nvSpPr>
-        <p:spPr>
-          <a:xfrm>
-            <a:off x="978407" y="4059935"/>
-            <a:ext cx="2194560" cy="384048"/>
-          </a:xfrm>
-          <a:prstGeom prst="rect">
-            <a:avLst/>
-          </a:prstGeom>
-          <a:noFill/>
-        </p:spPr>
-        <p:txBody>
-          <a:bodyPr wrap="square" lIns="0" rIns="0" tIns="0" bIns="0" anchor="ctr">
-            <a:spAutoFit/>
-          </a:bodyPr>
-          <a:lstStyle/>
-          <a:p>
-            <a:pPr algn="l"/>
-            <a:r>
-              <a:rPr sz="1150" b="1" i="0">
-                <a:solidFill>
-                  <a:srgbClr val="EAF0F6"/>
-                </a:solidFill>
-                <a:latin typeface="Calibri"/>
-              </a:rPr>
-              <a:t>BOM &amp; assembly</a:t>
-            </a:r>
-          </a:p>
-        </p:txBody>
-      </p:sp>
-      <p:sp>
-        <p:nvSpPr>
-          <p:cNvPr id="71" name="Oval 70"/>
-          <p:cNvSpPr/>
-          <p:nvPr/>
-        </p:nvSpPr>
-        <p:spPr>
-          <a:xfrm>
-            <a:off x="3355848" y="4133087"/>
-            <a:ext cx="237744" cy="237744"/>
-          </a:xfrm>
-          <a:prstGeom prst="ellipse">
-            <a:avLst/>
-          </a:prstGeom>
-          <a:solidFill>
-            <a:srgbClr val="E05D5D"/>
-          </a:solidFill>
-          <a:ln>
-            <a:noFill/>
-          </a:ln>
-        </p:spPr>
-        <p:txBody>
-          <a:bodyPr rtlCol="0" anchor="ctr"/>
-          <a:lstStyle/>
-          <a:p>
-            <a:pPr algn="ctr"/>
-          </a:p>
-        </p:txBody>
-      </p:sp>
-      <p:sp>
-        <p:nvSpPr>
-          <p:cNvPr id="72" name="TextBox 71"/>
-          <p:cNvSpPr txBox="1"/>
-          <p:nvPr/>
-        </p:nvSpPr>
-        <p:spPr>
-          <a:xfrm>
-            <a:off x="3355848" y="4133087"/>
-            <a:ext cx="237744" cy="237744"/>
-          </a:xfrm>
-          <a:prstGeom prst="rect">
-            <a:avLst/>
-          </a:prstGeom>
-          <a:noFill/>
-        </p:spPr>
-        <p:txBody>
-          <a:bodyPr wrap="square" lIns="0" rIns="0" tIns="0" bIns="0" anchor="ctr">
-            <a:spAutoFit/>
-          </a:bodyPr>
-          <a:lstStyle/>
-          <a:p>
-            <a:pPr algn="ctr"/>
-            <a:r>
-              <a:rPr sz="1100" b="1" i="0">
-                <a:solidFill>
-                  <a:srgbClr val="EAF0F6"/>
-                </a:solidFill>
-                <a:latin typeface="Calibri"/>
-              </a:rPr>
-              <a:t>✗</a:t>
-            </a:r>
-          </a:p>
-        </p:txBody>
-      </p:sp>
-      <p:sp>
-        <p:nvSpPr>
-          <p:cNvPr id="73" name="TextBox 72"/>
-          <p:cNvSpPr txBox="1"/>
-          <p:nvPr/>
-        </p:nvSpPr>
-        <p:spPr>
-          <a:xfrm>
-            <a:off x="3703320" y="4059935"/>
-            <a:ext cx="3675888" cy="384048"/>
-          </a:xfrm>
-          <a:prstGeom prst="rect">
-            <a:avLst/>
-          </a:prstGeom>
-          <a:noFill/>
-        </p:spPr>
-        <p:txBody>
-          <a:bodyPr wrap="square" lIns="0" rIns="0" tIns="0" bIns="0" anchor="ctr">
-            <a:spAutoFit/>
-          </a:bodyPr>
-          <a:lstStyle/>
-          <a:p>
-            <a:pPr algn="l"/>
-            <a:r>
-              <a:rPr sz="1100" b="0" i="0">
-                <a:solidFill>
-                  <a:srgbClr val="9FB0C3"/>
-                </a:solidFill>
-                <a:latin typeface="Calibri"/>
-              </a:rPr>
-              <a:t>Extra connectors, wires, terminals, 3 PCBs</a:t>
-            </a:r>
-          </a:p>
-        </p:txBody>
-      </p:sp>
-      <p:sp>
-        <p:nvSpPr>
-          <p:cNvPr id="74" name="Oval 73"/>
-          <p:cNvSpPr/>
-          <p:nvPr/>
-        </p:nvSpPr>
-        <p:spPr>
-          <a:xfrm>
-            <a:off x="7580375" y="4133087"/>
-            <a:ext cx="237744" cy="237744"/>
-          </a:xfrm>
-          <a:prstGeom prst="ellipse">
-            <a:avLst/>
-          </a:prstGeom>
-          <a:solidFill>
-            <a:srgbClr val="3FA46A"/>
-          </a:solidFill>
-          <a:ln>
-            <a:noFill/>
-          </a:ln>
-        </p:spPr>
-        <p:txBody>
-          <a:bodyPr rtlCol="0" anchor="ctr"/>
-          <a:lstStyle/>
-          <a:p>
-            <a:pPr algn="ctr"/>
-          </a:p>
-        </p:txBody>
-      </p:sp>
-      <p:sp>
-        <p:nvSpPr>
-          <p:cNvPr id="75" name="TextBox 74"/>
-          <p:cNvSpPr txBox="1"/>
-          <p:nvPr/>
-        </p:nvSpPr>
-        <p:spPr>
-          <a:xfrm>
-            <a:off x="7580375" y="4133087"/>
-            <a:ext cx="237744" cy="237744"/>
-          </a:xfrm>
-          <a:prstGeom prst="rect">
-            <a:avLst/>
-          </a:prstGeom>
-          <a:noFill/>
-        </p:spPr>
-        <p:txBody>
-          <a:bodyPr wrap="square" lIns="0" rIns="0" tIns="0" bIns="0" anchor="ctr">
-            <a:spAutoFit/>
-          </a:bodyPr>
-          <a:lstStyle/>
-          <a:p>
-            <a:pPr algn="ctr"/>
-            <a:r>
-              <a:rPr sz="1100" b="1" i="0">
-                <a:solidFill>
-                  <a:srgbClr val="EAF0F6"/>
-                </a:solidFill>
-                <a:latin typeface="Calibri"/>
-              </a:rPr>
-              <a:t>✓</a:t>
-            </a:r>
-          </a:p>
-        </p:txBody>
-      </p:sp>
-      <p:sp>
-        <p:nvSpPr>
-          <p:cNvPr id="76" name="TextBox 75"/>
-          <p:cNvSpPr txBox="1"/>
-          <p:nvPr/>
-        </p:nvSpPr>
-        <p:spPr>
-          <a:xfrm>
-            <a:off x="7927848" y="4059935"/>
-            <a:ext cx="3712464" cy="384048"/>
-          </a:xfrm>
-          <a:prstGeom prst="rect">
-            <a:avLst/>
-          </a:prstGeom>
-          <a:noFill/>
-        </p:spPr>
-        <p:txBody>
-          <a:bodyPr wrap="square" lIns="0" rIns="0" tIns="0" bIns="0" anchor="ctr">
-            <a:spAutoFit/>
-          </a:bodyPr>
-          <a:lstStyle/>
-          <a:p>
-            <a:pPr algn="l"/>
-            <a:r>
-              <a:rPr sz="1100" b="0" i="0">
-                <a:solidFill>
-                  <a:srgbClr val="EAF0F6"/>
-                </a:solidFill>
-                <a:latin typeface="Calibri"/>
-              </a:rPr>
-              <a:t>One part number, single assembly step</a:t>
-            </a:r>
-          </a:p>
-        </p:txBody>
-      </p:sp>
-      <p:sp>
-        <p:nvSpPr>
-          <p:cNvPr id="77" name="Rectangle 76"/>
-          <p:cNvSpPr/>
-          <p:nvPr/>
-        </p:nvSpPr>
-        <p:spPr>
-          <a:xfrm>
-            <a:off x="457200" y="4443983"/>
-            <a:ext cx="11274552" cy="384048"/>
-          </a:xfrm>
-          <a:prstGeom prst="rect">
-            <a:avLst/>
-          </a:prstGeom>
-          <a:solidFill>
-            <a:srgbClr val="0E1621"/>
-          </a:solidFill>
-          <a:ln>
-            <a:noFill/>
-          </a:ln>
-        </p:spPr>
-        <p:txBody>
-          <a:bodyPr rtlCol="0" anchor="ctr"/>
-          <a:lstStyle/>
-          <a:p>
-            <a:pPr algn="ctr"/>
-          </a:p>
-        </p:txBody>
-      </p:sp>
-      <p:sp>
-        <p:nvSpPr>
-          <p:cNvPr id="78" name="TextBox 77"/>
-          <p:cNvSpPr txBox="1"/>
-          <p:nvPr/>
-        </p:nvSpPr>
-        <p:spPr>
-          <a:xfrm>
-            <a:off x="566928" y="4443983"/>
-            <a:ext cx="274320" cy="384048"/>
-          </a:xfrm>
-          <a:prstGeom prst="rect">
-            <a:avLst/>
-          </a:prstGeom>
-          <a:noFill/>
-        </p:spPr>
-        <p:txBody>
-          <a:bodyPr wrap="square" lIns="0" rIns="0" tIns="0" bIns="0" anchor="ctr">
-            <a:spAutoFit/>
-          </a:bodyPr>
-          <a:lstStyle/>
-          <a:p>
-            <a:pPr algn="l"/>
-            <a:r>
-              <a:rPr sz="1100" b="0" i="0">
-                <a:solidFill>
-                  <a:srgbClr val="9FB0C3"/>
-                </a:solidFill>
-                <a:latin typeface="Calibri"/>
-              </a:rPr>
-              <a:t>8</a:t>
-            </a:r>
-          </a:p>
-        </p:txBody>
-      </p:sp>
-      <p:sp>
-        <p:nvSpPr>
-          <p:cNvPr id="79" name="TextBox 78"/>
-          <p:cNvSpPr txBox="1"/>
-          <p:nvPr/>
-        </p:nvSpPr>
-        <p:spPr>
-          <a:xfrm>
-            <a:off x="978407" y="4443983"/>
-            <a:ext cx="2194560" cy="384048"/>
-          </a:xfrm>
-          <a:prstGeom prst="rect">
-            <a:avLst/>
-          </a:prstGeom>
-          <a:noFill/>
-        </p:spPr>
-        <p:txBody>
-          <a:bodyPr wrap="square" lIns="0" rIns="0" tIns="0" bIns="0" anchor="ctr">
-            <a:spAutoFit/>
-          </a:bodyPr>
-          <a:lstStyle/>
-          <a:p>
-            <a:pPr algn="l"/>
-            <a:r>
-              <a:rPr sz="1150" b="1" i="0">
-                <a:solidFill>
-                  <a:srgbClr val="EAF0F6"/>
-                </a:solidFill>
-                <a:latin typeface="Calibri"/>
-              </a:rPr>
-              <a:t>Panel utilization</a:t>
-            </a:r>
-          </a:p>
-        </p:txBody>
-      </p:sp>
-      <p:sp>
-        <p:nvSpPr>
-          <p:cNvPr id="80" name="Oval 79"/>
-          <p:cNvSpPr/>
-          <p:nvPr/>
-        </p:nvSpPr>
-        <p:spPr>
-          <a:xfrm>
-            <a:off x="3355848" y="4517136"/>
-            <a:ext cx="237744" cy="237744"/>
-          </a:xfrm>
-          <a:prstGeom prst="ellipse">
-            <a:avLst/>
-          </a:prstGeom>
-          <a:solidFill>
-            <a:srgbClr val="3FA46A"/>
-          </a:solidFill>
-          <a:ln>
-            <a:noFill/>
-          </a:ln>
-        </p:spPr>
-        <p:txBody>
-          <a:bodyPr rtlCol="0" anchor="ctr"/>
-          <a:lstStyle/>
-          <a:p>
-            <a:pPr algn="ctr"/>
-          </a:p>
-        </p:txBody>
-      </p:sp>
-      <p:sp>
-        <p:nvSpPr>
-          <p:cNvPr id="81" name="TextBox 80"/>
-          <p:cNvSpPr txBox="1"/>
-          <p:nvPr/>
-        </p:nvSpPr>
-        <p:spPr>
-          <a:xfrm>
-            <a:off x="3355848" y="4517136"/>
-            <a:ext cx="237744" cy="237744"/>
-          </a:xfrm>
-          <a:prstGeom prst="rect">
-            <a:avLst/>
-          </a:prstGeom>
-          <a:noFill/>
-        </p:spPr>
-        <p:txBody>
-          <a:bodyPr wrap="square" lIns="0" rIns="0" tIns="0" bIns="0" anchor="ctr">
-            <a:spAutoFit/>
-          </a:bodyPr>
-          <a:lstStyle/>
-          <a:p>
-            <a:pPr algn="ctr"/>
-            <a:r>
-              <a:rPr sz="1100" b="1" i="0">
-                <a:solidFill>
-                  <a:srgbClr val="EAF0F6"/>
-                </a:solidFill>
-                <a:latin typeface="Calibri"/>
-              </a:rPr>
-              <a:t>✓</a:t>
-            </a:r>
-          </a:p>
-        </p:txBody>
-      </p:sp>
-      <p:sp>
-        <p:nvSpPr>
-          <p:cNvPr id="82" name="TextBox 81"/>
-          <p:cNvSpPr txBox="1"/>
-          <p:nvPr/>
-        </p:nvSpPr>
-        <p:spPr>
-          <a:xfrm>
-            <a:off x="3703320" y="4443983"/>
-            <a:ext cx="3675888" cy="384048"/>
-          </a:xfrm>
-          <a:prstGeom prst="rect">
-            <a:avLst/>
-          </a:prstGeom>
-          <a:noFill/>
-        </p:spPr>
-        <p:txBody>
-          <a:bodyPr wrap="square" lIns="0" rIns="0" tIns="0" bIns="0" anchor="ctr">
-            <a:spAutoFit/>
-          </a:bodyPr>
-          <a:lstStyle/>
-          <a:p>
-            <a:pPr algn="l"/>
-            <a:r>
-              <a:rPr sz="1100" b="0" i="0">
-                <a:solidFill>
-                  <a:srgbClr val="EAF0F6"/>
-                </a:solidFill>
-                <a:latin typeface="Calibri"/>
-              </a:rPr>
-              <a:t>Small rectangular boards nest efficiently</a:t>
-            </a:r>
-          </a:p>
-        </p:txBody>
-      </p:sp>
-      <p:sp>
-        <p:nvSpPr>
-          <p:cNvPr id="83" name="Oval 82"/>
-          <p:cNvSpPr/>
-          <p:nvPr/>
-        </p:nvSpPr>
-        <p:spPr>
-          <a:xfrm>
-            <a:off x="7580375" y="4517136"/>
-            <a:ext cx="237744" cy="237744"/>
-          </a:xfrm>
-          <a:prstGeom prst="ellipse">
-            <a:avLst/>
-          </a:prstGeom>
-          <a:solidFill>
-            <a:srgbClr val="E05D5D"/>
-          </a:solidFill>
-          <a:ln>
-            <a:noFill/>
-          </a:ln>
-        </p:spPr>
-        <p:txBody>
-          <a:bodyPr rtlCol="0" anchor="ctr"/>
-          <a:lstStyle/>
-          <a:p>
-            <a:pPr algn="ctr"/>
-          </a:p>
-        </p:txBody>
-      </p:sp>
-      <p:sp>
-        <p:nvSpPr>
-          <p:cNvPr id="84" name="TextBox 83"/>
-          <p:cNvSpPr txBox="1"/>
-          <p:nvPr/>
-        </p:nvSpPr>
-        <p:spPr>
-          <a:xfrm>
-            <a:off x="7580375" y="4517136"/>
-            <a:ext cx="237744" cy="237744"/>
-          </a:xfrm>
-          <a:prstGeom prst="rect">
-            <a:avLst/>
-          </a:prstGeom>
-          <a:noFill/>
-        </p:spPr>
-        <p:txBody>
-          <a:bodyPr wrap="square" lIns="0" rIns="0" tIns="0" bIns="0" anchor="ctr">
-            <a:spAutoFit/>
-          </a:bodyPr>
-          <a:lstStyle/>
-          <a:p>
-            <a:pPr algn="ctr"/>
-            <a:r>
-              <a:rPr sz="1100" b="1" i="0">
-                <a:solidFill>
-                  <a:srgbClr val="EAF0F6"/>
-                </a:solidFill>
-                <a:latin typeface="Calibri"/>
-              </a:rPr>
-              <a:t>✗</a:t>
-            </a:r>
-          </a:p>
-        </p:txBody>
-      </p:sp>
-      <p:sp>
-        <p:nvSpPr>
-          <p:cNvPr id="85" name="TextBox 84"/>
-          <p:cNvSpPr txBox="1"/>
-          <p:nvPr/>
-        </p:nvSpPr>
-        <p:spPr>
-          <a:xfrm>
-            <a:off x="7927848" y="4443983"/>
-            <a:ext cx="3712464" cy="384048"/>
-          </a:xfrm>
-          <a:prstGeom prst="rect">
-            <a:avLst/>
-          </a:prstGeom>
-          <a:noFill/>
-        </p:spPr>
-        <p:txBody>
-          <a:bodyPr wrap="square" lIns="0" rIns="0" tIns="0" bIns="0" anchor="ctr">
-            <a:spAutoFit/>
-          </a:bodyPr>
-          <a:lstStyle/>
-          <a:p>
-            <a:pPr algn="l"/>
-            <a:r>
-              <a:rPr sz="1100" b="0" i="0">
-                <a:solidFill>
-                  <a:srgbClr val="9FB0C3"/>
-                </a:solidFill>
-                <a:latin typeface="Calibri"/>
-              </a:rPr>
-              <a:t>C-outline leaves unused panel area</a:t>
-            </a:r>
-          </a:p>
-        </p:txBody>
-      </p:sp>
-      <p:sp>
-        <p:nvSpPr>
-          <p:cNvPr id="86" name="Rectangle 85"/>
-          <p:cNvSpPr/>
-          <p:nvPr/>
-        </p:nvSpPr>
-        <p:spPr>
-          <a:xfrm>
-            <a:off x="457200" y="4828031"/>
-            <a:ext cx="11274552" cy="384048"/>
-          </a:xfrm>
-          <a:prstGeom prst="rect">
-            <a:avLst/>
-          </a:prstGeom>
-          <a:solidFill>
-            <a:srgbClr val="172331"/>
-          </a:solidFill>
-          <a:ln>
-            <a:noFill/>
-          </a:ln>
-        </p:spPr>
-        <p:txBody>
-          <a:bodyPr rtlCol="0" anchor="ctr"/>
-          <a:lstStyle/>
-          <a:p>
-            <a:pPr algn="ctr"/>
-          </a:p>
-        </p:txBody>
-      </p:sp>
-      <p:sp>
-        <p:nvSpPr>
-          <p:cNvPr id="87" name="TextBox 86"/>
-          <p:cNvSpPr txBox="1"/>
-          <p:nvPr/>
-        </p:nvSpPr>
-        <p:spPr>
-          <a:xfrm>
-            <a:off x="566928" y="4828031"/>
-            <a:ext cx="274320" cy="384048"/>
-          </a:xfrm>
-          <a:prstGeom prst="rect">
-            <a:avLst/>
-          </a:prstGeom>
-          <a:noFill/>
-        </p:spPr>
-        <p:txBody>
-          <a:bodyPr wrap="square" lIns="0" rIns="0" tIns="0" bIns="0" anchor="ctr">
-            <a:spAutoFit/>
-          </a:bodyPr>
-          <a:lstStyle/>
-          <a:p>
-            <a:pPr algn="l"/>
-            <a:r>
-              <a:rPr sz="1100" b="0" i="0">
-                <a:solidFill>
-                  <a:srgbClr val="9FB0C3"/>
-                </a:solidFill>
-                <a:latin typeface="Calibri"/>
-              </a:rPr>
-              <a:t>9</a:t>
-            </a:r>
-          </a:p>
-        </p:txBody>
-      </p:sp>
-      <p:sp>
-        <p:nvSpPr>
-          <p:cNvPr id="88" name="TextBox 87"/>
-          <p:cNvSpPr txBox="1"/>
-          <p:nvPr/>
-        </p:nvSpPr>
-        <p:spPr>
-          <a:xfrm>
-            <a:off x="978407" y="4828031"/>
-            <a:ext cx="2194560" cy="384048"/>
-          </a:xfrm>
-          <a:prstGeom prst="rect">
-            <a:avLst/>
-          </a:prstGeom>
-          <a:noFill/>
-        </p:spPr>
-        <p:txBody>
-          <a:bodyPr wrap="square" lIns="0" rIns="0" tIns="0" bIns="0" anchor="ctr">
-            <a:spAutoFit/>
-          </a:bodyPr>
-          <a:lstStyle/>
-          <a:p>
-            <a:pPr algn="l"/>
-            <a:r>
-              <a:rPr sz="1150" b="1" i="0">
-                <a:solidFill>
-                  <a:srgbClr val="EAF0F6"/>
-                </a:solidFill>
-                <a:latin typeface="Calibri"/>
-              </a:rPr>
-              <a:t>Warpage &amp; depaneling ★</a:t>
-            </a:r>
-          </a:p>
-        </p:txBody>
-      </p:sp>
-      <p:sp>
-        <p:nvSpPr>
-          <p:cNvPr id="89" name="Oval 88"/>
-          <p:cNvSpPr/>
-          <p:nvPr/>
-        </p:nvSpPr>
-        <p:spPr>
-          <a:xfrm>
-            <a:off x="3355848" y="4901183"/>
-            <a:ext cx="237744" cy="237744"/>
-          </a:xfrm>
-          <a:prstGeom prst="ellipse">
-            <a:avLst/>
-          </a:prstGeom>
-          <a:solidFill>
-            <a:srgbClr val="3FA46A"/>
-          </a:solidFill>
-          <a:ln>
-            <a:noFill/>
-          </a:ln>
-        </p:spPr>
-        <p:txBody>
-          <a:bodyPr rtlCol="0" anchor="ctr"/>
-          <a:lstStyle/>
-          <a:p>
-            <a:pPr algn="ctr"/>
-          </a:p>
-        </p:txBody>
-      </p:sp>
-      <p:sp>
-        <p:nvSpPr>
-          <p:cNvPr id="90" name="TextBox 89"/>
-          <p:cNvSpPr txBox="1"/>
-          <p:nvPr/>
-        </p:nvSpPr>
-        <p:spPr>
-          <a:xfrm>
-            <a:off x="3355848" y="4901183"/>
-            <a:ext cx="237744" cy="237744"/>
-          </a:xfrm>
-          <a:prstGeom prst="rect">
-            <a:avLst/>
-          </a:prstGeom>
-          <a:noFill/>
-        </p:spPr>
-        <p:txBody>
-          <a:bodyPr wrap="square" lIns="0" rIns="0" tIns="0" bIns="0" anchor="ctr">
-            <a:spAutoFit/>
-          </a:bodyPr>
-          <a:lstStyle/>
-          <a:p>
-            <a:pPr algn="ctr"/>
-            <a:r>
-              <a:rPr sz="1100" b="1" i="0">
-                <a:solidFill>
-                  <a:srgbClr val="EAF0F6"/>
-                </a:solidFill>
-                <a:latin typeface="Calibri"/>
-              </a:rPr>
-              <a:t>✓</a:t>
-            </a:r>
-          </a:p>
-        </p:txBody>
-      </p:sp>
-      <p:sp>
-        <p:nvSpPr>
-          <p:cNvPr id="91" name="TextBox 90"/>
-          <p:cNvSpPr txBox="1"/>
-          <p:nvPr/>
-        </p:nvSpPr>
-        <p:spPr>
-          <a:xfrm>
-            <a:off x="3703320" y="4828031"/>
-            <a:ext cx="3675888" cy="384048"/>
-          </a:xfrm>
-          <a:prstGeom prst="rect">
-            <a:avLst/>
-          </a:prstGeom>
-          <a:noFill/>
-        </p:spPr>
-        <p:txBody>
-          <a:bodyPr wrap="square" lIns="0" rIns="0" tIns="0" bIns="0" anchor="ctr">
-            <a:spAutoFit/>
-          </a:bodyPr>
-          <a:lstStyle/>
-          <a:p>
-            <a:pPr algn="l"/>
-            <a:r>
-              <a:rPr sz="1100" b="0" i="0">
-                <a:solidFill>
-                  <a:srgbClr val="EAF0F6"/>
-                </a:solidFill>
-                <a:latin typeface="Calibri"/>
-              </a:rPr>
-              <a:t>Short boards stay flat; low joint stress</a:t>
-            </a:r>
-          </a:p>
-        </p:txBody>
-      </p:sp>
-      <p:sp>
-        <p:nvSpPr>
-          <p:cNvPr id="92" name="Oval 91"/>
-          <p:cNvSpPr/>
-          <p:nvPr/>
-        </p:nvSpPr>
-        <p:spPr>
-          <a:xfrm>
-            <a:off x="7580375" y="4901183"/>
-            <a:ext cx="237744" cy="237744"/>
-          </a:xfrm>
-          <a:prstGeom prst="ellipse">
-            <a:avLst/>
-          </a:prstGeom>
-          <a:solidFill>
-            <a:srgbClr val="E05D5D"/>
-          </a:solidFill>
-          <a:ln>
-            <a:noFill/>
-          </a:ln>
-        </p:spPr>
-        <p:txBody>
-          <a:bodyPr rtlCol="0" anchor="ctr"/>
-          <a:lstStyle/>
-          <a:p>
-            <a:pPr algn="ctr"/>
-          </a:p>
-        </p:txBody>
-      </p:sp>
-      <p:sp>
-        <p:nvSpPr>
-          <p:cNvPr id="93" name="TextBox 92"/>
-          <p:cNvSpPr txBox="1"/>
-          <p:nvPr/>
-        </p:nvSpPr>
-        <p:spPr>
-          <a:xfrm>
-            <a:off x="7580375" y="4901183"/>
-            <a:ext cx="237744" cy="237744"/>
-          </a:xfrm>
-          <a:prstGeom prst="rect">
-            <a:avLst/>
-          </a:prstGeom>
-          <a:noFill/>
-        </p:spPr>
-        <p:txBody>
-          <a:bodyPr wrap="square" lIns="0" rIns="0" tIns="0" bIns="0" anchor="ctr">
-            <a:spAutoFit/>
-          </a:bodyPr>
-          <a:lstStyle/>
-          <a:p>
-            <a:pPr algn="ctr"/>
-            <a:r>
-              <a:rPr sz="1100" b="1" i="0">
-                <a:solidFill>
-                  <a:srgbClr val="EAF0F6"/>
-                </a:solidFill>
-                <a:latin typeface="Calibri"/>
-              </a:rPr>
-              <a:t>✗</a:t>
-            </a:r>
-          </a:p>
-        </p:txBody>
-      </p:sp>
-      <p:sp>
-        <p:nvSpPr>
-          <p:cNvPr id="94" name="TextBox 93"/>
-          <p:cNvSpPr txBox="1"/>
-          <p:nvPr/>
-        </p:nvSpPr>
-        <p:spPr>
-          <a:xfrm>
-            <a:off x="7927848" y="4828031"/>
-            <a:ext cx="3712464" cy="384048"/>
-          </a:xfrm>
-          <a:prstGeom prst="rect">
-            <a:avLst/>
-          </a:prstGeom>
-          <a:noFill/>
-        </p:spPr>
-        <p:txBody>
-          <a:bodyPr wrap="square" lIns="0" rIns="0" tIns="0" bIns="0" anchor="ctr">
-            <a:spAutoFit/>
-          </a:bodyPr>
-          <a:lstStyle/>
-          <a:p>
-            <a:pPr algn="l"/>
-            <a:r>
-              <a:rPr sz="1100" b="0" i="0">
-                <a:solidFill>
-                  <a:srgbClr val="9FB0C3"/>
-                </a:solidFill>
-                <a:latin typeface="Calibri"/>
-              </a:rPr>
-              <a:t>Long C-shape can warp, stressing LED joints</a:t>
-            </a:r>
-          </a:p>
-        </p:txBody>
-      </p:sp>
-      <p:sp>
-        <p:nvSpPr>
-          <p:cNvPr id="95" name="Rectangle 94"/>
-          <p:cNvSpPr/>
-          <p:nvPr/>
-        </p:nvSpPr>
-        <p:spPr>
-          <a:xfrm>
-            <a:off x="457200" y="5212079"/>
-            <a:ext cx="11274552" cy="384048"/>
-          </a:xfrm>
-          <a:prstGeom prst="rect">
-            <a:avLst/>
-          </a:prstGeom>
-          <a:solidFill>
-            <a:srgbClr val="0E1621"/>
-          </a:solidFill>
-          <a:ln>
-            <a:noFill/>
-          </a:ln>
-        </p:spPr>
-        <p:txBody>
-          <a:bodyPr rtlCol="0" anchor="ctr"/>
-          <a:lstStyle/>
-          <a:p>
-            <a:pPr algn="ctr"/>
-          </a:p>
-        </p:txBody>
-      </p:sp>
-      <p:sp>
-        <p:nvSpPr>
-          <p:cNvPr id="96" name="TextBox 95"/>
-          <p:cNvSpPr txBox="1"/>
-          <p:nvPr/>
-        </p:nvSpPr>
-        <p:spPr>
-          <a:xfrm>
-            <a:off x="566928" y="5212079"/>
-            <a:ext cx="274320" cy="384048"/>
-          </a:xfrm>
-          <a:prstGeom prst="rect">
-            <a:avLst/>
-          </a:prstGeom>
-          <a:noFill/>
-        </p:spPr>
-        <p:txBody>
-          <a:bodyPr wrap="square" lIns="0" rIns="0" tIns="0" bIns="0" anchor="ctr">
-            <a:spAutoFit/>
-          </a:bodyPr>
-          <a:lstStyle/>
-          <a:p>
-            <a:pPr algn="l"/>
-            <a:r>
-              <a:rPr sz="1100" b="0" i="0">
-                <a:solidFill>
-                  <a:srgbClr val="9FB0C3"/>
-                </a:solidFill>
-                <a:latin typeface="Calibri"/>
-              </a:rPr>
-              <a:t>10</a:t>
-            </a:r>
-          </a:p>
-        </p:txBody>
-      </p:sp>
-      <p:sp>
-        <p:nvSpPr>
-          <p:cNvPr id="97" name="TextBox 96"/>
-          <p:cNvSpPr txBox="1"/>
-          <p:nvPr/>
-        </p:nvSpPr>
-        <p:spPr>
-          <a:xfrm>
-            <a:off x="978407" y="5212079"/>
-            <a:ext cx="2194560" cy="384048"/>
-          </a:xfrm>
-          <a:prstGeom prst="rect">
-            <a:avLst/>
-          </a:prstGeom>
-          <a:noFill/>
-        </p:spPr>
-        <p:txBody>
-          <a:bodyPr wrap="square" lIns="0" rIns="0" tIns="0" bIns="0" anchor="ctr">
-            <a:spAutoFit/>
-          </a:bodyPr>
-          <a:lstStyle/>
-          <a:p>
-            <a:pPr algn="l"/>
-            <a:r>
-              <a:rPr sz="1150" b="1" i="0">
-                <a:solidFill>
-                  <a:srgbClr val="EAF0F6"/>
-                </a:solidFill>
-                <a:latin typeface="Calibri"/>
-              </a:rPr>
-              <a:t>Mechanical fit &amp; service</a:t>
-            </a:r>
-          </a:p>
-        </p:txBody>
-      </p:sp>
-      <p:sp>
-        <p:nvSpPr>
-          <p:cNvPr id="98" name="Oval 97"/>
-          <p:cNvSpPr/>
-          <p:nvPr/>
-        </p:nvSpPr>
-        <p:spPr>
-          <a:xfrm>
-            <a:off x="3355848" y="5285231"/>
-            <a:ext cx="237744" cy="237744"/>
-          </a:xfrm>
-          <a:prstGeom prst="ellipse">
-            <a:avLst/>
-          </a:prstGeom>
-          <a:solidFill>
-            <a:srgbClr val="3FA46A"/>
-          </a:solidFill>
-          <a:ln>
-            <a:noFill/>
-          </a:ln>
-        </p:spPr>
-        <p:txBody>
-          <a:bodyPr rtlCol="0" anchor="ctr"/>
-          <a:lstStyle/>
-          <a:p>
-            <a:pPr algn="ctr"/>
-          </a:p>
-        </p:txBody>
-      </p:sp>
-      <p:sp>
-        <p:nvSpPr>
-          <p:cNvPr id="99" name="TextBox 98"/>
-          <p:cNvSpPr txBox="1"/>
-          <p:nvPr/>
-        </p:nvSpPr>
-        <p:spPr>
-          <a:xfrm>
-            <a:off x="3355848" y="5285231"/>
-            <a:ext cx="237744" cy="237744"/>
-          </a:xfrm>
-          <a:prstGeom prst="rect">
-            <a:avLst/>
-          </a:prstGeom>
-          <a:noFill/>
-        </p:spPr>
-        <p:txBody>
-          <a:bodyPr wrap="square" lIns="0" rIns="0" tIns="0" bIns="0" anchor="ctr">
-            <a:spAutoFit/>
-          </a:bodyPr>
-          <a:lstStyle/>
-          <a:p>
-            <a:pPr algn="ctr"/>
-            <a:r>
-              <a:rPr sz="1100" b="1" i="0">
-                <a:solidFill>
-                  <a:srgbClr val="EAF0F6"/>
-                </a:solidFill>
-                <a:latin typeface="Calibri"/>
-              </a:rPr>
-              <a:t>✓</a:t>
-            </a:r>
-          </a:p>
-        </p:txBody>
-      </p:sp>
-      <p:sp>
-        <p:nvSpPr>
-          <p:cNvPr id="100" name="TextBox 99"/>
-          <p:cNvSpPr txBox="1"/>
-          <p:nvPr/>
-        </p:nvSpPr>
-        <p:spPr>
-          <a:xfrm>
-            <a:off x="3703320" y="5212079"/>
-            <a:ext cx="3675888" cy="384048"/>
-          </a:xfrm>
-          <a:prstGeom prst="rect">
-            <a:avLst/>
-          </a:prstGeom>
-          <a:noFill/>
-        </p:spPr>
-        <p:txBody>
-          <a:bodyPr wrap="square" lIns="0" rIns="0" tIns="0" bIns="0" anchor="ctr">
-            <a:spAutoFit/>
-          </a:bodyPr>
-          <a:lstStyle/>
-          <a:p>
-            <a:pPr algn="l"/>
-            <a:r>
-              <a:rPr sz="1100" b="0" i="0">
-                <a:solidFill>
-                  <a:srgbClr val="EAF0F6"/>
-                </a:solidFill>
-                <a:latin typeface="Calibri"/>
-              </a:rPr>
-              <a:t>Boards placed and replaced independently</a:t>
-            </a:r>
-          </a:p>
-        </p:txBody>
-      </p:sp>
-      <p:sp>
-        <p:nvSpPr>
-          <p:cNvPr id="101" name="Oval 100"/>
-          <p:cNvSpPr/>
-          <p:nvPr/>
-        </p:nvSpPr>
-        <p:spPr>
-          <a:xfrm>
-            <a:off x="7580375" y="5285231"/>
-            <a:ext cx="237744" cy="237744"/>
-          </a:xfrm>
-          <a:prstGeom prst="ellipse">
-            <a:avLst/>
-          </a:prstGeom>
-          <a:solidFill>
-            <a:srgbClr val="E05D5D"/>
-          </a:solidFill>
-          <a:ln>
-            <a:noFill/>
-          </a:ln>
-        </p:spPr>
-        <p:txBody>
-          <a:bodyPr rtlCol="0" anchor="ctr"/>
-          <a:lstStyle/>
-          <a:p>
-            <a:pPr algn="ctr"/>
-          </a:p>
-        </p:txBody>
-      </p:sp>
-      <p:sp>
-        <p:nvSpPr>
-          <p:cNvPr id="102" name="TextBox 101"/>
-          <p:cNvSpPr txBox="1"/>
-          <p:nvPr/>
-        </p:nvSpPr>
-        <p:spPr>
-          <a:xfrm>
-            <a:off x="7580375" y="5285231"/>
-            <a:ext cx="237744" cy="237744"/>
-          </a:xfrm>
-          <a:prstGeom prst="rect">
-            <a:avLst/>
-          </a:prstGeom>
-          <a:noFill/>
-        </p:spPr>
-        <p:txBody>
-          <a:bodyPr wrap="square" lIns="0" rIns="0" tIns="0" bIns="0" anchor="ctr">
-            <a:spAutoFit/>
-          </a:bodyPr>
-          <a:lstStyle/>
-          <a:p>
-            <a:pPr algn="ctr"/>
-            <a:r>
-              <a:rPr sz="1100" b="1" i="0">
-                <a:solidFill>
-                  <a:srgbClr val="EAF0F6"/>
-                </a:solidFill>
-                <a:latin typeface="Calibri"/>
-              </a:rPr>
-              <a:t>✗</a:t>
-            </a:r>
-          </a:p>
-        </p:txBody>
-      </p:sp>
-      <p:sp>
-        <p:nvSpPr>
-          <p:cNvPr id="103" name="TextBox 102"/>
-          <p:cNvSpPr txBox="1"/>
-          <p:nvPr/>
-        </p:nvSpPr>
-        <p:spPr>
-          <a:xfrm>
-            <a:off x="7927848" y="5212079"/>
-            <a:ext cx="3712464" cy="384048"/>
-          </a:xfrm>
-          <a:prstGeom prst="rect">
-            <a:avLst/>
-          </a:prstGeom>
-          <a:noFill/>
-        </p:spPr>
-        <p:txBody>
-          <a:bodyPr wrap="square" lIns="0" rIns="0" tIns="0" bIns="0" anchor="ctr">
-            <a:spAutoFit/>
-          </a:bodyPr>
-          <a:lstStyle/>
-          <a:p>
-            <a:pPr algn="l"/>
-            <a:r>
-              <a:rPr sz="1100" b="0" i="0">
-                <a:solidFill>
-                  <a:srgbClr val="9FB0C3"/>
-                </a:solidFill>
-                <a:latin typeface="Calibri"/>
-              </a:rPr>
-              <a:t>Whole C must meet the housing tolerance</a:t>
-            </a:r>
-          </a:p>
-        </p:txBody>
-      </p:sp>
-      <p:sp>
-        <p:nvSpPr>
-          <p:cNvPr id="104" name="Rounded Rectangle 103"/>
-          <p:cNvSpPr/>
-          <p:nvPr/>
-        </p:nvSpPr>
-        <p:spPr>
-          <a:xfrm>
-            <a:off x="457200" y="5760720"/>
-            <a:ext cx="11274552" cy="731519"/>
-          </a:xfrm>
-          <a:prstGeom prst="roundRect">
-            <a:avLst>
-              <a:gd name="adj" fmla="val 12000"/>
-            </a:avLst>
-          </a:prstGeom>
-          <a:solidFill>
-            <a:srgbClr val="1D2B3B"/>
-          </a:solidFill>
-          <a:ln w="15875">
-            <a:solidFill>
-              <a:srgbClr val="3FA46A"/>
-            </a:solidFill>
-          </a:ln>
-        </p:spPr>
-        <p:txBody>
-          <a:bodyPr rtlCol="0" anchor="ctr"/>
-          <a:lstStyle/>
-          <a:p>
-            <a:pPr algn="ctr"/>
-          </a:p>
-        </p:txBody>
-      </p:sp>
-      <p:sp>
-        <p:nvSpPr>
-          <p:cNvPr id="105" name="TextBox 104"/>
-          <p:cNvSpPr txBox="1"/>
-          <p:nvPr/>
-        </p:nvSpPr>
-        <p:spPr>
-          <a:xfrm>
-            <a:off x="685800" y="5760720"/>
-            <a:ext cx="3108960" cy="731519"/>
-          </a:xfrm>
-          <a:prstGeom prst="rect">
-            <a:avLst/>
-          </a:prstGeom>
-          <a:noFill/>
-        </p:spPr>
-        <p:txBody>
-          <a:bodyPr wrap="square" lIns="0" rIns="0" tIns="0" bIns="0" anchor="ctr">
-            <a:spAutoFit/>
-          </a:bodyPr>
-          <a:lstStyle/>
-          <a:p>
-            <a:pPr algn="l"/>
-            <a:r>
-              <a:rPr sz="1100" b="0" i="0">
-                <a:solidFill>
-                  <a:srgbClr val="9FB0C3"/>
-                </a:solidFill>
-                <a:latin typeface="Calibri"/>
-              </a:rPr>
-              <a:t>Best overall</a:t>
-            </a:r>
-          </a:p>
-          <a:p>
-            <a:pPr algn="l"/>
-            <a:r>
-              <a:rPr sz="1700" b="1" i="0">
-                <a:solidFill>
-                  <a:srgbClr val="FFD34D"/>
-                </a:solidFill>
-                <a:latin typeface="Calibri"/>
-              </a:rPr>
-              <a:t>Single C-Shape PCB</a:t>
-            </a:r>
-          </a:p>
-        </p:txBody>
-      </p:sp>
-      <p:sp>
-        <p:nvSpPr>
-          <p:cNvPr id="106" name="TextBox 105"/>
-          <p:cNvSpPr txBox="1"/>
-          <p:nvPr/>
-        </p:nvSpPr>
-        <p:spPr>
-          <a:xfrm>
-            <a:off x="3840480" y="5760720"/>
-            <a:ext cx="7680960" cy="731519"/>
-          </a:xfrm>
-          <a:prstGeom prst="rect">
-            <a:avLst/>
-          </a:prstGeom>
-          <a:noFill/>
-        </p:spPr>
-        <p:txBody>
-          <a:bodyPr wrap="square" lIns="0" rIns="0" tIns="0" bIns="0" anchor="ctr">
-            <a:spAutoFit/>
-          </a:bodyPr>
-          <a:lstStyle/>
-          <a:p>
-            <a:pPr algn="l"/>
-            <a:r>
-              <a:rPr sz="1100" b="0" i="0">
-                <a:solidFill>
-                  <a:srgbClr val="EAF0F6"/>
-                </a:solidFill>
-                <a:latin typeface="Calibri"/>
-              </a:rPr>
-              <a:t>Wins 7 of 10, including every EMC criterion: removing the inter-board harness removes the main emission, immunity and reliability risk. Pick the 3-PCB split only when panel cost or housing tolerance dominates, and then use flex jumpers with common-mode filtering at each interface.</a:t>
+              <a:t> (7 of 10 parameters, including all EMC parameters)</a:t>
             </a:r>
           </a:p>
         </p:txBody>
